--- a/Final_Physical_Analyst_Project.pptx
+++ b/Final_Physical_Analyst_Project.pptx
@@ -14,12 +14,12 @@
     <p:sldId id="260" r:id="rId5"/>
     <p:sldId id="259" r:id="rId6"/>
     <p:sldId id="276" r:id="rId7"/>
-    <p:sldId id="266" r:id="rId8"/>
-    <p:sldId id="270" r:id="rId9"/>
-    <p:sldId id="272" r:id="rId10"/>
-    <p:sldId id="273" r:id="rId11"/>
-    <p:sldId id="274" r:id="rId12"/>
-    <p:sldId id="275" r:id="rId13"/>
+    <p:sldId id="278" r:id="rId8"/>
+    <p:sldId id="280" r:id="rId9"/>
+    <p:sldId id="279" r:id="rId10"/>
+    <p:sldId id="281" r:id="rId11"/>
+    <p:sldId id="266" r:id="rId12"/>
+    <p:sldId id="270" r:id="rId13"/>
   </p:sldIdLst>
   <p:sldSz cx="18288000" cy="10287000"/>
   <p:notesSz cx="10287000" cy="18288000"/>
@@ -332,6 +332,282 @@
 </p:notes>
 </file>
 
+<file path=ppt/notesSlides/notesSlide10.xml><?xml version="1.0" encoding="utf-8"?>
+<p:notes xmlns:a="http://schemas.openxmlformats.org/drawingml/2006/main" xmlns:r="http://schemas.openxmlformats.org/officeDocument/2006/relationships" xmlns:p="http://schemas.openxmlformats.org/presentationml/2006/main">
+  <p:cSld>
+    <p:spTree>
+      <p:nvGrpSpPr>
+        <p:cNvPr id="1" name="">
+          <a:extLst>
+            <a:ext uri="{FF2B5EF4-FFF2-40B4-BE49-F238E27FC236}">
+              <a16:creationId xmlns:a16="http://schemas.microsoft.com/office/drawing/2014/main" id="{571F0056-DE75-F19D-0ED5-6374BE330548}"/>
+            </a:ext>
+          </a:extLst>
+        </p:cNvPr>
+        <p:cNvGrpSpPr/>
+        <p:nvPr/>
+      </p:nvGrpSpPr>
+      <p:grpSpPr>
+        <a:xfrm>
+          <a:off x="0" y="0"/>
+          <a:ext cx="0" cy="0"/>
+          <a:chOff x="0" y="0"/>
+          <a:chExt cx="0" cy="0"/>
+        </a:xfrm>
+      </p:grpSpPr>
+      <p:sp>
+        <p:nvSpPr>
+          <p:cNvPr id="2" name="Slide Image Placeholder 1">
+            <a:extLst>
+              <a:ext uri="{FF2B5EF4-FFF2-40B4-BE49-F238E27FC236}">
+                <a16:creationId xmlns:a16="http://schemas.microsoft.com/office/drawing/2014/main" id="{95C55C37-4730-5DF1-E425-6A63A051CF71}"/>
+              </a:ext>
+            </a:extLst>
+          </p:cNvPr>
+          <p:cNvSpPr>
+            <a:spLocks noGrp="1" noRot="1" noChangeAspect="1"/>
+          </p:cNvSpPr>
+          <p:nvPr>
+            <p:ph type="sldImg"/>
+          </p:nvPr>
+        </p:nvSpPr>
+        <p:spPr/>
+      </p:sp>
+      <p:sp>
+        <p:nvSpPr>
+          <p:cNvPr id="3" name="Notes Placeholder 2">
+            <a:extLst>
+              <a:ext uri="{FF2B5EF4-FFF2-40B4-BE49-F238E27FC236}">
+                <a16:creationId xmlns:a16="http://schemas.microsoft.com/office/drawing/2014/main" id="{D13036AA-2A18-763E-C05B-6417A9BC565F}"/>
+              </a:ext>
+            </a:extLst>
+          </p:cNvPr>
+          <p:cNvSpPr>
+            <a:spLocks noGrp="1"/>
+          </p:cNvSpPr>
+          <p:nvPr>
+            <p:ph type="body" idx="1"/>
+          </p:nvPr>
+        </p:nvSpPr>
+        <p:spPr/>
+        <p:txBody>
+          <a:bodyPr/>
+          <a:lstStyle/>
+          <a:p>
+            <a:endParaRPr lang="en-US" dirty="0"/>
+          </a:p>
+        </p:txBody>
+      </p:sp>
+      <p:sp>
+        <p:nvSpPr>
+          <p:cNvPr id="4" name="Slide Number Placeholder 3">
+            <a:extLst>
+              <a:ext uri="{FF2B5EF4-FFF2-40B4-BE49-F238E27FC236}">
+                <a16:creationId xmlns:a16="http://schemas.microsoft.com/office/drawing/2014/main" id="{214685D3-BC60-B4B3-6C79-6D88C45CFD78}"/>
+              </a:ext>
+            </a:extLst>
+          </p:cNvPr>
+          <p:cNvSpPr>
+            <a:spLocks noGrp="1"/>
+          </p:cNvSpPr>
+          <p:nvPr>
+            <p:ph type="sldNum" sz="quarter" idx="10"/>
+          </p:nvPr>
+        </p:nvSpPr>
+        <p:spPr/>
+        <p:txBody>
+          <a:bodyPr/>
+          <a:lstStyle/>
+          <a:p>
+            <a:fld id="{F7021451-1387-4CA6-816F-3879F97B5CBC}" type="slidenum">
+              <a:rPr lang="en-US"/>
+              <a:t>10</a:t>
+            </a:fld>
+            <a:endParaRPr lang="en-US"/>
+          </a:p>
+        </p:txBody>
+      </p:sp>
+    </p:spTree>
+    <p:extLst>
+      <p:ext uri="{BB962C8B-B14F-4D97-AF65-F5344CB8AC3E}">
+        <p14:creationId xmlns:p14="http://schemas.microsoft.com/office/powerpoint/2010/main" val="3442807169"/>
+      </p:ext>
+    </p:extLst>
+  </p:cSld>
+  <p:clrMapOvr>
+    <a:masterClrMapping/>
+  </p:clrMapOvr>
+</p:notes>
+</file>
+
+<file path=ppt/notesSlides/notesSlide11.xml><?xml version="1.0" encoding="utf-8"?>
+<p:notes xmlns:a="http://schemas.openxmlformats.org/drawingml/2006/main" xmlns:r="http://schemas.openxmlformats.org/officeDocument/2006/relationships" xmlns:p="http://schemas.openxmlformats.org/presentationml/2006/main">
+  <p:cSld>
+    <p:spTree>
+      <p:nvGrpSpPr>
+        <p:cNvPr id="1" name=""/>
+        <p:cNvGrpSpPr/>
+        <p:nvPr/>
+      </p:nvGrpSpPr>
+      <p:grpSpPr>
+        <a:xfrm>
+          <a:off x="0" y="0"/>
+          <a:ext cx="0" cy="0"/>
+          <a:chOff x="0" y="0"/>
+          <a:chExt cx="0" cy="0"/>
+        </a:xfrm>
+      </p:grpSpPr>
+      <p:sp>
+        <p:nvSpPr>
+          <p:cNvPr id="2" name="Slide Image Placeholder 1"/>
+          <p:cNvSpPr>
+            <a:spLocks noGrp="1" noRot="1" noChangeAspect="1"/>
+          </p:cNvSpPr>
+          <p:nvPr>
+            <p:ph type="sldImg"/>
+          </p:nvPr>
+        </p:nvSpPr>
+        <p:spPr/>
+      </p:sp>
+      <p:sp>
+        <p:nvSpPr>
+          <p:cNvPr id="3" name="Notes Placeholder 2"/>
+          <p:cNvSpPr>
+            <a:spLocks noGrp="1"/>
+          </p:cNvSpPr>
+          <p:nvPr>
+            <p:ph type="body" idx="1"/>
+          </p:nvPr>
+        </p:nvSpPr>
+        <p:spPr/>
+        <p:txBody>
+          <a:bodyPr/>
+          <a:lstStyle/>
+          <a:p>
+            <a:endParaRPr lang="en-US" dirty="0"/>
+          </a:p>
+        </p:txBody>
+      </p:sp>
+      <p:sp>
+        <p:nvSpPr>
+          <p:cNvPr id="4" name="Slide Number Placeholder 3"/>
+          <p:cNvSpPr>
+            <a:spLocks noGrp="1"/>
+          </p:cNvSpPr>
+          <p:nvPr>
+            <p:ph type="sldNum" sz="quarter" idx="10"/>
+          </p:nvPr>
+        </p:nvSpPr>
+        <p:spPr/>
+        <p:txBody>
+          <a:bodyPr/>
+          <a:lstStyle/>
+          <a:p>
+            <a:fld id="{F7021451-1387-4CA6-816F-3879F97B5CBC}" type="slidenum">
+              <a:rPr lang="en-US"/>
+              <a:t>11</a:t>
+            </a:fld>
+            <a:endParaRPr lang="en-US"/>
+          </a:p>
+        </p:txBody>
+      </p:sp>
+    </p:spTree>
+    <p:extLst>
+      <p:ext uri="{BB962C8B-B14F-4D97-AF65-F5344CB8AC3E}">
+        <p14:creationId xmlns:p14="http://schemas.microsoft.com/office/powerpoint/2010/main" val="1024086991"/>
+      </p:ext>
+    </p:extLst>
+  </p:cSld>
+  <p:clrMapOvr>
+    <a:masterClrMapping/>
+  </p:clrMapOvr>
+</p:notes>
+</file>
+
+<file path=ppt/notesSlides/notesSlide12.xml><?xml version="1.0" encoding="utf-8"?>
+<p:notes xmlns:a="http://schemas.openxmlformats.org/drawingml/2006/main" xmlns:r="http://schemas.openxmlformats.org/officeDocument/2006/relationships" xmlns:p="http://schemas.openxmlformats.org/presentationml/2006/main">
+  <p:cSld>
+    <p:spTree>
+      <p:nvGrpSpPr>
+        <p:cNvPr id="1" name=""/>
+        <p:cNvGrpSpPr/>
+        <p:nvPr/>
+      </p:nvGrpSpPr>
+      <p:grpSpPr>
+        <a:xfrm>
+          <a:off x="0" y="0"/>
+          <a:ext cx="0" cy="0"/>
+          <a:chOff x="0" y="0"/>
+          <a:chExt cx="0" cy="0"/>
+        </a:xfrm>
+      </p:grpSpPr>
+      <p:sp>
+        <p:nvSpPr>
+          <p:cNvPr id="2" name="Slide Image Placeholder 1"/>
+          <p:cNvSpPr>
+            <a:spLocks noGrp="1" noRot="1" noChangeAspect="1"/>
+          </p:cNvSpPr>
+          <p:nvPr>
+            <p:ph type="sldImg"/>
+          </p:nvPr>
+        </p:nvSpPr>
+        <p:spPr/>
+      </p:sp>
+      <p:sp>
+        <p:nvSpPr>
+          <p:cNvPr id="3" name="Notes Placeholder 2"/>
+          <p:cNvSpPr>
+            <a:spLocks noGrp="1"/>
+          </p:cNvSpPr>
+          <p:nvPr>
+            <p:ph type="body" idx="1"/>
+          </p:nvPr>
+        </p:nvSpPr>
+        <p:spPr/>
+        <p:txBody>
+          <a:bodyPr/>
+          <a:lstStyle/>
+          <a:p>
+            <a:endParaRPr lang="en-US" dirty="0"/>
+          </a:p>
+        </p:txBody>
+      </p:sp>
+      <p:sp>
+        <p:nvSpPr>
+          <p:cNvPr id="4" name="Slide Number Placeholder 3"/>
+          <p:cNvSpPr>
+            <a:spLocks noGrp="1"/>
+          </p:cNvSpPr>
+          <p:nvPr>
+            <p:ph type="sldNum" sz="quarter" idx="10"/>
+          </p:nvPr>
+        </p:nvSpPr>
+        <p:spPr/>
+        <p:txBody>
+          <a:bodyPr/>
+          <a:lstStyle/>
+          <a:p>
+            <a:fld id="{F7021451-1387-4CA6-816F-3879F97B5CBC}" type="slidenum">
+              <a:rPr lang="en-US"/>
+              <a:t>12</a:t>
+            </a:fld>
+            <a:endParaRPr lang="en-US"/>
+          </a:p>
+        </p:txBody>
+      </p:sp>
+    </p:spTree>
+    <p:extLst>
+      <p:ext uri="{BB962C8B-B14F-4D97-AF65-F5344CB8AC3E}">
+        <p14:creationId xmlns:p14="http://schemas.microsoft.com/office/powerpoint/2010/main" val="1024086991"/>
+      </p:ext>
+    </p:extLst>
+  </p:cSld>
+  <p:clrMapOvr>
+    <a:masterClrMapping/>
+  </p:clrMapOvr>
+</p:notes>
+</file>
+
 <file path=ppt/notesSlides/notesSlide2.xml><?xml version="1.0" encoding="utf-8"?>
 <p:notes xmlns:a="http://schemas.openxmlformats.org/drawingml/2006/main" xmlns:r="http://schemas.openxmlformats.org/officeDocument/2006/relationships" xmlns:p="http://schemas.openxmlformats.org/presentationml/2006/main">
   <p:cSld>
@@ -781,7 +1057,13 @@
   <p:cSld>
     <p:spTree>
       <p:nvGrpSpPr>
-        <p:cNvPr id="1" name=""/>
+        <p:cNvPr id="1" name="">
+          <a:extLst>
+            <a:ext uri="{FF2B5EF4-FFF2-40B4-BE49-F238E27FC236}">
+              <a16:creationId xmlns:a16="http://schemas.microsoft.com/office/drawing/2014/main" id="{DA1D21DE-81B4-2BC9-F554-E84036FD7C52}"/>
+            </a:ext>
+          </a:extLst>
+        </p:cNvPr>
         <p:cNvGrpSpPr/>
         <p:nvPr/>
       </p:nvGrpSpPr>
@@ -795,7 +1077,13 @@
       </p:grpSpPr>
       <p:sp>
         <p:nvSpPr>
-          <p:cNvPr id="2" name="Slide Image Placeholder 1"/>
+          <p:cNvPr id="2" name="Slide Image Placeholder 1">
+            <a:extLst>
+              <a:ext uri="{FF2B5EF4-FFF2-40B4-BE49-F238E27FC236}">
+                <a16:creationId xmlns:a16="http://schemas.microsoft.com/office/drawing/2014/main" id="{34DCB06B-406E-BE3F-7846-F1925982B1AC}"/>
+              </a:ext>
+            </a:extLst>
+          </p:cNvPr>
           <p:cNvSpPr>
             <a:spLocks noGrp="1" noRot="1" noChangeAspect="1"/>
           </p:cNvSpPr>
@@ -807,7 +1095,13 @@
       </p:sp>
       <p:sp>
         <p:nvSpPr>
-          <p:cNvPr id="3" name="Notes Placeholder 2"/>
+          <p:cNvPr id="3" name="Notes Placeholder 2">
+            <a:extLst>
+              <a:ext uri="{FF2B5EF4-FFF2-40B4-BE49-F238E27FC236}">
+                <a16:creationId xmlns:a16="http://schemas.microsoft.com/office/drawing/2014/main" id="{3C63A5CB-5C10-9CD5-9053-03831BCC2FEA}"/>
+              </a:ext>
+            </a:extLst>
+          </p:cNvPr>
           <p:cNvSpPr>
             <a:spLocks noGrp="1"/>
           </p:cNvSpPr>
@@ -826,7 +1120,13 @@
       </p:sp>
       <p:sp>
         <p:nvSpPr>
-          <p:cNvPr id="4" name="Slide Number Placeholder 3"/>
+          <p:cNvPr id="4" name="Slide Number Placeholder 3">
+            <a:extLst>
+              <a:ext uri="{FF2B5EF4-FFF2-40B4-BE49-F238E27FC236}">
+                <a16:creationId xmlns:a16="http://schemas.microsoft.com/office/drawing/2014/main" id="{E01F338F-645D-B07D-A943-3121F3E982A1}"/>
+              </a:ext>
+            </a:extLst>
+          </p:cNvPr>
           <p:cNvSpPr>
             <a:spLocks noGrp="1"/>
           </p:cNvSpPr>
@@ -850,7 +1150,7 @@
     </p:spTree>
     <p:extLst>
       <p:ext uri="{BB962C8B-B14F-4D97-AF65-F5344CB8AC3E}">
-        <p14:creationId xmlns:p14="http://schemas.microsoft.com/office/powerpoint/2010/main" val="1024086991"/>
+        <p14:creationId xmlns:p14="http://schemas.microsoft.com/office/powerpoint/2010/main" val="4096110383"/>
       </p:ext>
     </p:extLst>
   </p:cSld>
@@ -865,7 +1165,13 @@
   <p:cSld>
     <p:spTree>
       <p:nvGrpSpPr>
-        <p:cNvPr id="1" name=""/>
+        <p:cNvPr id="1" name="">
+          <a:extLst>
+            <a:ext uri="{FF2B5EF4-FFF2-40B4-BE49-F238E27FC236}">
+              <a16:creationId xmlns:a16="http://schemas.microsoft.com/office/drawing/2014/main" id="{5CC0E70A-F198-3F0A-DCF6-39BC99AFAD71}"/>
+            </a:ext>
+          </a:extLst>
+        </p:cNvPr>
         <p:cNvGrpSpPr/>
         <p:nvPr/>
       </p:nvGrpSpPr>
@@ -879,7 +1185,13 @@
       </p:grpSpPr>
       <p:sp>
         <p:nvSpPr>
-          <p:cNvPr id="2" name="Slide Image Placeholder 1"/>
+          <p:cNvPr id="2" name="Slide Image Placeholder 1">
+            <a:extLst>
+              <a:ext uri="{FF2B5EF4-FFF2-40B4-BE49-F238E27FC236}">
+                <a16:creationId xmlns:a16="http://schemas.microsoft.com/office/drawing/2014/main" id="{12BE59A9-6960-774F-5AFD-FADB976B6E9D}"/>
+              </a:ext>
+            </a:extLst>
+          </p:cNvPr>
           <p:cNvSpPr>
             <a:spLocks noGrp="1" noRot="1" noChangeAspect="1"/>
           </p:cNvSpPr>
@@ -891,7 +1203,13 @@
       </p:sp>
       <p:sp>
         <p:nvSpPr>
-          <p:cNvPr id="3" name="Notes Placeholder 2"/>
+          <p:cNvPr id="3" name="Notes Placeholder 2">
+            <a:extLst>
+              <a:ext uri="{FF2B5EF4-FFF2-40B4-BE49-F238E27FC236}">
+                <a16:creationId xmlns:a16="http://schemas.microsoft.com/office/drawing/2014/main" id="{2579E6B3-AC8F-114B-0DB1-F5117B550E09}"/>
+              </a:ext>
+            </a:extLst>
+          </p:cNvPr>
           <p:cNvSpPr>
             <a:spLocks noGrp="1"/>
           </p:cNvSpPr>
@@ -910,7 +1228,13 @@
       </p:sp>
       <p:sp>
         <p:nvSpPr>
-          <p:cNvPr id="4" name="Slide Number Placeholder 3"/>
+          <p:cNvPr id="4" name="Slide Number Placeholder 3">
+            <a:extLst>
+              <a:ext uri="{FF2B5EF4-FFF2-40B4-BE49-F238E27FC236}">
+                <a16:creationId xmlns:a16="http://schemas.microsoft.com/office/drawing/2014/main" id="{D65B498B-038D-341B-3F85-F90991B6B2B7}"/>
+              </a:ext>
+            </a:extLst>
+          </p:cNvPr>
           <p:cNvSpPr>
             <a:spLocks noGrp="1"/>
           </p:cNvSpPr>
@@ -934,7 +1258,115 @@
     </p:spTree>
     <p:extLst>
       <p:ext uri="{BB962C8B-B14F-4D97-AF65-F5344CB8AC3E}">
-        <p14:creationId xmlns:p14="http://schemas.microsoft.com/office/powerpoint/2010/main" val="1024086991"/>
+        <p14:creationId xmlns:p14="http://schemas.microsoft.com/office/powerpoint/2010/main" val="203403030"/>
+      </p:ext>
+    </p:extLst>
+  </p:cSld>
+  <p:clrMapOvr>
+    <a:masterClrMapping/>
+  </p:clrMapOvr>
+</p:notes>
+</file>
+
+<file path=ppt/notesSlides/notesSlide9.xml><?xml version="1.0" encoding="utf-8"?>
+<p:notes xmlns:a="http://schemas.openxmlformats.org/drawingml/2006/main" xmlns:r="http://schemas.openxmlformats.org/officeDocument/2006/relationships" xmlns:p="http://schemas.openxmlformats.org/presentationml/2006/main">
+  <p:cSld>
+    <p:spTree>
+      <p:nvGrpSpPr>
+        <p:cNvPr id="1" name="">
+          <a:extLst>
+            <a:ext uri="{FF2B5EF4-FFF2-40B4-BE49-F238E27FC236}">
+              <a16:creationId xmlns:a16="http://schemas.microsoft.com/office/drawing/2014/main" id="{3C6F75FC-967D-BA5B-7B03-023FD664CFCB}"/>
+            </a:ext>
+          </a:extLst>
+        </p:cNvPr>
+        <p:cNvGrpSpPr/>
+        <p:nvPr/>
+      </p:nvGrpSpPr>
+      <p:grpSpPr>
+        <a:xfrm>
+          <a:off x="0" y="0"/>
+          <a:ext cx="0" cy="0"/>
+          <a:chOff x="0" y="0"/>
+          <a:chExt cx="0" cy="0"/>
+        </a:xfrm>
+      </p:grpSpPr>
+      <p:sp>
+        <p:nvSpPr>
+          <p:cNvPr id="2" name="Slide Image Placeholder 1">
+            <a:extLst>
+              <a:ext uri="{FF2B5EF4-FFF2-40B4-BE49-F238E27FC236}">
+                <a16:creationId xmlns:a16="http://schemas.microsoft.com/office/drawing/2014/main" id="{0FEDBB1A-A8F5-409E-1241-08088FDE1A2B}"/>
+              </a:ext>
+            </a:extLst>
+          </p:cNvPr>
+          <p:cNvSpPr>
+            <a:spLocks noGrp="1" noRot="1" noChangeAspect="1"/>
+          </p:cNvSpPr>
+          <p:nvPr>
+            <p:ph type="sldImg"/>
+          </p:nvPr>
+        </p:nvSpPr>
+        <p:spPr/>
+      </p:sp>
+      <p:sp>
+        <p:nvSpPr>
+          <p:cNvPr id="3" name="Notes Placeholder 2">
+            <a:extLst>
+              <a:ext uri="{FF2B5EF4-FFF2-40B4-BE49-F238E27FC236}">
+                <a16:creationId xmlns:a16="http://schemas.microsoft.com/office/drawing/2014/main" id="{4B7EE58E-272C-7FBE-7FE3-A920887F6991}"/>
+              </a:ext>
+            </a:extLst>
+          </p:cNvPr>
+          <p:cNvSpPr>
+            <a:spLocks noGrp="1"/>
+          </p:cNvSpPr>
+          <p:nvPr>
+            <p:ph type="body" idx="1"/>
+          </p:nvPr>
+        </p:nvSpPr>
+        <p:spPr/>
+        <p:txBody>
+          <a:bodyPr/>
+          <a:lstStyle/>
+          <a:p>
+            <a:endParaRPr lang="en-US" dirty="0"/>
+          </a:p>
+        </p:txBody>
+      </p:sp>
+      <p:sp>
+        <p:nvSpPr>
+          <p:cNvPr id="4" name="Slide Number Placeholder 3">
+            <a:extLst>
+              <a:ext uri="{FF2B5EF4-FFF2-40B4-BE49-F238E27FC236}">
+                <a16:creationId xmlns:a16="http://schemas.microsoft.com/office/drawing/2014/main" id="{6017A5DE-4C23-188D-92D6-2B77C0803AC1}"/>
+              </a:ext>
+            </a:extLst>
+          </p:cNvPr>
+          <p:cNvSpPr>
+            <a:spLocks noGrp="1"/>
+          </p:cNvSpPr>
+          <p:nvPr>
+            <p:ph type="sldNum" sz="quarter" idx="10"/>
+          </p:nvPr>
+        </p:nvSpPr>
+        <p:spPr/>
+        <p:txBody>
+          <a:bodyPr/>
+          <a:lstStyle/>
+          <a:p>
+            <a:fld id="{F7021451-1387-4CA6-816F-3879F97B5CBC}" type="slidenum">
+              <a:rPr lang="en-US"/>
+              <a:t>9</a:t>
+            </a:fld>
+            <a:endParaRPr lang="en-US"/>
+          </a:p>
+        </p:txBody>
+      </p:sp>
+    </p:spTree>
+    <p:extLst>
+      <p:ext uri="{BB962C8B-B14F-4D97-AF65-F5344CB8AC3E}">
+        <p14:creationId xmlns:p14="http://schemas.microsoft.com/office/powerpoint/2010/main" val="976937517"/>
       </p:ext>
     </p:extLst>
   </p:cSld>
@@ -1842,6 +2274,1151 @@
 <file path=ppt/slides/slide10.xml><?xml version="1.0" encoding="utf-8"?>
 <p:sld xmlns:a="http://schemas.openxmlformats.org/drawingml/2006/main" xmlns:r="http://schemas.openxmlformats.org/officeDocument/2006/relationships" xmlns:p="http://schemas.openxmlformats.org/presentationml/2006/main">
   <p:cSld>
+    <p:bg>
+      <p:bgPr>
+        <a:solidFill>
+          <a:srgbClr val="F4F1EB"/>
+        </a:solidFill>
+        <a:effectLst/>
+      </p:bgPr>
+    </p:bg>
+    <p:spTree>
+      <p:nvGrpSpPr>
+        <p:cNvPr id="1" name="">
+          <a:extLst>
+            <a:ext uri="{FF2B5EF4-FFF2-40B4-BE49-F238E27FC236}">
+              <a16:creationId xmlns:a16="http://schemas.microsoft.com/office/drawing/2014/main" id="{70446057-9BDF-92F1-1536-B52459F3AD65}"/>
+            </a:ext>
+          </a:extLst>
+        </p:cNvPr>
+        <p:cNvGrpSpPr/>
+        <p:nvPr/>
+      </p:nvGrpSpPr>
+      <p:grpSpPr>
+        <a:xfrm>
+          <a:off x="0" y="0"/>
+          <a:ext cx="0" cy="0"/>
+          <a:chOff x="0" y="0"/>
+          <a:chExt cx="0" cy="0"/>
+        </a:xfrm>
+      </p:grpSpPr>
+      <p:sp>
+        <p:nvSpPr>
+          <p:cNvPr id="2" name="Shape 0">
+            <a:extLst>
+              <a:ext uri="{FF2B5EF4-FFF2-40B4-BE49-F238E27FC236}">
+                <a16:creationId xmlns:a16="http://schemas.microsoft.com/office/drawing/2014/main" id="{108ABD46-ED0C-DA09-48E6-E5A89EE7500C}"/>
+              </a:ext>
+            </a:extLst>
+          </p:cNvPr>
+          <p:cNvSpPr/>
+          <p:nvPr/>
+        </p:nvSpPr>
+        <p:spPr>
+          <a:xfrm>
+            <a:off x="838200" y="928688"/>
+            <a:ext cx="16611600" cy="9525"/>
+          </a:xfrm>
+          <a:prstGeom prst="rect">
+            <a:avLst/>
+          </a:prstGeom>
+          <a:solidFill>
+            <a:srgbClr val="0E1410">
+              <a:alpha val="12000"/>
+            </a:srgbClr>
+          </a:solidFill>
+          <a:ln/>
+        </p:spPr>
+        <p:txBody>
+          <a:bodyPr/>
+          <a:lstStyle/>
+          <a:p>
+            <a:endParaRPr lang="pt-PT"/>
+          </a:p>
+        </p:txBody>
+      </p:sp>
+      <p:sp>
+        <p:nvSpPr>
+          <p:cNvPr id="82" name="Text 80">
+            <a:extLst>
+              <a:ext uri="{FF2B5EF4-FFF2-40B4-BE49-F238E27FC236}">
+                <a16:creationId xmlns:a16="http://schemas.microsoft.com/office/drawing/2014/main" id="{F0C0D6B0-B15F-C79D-545F-C8493DE0EA98}"/>
+              </a:ext>
+            </a:extLst>
+          </p:cNvPr>
+          <p:cNvSpPr/>
+          <p:nvPr/>
+        </p:nvSpPr>
+        <p:spPr>
+          <a:xfrm>
+            <a:off x="16937682" y="9605963"/>
+            <a:ext cx="588318" cy="185738"/>
+          </a:xfrm>
+          <a:prstGeom prst="rect">
+            <a:avLst/>
+          </a:prstGeom>
+          <a:noFill/>
+          <a:ln/>
+        </p:spPr>
+        <p:txBody>
+          <a:bodyPr wrap="square" lIns="25400" tIns="25400" rIns="25400" bIns="25400" rtlCol="0" anchor="t">
+            <a:normAutofit lnSpcReduction="10000"/>
+          </a:bodyPr>
+          <a:lstStyle/>
+          <a:p>
+            <a:pPr marL="0" indent="0" algn="l">
+              <a:buNone/>
+            </a:pPr>
+            <a:r>
+              <a:rPr lang="en-US" sz="900" kern="0" spc="36" dirty="0">
+                <a:solidFill>
+                  <a:srgbClr val="6C726B"/>
+                </a:solidFill>
+                <a:latin typeface="JetBrains Mono" pitchFamily="34" charset="0"/>
+                <a:ea typeface="JetBrains Mono" pitchFamily="34" charset="-122"/>
+                <a:cs typeface="JetBrains Mono" pitchFamily="34" charset="-120"/>
+              </a:rPr>
+              <a:t>10 / 15</a:t>
+            </a:r>
+            <a:endParaRPr lang="en-US" sz="900" dirty="0"/>
+          </a:p>
+        </p:txBody>
+      </p:sp>
+      <p:sp>
+        <p:nvSpPr>
+          <p:cNvPr id="100" name="Shape 22">
+            <a:extLst>
+              <a:ext uri="{FF2B5EF4-FFF2-40B4-BE49-F238E27FC236}">
+                <a16:creationId xmlns:a16="http://schemas.microsoft.com/office/drawing/2014/main" id="{010522C2-58C9-83B0-FF7F-A229503BF1A8}"/>
+              </a:ext>
+            </a:extLst>
+          </p:cNvPr>
+          <p:cNvSpPr/>
+          <p:nvPr/>
+        </p:nvSpPr>
+        <p:spPr>
+          <a:xfrm>
+            <a:off x="838200" y="9424988"/>
+            <a:ext cx="16611600" cy="9525"/>
+          </a:xfrm>
+          <a:prstGeom prst="rect">
+            <a:avLst/>
+          </a:prstGeom>
+          <a:solidFill>
+            <a:srgbClr val="0E1410">
+              <a:alpha val="12000"/>
+            </a:srgbClr>
+          </a:solidFill>
+          <a:ln/>
+        </p:spPr>
+        <p:txBody>
+          <a:bodyPr/>
+          <a:lstStyle/>
+          <a:p>
+            <a:endParaRPr lang="pt-PT"/>
+          </a:p>
+        </p:txBody>
+      </p:sp>
+      <p:sp>
+        <p:nvSpPr>
+          <p:cNvPr id="103" name="Text 1">
+            <a:extLst>
+              <a:ext uri="{FF2B5EF4-FFF2-40B4-BE49-F238E27FC236}">
+                <a16:creationId xmlns:a16="http://schemas.microsoft.com/office/drawing/2014/main" id="{3FCE8F65-A202-4D78-F005-0506FD78393C}"/>
+              </a:ext>
+            </a:extLst>
+          </p:cNvPr>
+          <p:cNvSpPr/>
+          <p:nvPr/>
+        </p:nvSpPr>
+        <p:spPr>
+          <a:xfrm>
+            <a:off x="838200" y="609600"/>
+            <a:ext cx="2863129" cy="185738"/>
+          </a:xfrm>
+          <a:prstGeom prst="rect">
+            <a:avLst/>
+          </a:prstGeom>
+          <a:noFill/>
+          <a:ln/>
+        </p:spPr>
+        <p:txBody>
+          <a:bodyPr wrap="square" lIns="25400" tIns="25400" rIns="25400" bIns="25400" rtlCol="0" anchor="t">
+            <a:normAutofit lnSpcReduction="10000"/>
+          </a:bodyPr>
+          <a:lstStyle/>
+          <a:p>
+            <a:r>
+              <a:rPr lang="en-US" sz="900" kern="0" spc="36" dirty="0">
+                <a:solidFill>
+                  <a:srgbClr val="6C726B"/>
+                </a:solidFill>
+                <a:latin typeface="JetBrains Mono" pitchFamily="34" charset="0"/>
+                <a:ea typeface="JetBrains Mono" pitchFamily="34" charset="-122"/>
+                <a:cs typeface="JetBrains Mono" pitchFamily="34" charset="-120"/>
+              </a:rPr>
+              <a:t>SECTION 02 – RETRIEVAL &amp; CONTEXT</a:t>
+            </a:r>
+            <a:endParaRPr lang="en-US" sz="900" dirty="0"/>
+          </a:p>
+        </p:txBody>
+      </p:sp>
+      <p:sp>
+        <p:nvSpPr>
+          <p:cNvPr id="49" name="Text 3">
+            <a:extLst>
+              <a:ext uri="{FF2B5EF4-FFF2-40B4-BE49-F238E27FC236}">
+                <a16:creationId xmlns:a16="http://schemas.microsoft.com/office/drawing/2014/main" id="{803E59CE-FB12-CFD1-ACA4-4A8028528177}"/>
+              </a:ext>
+            </a:extLst>
+          </p:cNvPr>
+          <p:cNvSpPr/>
+          <p:nvPr/>
+        </p:nvSpPr>
+        <p:spPr>
+          <a:xfrm>
+            <a:off x="838200" y="1281113"/>
+            <a:ext cx="17109948" cy="214313"/>
+          </a:xfrm>
+          <a:prstGeom prst="rect">
+            <a:avLst/>
+          </a:prstGeom>
+          <a:noFill/>
+          <a:ln/>
+        </p:spPr>
+        <p:txBody>
+          <a:bodyPr wrap="square" lIns="25400" tIns="25400" rIns="25400" bIns="25400" rtlCol="0" anchor="t">
+            <a:normAutofit/>
+          </a:bodyPr>
+          <a:lstStyle/>
+          <a:p>
+            <a:pPr marL="0" indent="0" algn="l">
+              <a:buNone/>
+            </a:pPr>
+            <a:r>
+              <a:rPr lang="en-US" sz="1050" kern="0" spc="168" dirty="0">
+                <a:solidFill>
+                  <a:srgbClr val="6C726B"/>
+                </a:solidFill>
+                <a:latin typeface="JetBrains Mono" pitchFamily="34" charset="0"/>
+                <a:ea typeface="JetBrains Mono" pitchFamily="34" charset="-122"/>
+              </a:rPr>
+              <a:t>EXAMPLE 01</a:t>
+            </a:r>
+            <a:endParaRPr lang="en-US" sz="1050" dirty="0"/>
+          </a:p>
+        </p:txBody>
+      </p:sp>
+      <p:sp>
+        <p:nvSpPr>
+          <p:cNvPr id="51" name="Text 4">
+            <a:extLst>
+              <a:ext uri="{FF2B5EF4-FFF2-40B4-BE49-F238E27FC236}">
+                <a16:creationId xmlns:a16="http://schemas.microsoft.com/office/drawing/2014/main" id="{E33B125A-FA6B-92F1-4D88-E28F930D2EA5}"/>
+              </a:ext>
+            </a:extLst>
+          </p:cNvPr>
+          <p:cNvSpPr/>
+          <p:nvPr/>
+        </p:nvSpPr>
+        <p:spPr>
+          <a:xfrm>
+            <a:off x="838200" y="1571625"/>
+            <a:ext cx="4127297" cy="2389717"/>
+          </a:xfrm>
+          <a:prstGeom prst="rect">
+            <a:avLst/>
+          </a:prstGeom>
+          <a:noFill/>
+          <a:ln/>
+        </p:spPr>
+        <p:txBody>
+          <a:bodyPr wrap="square" lIns="25400" tIns="25400" rIns="25400" bIns="25400" rtlCol="0" anchor="t">
+            <a:normAutofit fontScale="92500"/>
+          </a:bodyPr>
+          <a:lstStyle/>
+          <a:p>
+            <a:pPr marL="0" indent="0" algn="l">
+              <a:lnSpc>
+                <a:spcPct val="96000"/>
+              </a:lnSpc>
+              <a:buNone/>
+            </a:pPr>
+            <a:r>
+              <a:rPr lang="en-US" sz="6900" b="1" kern="0" spc="-241" dirty="0">
+                <a:solidFill>
+                  <a:srgbClr val="0E1410"/>
+                </a:solidFill>
+                <a:latin typeface="Space Grotesk" pitchFamily="34" charset="0"/>
+                <a:ea typeface="Space Grotesk" pitchFamily="34" charset="-122"/>
+              </a:rPr>
+              <a:t>AI PHYSICAL ANALIST</a:t>
+            </a:r>
+          </a:p>
+        </p:txBody>
+      </p:sp>
+      <p:sp>
+        <p:nvSpPr>
+          <p:cNvPr id="55" name="Text 5">
+            <a:extLst>
+              <a:ext uri="{FF2B5EF4-FFF2-40B4-BE49-F238E27FC236}">
+                <a16:creationId xmlns:a16="http://schemas.microsoft.com/office/drawing/2014/main" id="{DC8459D9-4A03-C516-0D54-09C8023E2D6E}"/>
+              </a:ext>
+            </a:extLst>
+          </p:cNvPr>
+          <p:cNvSpPr/>
+          <p:nvPr/>
+        </p:nvSpPr>
+        <p:spPr>
+          <a:xfrm>
+            <a:off x="838201" y="3711773"/>
+            <a:ext cx="3462866" cy="2189692"/>
+          </a:xfrm>
+          <a:prstGeom prst="rect">
+            <a:avLst/>
+          </a:prstGeom>
+          <a:noFill/>
+          <a:ln/>
+        </p:spPr>
+        <p:txBody>
+          <a:bodyPr wrap="square" lIns="25400" tIns="25400" rIns="25400" bIns="25400" rtlCol="0" anchor="t">
+            <a:normAutofit lnSpcReduction="10000"/>
+          </a:bodyPr>
+          <a:lstStyle/>
+          <a:p>
+            <a:pPr algn="just">
+              <a:lnSpc>
+                <a:spcPct val="150000"/>
+              </a:lnSpc>
+            </a:pPr>
+            <a:r>
+              <a:rPr lang="en-US" sz="1650" dirty="0"/>
+              <a:t>The analyst isn't just a report generator,  it's a chat interface. You can ask follow-up questions, compare players, or query the whole dataset. The model routes every question before answering.</a:t>
+            </a:r>
+          </a:p>
+        </p:txBody>
+      </p:sp>
+      <p:sp>
+        <p:nvSpPr>
+          <p:cNvPr id="57" name="Shape 0">
+            <a:extLst>
+              <a:ext uri="{FF2B5EF4-FFF2-40B4-BE49-F238E27FC236}">
+                <a16:creationId xmlns:a16="http://schemas.microsoft.com/office/drawing/2014/main" id="{DE4BC527-04BE-B691-FA30-D366098602AD}"/>
+              </a:ext>
+            </a:extLst>
+          </p:cNvPr>
+          <p:cNvSpPr/>
+          <p:nvPr/>
+        </p:nvSpPr>
+        <p:spPr>
+          <a:xfrm>
+            <a:off x="838200" y="3563979"/>
+            <a:ext cx="1800000" cy="9525"/>
+          </a:xfrm>
+          <a:prstGeom prst="rect">
+            <a:avLst/>
+          </a:prstGeom>
+          <a:solidFill>
+            <a:srgbClr val="0E1410">
+              <a:alpha val="12000"/>
+            </a:srgbClr>
+          </a:solidFill>
+          <a:ln/>
+        </p:spPr>
+        <p:txBody>
+          <a:bodyPr/>
+          <a:lstStyle/>
+          <a:p>
+            <a:endParaRPr lang="pt-PT"/>
+          </a:p>
+        </p:txBody>
+      </p:sp>
+      <p:sp>
+        <p:nvSpPr>
+          <p:cNvPr id="6" name="Meia Moldura 5">
+            <a:extLst>
+              <a:ext uri="{FF2B5EF4-FFF2-40B4-BE49-F238E27FC236}">
+                <a16:creationId xmlns:a16="http://schemas.microsoft.com/office/drawing/2014/main" id="{953C1988-5E0E-68CB-3EC1-7397189D421F}"/>
+              </a:ext>
+            </a:extLst>
+          </p:cNvPr>
+          <p:cNvSpPr/>
+          <p:nvPr/>
+        </p:nvSpPr>
+        <p:spPr>
+          <a:xfrm>
+            <a:off x="4983117" y="1535900"/>
+            <a:ext cx="108000" cy="108000"/>
+          </a:xfrm>
+          <a:prstGeom prst="halfFrame">
+            <a:avLst/>
+          </a:prstGeom>
+          <a:solidFill>
+            <a:srgbClr val="0D140F"/>
+          </a:solidFill>
+          <a:ln>
+            <a:noFill/>
+          </a:ln>
+        </p:spPr>
+        <p:style>
+          <a:lnRef idx="2">
+            <a:schemeClr val="accent1">
+              <a:shade val="15000"/>
+            </a:schemeClr>
+          </a:lnRef>
+          <a:fillRef idx="1">
+            <a:schemeClr val="accent1"/>
+          </a:fillRef>
+          <a:effectRef idx="0">
+            <a:schemeClr val="accent1"/>
+          </a:effectRef>
+          <a:fontRef idx="minor">
+            <a:schemeClr val="lt1"/>
+          </a:fontRef>
+        </p:style>
+        <p:txBody>
+          <a:bodyPr rtlCol="0" anchor="ctr"/>
+          <a:lstStyle/>
+          <a:p>
+            <a:pPr algn="ctr"/>
+            <a:endParaRPr lang="pt-PT">
+              <a:solidFill>
+                <a:schemeClr val="tx1"/>
+              </a:solidFill>
+            </a:endParaRPr>
+          </a:p>
+        </p:txBody>
+      </p:sp>
+      <p:sp>
+        <p:nvSpPr>
+          <p:cNvPr id="7" name="Meia Moldura 6">
+            <a:extLst>
+              <a:ext uri="{FF2B5EF4-FFF2-40B4-BE49-F238E27FC236}">
+                <a16:creationId xmlns:a16="http://schemas.microsoft.com/office/drawing/2014/main" id="{D12BD135-11D6-08FC-4D51-603419CD92B6}"/>
+              </a:ext>
+            </a:extLst>
+          </p:cNvPr>
+          <p:cNvSpPr/>
+          <p:nvPr/>
+        </p:nvSpPr>
+        <p:spPr>
+          <a:xfrm rot="5400000">
+            <a:off x="10998090" y="1533527"/>
+            <a:ext cx="108000" cy="108000"/>
+          </a:xfrm>
+          <a:prstGeom prst="halfFrame">
+            <a:avLst/>
+          </a:prstGeom>
+          <a:solidFill>
+            <a:srgbClr val="0D140F"/>
+          </a:solidFill>
+          <a:ln>
+            <a:noFill/>
+          </a:ln>
+        </p:spPr>
+        <p:style>
+          <a:lnRef idx="2">
+            <a:schemeClr val="accent1">
+              <a:shade val="15000"/>
+            </a:schemeClr>
+          </a:lnRef>
+          <a:fillRef idx="1">
+            <a:schemeClr val="accent1"/>
+          </a:fillRef>
+          <a:effectRef idx="0">
+            <a:schemeClr val="accent1"/>
+          </a:effectRef>
+          <a:fontRef idx="minor">
+            <a:schemeClr val="lt1"/>
+          </a:fontRef>
+        </p:style>
+        <p:txBody>
+          <a:bodyPr rtlCol="0" anchor="ctr"/>
+          <a:lstStyle/>
+          <a:p>
+            <a:pPr algn="ctr"/>
+            <a:endParaRPr lang="pt-PT">
+              <a:solidFill>
+                <a:schemeClr val="tx1"/>
+              </a:solidFill>
+            </a:endParaRPr>
+          </a:p>
+        </p:txBody>
+      </p:sp>
+      <p:sp>
+        <p:nvSpPr>
+          <p:cNvPr id="8" name="Meia Moldura 7">
+            <a:extLst>
+              <a:ext uri="{FF2B5EF4-FFF2-40B4-BE49-F238E27FC236}">
+                <a16:creationId xmlns:a16="http://schemas.microsoft.com/office/drawing/2014/main" id="{5C2026E3-8B50-DD07-9FD6-8CE0B90D420D}"/>
+              </a:ext>
+            </a:extLst>
+          </p:cNvPr>
+          <p:cNvSpPr/>
+          <p:nvPr/>
+        </p:nvSpPr>
+        <p:spPr>
+          <a:xfrm rot="16200000">
+            <a:off x="4983117" y="4879402"/>
+            <a:ext cx="108000" cy="108000"/>
+          </a:xfrm>
+          <a:prstGeom prst="halfFrame">
+            <a:avLst/>
+          </a:prstGeom>
+          <a:solidFill>
+            <a:srgbClr val="0D140F"/>
+          </a:solidFill>
+          <a:ln>
+            <a:noFill/>
+          </a:ln>
+        </p:spPr>
+        <p:style>
+          <a:lnRef idx="2">
+            <a:schemeClr val="accent1">
+              <a:shade val="15000"/>
+            </a:schemeClr>
+          </a:lnRef>
+          <a:fillRef idx="1">
+            <a:schemeClr val="accent1"/>
+          </a:fillRef>
+          <a:effectRef idx="0">
+            <a:schemeClr val="accent1"/>
+          </a:effectRef>
+          <a:fontRef idx="minor">
+            <a:schemeClr val="lt1"/>
+          </a:fontRef>
+        </p:style>
+        <p:txBody>
+          <a:bodyPr rtlCol="0" anchor="ctr"/>
+          <a:lstStyle/>
+          <a:p>
+            <a:pPr algn="ctr"/>
+            <a:endParaRPr lang="pt-PT">
+              <a:solidFill>
+                <a:schemeClr val="tx1"/>
+              </a:solidFill>
+            </a:endParaRPr>
+          </a:p>
+        </p:txBody>
+      </p:sp>
+      <p:sp>
+        <p:nvSpPr>
+          <p:cNvPr id="9" name="Meia Moldura 8">
+            <a:extLst>
+              <a:ext uri="{FF2B5EF4-FFF2-40B4-BE49-F238E27FC236}">
+                <a16:creationId xmlns:a16="http://schemas.microsoft.com/office/drawing/2014/main" id="{1CB50C8E-6CD3-E03D-31C9-C7E6F5292D3B}"/>
+              </a:ext>
+            </a:extLst>
+          </p:cNvPr>
+          <p:cNvSpPr/>
+          <p:nvPr/>
+        </p:nvSpPr>
+        <p:spPr>
+          <a:xfrm rot="10800000">
+            <a:off x="11001614" y="4883016"/>
+            <a:ext cx="108000" cy="108000"/>
+          </a:xfrm>
+          <a:prstGeom prst="halfFrame">
+            <a:avLst/>
+          </a:prstGeom>
+          <a:solidFill>
+            <a:srgbClr val="0D140F"/>
+          </a:solidFill>
+          <a:ln>
+            <a:noFill/>
+          </a:ln>
+        </p:spPr>
+        <p:style>
+          <a:lnRef idx="2">
+            <a:schemeClr val="accent1">
+              <a:shade val="15000"/>
+            </a:schemeClr>
+          </a:lnRef>
+          <a:fillRef idx="1">
+            <a:schemeClr val="accent1"/>
+          </a:fillRef>
+          <a:effectRef idx="0">
+            <a:schemeClr val="accent1"/>
+          </a:effectRef>
+          <a:fontRef idx="minor">
+            <a:schemeClr val="lt1"/>
+          </a:fontRef>
+        </p:style>
+        <p:txBody>
+          <a:bodyPr rtlCol="0" anchor="ctr"/>
+          <a:lstStyle/>
+          <a:p>
+            <a:pPr algn="ctr"/>
+            <a:endParaRPr lang="pt-PT">
+              <a:solidFill>
+                <a:schemeClr val="tx1"/>
+              </a:solidFill>
+            </a:endParaRPr>
+          </a:p>
+        </p:txBody>
+      </p:sp>
+      <p:pic>
+        <p:nvPicPr>
+          <p:cNvPr id="18" name="Imagem 17">
+            <a:extLst>
+              <a:ext uri="{FF2B5EF4-FFF2-40B4-BE49-F238E27FC236}">
+                <a16:creationId xmlns:a16="http://schemas.microsoft.com/office/drawing/2014/main" id="{F0C06A81-E24A-DD83-94D3-AF10DF3F3CD6}"/>
+              </a:ext>
+            </a:extLst>
+          </p:cNvPr>
+          <p:cNvPicPr>
+            <a:picLocks noChangeAspect="1"/>
+          </p:cNvPicPr>
+          <p:nvPr/>
+        </p:nvPicPr>
+        <p:blipFill>
+          <a:blip r:embed="rId3"/>
+          <a:stretch>
+            <a:fillRect/>
+          </a:stretch>
+        </p:blipFill>
+        <p:spPr>
+          <a:xfrm>
+            <a:off x="4983116" y="1861191"/>
+            <a:ext cx="6014974" cy="2850847"/>
+          </a:xfrm>
+          <a:prstGeom prst="rect">
+            <a:avLst/>
+          </a:prstGeom>
+        </p:spPr>
+      </p:pic>
+      <p:sp>
+        <p:nvSpPr>
+          <p:cNvPr id="19" name="Meia Moldura 18">
+            <a:extLst>
+              <a:ext uri="{FF2B5EF4-FFF2-40B4-BE49-F238E27FC236}">
+                <a16:creationId xmlns:a16="http://schemas.microsoft.com/office/drawing/2014/main" id="{B11EFB46-172D-5843-C921-529641CA7BBF}"/>
+              </a:ext>
+            </a:extLst>
+          </p:cNvPr>
+          <p:cNvSpPr/>
+          <p:nvPr/>
+        </p:nvSpPr>
+        <p:spPr>
+          <a:xfrm>
+            <a:off x="4979593" y="5577336"/>
+            <a:ext cx="108000" cy="108000"/>
+          </a:xfrm>
+          <a:prstGeom prst="halfFrame">
+            <a:avLst/>
+          </a:prstGeom>
+          <a:solidFill>
+            <a:srgbClr val="0D140F"/>
+          </a:solidFill>
+          <a:ln>
+            <a:noFill/>
+          </a:ln>
+        </p:spPr>
+        <p:style>
+          <a:lnRef idx="2">
+            <a:schemeClr val="accent1">
+              <a:shade val="15000"/>
+            </a:schemeClr>
+          </a:lnRef>
+          <a:fillRef idx="1">
+            <a:schemeClr val="accent1"/>
+          </a:fillRef>
+          <a:effectRef idx="0">
+            <a:schemeClr val="accent1"/>
+          </a:effectRef>
+          <a:fontRef idx="minor">
+            <a:schemeClr val="lt1"/>
+          </a:fontRef>
+        </p:style>
+        <p:txBody>
+          <a:bodyPr rtlCol="0" anchor="ctr"/>
+          <a:lstStyle/>
+          <a:p>
+            <a:pPr algn="ctr"/>
+            <a:endParaRPr lang="pt-PT">
+              <a:solidFill>
+                <a:schemeClr val="tx1"/>
+              </a:solidFill>
+            </a:endParaRPr>
+          </a:p>
+        </p:txBody>
+      </p:sp>
+      <p:sp>
+        <p:nvSpPr>
+          <p:cNvPr id="20" name="Meia Moldura 19">
+            <a:extLst>
+              <a:ext uri="{FF2B5EF4-FFF2-40B4-BE49-F238E27FC236}">
+                <a16:creationId xmlns:a16="http://schemas.microsoft.com/office/drawing/2014/main" id="{84319672-D50D-47EC-A2C1-4DA05B19AB96}"/>
+              </a:ext>
+            </a:extLst>
+          </p:cNvPr>
+          <p:cNvSpPr/>
+          <p:nvPr/>
+        </p:nvSpPr>
+        <p:spPr>
+          <a:xfrm rot="5400000">
+            <a:off x="10994566" y="5574963"/>
+            <a:ext cx="108000" cy="108000"/>
+          </a:xfrm>
+          <a:prstGeom prst="halfFrame">
+            <a:avLst/>
+          </a:prstGeom>
+          <a:solidFill>
+            <a:srgbClr val="0D140F"/>
+          </a:solidFill>
+          <a:ln>
+            <a:noFill/>
+          </a:ln>
+        </p:spPr>
+        <p:style>
+          <a:lnRef idx="2">
+            <a:schemeClr val="accent1">
+              <a:shade val="15000"/>
+            </a:schemeClr>
+          </a:lnRef>
+          <a:fillRef idx="1">
+            <a:schemeClr val="accent1"/>
+          </a:fillRef>
+          <a:effectRef idx="0">
+            <a:schemeClr val="accent1"/>
+          </a:effectRef>
+          <a:fontRef idx="minor">
+            <a:schemeClr val="lt1"/>
+          </a:fontRef>
+        </p:style>
+        <p:txBody>
+          <a:bodyPr rtlCol="0" anchor="ctr"/>
+          <a:lstStyle/>
+          <a:p>
+            <a:pPr algn="ctr"/>
+            <a:endParaRPr lang="pt-PT">
+              <a:solidFill>
+                <a:schemeClr val="tx1"/>
+              </a:solidFill>
+            </a:endParaRPr>
+          </a:p>
+        </p:txBody>
+      </p:sp>
+      <p:sp>
+        <p:nvSpPr>
+          <p:cNvPr id="21" name="Meia Moldura 20">
+            <a:extLst>
+              <a:ext uri="{FF2B5EF4-FFF2-40B4-BE49-F238E27FC236}">
+                <a16:creationId xmlns:a16="http://schemas.microsoft.com/office/drawing/2014/main" id="{45849C0C-46B1-F06B-2419-CB86A1805601}"/>
+              </a:ext>
+            </a:extLst>
+          </p:cNvPr>
+          <p:cNvSpPr/>
+          <p:nvPr/>
+        </p:nvSpPr>
+        <p:spPr>
+          <a:xfrm rot="16200000">
+            <a:off x="4979593" y="8472605"/>
+            <a:ext cx="108000" cy="108000"/>
+          </a:xfrm>
+          <a:prstGeom prst="halfFrame">
+            <a:avLst/>
+          </a:prstGeom>
+          <a:solidFill>
+            <a:srgbClr val="0D140F"/>
+          </a:solidFill>
+          <a:ln>
+            <a:noFill/>
+          </a:ln>
+        </p:spPr>
+        <p:style>
+          <a:lnRef idx="2">
+            <a:schemeClr val="accent1">
+              <a:shade val="15000"/>
+            </a:schemeClr>
+          </a:lnRef>
+          <a:fillRef idx="1">
+            <a:schemeClr val="accent1"/>
+          </a:fillRef>
+          <a:effectRef idx="0">
+            <a:schemeClr val="accent1"/>
+          </a:effectRef>
+          <a:fontRef idx="minor">
+            <a:schemeClr val="lt1"/>
+          </a:fontRef>
+        </p:style>
+        <p:txBody>
+          <a:bodyPr rtlCol="0" anchor="ctr"/>
+          <a:lstStyle/>
+          <a:p>
+            <a:pPr algn="ctr"/>
+            <a:endParaRPr lang="pt-PT">
+              <a:solidFill>
+                <a:schemeClr val="tx1"/>
+              </a:solidFill>
+            </a:endParaRPr>
+          </a:p>
+        </p:txBody>
+      </p:sp>
+      <p:sp>
+        <p:nvSpPr>
+          <p:cNvPr id="22" name="Meia Moldura 21">
+            <a:extLst>
+              <a:ext uri="{FF2B5EF4-FFF2-40B4-BE49-F238E27FC236}">
+                <a16:creationId xmlns:a16="http://schemas.microsoft.com/office/drawing/2014/main" id="{4EF218A1-5576-3008-0E98-386419A5D344}"/>
+              </a:ext>
+            </a:extLst>
+          </p:cNvPr>
+          <p:cNvSpPr/>
+          <p:nvPr/>
+        </p:nvSpPr>
+        <p:spPr>
+          <a:xfrm rot="10800000">
+            <a:off x="10998090" y="8476219"/>
+            <a:ext cx="108000" cy="108000"/>
+          </a:xfrm>
+          <a:prstGeom prst="halfFrame">
+            <a:avLst/>
+          </a:prstGeom>
+          <a:solidFill>
+            <a:srgbClr val="0D140F"/>
+          </a:solidFill>
+          <a:ln>
+            <a:noFill/>
+          </a:ln>
+        </p:spPr>
+        <p:style>
+          <a:lnRef idx="2">
+            <a:schemeClr val="accent1">
+              <a:shade val="15000"/>
+            </a:schemeClr>
+          </a:lnRef>
+          <a:fillRef idx="1">
+            <a:schemeClr val="accent1"/>
+          </a:fillRef>
+          <a:effectRef idx="0">
+            <a:schemeClr val="accent1"/>
+          </a:effectRef>
+          <a:fontRef idx="minor">
+            <a:schemeClr val="lt1"/>
+          </a:fontRef>
+        </p:style>
+        <p:txBody>
+          <a:bodyPr rtlCol="0" anchor="ctr"/>
+          <a:lstStyle/>
+          <a:p>
+            <a:pPr algn="ctr"/>
+            <a:endParaRPr lang="pt-PT">
+              <a:solidFill>
+                <a:schemeClr val="tx1"/>
+              </a:solidFill>
+            </a:endParaRPr>
+          </a:p>
+        </p:txBody>
+      </p:sp>
+      <p:pic>
+        <p:nvPicPr>
+          <p:cNvPr id="23" name="Imagem 22">
+            <a:extLst>
+              <a:ext uri="{FF2B5EF4-FFF2-40B4-BE49-F238E27FC236}">
+                <a16:creationId xmlns:a16="http://schemas.microsoft.com/office/drawing/2014/main" id="{038BB5A6-F1F4-5AE9-42AB-23171CAA5254}"/>
+              </a:ext>
+            </a:extLst>
+          </p:cNvPr>
+          <p:cNvPicPr>
+            <a:picLocks noChangeAspect="1"/>
+          </p:cNvPicPr>
+          <p:nvPr/>
+        </p:nvPicPr>
+        <p:blipFill>
+          <a:blip r:embed="rId4"/>
+          <a:srcRect/>
+          <a:stretch/>
+        </p:blipFill>
+        <p:spPr>
+          <a:xfrm>
+            <a:off x="4979592" y="5813628"/>
+            <a:ext cx="6014974" cy="2509769"/>
+          </a:xfrm>
+          <a:prstGeom prst="rect">
+            <a:avLst/>
+          </a:prstGeom>
+        </p:spPr>
+      </p:pic>
+      <p:sp>
+        <p:nvSpPr>
+          <p:cNvPr id="25" name="Meia Moldura 24">
+            <a:extLst>
+              <a:ext uri="{FF2B5EF4-FFF2-40B4-BE49-F238E27FC236}">
+                <a16:creationId xmlns:a16="http://schemas.microsoft.com/office/drawing/2014/main" id="{D773F4F7-3EA8-C9C9-E936-E68A691F5EB0}"/>
+              </a:ext>
+            </a:extLst>
+          </p:cNvPr>
+          <p:cNvSpPr/>
+          <p:nvPr/>
+        </p:nvSpPr>
+        <p:spPr>
+          <a:xfrm>
+            <a:off x="11669568" y="2907497"/>
+            <a:ext cx="108000" cy="108000"/>
+          </a:xfrm>
+          <a:prstGeom prst="halfFrame">
+            <a:avLst/>
+          </a:prstGeom>
+          <a:solidFill>
+            <a:srgbClr val="0D140F"/>
+          </a:solidFill>
+          <a:ln>
+            <a:noFill/>
+          </a:ln>
+        </p:spPr>
+        <p:style>
+          <a:lnRef idx="2">
+            <a:schemeClr val="accent1">
+              <a:shade val="15000"/>
+            </a:schemeClr>
+          </a:lnRef>
+          <a:fillRef idx="1">
+            <a:schemeClr val="accent1"/>
+          </a:fillRef>
+          <a:effectRef idx="0">
+            <a:schemeClr val="accent1"/>
+          </a:effectRef>
+          <a:fontRef idx="minor">
+            <a:schemeClr val="lt1"/>
+          </a:fontRef>
+        </p:style>
+        <p:txBody>
+          <a:bodyPr rtlCol="0" anchor="ctr"/>
+          <a:lstStyle/>
+          <a:p>
+            <a:pPr algn="ctr"/>
+            <a:endParaRPr lang="pt-PT">
+              <a:solidFill>
+                <a:schemeClr val="tx1"/>
+              </a:solidFill>
+            </a:endParaRPr>
+          </a:p>
+        </p:txBody>
+      </p:sp>
+      <p:sp>
+        <p:nvSpPr>
+          <p:cNvPr id="26" name="Meia Moldura 25">
+            <a:extLst>
+              <a:ext uri="{FF2B5EF4-FFF2-40B4-BE49-F238E27FC236}">
+                <a16:creationId xmlns:a16="http://schemas.microsoft.com/office/drawing/2014/main" id="{9B8AAAFA-F6C5-E94B-37C1-3D981F985861}"/>
+              </a:ext>
+            </a:extLst>
+          </p:cNvPr>
+          <p:cNvSpPr/>
+          <p:nvPr/>
+        </p:nvSpPr>
+        <p:spPr>
+          <a:xfrm rot="5400000">
+            <a:off x="17684541" y="2905124"/>
+            <a:ext cx="108000" cy="108000"/>
+          </a:xfrm>
+          <a:prstGeom prst="halfFrame">
+            <a:avLst/>
+          </a:prstGeom>
+          <a:solidFill>
+            <a:srgbClr val="0D140F"/>
+          </a:solidFill>
+          <a:ln>
+            <a:noFill/>
+          </a:ln>
+        </p:spPr>
+        <p:style>
+          <a:lnRef idx="2">
+            <a:schemeClr val="accent1">
+              <a:shade val="15000"/>
+            </a:schemeClr>
+          </a:lnRef>
+          <a:fillRef idx="1">
+            <a:schemeClr val="accent1"/>
+          </a:fillRef>
+          <a:effectRef idx="0">
+            <a:schemeClr val="accent1"/>
+          </a:effectRef>
+          <a:fontRef idx="minor">
+            <a:schemeClr val="lt1"/>
+          </a:fontRef>
+        </p:style>
+        <p:txBody>
+          <a:bodyPr rtlCol="0" anchor="ctr"/>
+          <a:lstStyle/>
+          <a:p>
+            <a:pPr algn="ctr"/>
+            <a:endParaRPr lang="pt-PT">
+              <a:solidFill>
+                <a:schemeClr val="tx1"/>
+              </a:solidFill>
+            </a:endParaRPr>
+          </a:p>
+        </p:txBody>
+      </p:sp>
+      <p:sp>
+        <p:nvSpPr>
+          <p:cNvPr id="27" name="Meia Moldura 26">
+            <a:extLst>
+              <a:ext uri="{FF2B5EF4-FFF2-40B4-BE49-F238E27FC236}">
+                <a16:creationId xmlns:a16="http://schemas.microsoft.com/office/drawing/2014/main" id="{AB5F1260-5C99-28B1-4F47-0366CFA7594D}"/>
+              </a:ext>
+            </a:extLst>
+          </p:cNvPr>
+          <p:cNvSpPr/>
+          <p:nvPr/>
+        </p:nvSpPr>
+        <p:spPr>
+          <a:xfrm rot="16200000">
+            <a:off x="11669568" y="6986104"/>
+            <a:ext cx="108000" cy="108000"/>
+          </a:xfrm>
+          <a:prstGeom prst="halfFrame">
+            <a:avLst/>
+          </a:prstGeom>
+          <a:solidFill>
+            <a:srgbClr val="0D140F"/>
+          </a:solidFill>
+          <a:ln>
+            <a:noFill/>
+          </a:ln>
+        </p:spPr>
+        <p:style>
+          <a:lnRef idx="2">
+            <a:schemeClr val="accent1">
+              <a:shade val="15000"/>
+            </a:schemeClr>
+          </a:lnRef>
+          <a:fillRef idx="1">
+            <a:schemeClr val="accent1"/>
+          </a:fillRef>
+          <a:effectRef idx="0">
+            <a:schemeClr val="accent1"/>
+          </a:effectRef>
+          <a:fontRef idx="minor">
+            <a:schemeClr val="lt1"/>
+          </a:fontRef>
+        </p:style>
+        <p:txBody>
+          <a:bodyPr rtlCol="0" anchor="ctr"/>
+          <a:lstStyle/>
+          <a:p>
+            <a:pPr algn="ctr"/>
+            <a:endParaRPr lang="pt-PT">
+              <a:solidFill>
+                <a:schemeClr val="tx1"/>
+              </a:solidFill>
+            </a:endParaRPr>
+          </a:p>
+        </p:txBody>
+      </p:sp>
+      <p:sp>
+        <p:nvSpPr>
+          <p:cNvPr id="28" name="Meia Moldura 27">
+            <a:extLst>
+              <a:ext uri="{FF2B5EF4-FFF2-40B4-BE49-F238E27FC236}">
+                <a16:creationId xmlns:a16="http://schemas.microsoft.com/office/drawing/2014/main" id="{50B3AA57-2B75-04F3-81AA-EA2E522FEB02}"/>
+              </a:ext>
+            </a:extLst>
+          </p:cNvPr>
+          <p:cNvSpPr/>
+          <p:nvPr/>
+        </p:nvSpPr>
+        <p:spPr>
+          <a:xfrm rot="10800000">
+            <a:off x="17688065" y="6989718"/>
+            <a:ext cx="108000" cy="108000"/>
+          </a:xfrm>
+          <a:prstGeom prst="halfFrame">
+            <a:avLst/>
+          </a:prstGeom>
+          <a:solidFill>
+            <a:srgbClr val="0D140F"/>
+          </a:solidFill>
+          <a:ln>
+            <a:noFill/>
+          </a:ln>
+        </p:spPr>
+        <p:style>
+          <a:lnRef idx="2">
+            <a:schemeClr val="accent1">
+              <a:shade val="15000"/>
+            </a:schemeClr>
+          </a:lnRef>
+          <a:fillRef idx="1">
+            <a:schemeClr val="accent1"/>
+          </a:fillRef>
+          <a:effectRef idx="0">
+            <a:schemeClr val="accent1"/>
+          </a:effectRef>
+          <a:fontRef idx="minor">
+            <a:schemeClr val="lt1"/>
+          </a:fontRef>
+        </p:style>
+        <p:txBody>
+          <a:bodyPr rtlCol="0" anchor="ctr"/>
+          <a:lstStyle/>
+          <a:p>
+            <a:pPr algn="ctr"/>
+            <a:endParaRPr lang="pt-PT">
+              <a:solidFill>
+                <a:schemeClr val="tx1"/>
+              </a:solidFill>
+            </a:endParaRPr>
+          </a:p>
+        </p:txBody>
+      </p:sp>
+      <p:pic>
+        <p:nvPicPr>
+          <p:cNvPr id="29" name="Imagem 28">
+            <a:extLst>
+              <a:ext uri="{FF2B5EF4-FFF2-40B4-BE49-F238E27FC236}">
+                <a16:creationId xmlns:a16="http://schemas.microsoft.com/office/drawing/2014/main" id="{025CBE60-ED0A-B73B-321D-5B5E54AFF746}"/>
+              </a:ext>
+            </a:extLst>
+          </p:cNvPr>
+          <p:cNvPicPr>
+            <a:picLocks noChangeAspect="1"/>
+          </p:cNvPicPr>
+          <p:nvPr/>
+        </p:nvPicPr>
+        <p:blipFill>
+          <a:blip r:embed="rId5"/>
+          <a:srcRect/>
+          <a:stretch/>
+        </p:blipFill>
+        <p:spPr>
+          <a:xfrm>
+            <a:off x="11774044" y="3126781"/>
+            <a:ext cx="5802497" cy="3813364"/>
+          </a:xfrm>
+          <a:prstGeom prst="rect">
+            <a:avLst/>
+          </a:prstGeom>
+        </p:spPr>
+      </p:pic>
+    </p:spTree>
+    <p:extLst>
+      <p:ext uri="{BB962C8B-B14F-4D97-AF65-F5344CB8AC3E}">
+        <p14:creationId xmlns:p14="http://schemas.microsoft.com/office/powerpoint/2010/main" val="2571536018"/>
+      </p:ext>
+    </p:extLst>
+  </p:cSld>
+  <p:clrMapOvr>
+    <a:masterClrMapping/>
+  </p:clrMapOvr>
+</p:sld>
+</file>
+
+<file path=ppt/slides/slide11.xml><?xml version="1.0" encoding="utf-8"?>
+<p:sld xmlns:a="http://schemas.openxmlformats.org/drawingml/2006/main" xmlns:r="http://schemas.openxmlformats.org/officeDocument/2006/relationships" xmlns:p="http://schemas.openxmlformats.org/presentationml/2006/main">
+  <p:cSld name="Slide 11">
+    <p:bg>
+      <p:bgPr>
+        <a:solidFill>
+          <a:srgbClr val="E2F0D9">
+            <a:alpha val="80000"/>
+          </a:srgbClr>
+        </a:solidFill>
+        <a:effectLst/>
+      </p:bgPr>
+    </p:bg>
     <p:spTree>
       <p:nvGrpSpPr>
         <p:cNvPr id="1" name=""/>
@@ -1856,12 +3433,395 @@
           <a:chExt cx="0" cy="0"/>
         </a:xfrm>
       </p:grpSpPr>
+      <p:sp>
+        <p:nvSpPr>
+          <p:cNvPr id="2" name="Shape 0"/>
+          <p:cNvSpPr/>
+          <p:nvPr/>
+        </p:nvSpPr>
+        <p:spPr>
+          <a:xfrm>
+            <a:off x="838200" y="871538"/>
+            <a:ext cx="16611600" cy="9525"/>
+          </a:xfrm>
+          <a:prstGeom prst="rect">
+            <a:avLst/>
+          </a:prstGeom>
+          <a:solidFill>
+            <a:srgbClr val="0E1410">
+              <a:alpha val="12000"/>
+            </a:srgbClr>
+          </a:solidFill>
+          <a:ln/>
+        </p:spPr>
+        <p:txBody>
+          <a:bodyPr/>
+          <a:lstStyle/>
+          <a:p>
+            <a:endParaRPr lang="pt-PT"/>
+          </a:p>
+        </p:txBody>
+      </p:sp>
+      <p:sp>
+        <p:nvSpPr>
+          <p:cNvPr id="3" name="Text 1"/>
+          <p:cNvSpPr/>
+          <p:nvPr/>
+        </p:nvSpPr>
+        <p:spPr>
+          <a:xfrm>
+            <a:off x="838200" y="571500"/>
+            <a:ext cx="807765" cy="185738"/>
+          </a:xfrm>
+          <a:prstGeom prst="rect">
+            <a:avLst/>
+          </a:prstGeom>
+          <a:noFill/>
+          <a:ln/>
+        </p:spPr>
+        <p:txBody>
+          <a:bodyPr wrap="square" lIns="25400" tIns="25400" rIns="25400" bIns="25400" rtlCol="0" anchor="t">
+            <a:normAutofit lnSpcReduction="10000"/>
+          </a:bodyPr>
+          <a:lstStyle/>
+          <a:p>
+            <a:pPr marL="0" indent="0" algn="l">
+              <a:buNone/>
+            </a:pPr>
+            <a:r>
+              <a:rPr lang="en-US" sz="900" kern="0" spc="36" dirty="0">
+                <a:solidFill>
+                  <a:srgbClr val="6C726B"/>
+                </a:solidFill>
+                <a:latin typeface="JetBrains Mono" pitchFamily="34" charset="0"/>
+                <a:ea typeface="JetBrains Mono" pitchFamily="34" charset="-122"/>
+                <a:cs typeface="JetBrains Mono" pitchFamily="34" charset="-120"/>
+              </a:rPr>
+              <a:t>SECTION 03</a:t>
+            </a:r>
+            <a:endParaRPr lang="en-US" sz="900" dirty="0"/>
+          </a:p>
+        </p:txBody>
+      </p:sp>
+      <p:sp>
+        <p:nvSpPr>
+          <p:cNvPr id="4" name="Text 2"/>
+          <p:cNvSpPr/>
+          <p:nvPr/>
+        </p:nvSpPr>
+        <p:spPr>
+          <a:xfrm>
+            <a:off x="8887941" y="571500"/>
+            <a:ext cx="807765" cy="185738"/>
+          </a:xfrm>
+          <a:prstGeom prst="rect">
+            <a:avLst/>
+          </a:prstGeom>
+          <a:noFill/>
+          <a:ln/>
+        </p:spPr>
+        <p:txBody>
+          <a:bodyPr wrap="square" lIns="25400" tIns="25400" rIns="25400" bIns="25400" rtlCol="0" anchor="t">
+            <a:normAutofit lnSpcReduction="10000"/>
+          </a:bodyPr>
+          <a:lstStyle/>
+          <a:p>
+            <a:pPr marL="0" indent="0" algn="l">
+              <a:buNone/>
+            </a:pPr>
+            <a:r>
+              <a:rPr lang="en-US" sz="900" kern="0" spc="36" dirty="0">
+                <a:solidFill>
+                  <a:srgbClr val="6C726B"/>
+                </a:solidFill>
+                <a:latin typeface="JetBrains Mono" pitchFamily="34" charset="0"/>
+                <a:ea typeface="JetBrains Mono" pitchFamily="34" charset="-122"/>
+                <a:cs typeface="JetBrains Mono" pitchFamily="34" charset="-120"/>
+              </a:rPr>
+              <a:t>STORYBOARD</a:t>
+            </a:r>
+            <a:endParaRPr lang="en-US" sz="900" dirty="0"/>
+          </a:p>
+        </p:txBody>
+      </p:sp>
+      <p:sp>
+        <p:nvSpPr>
+          <p:cNvPr id="5" name="Text 3"/>
+          <p:cNvSpPr/>
+          <p:nvPr/>
+        </p:nvSpPr>
+        <p:spPr>
+          <a:xfrm>
+            <a:off x="16937682" y="571500"/>
+            <a:ext cx="588318" cy="185738"/>
+          </a:xfrm>
+          <a:prstGeom prst="rect">
+            <a:avLst/>
+          </a:prstGeom>
+          <a:noFill/>
+          <a:ln/>
+        </p:spPr>
+        <p:txBody>
+          <a:bodyPr wrap="square" lIns="25400" tIns="25400" rIns="25400" bIns="25400" rtlCol="0" anchor="t">
+            <a:normAutofit lnSpcReduction="10000"/>
+          </a:bodyPr>
+          <a:lstStyle/>
+          <a:p>
+            <a:pPr marL="0" indent="0" algn="l">
+              <a:buNone/>
+            </a:pPr>
+            <a:r>
+              <a:rPr lang="en-US" sz="900" kern="0" spc="36" dirty="0">
+                <a:solidFill>
+                  <a:srgbClr val="6C726B"/>
+                </a:solidFill>
+                <a:latin typeface="JetBrains Mono" pitchFamily="34" charset="0"/>
+                <a:ea typeface="JetBrains Mono" pitchFamily="34" charset="-122"/>
+                <a:cs typeface="JetBrains Mono" pitchFamily="34" charset="-120"/>
+              </a:rPr>
+              <a:t>11 / 15</a:t>
+            </a:r>
+            <a:endParaRPr lang="en-US" sz="900" dirty="0"/>
+          </a:p>
+        </p:txBody>
+      </p:sp>
+      <p:sp>
+        <p:nvSpPr>
+          <p:cNvPr id="7" name="Text 5"/>
+          <p:cNvSpPr/>
+          <p:nvPr/>
+        </p:nvSpPr>
+        <p:spPr>
+          <a:xfrm>
+            <a:off x="838200" y="1109663"/>
+            <a:ext cx="13538835" cy="7078935"/>
+          </a:xfrm>
+          <a:prstGeom prst="rect">
+            <a:avLst/>
+          </a:prstGeom>
+          <a:noFill/>
+          <a:ln/>
+        </p:spPr>
+        <p:txBody>
+          <a:bodyPr wrap="square" lIns="25400" tIns="25400" rIns="25400" bIns="25400" rtlCol="0" anchor="t">
+            <a:normAutofit/>
+          </a:bodyPr>
+          <a:lstStyle/>
+          <a:p>
+            <a:pPr marL="0" indent="0" algn="l">
+              <a:lnSpc>
+                <a:spcPct val="88000"/>
+              </a:lnSpc>
+              <a:buNone/>
+            </a:pPr>
+            <a:r>
+              <a:rPr lang="en-US" sz="21000" b="1" kern="0" spc="-1050" dirty="0">
+                <a:solidFill>
+                  <a:srgbClr val="0E1410"/>
+                </a:solidFill>
+                <a:latin typeface="Space Grotesk" pitchFamily="34" charset="0"/>
+                <a:ea typeface="Space Grotesk" pitchFamily="34" charset="-122"/>
+                <a:cs typeface="Space Grotesk" pitchFamily="34" charset="-120"/>
+              </a:rPr>
+              <a:t>Future Vision</a:t>
+            </a:r>
+          </a:p>
+          <a:p>
+            <a:pPr marL="0" indent="0" algn="l">
+              <a:lnSpc>
+                <a:spcPct val="88000"/>
+              </a:lnSpc>
+              <a:buNone/>
+            </a:pPr>
+            <a:r>
+              <a:rPr lang="en-US" sz="21000" b="1" kern="0" spc="-1050" dirty="0">
+                <a:solidFill>
+                  <a:srgbClr val="0E1410"/>
+                </a:solidFill>
+                <a:latin typeface="Space Grotesk" pitchFamily="34" charset="0"/>
+                <a:ea typeface="Space Grotesk" pitchFamily="34" charset="-122"/>
+                <a:cs typeface="Space Grotesk" pitchFamily="34" charset="-120"/>
+              </a:rPr>
+              <a:t>Storyboard</a:t>
+            </a:r>
+            <a:r>
+              <a:rPr lang="en-US" sz="21000" b="1" kern="0" spc="-1050" dirty="0">
+                <a:solidFill>
+                  <a:srgbClr val="FF5A1F"/>
+                </a:solidFill>
+                <a:latin typeface="Space Grotesk" pitchFamily="34" charset="0"/>
+                <a:ea typeface="Space Grotesk" pitchFamily="34" charset="-122"/>
+                <a:cs typeface="Space Grotesk" pitchFamily="34" charset="-120"/>
+              </a:rPr>
+              <a:t>.</a:t>
+            </a:r>
+            <a:endParaRPr lang="en-US" sz="21000" dirty="0"/>
+          </a:p>
+        </p:txBody>
+      </p:sp>
+      <p:sp>
+        <p:nvSpPr>
+          <p:cNvPr id="15" name="Shape 13"/>
+          <p:cNvSpPr/>
+          <p:nvPr/>
+        </p:nvSpPr>
+        <p:spPr>
+          <a:xfrm>
+            <a:off x="838200" y="9930705"/>
+            <a:ext cx="16611600" cy="9525"/>
+          </a:xfrm>
+          <a:prstGeom prst="rect">
+            <a:avLst/>
+          </a:prstGeom>
+          <a:solidFill>
+            <a:srgbClr val="0E1410">
+              <a:alpha val="12000"/>
+            </a:srgbClr>
+          </a:solidFill>
+          <a:ln/>
+        </p:spPr>
+        <p:txBody>
+          <a:bodyPr/>
+          <a:lstStyle/>
+          <a:p>
+            <a:endParaRPr lang="pt-PT"/>
+          </a:p>
+        </p:txBody>
+      </p:sp>
+      <p:sp>
+        <p:nvSpPr>
+          <p:cNvPr id="16" name="Text 14"/>
+          <p:cNvSpPr/>
+          <p:nvPr/>
+        </p:nvSpPr>
+        <p:spPr>
+          <a:xfrm>
+            <a:off x="838200" y="10092630"/>
+            <a:ext cx="2197596" cy="185738"/>
+          </a:xfrm>
+          <a:prstGeom prst="rect">
+            <a:avLst/>
+          </a:prstGeom>
+          <a:noFill/>
+          <a:ln/>
+        </p:spPr>
+        <p:txBody>
+          <a:bodyPr wrap="square" lIns="25400" tIns="25400" rIns="25400" bIns="25400" rtlCol="0" anchor="t">
+            <a:normAutofit lnSpcReduction="10000"/>
+          </a:bodyPr>
+          <a:lstStyle/>
+          <a:p>
+            <a:pPr marL="0" indent="0" algn="l">
+              <a:buNone/>
+            </a:pPr>
+            <a:r>
+              <a:rPr lang="en-US" sz="900" kern="0" spc="36" dirty="0">
+                <a:solidFill>
+                  <a:srgbClr val="6C726B"/>
+                </a:solidFill>
+                <a:latin typeface="JetBrains Mono" pitchFamily="34" charset="0"/>
+                <a:ea typeface="JetBrains Mono" pitchFamily="34" charset="-122"/>
+                <a:cs typeface="JetBrains Mono" pitchFamily="34" charset="-120"/>
+              </a:rPr>
+              <a:t>SIX FUNCTIONS · ONE ASSISTANT</a:t>
+            </a:r>
+            <a:endParaRPr lang="en-US" sz="900" dirty="0"/>
+          </a:p>
+        </p:txBody>
+      </p:sp>
+      <p:sp>
+        <p:nvSpPr>
+          <p:cNvPr id="17" name="Text 15"/>
+          <p:cNvSpPr/>
+          <p:nvPr/>
+        </p:nvSpPr>
+        <p:spPr>
+          <a:xfrm>
+            <a:off x="15327883" y="10092630"/>
+            <a:ext cx="2198117" cy="185738"/>
+          </a:xfrm>
+          <a:prstGeom prst="rect">
+            <a:avLst/>
+          </a:prstGeom>
+          <a:noFill/>
+          <a:ln/>
+        </p:spPr>
+        <p:txBody>
+          <a:bodyPr wrap="square" lIns="25400" tIns="25400" rIns="25400" bIns="25400" rtlCol="0" anchor="t">
+            <a:normAutofit lnSpcReduction="10000"/>
+          </a:bodyPr>
+          <a:lstStyle/>
+          <a:p>
+            <a:pPr marL="0" indent="0" algn="l">
+              <a:buNone/>
+            </a:pPr>
+            <a:r>
+              <a:rPr lang="en-US" sz="900" kern="0" spc="36" dirty="0">
+                <a:solidFill>
+                  <a:srgbClr val="6C726B"/>
+                </a:solidFill>
+                <a:latin typeface="JetBrains Mono" pitchFamily="34" charset="0"/>
+                <a:ea typeface="JetBrains Mono" pitchFamily="34" charset="-122"/>
+                <a:cs typeface="JetBrains Mono" pitchFamily="34" charset="-120"/>
+              </a:rPr>
+              <a:t>BRIEF → TARGET → ALTERNATIVES</a:t>
+            </a:r>
+            <a:endParaRPr lang="en-US" sz="900" dirty="0"/>
+          </a:p>
+        </p:txBody>
+      </p:sp>
+      <p:sp>
+        <p:nvSpPr>
+          <p:cNvPr id="18" name="Text 4">
+            <a:extLst>
+              <a:ext uri="{FF2B5EF4-FFF2-40B4-BE49-F238E27FC236}">
+                <a16:creationId xmlns:a16="http://schemas.microsoft.com/office/drawing/2014/main" id="{909B17A2-8857-13A7-15BF-CFCF8F3A119C}"/>
+              </a:ext>
+            </a:extLst>
+          </p:cNvPr>
+          <p:cNvSpPr/>
+          <p:nvPr/>
+        </p:nvSpPr>
+        <p:spPr>
+          <a:xfrm>
+            <a:off x="12694905" y="1338935"/>
+            <a:ext cx="11435426" cy="9250635"/>
+          </a:xfrm>
+          <a:prstGeom prst="rect">
+            <a:avLst/>
+          </a:prstGeom>
+          <a:noFill/>
+          <a:ln/>
+        </p:spPr>
+        <p:txBody>
+          <a:bodyPr wrap="square" lIns="25400" tIns="25400" rIns="25400" bIns="25400" rtlCol="0" anchor="t">
+            <a:normAutofit lnSpcReduction="10000"/>
+          </a:bodyPr>
+          <a:lstStyle/>
+          <a:p>
+            <a:pPr marL="0" indent="0" algn="l">
+              <a:lnSpc>
+                <a:spcPct val="181350"/>
+              </a:lnSpc>
+              <a:buNone/>
+            </a:pPr>
+            <a:r>
+              <a:rPr lang="en-US" sz="40000" b="1" kern="0" spc="-2000" dirty="0">
+                <a:solidFill>
+                  <a:srgbClr val="006B2E">
+                    <a:alpha val="8000"/>
+                  </a:srgbClr>
+                </a:solidFill>
+                <a:latin typeface="Space Grotesk" pitchFamily="34" charset="0"/>
+                <a:ea typeface="Space Grotesk" pitchFamily="34" charset="-122"/>
+              </a:rPr>
+              <a:t>03</a:t>
+            </a:r>
+            <a:endParaRPr lang="en-US" sz="40000" dirty="0"/>
+          </a:p>
+        </p:txBody>
+      </p:sp>
     </p:spTree>
-    <p:extLst>
-      <p:ext uri="{BB962C8B-B14F-4D97-AF65-F5344CB8AC3E}">
-        <p14:creationId xmlns:p14="http://schemas.microsoft.com/office/powerpoint/2010/main" val="2022150522"/>
-      </p:ext>
-    </p:extLst>
   </p:cSld>
   <p:clrMapOvr>
     <a:masterClrMapping/>
@@ -1869,9 +3829,17 @@
 </p:sld>
 </file>
 
-<file path=ppt/slides/slide11.xml><?xml version="1.0" encoding="utf-8"?>
+<file path=ppt/slides/slide12.xml><?xml version="1.0" encoding="utf-8"?>
 <p:sld xmlns:a="http://schemas.openxmlformats.org/drawingml/2006/main" xmlns:r="http://schemas.openxmlformats.org/officeDocument/2006/relationships" xmlns:p="http://schemas.openxmlformats.org/presentationml/2006/main">
-  <p:cSld>
+  <p:cSld name="Slide 15">
+    <p:bg>
+      <p:bgPr>
+        <a:solidFill>
+          <a:srgbClr val="0E1410"/>
+        </a:solidFill>
+        <a:effectLst/>
+      </p:bgPr>
+    </p:bg>
     <p:spTree>
       <p:nvGrpSpPr>
         <p:cNvPr id="1" name=""/>
@@ -1886,42 +3854,768 @@
           <a:chExt cx="0" cy="0"/>
         </a:xfrm>
       </p:grpSpPr>
+      <p:sp>
+        <p:nvSpPr>
+          <p:cNvPr id="2" name="Shape 0"/>
+          <p:cNvSpPr/>
+          <p:nvPr/>
+        </p:nvSpPr>
+        <p:spPr>
+          <a:xfrm>
+            <a:off x="838200" y="738188"/>
+            <a:ext cx="16611600" cy="9525"/>
+          </a:xfrm>
+          <a:prstGeom prst="rect">
+            <a:avLst/>
+          </a:prstGeom>
+          <a:solidFill>
+            <a:srgbClr val="F4F1EA">
+              <a:alpha val="18000"/>
+            </a:srgbClr>
+          </a:solidFill>
+          <a:ln/>
+        </p:spPr>
+        <p:txBody>
+          <a:bodyPr/>
+          <a:lstStyle/>
+          <a:p>
+            <a:endParaRPr lang="pt-PT"/>
+          </a:p>
+        </p:txBody>
+      </p:sp>
+      <p:sp>
+        <p:nvSpPr>
+          <p:cNvPr id="3" name="Text 1"/>
+          <p:cNvSpPr/>
+          <p:nvPr/>
+        </p:nvSpPr>
+        <p:spPr>
+          <a:xfrm>
+            <a:off x="838200" y="457200"/>
+            <a:ext cx="588318" cy="185738"/>
+          </a:xfrm>
+          <a:prstGeom prst="rect">
+            <a:avLst/>
+          </a:prstGeom>
+          <a:noFill/>
+          <a:ln/>
+        </p:spPr>
+        <p:txBody>
+          <a:bodyPr wrap="square" lIns="25400" tIns="25400" rIns="25400" bIns="25400" rtlCol="0" anchor="t">
+            <a:normAutofit lnSpcReduction="10000"/>
+          </a:bodyPr>
+          <a:lstStyle/>
+          <a:p>
+            <a:pPr marL="0" indent="0" algn="l">
+              <a:buNone/>
+            </a:pPr>
+            <a:r>
+              <a:rPr lang="en-US" sz="900" kern="0" spc="36" dirty="0">
+                <a:solidFill>
+                  <a:srgbClr val="F4F1EA">
+                    <a:alpha val="45000"/>
+                  </a:srgbClr>
+                </a:solidFill>
+                <a:latin typeface="JetBrains Mono" pitchFamily="34" charset="0"/>
+                <a:ea typeface="JetBrains Mono" pitchFamily="34" charset="-122"/>
+                <a:cs typeface="JetBrains Mono" pitchFamily="34" charset="-120"/>
+              </a:rPr>
+              <a:t>15 / 15</a:t>
+            </a:r>
+            <a:endParaRPr lang="en-US" sz="900" dirty="0"/>
+          </a:p>
+        </p:txBody>
+      </p:sp>
+      <p:sp>
+        <p:nvSpPr>
+          <p:cNvPr id="4" name="Text 2"/>
+          <p:cNvSpPr/>
+          <p:nvPr/>
+        </p:nvSpPr>
+        <p:spPr>
+          <a:xfrm>
+            <a:off x="16937682" y="457200"/>
+            <a:ext cx="588318" cy="185738"/>
+          </a:xfrm>
+          <a:prstGeom prst="rect">
+            <a:avLst/>
+          </a:prstGeom>
+          <a:noFill/>
+          <a:ln/>
+        </p:spPr>
+        <p:txBody>
+          <a:bodyPr wrap="square" lIns="25400" tIns="25400" rIns="25400" bIns="25400" rtlCol="0" anchor="t">
+            <a:normAutofit lnSpcReduction="10000"/>
+          </a:bodyPr>
+          <a:lstStyle/>
+          <a:p>
+            <a:pPr marL="0" indent="0" algn="l">
+              <a:buNone/>
+            </a:pPr>
+            <a:r>
+              <a:rPr lang="en-US" sz="900" kern="0" spc="36" dirty="0">
+                <a:solidFill>
+                  <a:srgbClr val="F4F1EA">
+                    <a:alpha val="45000"/>
+                  </a:srgbClr>
+                </a:solidFill>
+                <a:latin typeface="JetBrains Mono" pitchFamily="34" charset="0"/>
+                <a:ea typeface="JetBrains Mono" pitchFamily="34" charset="-122"/>
+                <a:cs typeface="JetBrains Mono" pitchFamily="34" charset="-120"/>
+              </a:rPr>
+              <a:t>CLOSING</a:t>
+            </a:r>
+            <a:endParaRPr lang="en-US" sz="900" dirty="0"/>
+          </a:p>
+        </p:txBody>
+      </p:sp>
+      <p:sp>
+        <p:nvSpPr>
+          <p:cNvPr id="5" name="Text 3"/>
+          <p:cNvSpPr/>
+          <p:nvPr/>
+        </p:nvSpPr>
+        <p:spPr>
+          <a:xfrm>
+            <a:off x="838200" y="1596479"/>
+            <a:ext cx="14716125" cy="185738"/>
+          </a:xfrm>
+          <a:prstGeom prst="rect">
+            <a:avLst/>
+          </a:prstGeom>
+          <a:noFill/>
+          <a:ln/>
+        </p:spPr>
+        <p:txBody>
+          <a:bodyPr wrap="square" lIns="25400" tIns="25400" rIns="25400" bIns="25400" rtlCol="0" anchor="t">
+            <a:normAutofit lnSpcReduction="10000"/>
+          </a:bodyPr>
+          <a:lstStyle/>
+          <a:p>
+            <a:pPr marL="0" indent="0" algn="l">
+              <a:buNone/>
+            </a:pPr>
+            <a:r>
+              <a:rPr lang="en-US" sz="900" kern="0" spc="36" dirty="0">
+                <a:solidFill>
+                  <a:srgbClr val="6FD29A"/>
+                </a:solidFill>
+                <a:latin typeface="JetBrains Mono" pitchFamily="34" charset="0"/>
+                <a:ea typeface="JetBrains Mono" pitchFamily="34" charset="-122"/>
+                <a:cs typeface="JetBrains Mono" pitchFamily="34" charset="-120"/>
+              </a:rPr>
+              <a:t>SKILLCORNER MEASURES. TWELVE REASONS.</a:t>
+            </a:r>
+            <a:endParaRPr lang="en-US" sz="900" dirty="0"/>
+          </a:p>
+        </p:txBody>
+      </p:sp>
+      <p:sp>
+        <p:nvSpPr>
+          <p:cNvPr id="6" name="Text 4"/>
+          <p:cNvSpPr/>
+          <p:nvPr/>
+        </p:nvSpPr>
+        <p:spPr>
+          <a:xfrm>
+            <a:off x="838200" y="1915567"/>
+            <a:ext cx="14716125" cy="5646241"/>
+          </a:xfrm>
+          <a:prstGeom prst="rect">
+            <a:avLst/>
+          </a:prstGeom>
+          <a:noFill/>
+          <a:ln/>
+        </p:spPr>
+        <p:txBody>
+          <a:bodyPr wrap="square" lIns="25400" tIns="25400" rIns="25400" bIns="25400" rtlCol="0" anchor="t">
+            <a:normAutofit/>
+          </a:bodyPr>
+          <a:lstStyle/>
+          <a:p>
+            <a:pPr marL="0" indent="0" algn="l">
+              <a:lnSpc>
+                <a:spcPct val="92000"/>
+              </a:lnSpc>
+              <a:buNone/>
+            </a:pPr>
+            <a:r>
+              <a:rPr lang="en-US" sz="12000" b="1" kern="0" spc="-540" dirty="0">
+                <a:solidFill>
+                  <a:srgbClr val="F4F1EA"/>
+                </a:solidFill>
+                <a:latin typeface="Space Grotesk" pitchFamily="34" charset="0"/>
+                <a:ea typeface="Space Grotesk" pitchFamily="34" charset="-122"/>
+                <a:cs typeface="Space Grotesk" pitchFamily="34" charset="-120"/>
+              </a:rPr>
+              <a:t>The model is the foundation. </a:t>
+            </a:r>
+            <a:r>
+              <a:rPr lang="en-US" sz="12000" b="1" kern="0" spc="-540" dirty="0">
+                <a:solidFill>
+                  <a:srgbClr val="6FD29A"/>
+                </a:solidFill>
+                <a:latin typeface="Space Grotesk" pitchFamily="34" charset="0"/>
+                <a:ea typeface="Space Grotesk" pitchFamily="34" charset="-122"/>
+                <a:cs typeface="Space Grotesk" pitchFamily="34" charset="-120"/>
+              </a:rPr>
+              <a:t>Context </a:t>
+            </a:r>
+            <a:r>
+              <a:rPr lang="en-US" sz="12000" b="1" kern="0" spc="-540" dirty="0">
+                <a:solidFill>
+                  <a:srgbClr val="F4F1EA"/>
+                </a:solidFill>
+                <a:latin typeface="Space Grotesk" pitchFamily="34" charset="0"/>
+                <a:ea typeface="Space Grotesk" pitchFamily="34" charset="-122"/>
+                <a:cs typeface="Space Grotesk" pitchFamily="34" charset="-120"/>
+              </a:rPr>
+              <a:t>is the product</a:t>
+            </a:r>
+            <a:r>
+              <a:rPr lang="en-US" sz="12000" b="1" kern="0" spc="-540" dirty="0">
+                <a:solidFill>
+                  <a:srgbClr val="FF5A1F"/>
+                </a:solidFill>
+                <a:latin typeface="Space Grotesk" pitchFamily="34" charset="0"/>
+                <a:ea typeface="Space Grotesk" pitchFamily="34" charset="-122"/>
+                <a:cs typeface="Space Grotesk" pitchFamily="34" charset="-120"/>
+              </a:rPr>
+              <a:t>.</a:t>
+            </a:r>
+            <a:endParaRPr lang="en-US" sz="12000" dirty="0"/>
+          </a:p>
+        </p:txBody>
+      </p:sp>
+      <p:sp>
+        <p:nvSpPr>
+          <p:cNvPr id="7" name="Shape 5"/>
+          <p:cNvSpPr/>
+          <p:nvPr/>
+        </p:nvSpPr>
+        <p:spPr>
+          <a:xfrm>
+            <a:off x="838200" y="8258175"/>
+            <a:ext cx="16611600" cy="9525"/>
+          </a:xfrm>
+          <a:prstGeom prst="rect">
+            <a:avLst/>
+          </a:prstGeom>
+          <a:solidFill>
+            <a:srgbClr val="F4F1EA">
+              <a:alpha val="18000"/>
+            </a:srgbClr>
+          </a:solidFill>
+          <a:ln/>
+        </p:spPr>
+        <p:txBody>
+          <a:bodyPr/>
+          <a:lstStyle/>
+          <a:p>
+            <a:endParaRPr lang="pt-PT"/>
+          </a:p>
+        </p:txBody>
+      </p:sp>
+      <p:sp>
+        <p:nvSpPr>
+          <p:cNvPr id="8" name="Text 6"/>
+          <p:cNvSpPr/>
+          <p:nvPr/>
+        </p:nvSpPr>
+        <p:spPr>
+          <a:xfrm>
+            <a:off x="838200" y="8529638"/>
+            <a:ext cx="807765" cy="185738"/>
+          </a:xfrm>
+          <a:prstGeom prst="rect">
+            <a:avLst/>
+          </a:prstGeom>
+          <a:noFill/>
+          <a:ln/>
+        </p:spPr>
+        <p:txBody>
+          <a:bodyPr wrap="square" lIns="25400" tIns="25400" rIns="25400" bIns="25400" rtlCol="0" anchor="t">
+            <a:normAutofit lnSpcReduction="10000"/>
+          </a:bodyPr>
+          <a:lstStyle/>
+          <a:p>
+            <a:pPr marL="0" indent="0" algn="l">
+              <a:buNone/>
+            </a:pPr>
+            <a:r>
+              <a:rPr lang="en-US" sz="900" kern="0" spc="36" dirty="0">
+                <a:solidFill>
+                  <a:srgbClr val="6C726B"/>
+                </a:solidFill>
+                <a:latin typeface="JetBrains Mono" pitchFamily="34" charset="0"/>
+                <a:ea typeface="JetBrains Mono" pitchFamily="34" charset="-122"/>
+                <a:cs typeface="JetBrains Mono" pitchFamily="34" charset="-120"/>
+              </a:rPr>
+              <a:t>FOUNDATION</a:t>
+            </a:r>
+            <a:endParaRPr lang="en-US" sz="900" dirty="0"/>
+          </a:p>
+        </p:txBody>
+      </p:sp>
+      <p:sp>
+        <p:nvSpPr>
+          <p:cNvPr id="9" name="Text 7"/>
+          <p:cNvSpPr/>
+          <p:nvPr/>
+        </p:nvSpPr>
+        <p:spPr>
+          <a:xfrm>
+            <a:off x="838200" y="8763000"/>
+            <a:ext cx="5494020" cy="352425"/>
+          </a:xfrm>
+          <a:prstGeom prst="rect">
+            <a:avLst/>
+          </a:prstGeom>
+          <a:noFill/>
+          <a:ln/>
+        </p:spPr>
+        <p:txBody>
+          <a:bodyPr wrap="square" lIns="25400" tIns="25400" rIns="25400" bIns="25400" rtlCol="0" anchor="t">
+            <a:normAutofit/>
+          </a:bodyPr>
+          <a:lstStyle/>
+          <a:p>
+            <a:pPr marL="0" indent="0" algn="l">
+              <a:buNone/>
+            </a:pPr>
+            <a:r>
+              <a:rPr lang="en-US" sz="1950" b="1" kern="0" spc="-39" dirty="0">
+                <a:solidFill>
+                  <a:srgbClr val="F4F1EA"/>
+                </a:solidFill>
+                <a:latin typeface="Space Grotesk" pitchFamily="34" charset="0"/>
+                <a:ea typeface="Space Grotesk" pitchFamily="34" charset="-122"/>
+                <a:cs typeface="Space Grotesk" pitchFamily="34" charset="-120"/>
+              </a:rPr>
+              <a:t>SkillCorner</a:t>
+            </a:r>
+            <a:endParaRPr lang="en-US" sz="1950" dirty="0"/>
+          </a:p>
+        </p:txBody>
+      </p:sp>
+      <p:sp>
+        <p:nvSpPr>
+          <p:cNvPr id="10" name="Text 8"/>
+          <p:cNvSpPr/>
+          <p:nvPr/>
+        </p:nvSpPr>
+        <p:spPr>
+          <a:xfrm>
+            <a:off x="838200" y="9153525"/>
+            <a:ext cx="5494020" cy="252413"/>
+          </a:xfrm>
+          <a:prstGeom prst="rect">
+            <a:avLst/>
+          </a:prstGeom>
+          <a:noFill/>
+          <a:ln/>
+        </p:spPr>
+        <p:txBody>
+          <a:bodyPr wrap="square" lIns="25400" tIns="25400" rIns="25400" bIns="25400" rtlCol="0" anchor="t">
+            <a:normAutofit fontScale="92500" lnSpcReduction="10000"/>
+          </a:bodyPr>
+          <a:lstStyle/>
+          <a:p>
+            <a:pPr marL="0" indent="0" algn="l">
+              <a:lnSpc>
+                <a:spcPct val="150000"/>
+              </a:lnSpc>
+              <a:buNone/>
+            </a:pPr>
+            <a:r>
+              <a:rPr lang="en-US" sz="1125" dirty="0">
+                <a:solidFill>
+                  <a:srgbClr val="F4F1EA">
+                    <a:alpha val="65000"/>
+                  </a:srgbClr>
+                </a:solidFill>
+                <a:latin typeface="Space Grotesk" pitchFamily="34" charset="0"/>
+                <a:ea typeface="Space Grotesk" pitchFamily="34" charset="-122"/>
+                <a:cs typeface="Space Grotesk" pitchFamily="34" charset="-120"/>
+              </a:rPr>
+              <a:t>Tracking · physical metrics · per-match telemetry. The signals.</a:t>
+            </a:r>
+            <a:endParaRPr lang="en-US" sz="1125" dirty="0"/>
+          </a:p>
+        </p:txBody>
+      </p:sp>
+      <p:sp>
+        <p:nvSpPr>
+          <p:cNvPr id="11" name="Text 9"/>
+          <p:cNvSpPr/>
+          <p:nvPr/>
+        </p:nvSpPr>
+        <p:spPr>
+          <a:xfrm>
+            <a:off x="6477000" y="8529638"/>
+            <a:ext cx="442020" cy="185738"/>
+          </a:xfrm>
+          <a:prstGeom prst="rect">
+            <a:avLst/>
+          </a:prstGeom>
+          <a:noFill/>
+          <a:ln/>
+        </p:spPr>
+        <p:txBody>
+          <a:bodyPr wrap="square" lIns="25400" tIns="25400" rIns="25400" bIns="25400" rtlCol="0" anchor="t">
+            <a:normAutofit lnSpcReduction="10000"/>
+          </a:bodyPr>
+          <a:lstStyle/>
+          <a:p>
+            <a:pPr marL="0" indent="0" algn="l">
+              <a:buNone/>
+            </a:pPr>
+            <a:r>
+              <a:rPr lang="en-US" sz="900" kern="0" spc="36" dirty="0">
+                <a:solidFill>
+                  <a:srgbClr val="6C726B"/>
+                </a:solidFill>
+                <a:latin typeface="JetBrains Mono" pitchFamily="34" charset="0"/>
+                <a:ea typeface="JetBrains Mono" pitchFamily="34" charset="-122"/>
+                <a:cs typeface="JetBrains Mono" pitchFamily="34" charset="-120"/>
+              </a:rPr>
+              <a:t>LAYER</a:t>
+            </a:r>
+            <a:endParaRPr lang="en-US" sz="900" dirty="0"/>
+          </a:p>
+        </p:txBody>
+      </p:sp>
+      <p:sp>
+        <p:nvSpPr>
+          <p:cNvPr id="12" name="Text 10"/>
+          <p:cNvSpPr/>
+          <p:nvPr/>
+        </p:nvSpPr>
+        <p:spPr>
+          <a:xfrm>
+            <a:off x="6477000" y="8763000"/>
+            <a:ext cx="5494020" cy="352425"/>
+          </a:xfrm>
+          <a:prstGeom prst="rect">
+            <a:avLst/>
+          </a:prstGeom>
+          <a:noFill/>
+          <a:ln/>
+        </p:spPr>
+        <p:txBody>
+          <a:bodyPr wrap="square" lIns="25400" tIns="25400" rIns="25400" bIns="25400" rtlCol="0" anchor="t">
+            <a:normAutofit/>
+          </a:bodyPr>
+          <a:lstStyle/>
+          <a:p>
+            <a:pPr marL="0" indent="0" algn="l">
+              <a:buNone/>
+            </a:pPr>
+            <a:r>
+              <a:rPr lang="en-US" sz="1950" b="1" kern="0" spc="-39" dirty="0">
+                <a:solidFill>
+                  <a:srgbClr val="F4F1EA"/>
+                </a:solidFill>
+                <a:latin typeface="Space Grotesk" pitchFamily="34" charset="0"/>
+                <a:ea typeface="Space Grotesk" pitchFamily="34" charset="-122"/>
+                <a:cs typeface="Space Grotesk" pitchFamily="34" charset="-120"/>
+              </a:rPr>
+              <a:t>Twelve · Context Engineering</a:t>
+            </a:r>
+            <a:endParaRPr lang="en-US" sz="1950" dirty="0"/>
+          </a:p>
+        </p:txBody>
+      </p:sp>
+      <p:sp>
+        <p:nvSpPr>
+          <p:cNvPr id="13" name="Text 11"/>
+          <p:cNvSpPr/>
+          <p:nvPr/>
+        </p:nvSpPr>
+        <p:spPr>
+          <a:xfrm>
+            <a:off x="6477000" y="9153525"/>
+            <a:ext cx="5494020" cy="252413"/>
+          </a:xfrm>
+          <a:prstGeom prst="rect">
+            <a:avLst/>
+          </a:prstGeom>
+          <a:noFill/>
+          <a:ln/>
+        </p:spPr>
+        <p:txBody>
+          <a:bodyPr wrap="square" lIns="25400" tIns="25400" rIns="25400" bIns="25400" rtlCol="0" anchor="t">
+            <a:normAutofit fontScale="92500" lnSpcReduction="10000"/>
+          </a:bodyPr>
+          <a:lstStyle/>
+          <a:p>
+            <a:pPr marL="0" indent="0" algn="l">
+              <a:lnSpc>
+                <a:spcPct val="150000"/>
+              </a:lnSpc>
+              <a:buNone/>
+            </a:pPr>
+            <a:r>
+              <a:rPr lang="en-US" sz="1125" dirty="0">
+                <a:solidFill>
+                  <a:srgbClr val="F4F1EA">
+                    <a:alpha val="65000"/>
+                  </a:srgbClr>
+                </a:solidFill>
+                <a:latin typeface="Space Grotesk" pitchFamily="34" charset="0"/>
+                <a:ea typeface="Space Grotesk" pitchFamily="34" charset="-122"/>
+                <a:cs typeface="Space Grotesk" pitchFamily="34" charset="-120"/>
+              </a:rPr>
+              <a:t>Pillars · retrieval · wordalisation · refusal. The product.</a:t>
+            </a:r>
+            <a:endParaRPr lang="en-US" sz="1125" dirty="0"/>
+          </a:p>
+        </p:txBody>
+      </p:sp>
+      <p:sp>
+        <p:nvSpPr>
+          <p:cNvPr id="14" name="Text 12"/>
+          <p:cNvSpPr/>
+          <p:nvPr/>
+        </p:nvSpPr>
+        <p:spPr>
+          <a:xfrm>
+            <a:off x="12115800" y="8529638"/>
+            <a:ext cx="368871" cy="185738"/>
+          </a:xfrm>
+          <a:prstGeom prst="rect">
+            <a:avLst/>
+          </a:prstGeom>
+          <a:noFill/>
+          <a:ln/>
+        </p:spPr>
+        <p:txBody>
+          <a:bodyPr wrap="square" lIns="25400" tIns="25400" rIns="25400" bIns="25400" rtlCol="0" anchor="t">
+            <a:normAutofit lnSpcReduction="10000"/>
+          </a:bodyPr>
+          <a:lstStyle/>
+          <a:p>
+            <a:pPr marL="0" indent="0" algn="l">
+              <a:buNone/>
+            </a:pPr>
+            <a:r>
+              <a:rPr lang="en-US" sz="900" kern="0" spc="36" dirty="0">
+                <a:solidFill>
+                  <a:srgbClr val="6C726B"/>
+                </a:solidFill>
+                <a:latin typeface="JetBrains Mono" pitchFamily="34" charset="0"/>
+                <a:ea typeface="JetBrains Mono" pitchFamily="34" charset="-122"/>
+                <a:cs typeface="JetBrains Mono" pitchFamily="34" charset="-120"/>
+              </a:rPr>
+              <a:t>NEXT</a:t>
+            </a:r>
+            <a:endParaRPr lang="en-US" sz="900" dirty="0"/>
+          </a:p>
+        </p:txBody>
+      </p:sp>
+      <p:sp>
+        <p:nvSpPr>
+          <p:cNvPr id="15" name="Text 13"/>
+          <p:cNvSpPr/>
+          <p:nvPr/>
+        </p:nvSpPr>
+        <p:spPr>
+          <a:xfrm>
+            <a:off x="12115800" y="8763000"/>
+            <a:ext cx="5494020" cy="352425"/>
+          </a:xfrm>
+          <a:prstGeom prst="rect">
+            <a:avLst/>
+          </a:prstGeom>
+          <a:noFill/>
+          <a:ln/>
+        </p:spPr>
+        <p:txBody>
+          <a:bodyPr wrap="square" lIns="25400" tIns="25400" rIns="25400" bIns="25400" rtlCol="0" anchor="t">
+            <a:normAutofit/>
+          </a:bodyPr>
+          <a:lstStyle/>
+          <a:p>
+            <a:pPr marL="0" indent="0" algn="l">
+              <a:buNone/>
+            </a:pPr>
+            <a:r>
+              <a:rPr lang="en-US" sz="1950" b="1" kern="0" spc="-39" dirty="0">
+                <a:solidFill>
+                  <a:srgbClr val="6FD29A"/>
+                </a:solidFill>
+                <a:latin typeface="Space Grotesk" pitchFamily="34" charset="0"/>
+                <a:ea typeface="Space Grotesk" pitchFamily="34" charset="-122"/>
+                <a:cs typeface="Space Grotesk" pitchFamily="34" charset="-120"/>
+              </a:rPr>
+              <a:t>Build the six functions.</a:t>
+            </a:r>
+            <a:endParaRPr lang="en-US" sz="1950" dirty="0"/>
+          </a:p>
+        </p:txBody>
+      </p:sp>
+      <p:sp>
+        <p:nvSpPr>
+          <p:cNvPr id="16" name="Text 14"/>
+          <p:cNvSpPr/>
+          <p:nvPr/>
+        </p:nvSpPr>
+        <p:spPr>
+          <a:xfrm>
+            <a:off x="12115800" y="9153525"/>
+            <a:ext cx="5494020" cy="252413"/>
+          </a:xfrm>
+          <a:prstGeom prst="rect">
+            <a:avLst/>
+          </a:prstGeom>
+          <a:noFill/>
+          <a:ln/>
+        </p:spPr>
+        <p:txBody>
+          <a:bodyPr wrap="square" lIns="25400" tIns="25400" rIns="25400" bIns="25400" rtlCol="0" anchor="t">
+            <a:normAutofit fontScale="92500" lnSpcReduction="10000"/>
+          </a:bodyPr>
+          <a:lstStyle/>
+          <a:p>
+            <a:pPr marL="0" indent="0" algn="l">
+              <a:lnSpc>
+                <a:spcPct val="150000"/>
+              </a:lnSpc>
+              <a:buNone/>
+            </a:pPr>
+            <a:r>
+              <a:rPr lang="en-US" sz="1125" dirty="0">
+                <a:solidFill>
+                  <a:srgbClr val="F4F1EA">
+                    <a:alpha val="65000"/>
+                  </a:srgbClr>
+                </a:solidFill>
+                <a:latin typeface="Space Grotesk" pitchFamily="34" charset="0"/>
+                <a:ea typeface="Space Grotesk" pitchFamily="34" charset="-122"/>
+                <a:cs typeface="Space Grotesk" pitchFamily="34" charset="-120"/>
+              </a:rPr>
+              <a:t>Three wordalisations, three ask-templates, one knowledge base.</a:t>
+            </a:r>
+            <a:endParaRPr lang="en-US" sz="1125" dirty="0"/>
+          </a:p>
+        </p:txBody>
+      </p:sp>
+      <p:sp>
+        <p:nvSpPr>
+          <p:cNvPr id="17" name="Shape 15"/>
+          <p:cNvSpPr/>
+          <p:nvPr/>
+        </p:nvSpPr>
+        <p:spPr>
+          <a:xfrm>
+            <a:off x="838200" y="9558338"/>
+            <a:ext cx="16611600" cy="9525"/>
+          </a:xfrm>
+          <a:prstGeom prst="rect">
+            <a:avLst/>
+          </a:prstGeom>
+          <a:solidFill>
+            <a:srgbClr val="F4F1EA">
+              <a:alpha val="18000"/>
+            </a:srgbClr>
+          </a:solidFill>
+          <a:ln/>
+        </p:spPr>
+        <p:txBody>
+          <a:bodyPr/>
+          <a:lstStyle/>
+          <a:p>
+            <a:endParaRPr lang="pt-PT"/>
+          </a:p>
+        </p:txBody>
+      </p:sp>
+      <p:sp>
+        <p:nvSpPr>
+          <p:cNvPr id="18" name="Text 16"/>
+          <p:cNvSpPr/>
+          <p:nvPr/>
+        </p:nvSpPr>
+        <p:spPr>
+          <a:xfrm>
+            <a:off x="838200" y="9720263"/>
+            <a:ext cx="2637099" cy="185738"/>
+          </a:xfrm>
+          <a:prstGeom prst="rect">
+            <a:avLst/>
+          </a:prstGeom>
+          <a:noFill/>
+          <a:ln/>
+        </p:spPr>
+        <p:txBody>
+          <a:bodyPr wrap="square" lIns="25400" tIns="25400" rIns="25400" bIns="25400" rtlCol="0" anchor="t">
+            <a:normAutofit lnSpcReduction="10000"/>
+          </a:bodyPr>
+          <a:lstStyle/>
+          <a:p>
+            <a:pPr marL="0" indent="0" algn="l">
+              <a:buNone/>
+            </a:pPr>
+            <a:r>
+              <a:rPr lang="en-US" sz="900" kern="0" spc="36" dirty="0">
+                <a:solidFill>
+                  <a:srgbClr val="F4F1EA">
+                    <a:alpha val="45000"/>
+                  </a:srgbClr>
+                </a:solidFill>
+                <a:latin typeface="JetBrains Mono" pitchFamily="34" charset="0"/>
+                <a:ea typeface="JetBrains Mono" pitchFamily="34" charset="-122"/>
+                <a:cs typeface="JetBrains Mono" pitchFamily="34" charset="-120"/>
+              </a:rPr>
+              <a:t>TWELVE · CONTEXT ENGINEERING · 2026</a:t>
+            </a:r>
+            <a:endParaRPr lang="en-US" sz="900" dirty="0"/>
+          </a:p>
+        </p:txBody>
+      </p:sp>
+      <p:sp>
+        <p:nvSpPr>
+          <p:cNvPr id="19" name="Text 17"/>
+          <p:cNvSpPr/>
+          <p:nvPr/>
+        </p:nvSpPr>
+        <p:spPr>
+          <a:xfrm>
+            <a:off x="16059894" y="9720263"/>
+            <a:ext cx="1466106" cy="185738"/>
+          </a:xfrm>
+          <a:prstGeom prst="rect">
+            <a:avLst/>
+          </a:prstGeom>
+          <a:noFill/>
+          <a:ln/>
+        </p:spPr>
+        <p:txBody>
+          <a:bodyPr wrap="square" lIns="25400" tIns="25400" rIns="25400" bIns="25400" rtlCol="0" anchor="t">
+            <a:normAutofit lnSpcReduction="10000"/>
+          </a:bodyPr>
+          <a:lstStyle/>
+          <a:p>
+            <a:pPr marL="0" indent="0" algn="l">
+              <a:buNone/>
+            </a:pPr>
+            <a:r>
+              <a:rPr lang="en-US" sz="900" kern="0" spc="36" dirty="0">
+                <a:solidFill>
+                  <a:srgbClr val="F4F1EA">
+                    <a:alpha val="45000"/>
+                  </a:srgbClr>
+                </a:solidFill>
+                <a:latin typeface="JetBrains Mono" pitchFamily="34" charset="0"/>
+                <a:ea typeface="JetBrains Mono" pitchFamily="34" charset="-122"/>
+                <a:cs typeface="JetBrains Mono" pitchFamily="34" charset="-120"/>
+              </a:rPr>
+              <a:t>SESSION CTXENG / 11</a:t>
+            </a:r>
+            <a:endParaRPr lang="en-US" sz="900" dirty="0"/>
+          </a:p>
+        </p:txBody>
+      </p:sp>
     </p:spTree>
-    <p:extLst>
-      <p:ext uri="{BB962C8B-B14F-4D97-AF65-F5344CB8AC3E}">
-        <p14:creationId xmlns:p14="http://schemas.microsoft.com/office/powerpoint/2010/main" val="740544758"/>
-      </p:ext>
-    </p:extLst>
-  </p:cSld>
-  <p:clrMapOvr>
-    <a:masterClrMapping/>
-  </p:clrMapOvr>
-</p:sld>
-</file>
-
-<file path=ppt/slides/slide12.xml><?xml version="1.0" encoding="utf-8"?>
-<p:sld xmlns:a="http://schemas.openxmlformats.org/drawingml/2006/main" xmlns:r="http://schemas.openxmlformats.org/officeDocument/2006/relationships" xmlns:p="http://schemas.openxmlformats.org/presentationml/2006/main">
-  <p:cSld>
-    <p:spTree>
-      <p:nvGrpSpPr>
-        <p:cNvPr id="1" name=""/>
-        <p:cNvGrpSpPr/>
-        <p:nvPr/>
-      </p:nvGrpSpPr>
-      <p:grpSpPr>
-        <a:xfrm>
-          <a:off x="0" y="0"/>
-          <a:ext cx="0" cy="0"/>
-          <a:chOff x="0" y="0"/>
-          <a:chExt cx="0" cy="0"/>
-        </a:xfrm>
-      </p:grpSpPr>
-    </p:spTree>
-    <p:extLst>
-      <p:ext uri="{BB962C8B-B14F-4D97-AF65-F5344CB8AC3E}">
-        <p14:creationId xmlns:p14="http://schemas.microsoft.com/office/powerpoint/2010/main" val="3631036400"/>
-      </p:ext>
-    </p:extLst>
   </p:cSld>
   <p:clrMapOvr>
     <a:masterClrMapping/>
@@ -8272,6 +10966,41 @@
               </a:rPr>
               <a:t>The Physical Scoring Pipeline</a:t>
             </a:r>
+          </a:p>
+        </p:txBody>
+      </p:sp>
+      <p:sp>
+        <p:nvSpPr>
+          <p:cNvPr id="4" name="Shape 0">
+            <a:extLst>
+              <a:ext uri="{FF2B5EF4-FFF2-40B4-BE49-F238E27FC236}">
+                <a16:creationId xmlns:a16="http://schemas.microsoft.com/office/drawing/2014/main" id="{5A34C603-A64A-B5B1-0588-6FDD1806890B}"/>
+              </a:ext>
+            </a:extLst>
+          </p:cNvPr>
+          <p:cNvSpPr/>
+          <p:nvPr/>
+        </p:nvSpPr>
+        <p:spPr>
+          <a:xfrm>
+            <a:off x="838200" y="4198459"/>
+            <a:ext cx="1800000" cy="9525"/>
+          </a:xfrm>
+          <a:prstGeom prst="rect">
+            <a:avLst/>
+          </a:prstGeom>
+          <a:solidFill>
+            <a:srgbClr val="0E1410">
+              <a:alpha val="12000"/>
+            </a:srgbClr>
+          </a:solidFill>
+          <a:ln/>
+        </p:spPr>
+        <p:txBody>
+          <a:bodyPr/>
+          <a:lstStyle/>
+          <a:p>
+            <a:endParaRPr lang="pt-PT"/>
           </a:p>
         </p:txBody>
       </p:sp>
@@ -8664,20 +11393,24 @@
 
 <file path=ppt/slides/slide7.xml><?xml version="1.0" encoding="utf-8"?>
 <p:sld xmlns:a="http://schemas.openxmlformats.org/drawingml/2006/main" xmlns:r="http://schemas.openxmlformats.org/officeDocument/2006/relationships" xmlns:p="http://schemas.openxmlformats.org/presentationml/2006/main">
-  <p:cSld name="Slide 11">
+  <p:cSld>
     <p:bg>
       <p:bgPr>
         <a:solidFill>
-          <a:srgbClr val="E2F0D9">
-            <a:alpha val="80000"/>
-          </a:srgbClr>
+          <a:srgbClr val="F4F1EB"/>
         </a:solidFill>
         <a:effectLst/>
       </p:bgPr>
     </p:bg>
     <p:spTree>
       <p:nvGrpSpPr>
-        <p:cNvPr id="1" name=""/>
+        <p:cNvPr id="1" name="">
+          <a:extLst>
+            <a:ext uri="{FF2B5EF4-FFF2-40B4-BE49-F238E27FC236}">
+              <a16:creationId xmlns:a16="http://schemas.microsoft.com/office/drawing/2014/main" id="{6DF340DD-F7DF-0651-7A83-9BC816A672EC}"/>
+            </a:ext>
+          </a:extLst>
+        </p:cNvPr>
         <p:cNvGrpSpPr/>
         <p:nvPr/>
       </p:nvGrpSpPr>
@@ -8691,13 +11424,19 @@
       </p:grpSpPr>
       <p:sp>
         <p:nvSpPr>
-          <p:cNvPr id="2" name="Shape 0"/>
-          <p:cNvSpPr/>
-          <p:nvPr/>
-        </p:nvSpPr>
-        <p:spPr>
-          <a:xfrm>
-            <a:off x="838200" y="871538"/>
+          <p:cNvPr id="2" name="Shape 0">
+            <a:extLst>
+              <a:ext uri="{FF2B5EF4-FFF2-40B4-BE49-F238E27FC236}">
+                <a16:creationId xmlns:a16="http://schemas.microsoft.com/office/drawing/2014/main" id="{AAB320EB-0EC1-D4E7-2BF2-73F90499DA2B}"/>
+              </a:ext>
+            </a:extLst>
+          </p:cNvPr>
+          <p:cNvSpPr/>
+          <p:nvPr/>
+        </p:nvSpPr>
+        <p:spPr>
+          <a:xfrm>
+            <a:off x="838200" y="928688"/>
             <a:ext cx="16611600" cy="9525"/>
           </a:xfrm>
           <a:prstGeom prst="rect">
@@ -8720,14 +11459,116 @@
       </p:sp>
       <p:sp>
         <p:nvSpPr>
-          <p:cNvPr id="3" name="Text 1"/>
-          <p:cNvSpPr/>
-          <p:nvPr/>
-        </p:nvSpPr>
-        <p:spPr>
-          <a:xfrm>
-            <a:off x="838200" y="571500"/>
-            <a:ext cx="807765" cy="185738"/>
+          <p:cNvPr id="5" name="Text 3">
+            <a:extLst>
+              <a:ext uri="{FF2B5EF4-FFF2-40B4-BE49-F238E27FC236}">
+                <a16:creationId xmlns:a16="http://schemas.microsoft.com/office/drawing/2014/main" id="{DFDC56F0-208F-189F-0C3B-48B211A2D87A}"/>
+              </a:ext>
+            </a:extLst>
+          </p:cNvPr>
+          <p:cNvSpPr/>
+          <p:nvPr/>
+        </p:nvSpPr>
+        <p:spPr>
+          <a:xfrm>
+            <a:off x="838200" y="1281113"/>
+            <a:ext cx="17109948" cy="214313"/>
+          </a:xfrm>
+          <a:prstGeom prst="rect">
+            <a:avLst/>
+          </a:prstGeom>
+          <a:noFill/>
+          <a:ln/>
+        </p:spPr>
+        <p:txBody>
+          <a:bodyPr wrap="square" lIns="25400" tIns="25400" rIns="25400" bIns="25400" rtlCol="0" anchor="t">
+            <a:normAutofit/>
+          </a:bodyPr>
+          <a:lstStyle/>
+          <a:p>
+            <a:pPr marL="0" indent="0" algn="l">
+              <a:buNone/>
+            </a:pPr>
+            <a:r>
+              <a:rPr lang="en-US" sz="1050" kern="0" spc="168" dirty="0">
+                <a:solidFill>
+                  <a:srgbClr val="6C726B"/>
+                </a:solidFill>
+                <a:latin typeface="JetBrains Mono" pitchFamily="34" charset="0"/>
+                <a:ea typeface="JetBrains Mono" pitchFamily="34" charset="-122"/>
+                <a:cs typeface="JetBrains Mono" pitchFamily="34" charset="-120"/>
+              </a:rPr>
+              <a:t>THE FOUR PILLARS</a:t>
+            </a:r>
+            <a:endParaRPr lang="en-US" sz="1050" dirty="0"/>
+          </a:p>
+        </p:txBody>
+      </p:sp>
+      <p:sp>
+        <p:nvSpPr>
+          <p:cNvPr id="6" name="Text 4">
+            <a:extLst>
+              <a:ext uri="{FF2B5EF4-FFF2-40B4-BE49-F238E27FC236}">
+                <a16:creationId xmlns:a16="http://schemas.microsoft.com/office/drawing/2014/main" id="{6FBD8067-6468-0BFC-3227-DD91B2938E19}"/>
+              </a:ext>
+            </a:extLst>
+          </p:cNvPr>
+          <p:cNvSpPr/>
+          <p:nvPr/>
+        </p:nvSpPr>
+        <p:spPr>
+          <a:xfrm>
+            <a:off x="838200" y="1571625"/>
+            <a:ext cx="17109948" cy="879277"/>
+          </a:xfrm>
+          <a:prstGeom prst="rect">
+            <a:avLst/>
+          </a:prstGeom>
+          <a:noFill/>
+          <a:ln/>
+        </p:spPr>
+        <p:txBody>
+          <a:bodyPr wrap="square" lIns="25400" tIns="25400" rIns="25400" bIns="25400" rtlCol="0" anchor="t">
+            <a:normAutofit fontScale="92500" lnSpcReduction="20000"/>
+          </a:bodyPr>
+          <a:lstStyle/>
+          <a:p>
+            <a:pPr marL="0" indent="0" algn="l">
+              <a:lnSpc>
+                <a:spcPct val="96000"/>
+              </a:lnSpc>
+              <a:buNone/>
+            </a:pPr>
+            <a:r>
+              <a:rPr lang="en-US" sz="6900" b="1" kern="0" spc="-241" dirty="0">
+                <a:solidFill>
+                  <a:srgbClr val="0E1410"/>
+                </a:solidFill>
+                <a:latin typeface="Space Grotesk" pitchFamily="34" charset="0"/>
+                <a:ea typeface="Space Grotesk" pitchFamily="34" charset="-122"/>
+              </a:rPr>
+              <a:t>LLM Pipeline</a:t>
+            </a:r>
+            <a:endParaRPr lang="en-US" sz="6900" dirty="0"/>
+          </a:p>
+        </p:txBody>
+      </p:sp>
+      <p:sp>
+        <p:nvSpPr>
+          <p:cNvPr id="82" name="Text 80">
+            <a:extLst>
+              <a:ext uri="{FF2B5EF4-FFF2-40B4-BE49-F238E27FC236}">
+                <a16:creationId xmlns:a16="http://schemas.microsoft.com/office/drawing/2014/main" id="{927D1447-3B2D-1BA3-C02A-111BB6D80F0C}"/>
+              </a:ext>
+            </a:extLst>
+          </p:cNvPr>
+          <p:cNvSpPr/>
+          <p:nvPr/>
+        </p:nvSpPr>
+        <p:spPr>
+          <a:xfrm>
+            <a:off x="16937682" y="9605963"/>
+            <a:ext cx="588318" cy="185738"/>
           </a:xfrm>
           <a:prstGeom prst="rect">
             <a:avLst/>
@@ -8753,7 +11594,7 @@
                 <a:ea typeface="JetBrains Mono" pitchFamily="34" charset="-122"/>
                 <a:cs typeface="JetBrains Mono" pitchFamily="34" charset="-120"/>
               </a:rPr>
-              <a:t>SECTION 03</a:t>
+              <a:t>07/ 15</a:t>
             </a:r>
             <a:endParaRPr lang="en-US" sz="900" dirty="0"/>
           </a:p>
@@ -8761,169 +11602,19 @@
       </p:sp>
       <p:sp>
         <p:nvSpPr>
-          <p:cNvPr id="4" name="Text 2"/>
-          <p:cNvSpPr/>
-          <p:nvPr/>
-        </p:nvSpPr>
-        <p:spPr>
-          <a:xfrm>
-            <a:off x="8887941" y="571500"/>
-            <a:ext cx="807765" cy="185738"/>
-          </a:xfrm>
-          <a:prstGeom prst="rect">
-            <a:avLst/>
-          </a:prstGeom>
-          <a:noFill/>
-          <a:ln/>
-        </p:spPr>
-        <p:txBody>
-          <a:bodyPr wrap="square" lIns="25400" tIns="25400" rIns="25400" bIns="25400" rtlCol="0" anchor="t">
-            <a:normAutofit lnSpcReduction="10000"/>
-          </a:bodyPr>
-          <a:lstStyle/>
-          <a:p>
-            <a:pPr marL="0" indent="0" algn="l">
-              <a:buNone/>
-            </a:pPr>
-            <a:r>
-              <a:rPr lang="en-US" sz="900" kern="0" spc="36" dirty="0">
-                <a:solidFill>
-                  <a:srgbClr val="6C726B"/>
-                </a:solidFill>
-                <a:latin typeface="JetBrains Mono" pitchFamily="34" charset="0"/>
-                <a:ea typeface="JetBrains Mono" pitchFamily="34" charset="-122"/>
-                <a:cs typeface="JetBrains Mono" pitchFamily="34" charset="-120"/>
-              </a:rPr>
-              <a:t>STORYBOARD</a:t>
-            </a:r>
-            <a:endParaRPr lang="en-US" sz="900" dirty="0"/>
-          </a:p>
-        </p:txBody>
-      </p:sp>
-      <p:sp>
-        <p:nvSpPr>
-          <p:cNvPr id="5" name="Text 3"/>
-          <p:cNvSpPr/>
-          <p:nvPr/>
-        </p:nvSpPr>
-        <p:spPr>
-          <a:xfrm>
-            <a:off x="16937682" y="571500"/>
-            <a:ext cx="588318" cy="185738"/>
-          </a:xfrm>
-          <a:prstGeom prst="rect">
-            <a:avLst/>
-          </a:prstGeom>
-          <a:noFill/>
-          <a:ln/>
-        </p:spPr>
-        <p:txBody>
-          <a:bodyPr wrap="square" lIns="25400" tIns="25400" rIns="25400" bIns="25400" rtlCol="0" anchor="t">
-            <a:normAutofit lnSpcReduction="10000"/>
-          </a:bodyPr>
-          <a:lstStyle/>
-          <a:p>
-            <a:pPr marL="0" indent="0" algn="l">
-              <a:buNone/>
-            </a:pPr>
-            <a:r>
-              <a:rPr lang="en-US" sz="900" kern="0" spc="36" dirty="0">
-                <a:solidFill>
-                  <a:srgbClr val="6C726B"/>
-                </a:solidFill>
-                <a:latin typeface="JetBrains Mono" pitchFamily="34" charset="0"/>
-                <a:ea typeface="JetBrains Mono" pitchFamily="34" charset="-122"/>
-                <a:cs typeface="JetBrains Mono" pitchFamily="34" charset="-120"/>
-              </a:rPr>
-              <a:t>11 / 15</a:t>
-            </a:r>
-            <a:endParaRPr lang="en-US" sz="900" dirty="0"/>
-          </a:p>
-        </p:txBody>
-      </p:sp>
-      <p:sp>
-        <p:nvSpPr>
-          <p:cNvPr id="7" name="Text 5"/>
-          <p:cNvSpPr/>
-          <p:nvPr/>
-        </p:nvSpPr>
-        <p:spPr>
-          <a:xfrm>
-            <a:off x="838200" y="1109663"/>
-            <a:ext cx="13538835" cy="7078935"/>
-          </a:xfrm>
-          <a:prstGeom prst="rect">
-            <a:avLst/>
-          </a:prstGeom>
-          <a:noFill/>
-          <a:ln/>
-        </p:spPr>
-        <p:txBody>
-          <a:bodyPr wrap="square" lIns="25400" tIns="25400" rIns="25400" bIns="25400" rtlCol="0" anchor="t">
-            <a:normAutofit/>
-          </a:bodyPr>
-          <a:lstStyle/>
-          <a:p>
-            <a:pPr marL="0" indent="0" algn="l">
-              <a:lnSpc>
-                <a:spcPct val="88000"/>
-              </a:lnSpc>
-              <a:buNone/>
-            </a:pPr>
-            <a:r>
-              <a:rPr lang="en-US" sz="21000" b="1" kern="0" spc="-1050" dirty="0">
-                <a:solidFill>
-                  <a:srgbClr val="0E1410"/>
-                </a:solidFill>
-                <a:latin typeface="Space Grotesk" pitchFamily="34" charset="0"/>
-                <a:ea typeface="Space Grotesk" pitchFamily="34" charset="-122"/>
-                <a:cs typeface="Space Grotesk" pitchFamily="34" charset="-120"/>
-              </a:rPr>
-              <a:t>Future Vision</a:t>
-            </a:r>
-          </a:p>
-          <a:p>
-            <a:pPr marL="0" indent="0" algn="l">
-              <a:lnSpc>
-                <a:spcPct val="88000"/>
-              </a:lnSpc>
-              <a:buNone/>
-            </a:pPr>
-            <a:r>
-              <a:rPr lang="en-US" sz="21000" b="1" kern="0" spc="-1050" dirty="0">
-                <a:solidFill>
-                  <a:srgbClr val="0E1410"/>
-                </a:solidFill>
-                <a:latin typeface="Space Grotesk" pitchFamily="34" charset="0"/>
-                <a:ea typeface="Space Grotesk" pitchFamily="34" charset="-122"/>
-                <a:cs typeface="Space Grotesk" pitchFamily="34" charset="-120"/>
-              </a:rPr>
-              <a:t>Storyboard</a:t>
-            </a:r>
-            <a:r>
-              <a:rPr lang="en-US" sz="21000" b="1" kern="0" spc="-1050" dirty="0">
-                <a:solidFill>
-                  <a:srgbClr val="FF5A1F"/>
-                </a:solidFill>
-                <a:latin typeface="Space Grotesk" pitchFamily="34" charset="0"/>
-                <a:ea typeface="Space Grotesk" pitchFamily="34" charset="-122"/>
-                <a:cs typeface="Space Grotesk" pitchFamily="34" charset="-120"/>
-              </a:rPr>
-              <a:t>.</a:t>
-            </a:r>
-            <a:endParaRPr lang="en-US" sz="21000" dirty="0"/>
-          </a:p>
-        </p:txBody>
-      </p:sp>
-      <p:sp>
-        <p:nvSpPr>
-          <p:cNvPr id="15" name="Shape 13"/>
-          <p:cNvSpPr/>
-          <p:nvPr/>
-        </p:nvSpPr>
-        <p:spPr>
-          <a:xfrm>
-            <a:off x="838200" y="9930705"/>
+          <p:cNvPr id="100" name="Shape 22">
+            <a:extLst>
+              <a:ext uri="{FF2B5EF4-FFF2-40B4-BE49-F238E27FC236}">
+                <a16:creationId xmlns:a16="http://schemas.microsoft.com/office/drawing/2014/main" id="{8AE8E231-2A3B-B637-F942-DCE8F543F4B4}"/>
+              </a:ext>
+            </a:extLst>
+          </p:cNvPr>
+          <p:cNvSpPr/>
+          <p:nvPr/>
+        </p:nvSpPr>
+        <p:spPr>
+          <a:xfrm>
+            <a:off x="838200" y="9424988"/>
             <a:ext cx="16611600" cy="9525"/>
           </a:xfrm>
           <a:prstGeom prst="rect">
@@ -8946,14 +11637,20 @@
       </p:sp>
       <p:sp>
         <p:nvSpPr>
-          <p:cNvPr id="16" name="Text 14"/>
-          <p:cNvSpPr/>
-          <p:nvPr/>
-        </p:nvSpPr>
-        <p:spPr>
-          <a:xfrm>
-            <a:off x="838200" y="10092630"/>
-            <a:ext cx="2197596" cy="185738"/>
+          <p:cNvPr id="103" name="Text 1">
+            <a:extLst>
+              <a:ext uri="{FF2B5EF4-FFF2-40B4-BE49-F238E27FC236}">
+                <a16:creationId xmlns:a16="http://schemas.microsoft.com/office/drawing/2014/main" id="{D60D394A-8C57-7A83-4782-9C7DE970DDB6}"/>
+              </a:ext>
+            </a:extLst>
+          </p:cNvPr>
+          <p:cNvSpPr/>
+          <p:nvPr/>
+        </p:nvSpPr>
+        <p:spPr>
+          <a:xfrm>
+            <a:off x="838200" y="609600"/>
+            <a:ext cx="2863129" cy="185738"/>
           </a:xfrm>
           <a:prstGeom prst="rect">
             <a:avLst/>
@@ -8979,7 +11676,7 @@
                 <a:ea typeface="JetBrains Mono" pitchFamily="34" charset="-122"/>
                 <a:cs typeface="JetBrains Mono" pitchFamily="34" charset="-120"/>
               </a:rPr>
-              <a:t>SIX FUNCTIONS · ONE ASSISTANT</a:t>
+              <a:t>SECTION 02 – RETRIEVAL &amp; CONTEXT</a:t>
             </a:r>
             <a:endParaRPr lang="en-US" sz="900" dirty="0"/>
           </a:p>
@@ -8987,14 +11684,20 @@
       </p:sp>
       <p:sp>
         <p:nvSpPr>
-          <p:cNvPr id="17" name="Text 15"/>
-          <p:cNvSpPr/>
-          <p:nvPr/>
-        </p:nvSpPr>
-        <p:spPr>
-          <a:xfrm>
-            <a:off x="15327883" y="10092630"/>
-            <a:ext cx="2198117" cy="185738"/>
+          <p:cNvPr id="3" name="Text 5">
+            <a:extLst>
+              <a:ext uri="{FF2B5EF4-FFF2-40B4-BE49-F238E27FC236}">
+                <a16:creationId xmlns:a16="http://schemas.microsoft.com/office/drawing/2014/main" id="{3A116DDC-CC2D-2E30-8723-53E97C05A80C}"/>
+              </a:ext>
+            </a:extLst>
+          </p:cNvPr>
+          <p:cNvSpPr/>
+          <p:nvPr/>
+        </p:nvSpPr>
+        <p:spPr>
+          <a:xfrm>
+            <a:off x="838200" y="2694733"/>
+            <a:ext cx="5296593" cy="1431727"/>
           </a:xfrm>
           <a:prstGeom prst="rect">
             <a:avLst/>
@@ -9004,80 +11707,2528 @@
         </p:spPr>
         <p:txBody>
           <a:bodyPr wrap="square" lIns="25400" tIns="25400" rIns="25400" bIns="25400" rtlCol="0" anchor="t">
-            <a:normAutofit lnSpcReduction="10000"/>
+            <a:normAutofit/>
           </a:bodyPr>
           <a:lstStyle/>
           <a:p>
-            <a:pPr marL="0" indent="0" algn="l">
-              <a:buNone/>
+            <a:pPr>
+              <a:lnSpc>
+                <a:spcPct val="150000"/>
+              </a:lnSpc>
             </a:pPr>
             <a:r>
-              <a:rPr lang="en-US" sz="900" kern="0" spc="36" dirty="0">
-                <a:solidFill>
-                  <a:srgbClr val="6C726B"/>
-                </a:solidFill>
-                <a:latin typeface="JetBrains Mono" pitchFamily="34" charset="0"/>
-                <a:ea typeface="JetBrains Mono" pitchFamily="34" charset="-122"/>
-                <a:cs typeface="JetBrains Mono" pitchFamily="34" charset="-120"/>
-              </a:rPr>
-              <a:t>BRIEF → TARGET → ALTERNATIVES</a:t>
-            </a:r>
-            <a:endParaRPr lang="en-US" sz="900" dirty="0"/>
-          </a:p>
-        </p:txBody>
-      </p:sp>
-      <p:sp>
-        <p:nvSpPr>
-          <p:cNvPr id="18" name="Text 4">
-            <a:extLst>
-              <a:ext uri="{FF2B5EF4-FFF2-40B4-BE49-F238E27FC236}">
-                <a16:creationId xmlns:a16="http://schemas.microsoft.com/office/drawing/2014/main" id="{909B17A2-8857-13A7-15BF-CFCF8F3A119C}"/>
-              </a:ext>
-            </a:extLst>
-          </p:cNvPr>
-          <p:cNvSpPr/>
-          <p:nvPr/>
-        </p:nvSpPr>
-        <p:spPr>
-          <a:xfrm>
-            <a:off x="12694905" y="1338935"/>
-            <a:ext cx="11435426" cy="9250635"/>
+              <a:rPr lang="pt-PT" dirty="0" err="1"/>
+              <a:t>Before</a:t>
+            </a:r>
+            <a:r>
+              <a:rPr lang="pt-PT" dirty="0"/>
+              <a:t> </a:t>
+            </a:r>
+            <a:r>
+              <a:rPr lang="pt-PT" dirty="0" err="1"/>
+              <a:t>the</a:t>
+            </a:r>
+            <a:r>
+              <a:rPr lang="pt-PT" dirty="0"/>
+              <a:t> LLM </a:t>
+            </a:r>
+            <a:r>
+              <a:rPr lang="pt-PT" dirty="0" err="1"/>
+              <a:t>sees</a:t>
+            </a:r>
+            <a:r>
+              <a:rPr lang="pt-PT" dirty="0"/>
+              <a:t> </a:t>
+            </a:r>
+            <a:r>
+              <a:rPr lang="pt-PT" dirty="0" err="1"/>
+              <a:t>the</a:t>
+            </a:r>
+            <a:r>
+              <a:rPr lang="pt-PT" dirty="0"/>
+              <a:t> </a:t>
+            </a:r>
+            <a:r>
+              <a:rPr lang="pt-PT" dirty="0" err="1"/>
+              <a:t>player’s</a:t>
+            </a:r>
+            <a:r>
+              <a:rPr lang="pt-PT" dirty="0"/>
+              <a:t> data, </a:t>
+            </a:r>
+            <a:r>
+              <a:rPr lang="pt-PT" dirty="0" err="1"/>
+              <a:t>it</a:t>
+            </a:r>
+            <a:r>
+              <a:rPr lang="pt-PT" dirty="0"/>
+              <a:t> </a:t>
+            </a:r>
+            <a:r>
+              <a:rPr lang="pt-PT" dirty="0" err="1"/>
+              <a:t>reads</a:t>
+            </a:r>
+            <a:r>
+              <a:rPr lang="pt-PT" dirty="0"/>
+              <a:t> a </a:t>
+            </a:r>
+            <a:r>
+              <a:rPr lang="pt-PT" dirty="0" err="1"/>
+              <a:t>curated</a:t>
+            </a:r>
+            <a:r>
+              <a:rPr lang="pt-PT" dirty="0"/>
+              <a:t> </a:t>
+            </a:r>
+            <a:r>
+              <a:rPr lang="pt-PT" dirty="0" err="1"/>
+              <a:t>knowledge</a:t>
+            </a:r>
+            <a:r>
+              <a:rPr lang="pt-PT" dirty="0"/>
+              <a:t> base – a set </a:t>
+            </a:r>
+            <a:r>
+              <a:rPr lang="pt-PT" dirty="0" err="1"/>
+              <a:t>of</a:t>
+            </a:r>
+            <a:r>
+              <a:rPr lang="pt-PT" dirty="0"/>
+              <a:t> Q&amp;Q </a:t>
+            </a:r>
+            <a:r>
+              <a:rPr lang="pt-PT" dirty="0" err="1"/>
+              <a:t>pairs</a:t>
+            </a:r>
+            <a:r>
+              <a:rPr lang="pt-PT" dirty="0"/>
+              <a:t> </a:t>
+            </a:r>
+            <a:r>
+              <a:rPr lang="pt-PT" dirty="0" err="1"/>
+              <a:t>loaded</a:t>
+            </a:r>
+            <a:r>
+              <a:rPr lang="pt-PT" dirty="0"/>
+              <a:t> </a:t>
+            </a:r>
+            <a:r>
+              <a:rPr lang="pt-PT" dirty="0" err="1"/>
+              <a:t>directly</a:t>
+            </a:r>
+            <a:r>
+              <a:rPr lang="pt-PT" dirty="0"/>
+              <a:t> </a:t>
+            </a:r>
+            <a:r>
+              <a:rPr lang="pt-PT" dirty="0" err="1"/>
+              <a:t>into</a:t>
+            </a:r>
+            <a:r>
+              <a:rPr lang="pt-PT" dirty="0"/>
+              <a:t> </a:t>
+            </a:r>
+            <a:r>
+              <a:rPr lang="pt-PT" dirty="0" err="1"/>
+              <a:t>the</a:t>
+            </a:r>
+            <a:r>
+              <a:rPr lang="pt-PT" dirty="0"/>
+              <a:t> </a:t>
+            </a:r>
+            <a:r>
+              <a:rPr lang="pt-PT" dirty="0" err="1"/>
+              <a:t>conversation</a:t>
+            </a:r>
+            <a:r>
+              <a:rPr lang="pt-PT" dirty="0"/>
+              <a:t> </a:t>
+            </a:r>
+            <a:r>
+              <a:rPr lang="pt-PT" dirty="0" err="1"/>
+              <a:t>history</a:t>
+            </a:r>
+            <a:r>
+              <a:rPr lang="pt-PT" dirty="0"/>
+              <a:t>.</a:t>
+            </a:r>
+          </a:p>
+          <a:p>
+            <a:pPr>
+              <a:lnSpc>
+                <a:spcPct val="150000"/>
+              </a:lnSpc>
+            </a:pPr>
+            <a:endParaRPr lang="en-US" sz="1650" dirty="0"/>
+          </a:p>
+        </p:txBody>
+      </p:sp>
+      <p:sp>
+        <p:nvSpPr>
+          <p:cNvPr id="9" name="Shape 5">
+            <a:extLst>
+              <a:ext uri="{FF2B5EF4-FFF2-40B4-BE49-F238E27FC236}">
+                <a16:creationId xmlns:a16="http://schemas.microsoft.com/office/drawing/2014/main" id="{54D1A699-9CC7-21C2-3036-A18FB119EE93}"/>
+              </a:ext>
+            </a:extLst>
+          </p:cNvPr>
+          <p:cNvSpPr/>
+          <p:nvPr/>
+        </p:nvSpPr>
+        <p:spPr>
+          <a:xfrm>
+            <a:off x="8842888" y="1588295"/>
+            <a:ext cx="7604978" cy="1214591"/>
+          </a:xfrm>
+          <a:prstGeom prst="roundRect">
+            <a:avLst>
+              <a:gd name="adj" fmla="val 15353"/>
+            </a:avLst>
+          </a:prstGeom>
+          <a:solidFill>
+            <a:srgbClr val="FBF9F3"/>
+          </a:solidFill>
+          <a:ln w="9525">
+            <a:solidFill>
+              <a:srgbClr val="0E1410">
+                <a:alpha val="12000"/>
+              </a:srgbClr>
+            </a:solidFill>
+            <a:prstDash val="solid"/>
+          </a:ln>
+        </p:spPr>
+        <p:txBody>
+          <a:bodyPr/>
+          <a:lstStyle/>
+          <a:p>
+            <a:endParaRPr lang="pt-PT" dirty="0"/>
+          </a:p>
+        </p:txBody>
+      </p:sp>
+      <p:sp>
+        <p:nvSpPr>
+          <p:cNvPr id="18" name="CaixaDeTexto 17">
+            <a:extLst>
+              <a:ext uri="{FF2B5EF4-FFF2-40B4-BE49-F238E27FC236}">
+                <a16:creationId xmlns:a16="http://schemas.microsoft.com/office/drawing/2014/main" id="{FD5BF58E-4984-21AF-0A09-85C159948D1F}"/>
+              </a:ext>
+            </a:extLst>
+          </p:cNvPr>
+          <p:cNvSpPr txBox="1"/>
+          <p:nvPr/>
+        </p:nvSpPr>
+        <p:spPr>
+          <a:xfrm>
+            <a:off x="9983724" y="1880085"/>
+            <a:ext cx="2766349" cy="646331"/>
           </a:xfrm>
           <a:prstGeom prst="rect">
             <a:avLst/>
           </a:prstGeom>
           <a:noFill/>
-          <a:ln/>
-        </p:spPr>
-        <p:txBody>
-          <a:bodyPr wrap="square" lIns="25400" tIns="25400" rIns="25400" bIns="25400" rtlCol="0" anchor="t">
-            <a:normAutofit lnSpcReduction="10000"/>
+        </p:spPr>
+        <p:txBody>
+          <a:bodyPr wrap="square" rtlCol="0">
+            <a:spAutoFit/>
           </a:bodyPr>
           <a:lstStyle/>
           <a:p>
-            <a:pPr marL="0" indent="0" algn="l">
-              <a:lnSpc>
-                <a:spcPct val="181350"/>
-              </a:lnSpc>
-              <a:buNone/>
+            <a:pPr marL="342900" indent="-342900">
+              <a:buAutoNum type="arabicPeriod"/>
             </a:pPr>
             <a:r>
-              <a:rPr lang="en-US" sz="40000" b="1" kern="0" spc="-2000" dirty="0">
-                <a:solidFill>
-                  <a:srgbClr val="006B2E">
-                    <a:alpha val="8000"/>
-                  </a:srgbClr>
-                </a:solidFill>
-                <a:latin typeface="Space Grotesk" pitchFamily="34" charset="0"/>
-                <a:ea typeface="Space Grotesk" pitchFamily="34" charset="-122"/>
-              </a:rPr>
-              <a:t>03</a:t>
-            </a:r>
-            <a:endParaRPr lang="en-US" sz="40000" dirty="0"/>
+              <a:rPr lang="pt-PT" b="1" dirty="0" err="1">
+                <a:solidFill>
+                  <a:schemeClr val="bg2">
+                    <a:lumMod val="25000"/>
+                  </a:schemeClr>
+                </a:solidFill>
+              </a:rPr>
+              <a:t>System</a:t>
+            </a:r>
+            <a:r>
+              <a:rPr lang="pt-PT" b="1" dirty="0">
+                <a:solidFill>
+                  <a:schemeClr val="bg2">
+                    <a:lumMod val="25000"/>
+                  </a:schemeClr>
+                </a:solidFill>
+              </a:rPr>
+              <a:t> </a:t>
+            </a:r>
+            <a:r>
+              <a:rPr lang="pt-PT" b="1" dirty="0" err="1">
+                <a:solidFill>
+                  <a:schemeClr val="bg2">
+                    <a:lumMod val="25000"/>
+                  </a:schemeClr>
+                </a:solidFill>
+              </a:rPr>
+              <a:t>Prompt</a:t>
+            </a:r>
+            <a:endParaRPr lang="pt-PT" b="1" dirty="0">
+              <a:solidFill>
+                <a:schemeClr val="bg2">
+                  <a:lumMod val="25000"/>
+                </a:schemeClr>
+              </a:solidFill>
+            </a:endParaRPr>
+          </a:p>
+          <a:p>
+            <a:r>
+              <a:rPr lang="pt-PT" i="1" dirty="0" err="1">
+                <a:solidFill>
+                  <a:schemeClr val="bg2">
+                    <a:lumMod val="25000"/>
+                  </a:schemeClr>
+                </a:solidFill>
+              </a:rPr>
+              <a:t>Who</a:t>
+            </a:r>
+            <a:r>
+              <a:rPr lang="pt-PT" i="1" dirty="0">
+                <a:solidFill>
+                  <a:schemeClr val="bg2">
+                    <a:lumMod val="25000"/>
+                  </a:schemeClr>
+                </a:solidFill>
+              </a:rPr>
+              <a:t> </a:t>
+            </a:r>
+            <a:r>
+              <a:rPr lang="pt-PT" i="1" dirty="0" err="1">
+                <a:solidFill>
+                  <a:schemeClr val="bg2">
+                    <a:lumMod val="25000"/>
+                  </a:schemeClr>
+                </a:solidFill>
+              </a:rPr>
+              <a:t>the</a:t>
+            </a:r>
+            <a:r>
+              <a:rPr lang="pt-PT" i="1" dirty="0">
+                <a:solidFill>
+                  <a:schemeClr val="bg2">
+                    <a:lumMod val="25000"/>
+                  </a:schemeClr>
+                </a:solidFill>
+              </a:rPr>
+              <a:t> LLM </a:t>
+            </a:r>
+            <a:r>
+              <a:rPr lang="pt-PT" i="1" dirty="0" err="1">
+                <a:solidFill>
+                  <a:schemeClr val="bg2">
+                    <a:lumMod val="25000"/>
+                  </a:schemeClr>
+                </a:solidFill>
+              </a:rPr>
+              <a:t>is</a:t>
+            </a:r>
+            <a:r>
+              <a:rPr lang="pt-PT" i="1" dirty="0">
+                <a:solidFill>
+                  <a:schemeClr val="bg2">
+                    <a:lumMod val="25000"/>
+                  </a:schemeClr>
+                </a:solidFill>
+              </a:rPr>
+              <a:t>.</a:t>
+            </a:r>
+          </a:p>
+        </p:txBody>
+      </p:sp>
+      <p:pic>
+        <p:nvPicPr>
+          <p:cNvPr id="43" name="Imagem 42">
+            <a:extLst>
+              <a:ext uri="{FF2B5EF4-FFF2-40B4-BE49-F238E27FC236}">
+                <a16:creationId xmlns:a16="http://schemas.microsoft.com/office/drawing/2014/main" id="{DCA1676B-D8B2-3CEB-AC1B-C527788E366F}"/>
+              </a:ext>
+            </a:extLst>
+          </p:cNvPr>
+          <p:cNvPicPr>
+            <a:picLocks noChangeAspect="1"/>
+          </p:cNvPicPr>
+          <p:nvPr/>
+        </p:nvPicPr>
+        <p:blipFill>
+          <a:blip r:embed="rId3"/>
+          <a:srcRect/>
+          <a:stretch/>
+        </p:blipFill>
+        <p:spPr>
+          <a:xfrm>
+            <a:off x="9129785" y="1919730"/>
+            <a:ext cx="567043" cy="567043"/>
+          </a:xfrm>
+          <a:prstGeom prst="rect">
+            <a:avLst/>
+          </a:prstGeom>
+        </p:spPr>
+      </p:pic>
+      <p:sp>
+        <p:nvSpPr>
+          <p:cNvPr id="44" name="CaixaDeTexto 43">
+            <a:extLst>
+              <a:ext uri="{FF2B5EF4-FFF2-40B4-BE49-F238E27FC236}">
+                <a16:creationId xmlns:a16="http://schemas.microsoft.com/office/drawing/2014/main" id="{EFED7101-E762-297C-5DFF-CDFDA24AFFE3}"/>
+              </a:ext>
+            </a:extLst>
+          </p:cNvPr>
+          <p:cNvSpPr txBox="1"/>
+          <p:nvPr/>
+        </p:nvSpPr>
+        <p:spPr>
+          <a:xfrm>
+            <a:off x="13279416" y="1885690"/>
+            <a:ext cx="3029189" cy="646331"/>
+          </a:xfrm>
+          <a:prstGeom prst="rect">
+            <a:avLst/>
+          </a:prstGeom>
+          <a:noFill/>
+        </p:spPr>
+        <p:txBody>
+          <a:bodyPr wrap="square" rtlCol="0">
+            <a:spAutoFit/>
+          </a:bodyPr>
+          <a:lstStyle/>
+          <a:p>
+            <a:r>
+              <a:rPr lang="pt-PT" i="1" dirty="0">
+                <a:solidFill>
+                  <a:schemeClr val="bg2">
+                    <a:lumMod val="25000"/>
+                  </a:schemeClr>
+                </a:solidFill>
+              </a:rPr>
+              <a:t>“</a:t>
+            </a:r>
+            <a:r>
+              <a:rPr lang="pt-PT" i="1" dirty="0" err="1">
+                <a:solidFill>
+                  <a:schemeClr val="bg2">
+                    <a:lumMod val="25000"/>
+                  </a:schemeClr>
+                </a:solidFill>
+              </a:rPr>
+              <a:t>You</a:t>
+            </a:r>
+            <a:r>
+              <a:rPr lang="pt-PT" i="1" dirty="0">
+                <a:solidFill>
+                  <a:schemeClr val="bg2">
+                    <a:lumMod val="25000"/>
+                  </a:schemeClr>
+                </a:solidFill>
+              </a:rPr>
+              <a:t> are a </a:t>
+            </a:r>
+            <a:r>
+              <a:rPr lang="pt-PT" i="1" dirty="0" err="1">
+                <a:solidFill>
+                  <a:schemeClr val="bg2">
+                    <a:lumMod val="25000"/>
+                  </a:schemeClr>
+                </a:solidFill>
+              </a:rPr>
+              <a:t>physical</a:t>
+            </a:r>
+            <a:r>
+              <a:rPr lang="pt-PT" i="1" dirty="0">
+                <a:solidFill>
+                  <a:schemeClr val="bg2">
+                    <a:lumMod val="25000"/>
+                  </a:schemeClr>
+                </a:solidFill>
+              </a:rPr>
+              <a:t> data </a:t>
+            </a:r>
+            <a:r>
+              <a:rPr lang="pt-PT" i="1" dirty="0" err="1">
+                <a:solidFill>
+                  <a:schemeClr val="bg2">
+                    <a:lumMod val="25000"/>
+                  </a:schemeClr>
+                </a:solidFill>
+              </a:rPr>
+              <a:t>analyst</a:t>
+            </a:r>
+            <a:r>
+              <a:rPr lang="pt-PT" i="1" dirty="0">
+                <a:solidFill>
+                  <a:schemeClr val="bg2">
+                    <a:lumMod val="25000"/>
+                  </a:schemeClr>
+                </a:solidFill>
+              </a:rPr>
+              <a:t>...”</a:t>
+            </a:r>
+          </a:p>
+        </p:txBody>
+      </p:sp>
+      <p:sp>
+        <p:nvSpPr>
+          <p:cNvPr id="47" name="Shape 5">
+            <a:extLst>
+              <a:ext uri="{FF2B5EF4-FFF2-40B4-BE49-F238E27FC236}">
+                <a16:creationId xmlns:a16="http://schemas.microsoft.com/office/drawing/2014/main" id="{CB9666F1-B603-2FF9-B002-91FD95B10C6B}"/>
+              </a:ext>
+            </a:extLst>
+          </p:cNvPr>
+          <p:cNvSpPr/>
+          <p:nvPr/>
+        </p:nvSpPr>
+        <p:spPr>
+          <a:xfrm>
+            <a:off x="8842888" y="3178238"/>
+            <a:ext cx="7604978" cy="1214591"/>
+          </a:xfrm>
+          <a:prstGeom prst="roundRect">
+            <a:avLst>
+              <a:gd name="adj" fmla="val 15353"/>
+            </a:avLst>
+          </a:prstGeom>
+          <a:solidFill>
+            <a:srgbClr val="FBF9F3"/>
+          </a:solidFill>
+          <a:ln w="9525">
+            <a:solidFill>
+              <a:srgbClr val="0E1410">
+                <a:alpha val="12000"/>
+              </a:srgbClr>
+            </a:solidFill>
+            <a:prstDash val="solid"/>
+          </a:ln>
+        </p:spPr>
+        <p:txBody>
+          <a:bodyPr/>
+          <a:lstStyle/>
+          <a:p>
+            <a:endParaRPr lang="pt-PT" dirty="0"/>
+          </a:p>
+        </p:txBody>
+      </p:sp>
+      <p:sp>
+        <p:nvSpPr>
+          <p:cNvPr id="50" name="CaixaDeTexto 49">
+            <a:extLst>
+              <a:ext uri="{FF2B5EF4-FFF2-40B4-BE49-F238E27FC236}">
+                <a16:creationId xmlns:a16="http://schemas.microsoft.com/office/drawing/2014/main" id="{0E458A2F-884B-A768-6240-471F4950EAB5}"/>
+              </a:ext>
+            </a:extLst>
+          </p:cNvPr>
+          <p:cNvSpPr txBox="1"/>
+          <p:nvPr/>
+        </p:nvSpPr>
+        <p:spPr>
+          <a:xfrm>
+            <a:off x="9983724" y="3470028"/>
+            <a:ext cx="2766349" cy="646331"/>
+          </a:xfrm>
+          <a:prstGeom prst="rect">
+            <a:avLst/>
+          </a:prstGeom>
+          <a:noFill/>
+        </p:spPr>
+        <p:txBody>
+          <a:bodyPr wrap="square" rtlCol="0">
+            <a:spAutoFit/>
+          </a:bodyPr>
+          <a:lstStyle/>
+          <a:p>
+            <a:r>
+              <a:rPr lang="pt-PT" b="1" i="1" dirty="0">
+                <a:solidFill>
+                  <a:schemeClr val="bg2">
+                    <a:lumMod val="25000"/>
+                  </a:schemeClr>
+                </a:solidFill>
+              </a:rPr>
+              <a:t>2. Q&amp;A </a:t>
+            </a:r>
+            <a:r>
+              <a:rPr lang="pt-PT" b="1" i="1" dirty="0" err="1">
+                <a:solidFill>
+                  <a:schemeClr val="bg2">
+                    <a:lumMod val="25000"/>
+                  </a:schemeClr>
+                </a:solidFill>
+              </a:rPr>
+              <a:t>Pairs</a:t>
+            </a:r>
+            <a:endParaRPr lang="pt-PT" b="1" i="1" dirty="0">
+              <a:solidFill>
+                <a:schemeClr val="bg2">
+                  <a:lumMod val="25000"/>
+                </a:schemeClr>
+              </a:solidFill>
+            </a:endParaRPr>
+          </a:p>
+          <a:p>
+            <a:r>
+              <a:rPr lang="pt-PT" i="1" dirty="0" err="1">
+                <a:solidFill>
+                  <a:schemeClr val="bg2">
+                    <a:lumMod val="25000"/>
+                  </a:schemeClr>
+                </a:solidFill>
+              </a:rPr>
+              <a:t>What</a:t>
+            </a:r>
+            <a:r>
+              <a:rPr lang="pt-PT" i="1" dirty="0">
+                <a:solidFill>
+                  <a:schemeClr val="bg2">
+                    <a:lumMod val="25000"/>
+                  </a:schemeClr>
+                </a:solidFill>
+              </a:rPr>
+              <a:t> </a:t>
+            </a:r>
+            <a:r>
+              <a:rPr lang="pt-PT" i="1" dirty="0" err="1">
+                <a:solidFill>
+                  <a:schemeClr val="bg2">
+                    <a:lumMod val="25000"/>
+                  </a:schemeClr>
+                </a:solidFill>
+              </a:rPr>
+              <a:t>the</a:t>
+            </a:r>
+            <a:r>
+              <a:rPr lang="pt-PT" i="1" dirty="0">
+                <a:solidFill>
+                  <a:schemeClr val="bg2">
+                    <a:lumMod val="25000"/>
+                  </a:schemeClr>
+                </a:solidFill>
+              </a:rPr>
+              <a:t> LLM </a:t>
+            </a:r>
+            <a:r>
+              <a:rPr lang="pt-PT" i="1" dirty="0" err="1">
+                <a:solidFill>
+                  <a:schemeClr val="bg2">
+                    <a:lumMod val="25000"/>
+                  </a:schemeClr>
+                </a:solidFill>
+              </a:rPr>
+              <a:t>knows</a:t>
+            </a:r>
+            <a:r>
+              <a:rPr lang="pt-PT" i="1" dirty="0">
+                <a:solidFill>
+                  <a:schemeClr val="bg2">
+                    <a:lumMod val="25000"/>
+                  </a:schemeClr>
+                </a:solidFill>
+              </a:rPr>
+              <a:t>.</a:t>
+            </a:r>
+          </a:p>
+        </p:txBody>
+      </p:sp>
+      <p:pic>
+        <p:nvPicPr>
+          <p:cNvPr id="53" name="Imagem 52">
+            <a:extLst>
+              <a:ext uri="{FF2B5EF4-FFF2-40B4-BE49-F238E27FC236}">
+                <a16:creationId xmlns:a16="http://schemas.microsoft.com/office/drawing/2014/main" id="{9842374F-A501-78F9-BE09-2AF334C83B6C}"/>
+              </a:ext>
+            </a:extLst>
+          </p:cNvPr>
+          <p:cNvPicPr>
+            <a:picLocks noChangeAspect="1"/>
+          </p:cNvPicPr>
+          <p:nvPr/>
+        </p:nvPicPr>
+        <p:blipFill>
+          <a:blip r:embed="rId4"/>
+          <a:srcRect/>
+          <a:stretch/>
+        </p:blipFill>
+        <p:spPr>
+          <a:xfrm>
+            <a:off x="9129785" y="3509673"/>
+            <a:ext cx="567043" cy="567043"/>
+          </a:xfrm>
+          <a:prstGeom prst="rect">
+            <a:avLst/>
+          </a:prstGeom>
+        </p:spPr>
+      </p:pic>
+      <p:sp>
+        <p:nvSpPr>
+          <p:cNvPr id="56" name="CaixaDeTexto 55">
+            <a:extLst>
+              <a:ext uri="{FF2B5EF4-FFF2-40B4-BE49-F238E27FC236}">
+                <a16:creationId xmlns:a16="http://schemas.microsoft.com/office/drawing/2014/main" id="{8D6BE1FF-5F47-C745-6017-D0B12280D388}"/>
+              </a:ext>
+            </a:extLst>
+          </p:cNvPr>
+          <p:cNvSpPr txBox="1"/>
+          <p:nvPr/>
+        </p:nvSpPr>
+        <p:spPr>
+          <a:xfrm>
+            <a:off x="13279416" y="3475633"/>
+            <a:ext cx="3029189" cy="646331"/>
+          </a:xfrm>
+          <a:prstGeom prst="rect">
+            <a:avLst/>
+          </a:prstGeom>
+          <a:noFill/>
+        </p:spPr>
+        <p:txBody>
+          <a:bodyPr wrap="square" rtlCol="0">
+            <a:spAutoFit/>
+          </a:bodyPr>
+          <a:lstStyle/>
+          <a:p>
+            <a:r>
+              <a:rPr lang="pt-PT" i="1" dirty="0">
+                <a:solidFill>
+                  <a:schemeClr val="bg2">
+                    <a:lumMod val="25000"/>
+                  </a:schemeClr>
+                </a:solidFill>
+              </a:rPr>
+              <a:t>Q: ”</a:t>
+            </a:r>
+            <a:r>
+              <a:rPr lang="pt-PT" i="1" dirty="0" err="1">
+                <a:solidFill>
+                  <a:schemeClr val="bg2">
+                    <a:lumMod val="25000"/>
+                  </a:schemeClr>
+                </a:solidFill>
+              </a:rPr>
+              <a:t>What</a:t>
+            </a:r>
+            <a:r>
+              <a:rPr lang="pt-PT" i="1" dirty="0">
+                <a:solidFill>
+                  <a:schemeClr val="bg2">
+                    <a:lumMod val="25000"/>
+                  </a:schemeClr>
+                </a:solidFill>
+              </a:rPr>
+              <a:t> </a:t>
+            </a:r>
+            <a:r>
+              <a:rPr lang="pt-PT" i="1" dirty="0" err="1">
+                <a:solidFill>
+                  <a:schemeClr val="bg2">
+                    <a:lumMod val="25000"/>
+                  </a:schemeClr>
+                </a:solidFill>
+              </a:rPr>
+              <a:t>is</a:t>
+            </a:r>
+            <a:r>
+              <a:rPr lang="pt-PT" i="1" dirty="0">
+                <a:solidFill>
+                  <a:schemeClr val="bg2">
+                    <a:lumMod val="25000"/>
+                  </a:schemeClr>
+                </a:solidFill>
+              </a:rPr>
+              <a:t> PSV-99?”</a:t>
+            </a:r>
+          </a:p>
+          <a:p>
+            <a:r>
+              <a:rPr lang="pt-PT" i="1" dirty="0">
+                <a:solidFill>
+                  <a:schemeClr val="bg2">
+                    <a:lumMod val="25000"/>
+                  </a:schemeClr>
+                </a:solidFill>
+              </a:rPr>
+              <a:t>Q: “</a:t>
+            </a:r>
+            <a:r>
+              <a:rPr lang="pt-PT" i="1" dirty="0" err="1">
+                <a:solidFill>
+                  <a:schemeClr val="bg2">
+                    <a:lumMod val="25000"/>
+                  </a:schemeClr>
+                </a:solidFill>
+              </a:rPr>
+              <a:t>What</a:t>
+            </a:r>
+            <a:r>
+              <a:rPr lang="pt-PT" i="1" dirty="0">
+                <a:solidFill>
+                  <a:schemeClr val="bg2">
+                    <a:lumMod val="25000"/>
+                  </a:schemeClr>
+                </a:solidFill>
+              </a:rPr>
+              <a:t> </a:t>
+            </a:r>
+            <a:r>
+              <a:rPr lang="pt-PT" i="1" dirty="0" err="1">
+                <a:solidFill>
+                  <a:schemeClr val="bg2">
+                    <a:lumMod val="25000"/>
+                  </a:schemeClr>
+                </a:solidFill>
+              </a:rPr>
+              <a:t>means</a:t>
+            </a:r>
+            <a:r>
+              <a:rPr lang="pt-PT" i="1" dirty="0">
+                <a:solidFill>
+                  <a:schemeClr val="bg2">
+                    <a:lumMod val="25000"/>
+                  </a:schemeClr>
+                </a:solidFill>
+              </a:rPr>
+              <a:t> endurance?”</a:t>
+            </a:r>
+          </a:p>
+        </p:txBody>
+      </p:sp>
+      <p:sp>
+        <p:nvSpPr>
+          <p:cNvPr id="59" name="Shape 5">
+            <a:extLst>
+              <a:ext uri="{FF2B5EF4-FFF2-40B4-BE49-F238E27FC236}">
+                <a16:creationId xmlns:a16="http://schemas.microsoft.com/office/drawing/2014/main" id="{BDFF1A0C-9AA9-C966-B3EC-D5AC611A3C7F}"/>
+              </a:ext>
+            </a:extLst>
+          </p:cNvPr>
+          <p:cNvSpPr/>
+          <p:nvPr/>
+        </p:nvSpPr>
+        <p:spPr>
+          <a:xfrm>
+            <a:off x="8842888" y="4768181"/>
+            <a:ext cx="7604978" cy="1214591"/>
+          </a:xfrm>
+          <a:prstGeom prst="roundRect">
+            <a:avLst>
+              <a:gd name="adj" fmla="val 15353"/>
+            </a:avLst>
+          </a:prstGeom>
+          <a:solidFill>
+            <a:srgbClr val="FBF9F3"/>
+          </a:solidFill>
+          <a:ln w="9525">
+            <a:solidFill>
+              <a:srgbClr val="0E1410">
+                <a:alpha val="12000"/>
+              </a:srgbClr>
+            </a:solidFill>
+            <a:prstDash val="solid"/>
+          </a:ln>
+        </p:spPr>
+        <p:txBody>
+          <a:bodyPr/>
+          <a:lstStyle/>
+          <a:p>
+            <a:endParaRPr lang="pt-PT" dirty="0"/>
+          </a:p>
+        </p:txBody>
+      </p:sp>
+      <p:sp>
+        <p:nvSpPr>
+          <p:cNvPr id="60" name="CaixaDeTexto 59">
+            <a:extLst>
+              <a:ext uri="{FF2B5EF4-FFF2-40B4-BE49-F238E27FC236}">
+                <a16:creationId xmlns:a16="http://schemas.microsoft.com/office/drawing/2014/main" id="{D3320FA1-2D99-C8F3-FEE8-61B4467C1B47}"/>
+              </a:ext>
+            </a:extLst>
+          </p:cNvPr>
+          <p:cNvSpPr txBox="1"/>
+          <p:nvPr/>
+        </p:nvSpPr>
+        <p:spPr>
+          <a:xfrm>
+            <a:off x="9983724" y="5059971"/>
+            <a:ext cx="2766349" cy="646331"/>
+          </a:xfrm>
+          <a:prstGeom prst="rect">
+            <a:avLst/>
+          </a:prstGeom>
+          <a:noFill/>
+        </p:spPr>
+        <p:txBody>
+          <a:bodyPr wrap="square" rtlCol="0">
+            <a:spAutoFit/>
+          </a:bodyPr>
+          <a:lstStyle/>
+          <a:p>
+            <a:r>
+              <a:rPr lang="pt-PT" b="1" i="1" dirty="0">
+                <a:solidFill>
+                  <a:schemeClr val="bg2">
+                    <a:lumMod val="25000"/>
+                  </a:schemeClr>
+                </a:solidFill>
+              </a:rPr>
+              <a:t>3. Output </a:t>
+            </a:r>
+            <a:r>
+              <a:rPr lang="pt-PT" b="1" i="1" dirty="0" err="1">
+                <a:solidFill>
+                  <a:schemeClr val="bg2">
+                    <a:lumMod val="25000"/>
+                  </a:schemeClr>
+                </a:solidFill>
+              </a:rPr>
+              <a:t>Format</a:t>
+            </a:r>
+            <a:endParaRPr lang="pt-PT" b="1" i="1" dirty="0">
+              <a:solidFill>
+                <a:schemeClr val="bg2">
+                  <a:lumMod val="25000"/>
+                </a:schemeClr>
+              </a:solidFill>
+            </a:endParaRPr>
+          </a:p>
+          <a:p>
+            <a:r>
+              <a:rPr lang="pt-PT" i="1" dirty="0" err="1">
+                <a:solidFill>
+                  <a:schemeClr val="bg2">
+                    <a:lumMod val="25000"/>
+                  </a:schemeClr>
+                </a:solidFill>
+              </a:rPr>
+              <a:t>How</a:t>
+            </a:r>
+            <a:r>
+              <a:rPr lang="pt-PT" i="1" dirty="0">
+                <a:solidFill>
+                  <a:schemeClr val="bg2">
+                    <a:lumMod val="25000"/>
+                  </a:schemeClr>
+                </a:solidFill>
+              </a:rPr>
+              <a:t> to </a:t>
+            </a:r>
+            <a:r>
+              <a:rPr lang="pt-PT" i="1" dirty="0" err="1">
+                <a:solidFill>
+                  <a:schemeClr val="bg2">
+                    <a:lumMod val="25000"/>
+                  </a:schemeClr>
+                </a:solidFill>
+              </a:rPr>
+              <a:t>write</a:t>
+            </a:r>
+            <a:r>
+              <a:rPr lang="pt-PT" i="1" dirty="0">
+                <a:solidFill>
+                  <a:schemeClr val="bg2">
+                    <a:lumMod val="25000"/>
+                  </a:schemeClr>
+                </a:solidFill>
+              </a:rPr>
+              <a:t> </a:t>
+            </a:r>
+            <a:r>
+              <a:rPr lang="pt-PT" i="1" dirty="0" err="1">
+                <a:solidFill>
+                  <a:schemeClr val="bg2">
+                    <a:lumMod val="25000"/>
+                  </a:schemeClr>
+                </a:solidFill>
+              </a:rPr>
+              <a:t>the</a:t>
+            </a:r>
+            <a:r>
+              <a:rPr lang="pt-PT" i="1" dirty="0">
+                <a:solidFill>
+                  <a:schemeClr val="bg2">
+                    <a:lumMod val="25000"/>
+                  </a:schemeClr>
+                </a:solidFill>
+              </a:rPr>
+              <a:t> </a:t>
+            </a:r>
+            <a:r>
+              <a:rPr lang="pt-PT" i="1" dirty="0" err="1">
+                <a:solidFill>
+                  <a:schemeClr val="bg2">
+                    <a:lumMod val="25000"/>
+                  </a:schemeClr>
+                </a:solidFill>
+              </a:rPr>
+              <a:t>summary</a:t>
+            </a:r>
+            <a:r>
+              <a:rPr lang="pt-PT" i="1" dirty="0">
+                <a:solidFill>
+                  <a:schemeClr val="bg2">
+                    <a:lumMod val="25000"/>
+                  </a:schemeClr>
+                </a:solidFill>
+              </a:rPr>
+              <a:t>.</a:t>
+            </a:r>
+          </a:p>
+        </p:txBody>
+      </p:sp>
+      <p:pic>
+        <p:nvPicPr>
+          <p:cNvPr id="63" name="Imagem 62">
+            <a:extLst>
+              <a:ext uri="{FF2B5EF4-FFF2-40B4-BE49-F238E27FC236}">
+                <a16:creationId xmlns:a16="http://schemas.microsoft.com/office/drawing/2014/main" id="{A2169B6E-95BE-083C-3586-2C992AD91A6E}"/>
+              </a:ext>
+            </a:extLst>
+          </p:cNvPr>
+          <p:cNvPicPr>
+            <a:picLocks noChangeAspect="1"/>
+          </p:cNvPicPr>
+          <p:nvPr/>
+        </p:nvPicPr>
+        <p:blipFill>
+          <a:blip r:embed="rId5"/>
+          <a:srcRect/>
+          <a:stretch/>
+        </p:blipFill>
+        <p:spPr>
+          <a:xfrm>
+            <a:off x="9129785" y="5099616"/>
+            <a:ext cx="567043" cy="567043"/>
+          </a:xfrm>
+          <a:prstGeom prst="rect">
+            <a:avLst/>
+          </a:prstGeom>
+        </p:spPr>
+      </p:pic>
+      <p:sp>
+        <p:nvSpPr>
+          <p:cNvPr id="66" name="CaixaDeTexto 65">
+            <a:extLst>
+              <a:ext uri="{FF2B5EF4-FFF2-40B4-BE49-F238E27FC236}">
+                <a16:creationId xmlns:a16="http://schemas.microsoft.com/office/drawing/2014/main" id="{32B7199E-0520-026C-0ADE-CACD43C37B5D}"/>
+              </a:ext>
+            </a:extLst>
+          </p:cNvPr>
+          <p:cNvSpPr txBox="1"/>
+          <p:nvPr/>
+        </p:nvSpPr>
+        <p:spPr>
+          <a:xfrm>
+            <a:off x="13279416" y="5065576"/>
+            <a:ext cx="3029189" cy="646331"/>
+          </a:xfrm>
+          <a:prstGeom prst="rect">
+            <a:avLst/>
+          </a:prstGeom>
+          <a:noFill/>
+        </p:spPr>
+        <p:txBody>
+          <a:bodyPr wrap="square" rtlCol="0">
+            <a:spAutoFit/>
+          </a:bodyPr>
+          <a:lstStyle/>
+          <a:p>
+            <a:r>
+              <a:rPr lang="pt-PT" i="1" dirty="0">
+                <a:solidFill>
+                  <a:schemeClr val="bg2">
+                    <a:lumMod val="25000"/>
+                  </a:schemeClr>
+                </a:solidFill>
+              </a:rPr>
+              <a:t>“</a:t>
+            </a:r>
+            <a:r>
+              <a:rPr lang="pt-PT" i="1" dirty="0" err="1">
+                <a:solidFill>
+                  <a:schemeClr val="bg2">
+                    <a:lumMod val="25000"/>
+                  </a:schemeClr>
+                </a:solidFill>
+              </a:rPr>
+              <a:t>Write</a:t>
+            </a:r>
+            <a:r>
+              <a:rPr lang="pt-PT" i="1" dirty="0">
+                <a:solidFill>
+                  <a:schemeClr val="bg2">
+                    <a:lumMod val="25000"/>
+                  </a:schemeClr>
+                </a:solidFill>
+              </a:rPr>
+              <a:t> </a:t>
+            </a:r>
+            <a:r>
+              <a:rPr lang="pt-PT" i="1" dirty="0" err="1">
+                <a:solidFill>
+                  <a:schemeClr val="bg2">
+                    <a:lumMod val="25000"/>
+                  </a:schemeClr>
+                </a:solidFill>
+              </a:rPr>
+              <a:t>concise</a:t>
+            </a:r>
+            <a:r>
+              <a:rPr lang="pt-PT" i="1" dirty="0">
+                <a:solidFill>
+                  <a:schemeClr val="bg2">
+                    <a:lumMod val="25000"/>
+                  </a:schemeClr>
+                </a:solidFill>
+              </a:rPr>
+              <a:t>, </a:t>
+            </a:r>
+            <a:r>
+              <a:rPr lang="pt-PT" i="1" dirty="0" err="1">
+                <a:solidFill>
+                  <a:schemeClr val="bg2">
+                    <a:lumMod val="25000"/>
+                  </a:schemeClr>
+                </a:solidFill>
+              </a:rPr>
+              <a:t>professioal</a:t>
+            </a:r>
+            <a:r>
+              <a:rPr lang="pt-PT" i="1" dirty="0">
+                <a:solidFill>
+                  <a:schemeClr val="bg2">
+                    <a:lumMod val="25000"/>
+                  </a:schemeClr>
+                </a:solidFill>
+              </a:rPr>
+              <a:t>, </a:t>
+            </a:r>
+            <a:r>
+              <a:rPr lang="pt-PT" i="1" dirty="0" err="1">
+                <a:solidFill>
+                  <a:schemeClr val="bg2">
+                    <a:lumMod val="25000"/>
+                  </a:schemeClr>
+                </a:solidFill>
+              </a:rPr>
+              <a:t>player</a:t>
+            </a:r>
+            <a:r>
+              <a:rPr lang="pt-PT" i="1" dirty="0">
+                <a:solidFill>
+                  <a:schemeClr val="bg2">
+                    <a:lumMod val="25000"/>
+                  </a:schemeClr>
+                </a:solidFill>
+              </a:rPr>
+              <a:t> sumaries </a:t>
+            </a:r>
+            <a:r>
+              <a:rPr lang="pt-PT" i="1" dirty="0" err="1">
+                <a:solidFill>
+                  <a:schemeClr val="bg2">
+                    <a:lumMod val="25000"/>
+                  </a:schemeClr>
+                </a:solidFill>
+              </a:rPr>
+              <a:t>that</a:t>
+            </a:r>
+            <a:r>
+              <a:rPr lang="pt-PT" i="1" dirty="0">
+                <a:solidFill>
+                  <a:schemeClr val="bg2">
+                    <a:lumMod val="25000"/>
+                  </a:schemeClr>
+                </a:solidFill>
+              </a:rPr>
+              <a:t>...”</a:t>
+            </a:r>
+          </a:p>
+        </p:txBody>
+      </p:sp>
+      <p:sp>
+        <p:nvSpPr>
+          <p:cNvPr id="69" name="Shape 5">
+            <a:extLst>
+              <a:ext uri="{FF2B5EF4-FFF2-40B4-BE49-F238E27FC236}">
+                <a16:creationId xmlns:a16="http://schemas.microsoft.com/office/drawing/2014/main" id="{2BE478BB-5AB1-35CF-13AE-CD7FE6EB646E}"/>
+              </a:ext>
+            </a:extLst>
+          </p:cNvPr>
+          <p:cNvSpPr/>
+          <p:nvPr/>
+        </p:nvSpPr>
+        <p:spPr>
+          <a:xfrm>
+            <a:off x="8842888" y="6358124"/>
+            <a:ext cx="7604978" cy="1214591"/>
+          </a:xfrm>
+          <a:prstGeom prst="roundRect">
+            <a:avLst>
+              <a:gd name="adj" fmla="val 15353"/>
+            </a:avLst>
+          </a:prstGeom>
+          <a:solidFill>
+            <a:srgbClr val="FBF9F3"/>
+          </a:solidFill>
+          <a:ln w="9525">
+            <a:solidFill>
+              <a:srgbClr val="0E1410">
+                <a:alpha val="12000"/>
+              </a:srgbClr>
+            </a:solidFill>
+            <a:prstDash val="solid"/>
+          </a:ln>
+        </p:spPr>
+        <p:txBody>
+          <a:bodyPr/>
+          <a:lstStyle/>
+          <a:p>
+            <a:endParaRPr lang="pt-PT" dirty="0"/>
+          </a:p>
+        </p:txBody>
+      </p:sp>
+      <p:sp>
+        <p:nvSpPr>
+          <p:cNvPr id="72" name="CaixaDeTexto 71">
+            <a:extLst>
+              <a:ext uri="{FF2B5EF4-FFF2-40B4-BE49-F238E27FC236}">
+                <a16:creationId xmlns:a16="http://schemas.microsoft.com/office/drawing/2014/main" id="{C9506B96-CCCA-A5C8-FFD4-B62F18C1F41C}"/>
+              </a:ext>
+            </a:extLst>
+          </p:cNvPr>
+          <p:cNvSpPr txBox="1"/>
+          <p:nvPr/>
+        </p:nvSpPr>
+        <p:spPr>
+          <a:xfrm>
+            <a:off x="9983724" y="6649914"/>
+            <a:ext cx="3029189" cy="646331"/>
+          </a:xfrm>
+          <a:prstGeom prst="rect">
+            <a:avLst/>
+          </a:prstGeom>
+          <a:noFill/>
+        </p:spPr>
+        <p:txBody>
+          <a:bodyPr wrap="square" rtlCol="0">
+            <a:spAutoFit/>
+          </a:bodyPr>
+          <a:lstStyle/>
+          <a:p>
+            <a:r>
+              <a:rPr lang="pt-PT" b="1" i="1" dirty="0">
+                <a:solidFill>
+                  <a:schemeClr val="bg2">
+                    <a:lumMod val="25000"/>
+                  </a:schemeClr>
+                </a:solidFill>
+              </a:rPr>
+              <a:t>4. </a:t>
+            </a:r>
+            <a:r>
+              <a:rPr lang="pt-PT" b="1" i="1" dirty="0" err="1">
+                <a:solidFill>
+                  <a:schemeClr val="bg2">
+                    <a:lumMod val="25000"/>
+                  </a:schemeClr>
+                </a:solidFill>
+              </a:rPr>
+              <a:t>Examples</a:t>
+            </a:r>
+            <a:endParaRPr lang="pt-PT" b="1" i="1" dirty="0">
+              <a:solidFill>
+                <a:schemeClr val="bg2">
+                  <a:lumMod val="25000"/>
+                </a:schemeClr>
+              </a:solidFill>
+            </a:endParaRPr>
+          </a:p>
+          <a:p>
+            <a:r>
+              <a:rPr lang="pt-PT" i="1" dirty="0" err="1">
+                <a:solidFill>
+                  <a:schemeClr val="bg2">
+                    <a:lumMod val="25000"/>
+                  </a:schemeClr>
+                </a:solidFill>
+              </a:rPr>
+              <a:t>What</a:t>
+            </a:r>
+            <a:r>
+              <a:rPr lang="pt-PT" i="1" dirty="0">
+                <a:solidFill>
+                  <a:schemeClr val="bg2">
+                    <a:lumMod val="25000"/>
+                  </a:schemeClr>
+                </a:solidFill>
+              </a:rPr>
+              <a:t> a </a:t>
+            </a:r>
+            <a:r>
+              <a:rPr lang="pt-PT" i="1" dirty="0" err="1">
+                <a:solidFill>
+                  <a:schemeClr val="bg2">
+                    <a:lumMod val="25000"/>
+                  </a:schemeClr>
+                </a:solidFill>
+              </a:rPr>
+              <a:t>good</a:t>
+            </a:r>
+            <a:r>
+              <a:rPr lang="pt-PT" i="1" dirty="0">
+                <a:solidFill>
+                  <a:schemeClr val="bg2">
+                    <a:lumMod val="25000"/>
+                  </a:schemeClr>
+                </a:solidFill>
+              </a:rPr>
+              <a:t> output looks </a:t>
+            </a:r>
+            <a:r>
+              <a:rPr lang="pt-PT" i="1" dirty="0" err="1">
+                <a:solidFill>
+                  <a:schemeClr val="bg2">
+                    <a:lumMod val="25000"/>
+                  </a:schemeClr>
+                </a:solidFill>
+              </a:rPr>
+              <a:t>like</a:t>
+            </a:r>
+            <a:r>
+              <a:rPr lang="pt-PT" i="1" dirty="0">
+                <a:solidFill>
+                  <a:schemeClr val="bg2">
+                    <a:lumMod val="25000"/>
+                  </a:schemeClr>
+                </a:solidFill>
+              </a:rPr>
+              <a:t>.</a:t>
+            </a:r>
+          </a:p>
+        </p:txBody>
+      </p:sp>
+      <p:pic>
+        <p:nvPicPr>
+          <p:cNvPr id="75" name="Imagem 74">
+            <a:extLst>
+              <a:ext uri="{FF2B5EF4-FFF2-40B4-BE49-F238E27FC236}">
+                <a16:creationId xmlns:a16="http://schemas.microsoft.com/office/drawing/2014/main" id="{69B59A53-87F1-A23C-9617-D24AF8313BFF}"/>
+              </a:ext>
+            </a:extLst>
+          </p:cNvPr>
+          <p:cNvPicPr>
+            <a:picLocks noChangeAspect="1"/>
+          </p:cNvPicPr>
+          <p:nvPr/>
+        </p:nvPicPr>
+        <p:blipFill>
+          <a:blip r:embed="rId6"/>
+          <a:srcRect/>
+          <a:stretch/>
+        </p:blipFill>
+        <p:spPr>
+          <a:xfrm>
+            <a:off x="9129785" y="6689559"/>
+            <a:ext cx="567043" cy="567043"/>
+          </a:xfrm>
+          <a:prstGeom prst="rect">
+            <a:avLst/>
+          </a:prstGeom>
+        </p:spPr>
+      </p:pic>
+      <p:sp>
+        <p:nvSpPr>
+          <p:cNvPr id="78" name="CaixaDeTexto 77">
+            <a:extLst>
+              <a:ext uri="{FF2B5EF4-FFF2-40B4-BE49-F238E27FC236}">
+                <a16:creationId xmlns:a16="http://schemas.microsoft.com/office/drawing/2014/main" id="{F79AAC67-4483-B2F0-DC69-79E328AE0F24}"/>
+              </a:ext>
+            </a:extLst>
+          </p:cNvPr>
+          <p:cNvSpPr txBox="1"/>
+          <p:nvPr/>
+        </p:nvSpPr>
+        <p:spPr>
+          <a:xfrm>
+            <a:off x="13279416" y="6655519"/>
+            <a:ext cx="3029189" cy="646331"/>
+          </a:xfrm>
+          <a:prstGeom prst="rect">
+            <a:avLst/>
+          </a:prstGeom>
+          <a:noFill/>
+        </p:spPr>
+        <p:txBody>
+          <a:bodyPr wrap="square" rtlCol="0">
+            <a:spAutoFit/>
+          </a:bodyPr>
+          <a:lstStyle/>
+          <a:p>
+            <a:r>
+              <a:rPr lang="pt-PT" i="1" dirty="0" err="1">
+                <a:solidFill>
+                  <a:schemeClr val="bg2">
+                    <a:lumMod val="25000"/>
+                  </a:schemeClr>
+                </a:solidFill>
+              </a:rPr>
+              <a:t>Salah</a:t>
+            </a:r>
+            <a:r>
+              <a:rPr lang="pt-PT" i="1" dirty="0">
+                <a:solidFill>
+                  <a:schemeClr val="bg2">
+                    <a:lumMod val="25000"/>
+                  </a:schemeClr>
+                </a:solidFill>
+              </a:rPr>
+              <a:t> exemple: (...)</a:t>
+            </a:r>
+          </a:p>
+          <a:p>
+            <a:r>
+              <a:rPr lang="pt-PT" i="1" dirty="0">
+                <a:solidFill>
+                  <a:schemeClr val="bg2">
+                    <a:lumMod val="25000"/>
+                  </a:schemeClr>
+                </a:solidFill>
+              </a:rPr>
+              <a:t>Van </a:t>
+            </a:r>
+            <a:r>
+              <a:rPr lang="pt-PT" i="1" dirty="0" err="1">
+                <a:solidFill>
+                  <a:schemeClr val="bg2">
+                    <a:lumMod val="25000"/>
+                  </a:schemeClr>
+                </a:solidFill>
+              </a:rPr>
+              <a:t>Dijk</a:t>
+            </a:r>
+            <a:r>
+              <a:rPr lang="pt-PT" i="1" dirty="0">
+                <a:solidFill>
+                  <a:schemeClr val="bg2">
+                    <a:lumMod val="25000"/>
+                  </a:schemeClr>
+                </a:solidFill>
+              </a:rPr>
+              <a:t> exemple: (...)</a:t>
+            </a:r>
+          </a:p>
+        </p:txBody>
+      </p:sp>
+      <p:sp>
+        <p:nvSpPr>
+          <p:cNvPr id="79" name="Shape 5">
+            <a:extLst>
+              <a:ext uri="{FF2B5EF4-FFF2-40B4-BE49-F238E27FC236}">
+                <a16:creationId xmlns:a16="http://schemas.microsoft.com/office/drawing/2014/main" id="{D89B28C6-4FE9-4A2C-1778-5BAC7AEE0558}"/>
+              </a:ext>
+            </a:extLst>
+          </p:cNvPr>
+          <p:cNvSpPr/>
+          <p:nvPr/>
+        </p:nvSpPr>
+        <p:spPr>
+          <a:xfrm>
+            <a:off x="8842888" y="7904069"/>
+            <a:ext cx="7604978" cy="1214591"/>
+          </a:xfrm>
+          <a:prstGeom prst="roundRect">
+            <a:avLst>
+              <a:gd name="adj" fmla="val 15353"/>
+            </a:avLst>
+          </a:prstGeom>
+          <a:solidFill>
+            <a:srgbClr val="FBF9F3"/>
+          </a:solidFill>
+          <a:ln w="9525">
+            <a:solidFill>
+              <a:srgbClr val="0E1410">
+                <a:alpha val="12000"/>
+              </a:srgbClr>
+            </a:solidFill>
+            <a:prstDash val="solid"/>
+          </a:ln>
+        </p:spPr>
+        <p:txBody>
+          <a:bodyPr/>
+          <a:lstStyle/>
+          <a:p>
+            <a:endParaRPr lang="pt-PT" dirty="0"/>
+          </a:p>
+        </p:txBody>
+      </p:sp>
+      <p:sp>
+        <p:nvSpPr>
+          <p:cNvPr id="80" name="CaixaDeTexto 79">
+            <a:extLst>
+              <a:ext uri="{FF2B5EF4-FFF2-40B4-BE49-F238E27FC236}">
+                <a16:creationId xmlns:a16="http://schemas.microsoft.com/office/drawing/2014/main" id="{A0DEA921-C6C9-77A1-44BB-E0DD307B6BCA}"/>
+              </a:ext>
+            </a:extLst>
+          </p:cNvPr>
+          <p:cNvSpPr txBox="1"/>
+          <p:nvPr/>
+        </p:nvSpPr>
+        <p:spPr>
+          <a:xfrm>
+            <a:off x="9983724" y="8195859"/>
+            <a:ext cx="3029189" cy="646331"/>
+          </a:xfrm>
+          <a:prstGeom prst="rect">
+            <a:avLst/>
+          </a:prstGeom>
+          <a:noFill/>
+        </p:spPr>
+        <p:txBody>
+          <a:bodyPr wrap="square" rtlCol="0">
+            <a:spAutoFit/>
+          </a:bodyPr>
+          <a:lstStyle/>
+          <a:p>
+            <a:r>
+              <a:rPr lang="pt-PT" b="1" i="1" dirty="0">
+                <a:solidFill>
+                  <a:schemeClr val="bg2">
+                    <a:lumMod val="25000"/>
+                  </a:schemeClr>
+                </a:solidFill>
+              </a:rPr>
+              <a:t>5. </a:t>
+            </a:r>
+            <a:r>
+              <a:rPr lang="pt-PT" b="1" i="1" dirty="0" err="1">
+                <a:solidFill>
+                  <a:schemeClr val="bg2">
+                    <a:lumMod val="25000"/>
+                  </a:schemeClr>
+                </a:solidFill>
+              </a:rPr>
+              <a:t>Player</a:t>
+            </a:r>
+            <a:r>
+              <a:rPr lang="pt-PT" b="1" i="1" dirty="0">
+                <a:solidFill>
+                  <a:schemeClr val="bg2">
+                    <a:lumMod val="25000"/>
+                  </a:schemeClr>
+                </a:solidFill>
+              </a:rPr>
+              <a:t> Data</a:t>
+            </a:r>
+          </a:p>
+          <a:p>
+            <a:r>
+              <a:rPr lang="pt-PT" i="1" dirty="0" err="1">
+                <a:solidFill>
+                  <a:schemeClr val="bg2">
+                    <a:lumMod val="25000"/>
+                  </a:schemeClr>
+                </a:solidFill>
+              </a:rPr>
+              <a:t>The</a:t>
+            </a:r>
+            <a:r>
+              <a:rPr lang="pt-PT" i="1" dirty="0">
+                <a:solidFill>
+                  <a:schemeClr val="bg2">
+                    <a:lumMod val="25000"/>
+                  </a:schemeClr>
+                </a:solidFill>
+              </a:rPr>
+              <a:t> </a:t>
+            </a:r>
+            <a:r>
+              <a:rPr lang="pt-PT" i="1" dirty="0" err="1">
+                <a:solidFill>
+                  <a:schemeClr val="bg2">
+                    <a:lumMod val="25000"/>
+                  </a:schemeClr>
+                </a:solidFill>
+              </a:rPr>
+              <a:t>player’s</a:t>
+            </a:r>
+            <a:r>
+              <a:rPr lang="pt-PT" i="1" dirty="0">
+                <a:solidFill>
+                  <a:schemeClr val="bg2">
+                    <a:lumMod val="25000"/>
+                  </a:schemeClr>
+                </a:solidFill>
+              </a:rPr>
+              <a:t> </a:t>
+            </a:r>
+            <a:r>
+              <a:rPr lang="pt-PT" i="1" dirty="0" err="1">
+                <a:solidFill>
+                  <a:schemeClr val="bg2">
+                    <a:lumMod val="25000"/>
+                  </a:schemeClr>
+                </a:solidFill>
+              </a:rPr>
+              <a:t>summary</a:t>
+            </a:r>
+            <a:r>
+              <a:rPr lang="pt-PT" i="1" dirty="0">
+                <a:solidFill>
+                  <a:schemeClr val="bg2">
+                    <a:lumMod val="25000"/>
+                  </a:schemeClr>
+                </a:solidFill>
+              </a:rPr>
+              <a:t> data.</a:t>
+            </a:r>
+          </a:p>
+        </p:txBody>
+      </p:sp>
+      <p:pic>
+        <p:nvPicPr>
+          <p:cNvPr id="84" name="Imagem 83">
+            <a:extLst>
+              <a:ext uri="{FF2B5EF4-FFF2-40B4-BE49-F238E27FC236}">
+                <a16:creationId xmlns:a16="http://schemas.microsoft.com/office/drawing/2014/main" id="{F52D7620-88B8-63C8-B792-43B568A8FE4C}"/>
+              </a:ext>
+            </a:extLst>
+          </p:cNvPr>
+          <p:cNvPicPr>
+            <a:picLocks noChangeAspect="1"/>
+          </p:cNvPicPr>
+          <p:nvPr/>
+        </p:nvPicPr>
+        <p:blipFill>
+          <a:blip r:embed="rId7"/>
+          <a:srcRect/>
+          <a:stretch/>
+        </p:blipFill>
+        <p:spPr>
+          <a:xfrm>
+            <a:off x="9129785" y="8235504"/>
+            <a:ext cx="567043" cy="567043"/>
+          </a:xfrm>
+          <a:prstGeom prst="rect">
+            <a:avLst/>
+          </a:prstGeom>
+        </p:spPr>
+      </p:pic>
+      <p:sp>
+        <p:nvSpPr>
+          <p:cNvPr id="85" name="CaixaDeTexto 84">
+            <a:extLst>
+              <a:ext uri="{FF2B5EF4-FFF2-40B4-BE49-F238E27FC236}">
+                <a16:creationId xmlns:a16="http://schemas.microsoft.com/office/drawing/2014/main" id="{14EE3B19-6887-2829-9288-E218DEC08964}"/>
+              </a:ext>
+            </a:extLst>
+          </p:cNvPr>
+          <p:cNvSpPr txBox="1"/>
+          <p:nvPr/>
+        </p:nvSpPr>
+        <p:spPr>
+          <a:xfrm>
+            <a:off x="13279416" y="8201464"/>
+            <a:ext cx="3029189" cy="646331"/>
+          </a:xfrm>
+          <a:prstGeom prst="rect">
+            <a:avLst/>
+          </a:prstGeom>
+          <a:noFill/>
+        </p:spPr>
+        <p:txBody>
+          <a:bodyPr wrap="square" rtlCol="0">
+            <a:spAutoFit/>
+          </a:bodyPr>
+          <a:lstStyle/>
+          <a:p>
+            <a:r>
+              <a:rPr lang="pt-PT" i="1" dirty="0">
+                <a:solidFill>
+                  <a:schemeClr val="bg2">
+                    <a:lumMod val="25000"/>
+                  </a:schemeClr>
+                </a:solidFill>
+              </a:rPr>
+              <a:t>PSV-99: 91th (33.4km/h)</a:t>
+            </a:r>
+          </a:p>
+          <a:p>
+            <a:r>
+              <a:rPr lang="pt-PT" i="1" dirty="0">
+                <a:solidFill>
+                  <a:schemeClr val="bg2">
+                    <a:lumMod val="25000"/>
+                  </a:schemeClr>
+                </a:solidFill>
+              </a:rPr>
+              <a:t>HSR </a:t>
+            </a:r>
+            <a:r>
+              <a:rPr lang="pt-PT" i="1" dirty="0" err="1">
+                <a:solidFill>
+                  <a:schemeClr val="bg2">
+                    <a:lumMod val="25000"/>
+                  </a:schemeClr>
+                </a:solidFill>
+              </a:rPr>
+              <a:t>Distance</a:t>
+            </a:r>
+            <a:r>
+              <a:rPr lang="pt-PT" i="1" dirty="0">
+                <a:solidFill>
+                  <a:schemeClr val="bg2">
+                    <a:lumMod val="25000"/>
+                  </a:schemeClr>
+                </a:solidFill>
+              </a:rPr>
+              <a:t>: 75th (700m)</a:t>
+            </a:r>
+          </a:p>
+        </p:txBody>
+      </p:sp>
+      <p:cxnSp>
+        <p:nvCxnSpPr>
+          <p:cNvPr id="101" name="Conexão Reta Unidirecional 100">
+            <a:extLst>
+              <a:ext uri="{FF2B5EF4-FFF2-40B4-BE49-F238E27FC236}">
+                <a16:creationId xmlns:a16="http://schemas.microsoft.com/office/drawing/2014/main" id="{4962F8EE-485B-A9AC-9E84-D091097027BC}"/>
+              </a:ext>
+            </a:extLst>
+          </p:cNvPr>
+          <p:cNvCxnSpPr>
+            <a:stCxn id="9" idx="2"/>
+            <a:endCxn id="47" idx="0"/>
+          </p:cNvCxnSpPr>
+          <p:nvPr/>
+        </p:nvCxnSpPr>
+        <p:spPr>
+          <a:xfrm>
+            <a:off x="12645377" y="2802886"/>
+            <a:ext cx="0" cy="375352"/>
+          </a:xfrm>
+          <a:prstGeom prst="straightConnector1">
+            <a:avLst/>
+          </a:prstGeom>
+          <a:ln w="38100">
+            <a:solidFill>
+              <a:srgbClr val="031605"/>
+            </a:solidFill>
+            <a:tailEnd type="triangle"/>
+          </a:ln>
+        </p:spPr>
+        <p:style>
+          <a:lnRef idx="1">
+            <a:schemeClr val="accent1"/>
+          </a:lnRef>
+          <a:fillRef idx="0">
+            <a:schemeClr val="accent1"/>
+          </a:fillRef>
+          <a:effectRef idx="0">
+            <a:schemeClr val="accent1"/>
+          </a:effectRef>
+          <a:fontRef idx="minor">
+            <a:schemeClr val="tx1"/>
+          </a:fontRef>
+        </p:style>
+      </p:cxnSp>
+      <p:cxnSp>
+        <p:nvCxnSpPr>
+          <p:cNvPr id="102" name="Conexão Reta Unidirecional 101">
+            <a:extLst>
+              <a:ext uri="{FF2B5EF4-FFF2-40B4-BE49-F238E27FC236}">
+                <a16:creationId xmlns:a16="http://schemas.microsoft.com/office/drawing/2014/main" id="{D1173EA4-76E5-8B96-85D8-6A153FA88E5B}"/>
+              </a:ext>
+            </a:extLst>
+          </p:cNvPr>
+          <p:cNvCxnSpPr/>
+          <p:nvPr/>
+        </p:nvCxnSpPr>
+        <p:spPr>
+          <a:xfrm>
+            <a:off x="12645377" y="4392829"/>
+            <a:ext cx="0" cy="375352"/>
+          </a:xfrm>
+          <a:prstGeom prst="straightConnector1">
+            <a:avLst/>
+          </a:prstGeom>
+          <a:ln w="38100">
+            <a:solidFill>
+              <a:srgbClr val="031605"/>
+            </a:solidFill>
+            <a:tailEnd type="triangle"/>
+          </a:ln>
+        </p:spPr>
+        <p:style>
+          <a:lnRef idx="1">
+            <a:schemeClr val="accent1"/>
+          </a:lnRef>
+          <a:fillRef idx="0">
+            <a:schemeClr val="accent1"/>
+          </a:fillRef>
+          <a:effectRef idx="0">
+            <a:schemeClr val="accent1"/>
+          </a:effectRef>
+          <a:fontRef idx="minor">
+            <a:schemeClr val="tx1"/>
+          </a:fontRef>
+        </p:style>
+      </p:cxnSp>
+      <p:cxnSp>
+        <p:nvCxnSpPr>
+          <p:cNvPr id="104" name="Conexão Reta Unidirecional 103">
+            <a:extLst>
+              <a:ext uri="{FF2B5EF4-FFF2-40B4-BE49-F238E27FC236}">
+                <a16:creationId xmlns:a16="http://schemas.microsoft.com/office/drawing/2014/main" id="{3A92D469-9F82-85C1-026C-D7D8CC3C27AB}"/>
+              </a:ext>
+            </a:extLst>
+          </p:cNvPr>
+          <p:cNvCxnSpPr/>
+          <p:nvPr/>
+        </p:nvCxnSpPr>
+        <p:spPr>
+          <a:xfrm>
+            <a:off x="12645377" y="5982772"/>
+            <a:ext cx="0" cy="375352"/>
+          </a:xfrm>
+          <a:prstGeom prst="straightConnector1">
+            <a:avLst/>
+          </a:prstGeom>
+          <a:ln w="38100">
+            <a:solidFill>
+              <a:srgbClr val="031605"/>
+            </a:solidFill>
+            <a:tailEnd type="triangle"/>
+          </a:ln>
+        </p:spPr>
+        <p:style>
+          <a:lnRef idx="1">
+            <a:schemeClr val="accent1"/>
+          </a:lnRef>
+          <a:fillRef idx="0">
+            <a:schemeClr val="accent1"/>
+          </a:fillRef>
+          <a:effectRef idx="0">
+            <a:schemeClr val="accent1"/>
+          </a:effectRef>
+          <a:fontRef idx="minor">
+            <a:schemeClr val="tx1"/>
+          </a:fontRef>
+        </p:style>
+      </p:cxnSp>
+      <p:cxnSp>
+        <p:nvCxnSpPr>
+          <p:cNvPr id="105" name="Conexão Reta Unidirecional 104">
+            <a:extLst>
+              <a:ext uri="{FF2B5EF4-FFF2-40B4-BE49-F238E27FC236}">
+                <a16:creationId xmlns:a16="http://schemas.microsoft.com/office/drawing/2014/main" id="{76ACEBA2-5FD8-A3D0-66F2-144E1B7C136C}"/>
+              </a:ext>
+            </a:extLst>
+          </p:cNvPr>
+          <p:cNvCxnSpPr/>
+          <p:nvPr/>
+        </p:nvCxnSpPr>
+        <p:spPr>
+          <a:xfrm>
+            <a:off x="12645377" y="7572715"/>
+            <a:ext cx="0" cy="375352"/>
+          </a:xfrm>
+          <a:prstGeom prst="straightConnector1">
+            <a:avLst/>
+          </a:prstGeom>
+          <a:ln w="38100">
+            <a:solidFill>
+              <a:srgbClr val="031605"/>
+            </a:solidFill>
+            <a:tailEnd type="triangle"/>
+          </a:ln>
+        </p:spPr>
+        <p:style>
+          <a:lnRef idx="1">
+            <a:schemeClr val="accent1"/>
+          </a:lnRef>
+          <a:fillRef idx="0">
+            <a:schemeClr val="accent1"/>
+          </a:fillRef>
+          <a:effectRef idx="0">
+            <a:schemeClr val="accent1"/>
+          </a:effectRef>
+          <a:fontRef idx="minor">
+            <a:schemeClr val="tx1"/>
+          </a:fontRef>
+        </p:style>
+      </p:cxnSp>
+      <p:pic>
+        <p:nvPicPr>
+          <p:cNvPr id="106" name="Imagem 105">
+            <a:extLst>
+              <a:ext uri="{FF2B5EF4-FFF2-40B4-BE49-F238E27FC236}">
+                <a16:creationId xmlns:a16="http://schemas.microsoft.com/office/drawing/2014/main" id="{2DA4B0D0-3F93-E012-3AF6-79F334096799}"/>
+              </a:ext>
+            </a:extLst>
+          </p:cNvPr>
+          <p:cNvPicPr>
+            <a:picLocks noChangeAspect="1"/>
+          </p:cNvPicPr>
+          <p:nvPr/>
+        </p:nvPicPr>
+        <p:blipFill>
+          <a:blip r:embed="rId3"/>
+          <a:srcRect/>
+          <a:stretch/>
+        </p:blipFill>
+        <p:spPr>
+          <a:xfrm>
+            <a:off x="824417" y="4985593"/>
+            <a:ext cx="802114" cy="802114"/>
+          </a:xfrm>
+          <a:prstGeom prst="rect">
+            <a:avLst/>
+          </a:prstGeom>
+        </p:spPr>
+      </p:pic>
+      <p:pic>
+        <p:nvPicPr>
+          <p:cNvPr id="107" name="Imagem 106">
+            <a:extLst>
+              <a:ext uri="{FF2B5EF4-FFF2-40B4-BE49-F238E27FC236}">
+                <a16:creationId xmlns:a16="http://schemas.microsoft.com/office/drawing/2014/main" id="{B17E9F43-F90C-9D8A-681D-B4C80D136309}"/>
+              </a:ext>
+            </a:extLst>
+          </p:cNvPr>
+          <p:cNvPicPr>
+            <a:picLocks noChangeAspect="1"/>
+          </p:cNvPicPr>
+          <p:nvPr/>
+        </p:nvPicPr>
+        <p:blipFill>
+          <a:blip r:embed="rId4"/>
+          <a:srcRect/>
+          <a:stretch/>
+        </p:blipFill>
+        <p:spPr>
+          <a:xfrm>
+            <a:off x="2443773" y="4995846"/>
+            <a:ext cx="802114" cy="802114"/>
+          </a:xfrm>
+          <a:prstGeom prst="rect">
+            <a:avLst/>
+          </a:prstGeom>
+        </p:spPr>
+      </p:pic>
+      <p:pic>
+        <p:nvPicPr>
+          <p:cNvPr id="108" name="Imagem 107">
+            <a:extLst>
+              <a:ext uri="{FF2B5EF4-FFF2-40B4-BE49-F238E27FC236}">
+                <a16:creationId xmlns:a16="http://schemas.microsoft.com/office/drawing/2014/main" id="{E93D7B7C-8554-4A92-3471-BE322E58491B}"/>
+              </a:ext>
+            </a:extLst>
+          </p:cNvPr>
+          <p:cNvPicPr>
+            <a:picLocks noChangeAspect="1"/>
+          </p:cNvPicPr>
+          <p:nvPr/>
+        </p:nvPicPr>
+        <p:blipFill>
+          <a:blip r:embed="rId5"/>
+          <a:srcRect/>
+          <a:stretch/>
+        </p:blipFill>
+        <p:spPr>
+          <a:xfrm>
+            <a:off x="3921356" y="4995846"/>
+            <a:ext cx="802114" cy="802114"/>
+          </a:xfrm>
+          <a:prstGeom prst="rect">
+            <a:avLst/>
+          </a:prstGeom>
+        </p:spPr>
+      </p:pic>
+      <p:pic>
+        <p:nvPicPr>
+          <p:cNvPr id="109" name="Imagem 108">
+            <a:extLst>
+              <a:ext uri="{FF2B5EF4-FFF2-40B4-BE49-F238E27FC236}">
+                <a16:creationId xmlns:a16="http://schemas.microsoft.com/office/drawing/2014/main" id="{C8B7A17B-66CD-12BD-02CB-DCCAC9EFF815}"/>
+              </a:ext>
+            </a:extLst>
+          </p:cNvPr>
+          <p:cNvPicPr>
+            <a:picLocks noChangeAspect="1"/>
+          </p:cNvPicPr>
+          <p:nvPr/>
+        </p:nvPicPr>
+        <p:blipFill>
+          <a:blip r:embed="rId6"/>
+          <a:srcRect/>
+          <a:stretch/>
+        </p:blipFill>
+        <p:spPr>
+          <a:xfrm>
+            <a:off x="5539738" y="4982724"/>
+            <a:ext cx="802114" cy="802114"/>
+          </a:xfrm>
+          <a:prstGeom prst="rect">
+            <a:avLst/>
+          </a:prstGeom>
+        </p:spPr>
+      </p:pic>
+      <p:pic>
+        <p:nvPicPr>
+          <p:cNvPr id="111" name="Imagem 110">
+            <a:extLst>
+              <a:ext uri="{FF2B5EF4-FFF2-40B4-BE49-F238E27FC236}">
+                <a16:creationId xmlns:a16="http://schemas.microsoft.com/office/drawing/2014/main" id="{33E4CB03-5F7B-5F81-D875-B83F60B9BE43}"/>
+              </a:ext>
+            </a:extLst>
+          </p:cNvPr>
+          <p:cNvPicPr>
+            <a:picLocks noChangeAspect="1"/>
+          </p:cNvPicPr>
+          <p:nvPr/>
+        </p:nvPicPr>
+        <p:blipFill>
+          <a:blip r:embed="rId7"/>
+          <a:srcRect/>
+          <a:stretch/>
+        </p:blipFill>
+        <p:spPr>
+          <a:xfrm>
+            <a:off x="7018295" y="4982079"/>
+            <a:ext cx="802114" cy="802114"/>
+          </a:xfrm>
+          <a:prstGeom prst="rect">
+            <a:avLst/>
+          </a:prstGeom>
+        </p:spPr>
+      </p:pic>
+      <p:cxnSp>
+        <p:nvCxnSpPr>
+          <p:cNvPr id="112" name="Conexão Reta Unidirecional 111">
+            <a:extLst>
+              <a:ext uri="{FF2B5EF4-FFF2-40B4-BE49-F238E27FC236}">
+                <a16:creationId xmlns:a16="http://schemas.microsoft.com/office/drawing/2014/main" id="{B691A439-1B7F-BDE6-EF46-4D372421D272}"/>
+              </a:ext>
+            </a:extLst>
+          </p:cNvPr>
+          <p:cNvCxnSpPr>
+            <a:cxnSpLocks/>
+          </p:cNvCxnSpPr>
+          <p:nvPr/>
+        </p:nvCxnSpPr>
+        <p:spPr>
+          <a:xfrm>
+            <a:off x="1774685" y="5383136"/>
+            <a:ext cx="417797" cy="0"/>
+          </a:xfrm>
+          <a:prstGeom prst="straightConnector1">
+            <a:avLst/>
+          </a:prstGeom>
+          <a:ln w="38100">
+            <a:solidFill>
+              <a:srgbClr val="031605"/>
+            </a:solidFill>
+            <a:tailEnd type="triangle"/>
+          </a:ln>
+        </p:spPr>
+        <p:style>
+          <a:lnRef idx="1">
+            <a:schemeClr val="accent1"/>
+          </a:lnRef>
+          <a:fillRef idx="0">
+            <a:schemeClr val="accent1"/>
+          </a:fillRef>
+          <a:effectRef idx="0">
+            <a:schemeClr val="accent1"/>
+          </a:effectRef>
+          <a:fontRef idx="minor">
+            <a:schemeClr val="tx1"/>
+          </a:fontRef>
+        </p:style>
+      </p:cxnSp>
+      <p:cxnSp>
+        <p:nvCxnSpPr>
+          <p:cNvPr id="114" name="Conexão Reta Unidirecional 113">
+            <a:extLst>
+              <a:ext uri="{FF2B5EF4-FFF2-40B4-BE49-F238E27FC236}">
+                <a16:creationId xmlns:a16="http://schemas.microsoft.com/office/drawing/2014/main" id="{69F1E44A-141F-1817-0F56-88CDDD513308}"/>
+              </a:ext>
+            </a:extLst>
+          </p:cNvPr>
+          <p:cNvCxnSpPr>
+            <a:cxnSpLocks/>
+          </p:cNvCxnSpPr>
+          <p:nvPr/>
+        </p:nvCxnSpPr>
+        <p:spPr>
+          <a:xfrm>
+            <a:off x="3486496" y="5375476"/>
+            <a:ext cx="417797" cy="0"/>
+          </a:xfrm>
+          <a:prstGeom prst="straightConnector1">
+            <a:avLst/>
+          </a:prstGeom>
+          <a:ln w="38100">
+            <a:solidFill>
+              <a:srgbClr val="031605"/>
+            </a:solidFill>
+            <a:tailEnd type="triangle"/>
+          </a:ln>
+        </p:spPr>
+        <p:style>
+          <a:lnRef idx="1">
+            <a:schemeClr val="accent1"/>
+          </a:lnRef>
+          <a:fillRef idx="0">
+            <a:schemeClr val="accent1"/>
+          </a:fillRef>
+          <a:effectRef idx="0">
+            <a:schemeClr val="accent1"/>
+          </a:effectRef>
+          <a:fontRef idx="minor">
+            <a:schemeClr val="tx1"/>
+          </a:fontRef>
+        </p:style>
+      </p:cxnSp>
+      <p:cxnSp>
+        <p:nvCxnSpPr>
+          <p:cNvPr id="115" name="Conexão Reta Unidirecional 114">
+            <a:extLst>
+              <a:ext uri="{FF2B5EF4-FFF2-40B4-BE49-F238E27FC236}">
+                <a16:creationId xmlns:a16="http://schemas.microsoft.com/office/drawing/2014/main" id="{8D4F0456-7749-0529-8650-369B62F8B670}"/>
+              </a:ext>
+            </a:extLst>
+          </p:cNvPr>
+          <p:cNvCxnSpPr>
+            <a:cxnSpLocks/>
+          </p:cNvCxnSpPr>
+          <p:nvPr/>
+        </p:nvCxnSpPr>
+        <p:spPr>
+          <a:xfrm>
+            <a:off x="4875414" y="5375476"/>
+            <a:ext cx="417797" cy="0"/>
+          </a:xfrm>
+          <a:prstGeom prst="straightConnector1">
+            <a:avLst/>
+          </a:prstGeom>
+          <a:ln w="38100">
+            <a:solidFill>
+              <a:srgbClr val="031605"/>
+            </a:solidFill>
+            <a:tailEnd type="triangle"/>
+          </a:ln>
+        </p:spPr>
+        <p:style>
+          <a:lnRef idx="1">
+            <a:schemeClr val="accent1"/>
+          </a:lnRef>
+          <a:fillRef idx="0">
+            <a:schemeClr val="accent1"/>
+          </a:fillRef>
+          <a:effectRef idx="0">
+            <a:schemeClr val="accent1"/>
+          </a:effectRef>
+          <a:fontRef idx="minor">
+            <a:schemeClr val="tx1"/>
+          </a:fontRef>
+        </p:style>
+      </p:cxnSp>
+      <p:cxnSp>
+        <p:nvCxnSpPr>
+          <p:cNvPr id="116" name="Conexão Reta Unidirecional 115">
+            <a:extLst>
+              <a:ext uri="{FF2B5EF4-FFF2-40B4-BE49-F238E27FC236}">
+                <a16:creationId xmlns:a16="http://schemas.microsoft.com/office/drawing/2014/main" id="{387BBF33-970E-8CE7-196B-B5D1F1732BC7}"/>
+              </a:ext>
+            </a:extLst>
+          </p:cNvPr>
+          <p:cNvCxnSpPr>
+            <a:cxnSpLocks/>
+          </p:cNvCxnSpPr>
+          <p:nvPr/>
+        </p:nvCxnSpPr>
+        <p:spPr>
+          <a:xfrm>
+            <a:off x="6600498" y="5375476"/>
+            <a:ext cx="417797" cy="0"/>
+          </a:xfrm>
+          <a:prstGeom prst="straightConnector1">
+            <a:avLst/>
+          </a:prstGeom>
+          <a:ln w="38100">
+            <a:solidFill>
+              <a:srgbClr val="031605"/>
+            </a:solidFill>
+            <a:tailEnd type="triangle"/>
+          </a:ln>
+        </p:spPr>
+        <p:style>
+          <a:lnRef idx="1">
+            <a:schemeClr val="accent1"/>
+          </a:lnRef>
+          <a:fillRef idx="0">
+            <a:schemeClr val="accent1"/>
+          </a:fillRef>
+          <a:effectRef idx="0">
+            <a:schemeClr val="accent1"/>
+          </a:effectRef>
+          <a:fontRef idx="minor">
+            <a:schemeClr val="tx1"/>
+          </a:fontRef>
+        </p:style>
+      </p:cxnSp>
+      <p:sp>
+        <p:nvSpPr>
+          <p:cNvPr id="118" name="CaixaDeTexto 117">
+            <a:extLst>
+              <a:ext uri="{FF2B5EF4-FFF2-40B4-BE49-F238E27FC236}">
+                <a16:creationId xmlns:a16="http://schemas.microsoft.com/office/drawing/2014/main" id="{FF9DC162-1B81-B490-8823-7C8C4F716BB7}"/>
+              </a:ext>
+            </a:extLst>
+          </p:cNvPr>
+          <p:cNvSpPr txBox="1"/>
+          <p:nvPr/>
+        </p:nvSpPr>
+        <p:spPr>
+          <a:xfrm>
+            <a:off x="2211463" y="5982772"/>
+            <a:ext cx="1266733" cy="646331"/>
+          </a:xfrm>
+          <a:prstGeom prst="rect">
+            <a:avLst/>
+          </a:prstGeom>
+          <a:noFill/>
+        </p:spPr>
+        <p:txBody>
+          <a:bodyPr wrap="square">
+            <a:spAutoFit/>
+          </a:bodyPr>
+          <a:lstStyle/>
+          <a:p>
+            <a:pPr algn="ctr"/>
+            <a:r>
+              <a:rPr lang="pt-PT" b="1" i="1" dirty="0">
+                <a:solidFill>
+                  <a:schemeClr val="bg2">
+                    <a:lumMod val="25000"/>
+                  </a:schemeClr>
+                </a:solidFill>
+              </a:rPr>
+              <a:t>Q&amp;A</a:t>
+            </a:r>
+          </a:p>
+          <a:p>
+            <a:pPr algn="ctr"/>
+            <a:r>
+              <a:rPr lang="pt-PT" b="1" i="1" dirty="0">
+                <a:solidFill>
+                  <a:schemeClr val="bg2">
+                    <a:lumMod val="25000"/>
+                  </a:schemeClr>
+                </a:solidFill>
+              </a:rPr>
+              <a:t> </a:t>
+            </a:r>
+            <a:r>
+              <a:rPr lang="pt-PT" b="1" i="1" dirty="0" err="1">
+                <a:solidFill>
+                  <a:schemeClr val="bg2">
+                    <a:lumMod val="25000"/>
+                  </a:schemeClr>
+                </a:solidFill>
+              </a:rPr>
+              <a:t>Pairs</a:t>
+            </a:r>
+            <a:endParaRPr lang="pt-PT" b="1" i="1" dirty="0">
+              <a:solidFill>
+                <a:schemeClr val="bg2">
+                  <a:lumMod val="25000"/>
+                </a:schemeClr>
+              </a:solidFill>
+            </a:endParaRPr>
+          </a:p>
+        </p:txBody>
+      </p:sp>
+      <p:sp>
+        <p:nvSpPr>
+          <p:cNvPr id="119" name="CaixaDeTexto 118">
+            <a:extLst>
+              <a:ext uri="{FF2B5EF4-FFF2-40B4-BE49-F238E27FC236}">
+                <a16:creationId xmlns:a16="http://schemas.microsoft.com/office/drawing/2014/main" id="{3F5DB756-4E73-5902-C92B-70B8D8A9556A}"/>
+              </a:ext>
+            </a:extLst>
+          </p:cNvPr>
+          <p:cNvSpPr txBox="1"/>
+          <p:nvPr/>
+        </p:nvSpPr>
+        <p:spPr>
+          <a:xfrm>
+            <a:off x="592107" y="5982771"/>
+            <a:ext cx="1266733" cy="646331"/>
+          </a:xfrm>
+          <a:prstGeom prst="rect">
+            <a:avLst/>
+          </a:prstGeom>
+          <a:noFill/>
+        </p:spPr>
+        <p:txBody>
+          <a:bodyPr wrap="square">
+            <a:spAutoFit/>
+          </a:bodyPr>
+          <a:lstStyle/>
+          <a:p>
+            <a:pPr algn="ctr"/>
+            <a:r>
+              <a:rPr lang="pt-PT" b="1" i="1" dirty="0" err="1">
+                <a:solidFill>
+                  <a:schemeClr val="bg2">
+                    <a:lumMod val="25000"/>
+                  </a:schemeClr>
+                </a:solidFill>
+              </a:rPr>
+              <a:t>System</a:t>
+            </a:r>
+            <a:r>
+              <a:rPr lang="pt-PT" b="1" i="1" dirty="0">
+                <a:solidFill>
+                  <a:schemeClr val="bg2">
+                    <a:lumMod val="25000"/>
+                  </a:schemeClr>
+                </a:solidFill>
+              </a:rPr>
+              <a:t> </a:t>
+            </a:r>
+            <a:r>
+              <a:rPr lang="pt-PT" b="1" i="1" dirty="0" err="1">
+                <a:solidFill>
+                  <a:schemeClr val="bg2">
+                    <a:lumMod val="25000"/>
+                  </a:schemeClr>
+                </a:solidFill>
+              </a:rPr>
+              <a:t>Prompt</a:t>
+            </a:r>
+            <a:endParaRPr lang="pt-PT" b="1" i="1" dirty="0">
+              <a:solidFill>
+                <a:schemeClr val="bg2">
+                  <a:lumMod val="25000"/>
+                </a:schemeClr>
+              </a:solidFill>
+            </a:endParaRPr>
+          </a:p>
+        </p:txBody>
+      </p:sp>
+      <p:sp>
+        <p:nvSpPr>
+          <p:cNvPr id="120" name="CaixaDeTexto 119">
+            <a:extLst>
+              <a:ext uri="{FF2B5EF4-FFF2-40B4-BE49-F238E27FC236}">
+                <a16:creationId xmlns:a16="http://schemas.microsoft.com/office/drawing/2014/main" id="{3C29BBE6-F6BF-1294-7249-4060FA868141}"/>
+              </a:ext>
+            </a:extLst>
+          </p:cNvPr>
+          <p:cNvSpPr txBox="1"/>
+          <p:nvPr/>
+        </p:nvSpPr>
+        <p:spPr>
+          <a:xfrm>
+            <a:off x="3726509" y="5982770"/>
+            <a:ext cx="1266733" cy="646331"/>
+          </a:xfrm>
+          <a:prstGeom prst="rect">
+            <a:avLst/>
+          </a:prstGeom>
+          <a:noFill/>
+        </p:spPr>
+        <p:txBody>
+          <a:bodyPr wrap="square">
+            <a:spAutoFit/>
+          </a:bodyPr>
+          <a:lstStyle/>
+          <a:p>
+            <a:pPr algn="ctr"/>
+            <a:r>
+              <a:rPr lang="pt-PT" b="1" i="1" dirty="0">
+                <a:solidFill>
+                  <a:schemeClr val="bg2">
+                    <a:lumMod val="25000"/>
+                  </a:schemeClr>
+                </a:solidFill>
+              </a:rPr>
+              <a:t>Output </a:t>
+            </a:r>
+            <a:r>
+              <a:rPr lang="pt-PT" b="1" i="1" dirty="0" err="1">
+                <a:solidFill>
+                  <a:schemeClr val="bg2">
+                    <a:lumMod val="25000"/>
+                  </a:schemeClr>
+                </a:solidFill>
+              </a:rPr>
+              <a:t>Format</a:t>
+            </a:r>
+            <a:endParaRPr lang="pt-PT" b="1" i="1" dirty="0">
+              <a:solidFill>
+                <a:schemeClr val="bg2">
+                  <a:lumMod val="25000"/>
+                </a:schemeClr>
+              </a:solidFill>
+            </a:endParaRPr>
+          </a:p>
+        </p:txBody>
+      </p:sp>
+      <p:sp>
+        <p:nvSpPr>
+          <p:cNvPr id="121" name="CaixaDeTexto 120">
+            <a:extLst>
+              <a:ext uri="{FF2B5EF4-FFF2-40B4-BE49-F238E27FC236}">
+                <a16:creationId xmlns:a16="http://schemas.microsoft.com/office/drawing/2014/main" id="{57991FEE-D93B-FE51-A16C-E3612E63D0D4}"/>
+              </a:ext>
+            </a:extLst>
+          </p:cNvPr>
+          <p:cNvSpPr txBox="1"/>
+          <p:nvPr/>
+        </p:nvSpPr>
+        <p:spPr>
+          <a:xfrm>
+            <a:off x="5293211" y="6117789"/>
+            <a:ext cx="1266733" cy="369332"/>
+          </a:xfrm>
+          <a:prstGeom prst="rect">
+            <a:avLst/>
+          </a:prstGeom>
+          <a:noFill/>
+        </p:spPr>
+        <p:txBody>
+          <a:bodyPr wrap="square">
+            <a:spAutoFit/>
+          </a:bodyPr>
+          <a:lstStyle/>
+          <a:p>
+            <a:pPr algn="ctr"/>
+            <a:r>
+              <a:rPr lang="pt-PT" b="1" i="1" dirty="0" err="1">
+                <a:solidFill>
+                  <a:schemeClr val="bg2">
+                    <a:lumMod val="25000"/>
+                  </a:schemeClr>
+                </a:solidFill>
+              </a:rPr>
+              <a:t>Examples</a:t>
+            </a:r>
+            <a:endParaRPr lang="pt-PT" b="1" i="1" dirty="0">
+              <a:solidFill>
+                <a:schemeClr val="bg2">
+                  <a:lumMod val="25000"/>
+                </a:schemeClr>
+              </a:solidFill>
+            </a:endParaRPr>
+          </a:p>
+        </p:txBody>
+      </p:sp>
+      <p:sp>
+        <p:nvSpPr>
+          <p:cNvPr id="122" name="CaixaDeTexto 121">
+            <a:extLst>
+              <a:ext uri="{FF2B5EF4-FFF2-40B4-BE49-F238E27FC236}">
+                <a16:creationId xmlns:a16="http://schemas.microsoft.com/office/drawing/2014/main" id="{F9BF0AE2-2687-D4F1-B05E-B875AEE3CBCC}"/>
+              </a:ext>
+            </a:extLst>
+          </p:cNvPr>
+          <p:cNvSpPr txBox="1"/>
+          <p:nvPr/>
+        </p:nvSpPr>
+        <p:spPr>
+          <a:xfrm>
+            <a:off x="6781517" y="5989087"/>
+            <a:ext cx="1266733" cy="646331"/>
+          </a:xfrm>
+          <a:prstGeom prst="rect">
+            <a:avLst/>
+          </a:prstGeom>
+          <a:noFill/>
+        </p:spPr>
+        <p:txBody>
+          <a:bodyPr wrap="square">
+            <a:spAutoFit/>
+          </a:bodyPr>
+          <a:lstStyle/>
+          <a:p>
+            <a:pPr algn="ctr"/>
+            <a:r>
+              <a:rPr lang="pt-PT" b="1" i="1" dirty="0" err="1">
+                <a:solidFill>
+                  <a:schemeClr val="bg2">
+                    <a:lumMod val="25000"/>
+                  </a:schemeClr>
+                </a:solidFill>
+              </a:rPr>
+              <a:t>Player</a:t>
+            </a:r>
+            <a:endParaRPr lang="pt-PT" b="1" i="1" dirty="0">
+              <a:solidFill>
+                <a:schemeClr val="bg2">
+                  <a:lumMod val="25000"/>
+                </a:schemeClr>
+              </a:solidFill>
+            </a:endParaRPr>
+          </a:p>
+          <a:p>
+            <a:pPr algn="ctr"/>
+            <a:r>
+              <a:rPr lang="pt-PT" b="1" i="1" dirty="0">
+                <a:solidFill>
+                  <a:schemeClr val="bg2">
+                    <a:lumMod val="25000"/>
+                  </a:schemeClr>
+                </a:solidFill>
+              </a:rPr>
+              <a:t>Data</a:t>
+            </a:r>
+          </a:p>
+        </p:txBody>
+      </p:sp>
+      <p:sp>
+        <p:nvSpPr>
+          <p:cNvPr id="123" name="Shape 0">
+            <a:extLst>
+              <a:ext uri="{FF2B5EF4-FFF2-40B4-BE49-F238E27FC236}">
+                <a16:creationId xmlns:a16="http://schemas.microsoft.com/office/drawing/2014/main" id="{A56F3048-CC6B-1176-9EA8-C6FD93BFAB8F}"/>
+              </a:ext>
+            </a:extLst>
+          </p:cNvPr>
+          <p:cNvSpPr/>
+          <p:nvPr/>
+        </p:nvSpPr>
+        <p:spPr>
+          <a:xfrm>
+            <a:off x="838200" y="2546939"/>
+            <a:ext cx="1800000" cy="9525"/>
+          </a:xfrm>
+          <a:prstGeom prst="rect">
+            <a:avLst/>
+          </a:prstGeom>
+          <a:solidFill>
+            <a:srgbClr val="0E1410">
+              <a:alpha val="12000"/>
+            </a:srgbClr>
+          </a:solidFill>
+          <a:ln/>
+        </p:spPr>
+        <p:txBody>
+          <a:bodyPr/>
+          <a:lstStyle/>
+          <a:p>
+            <a:endParaRPr lang="pt-PT"/>
           </a:p>
         </p:txBody>
       </p:sp>
     </p:spTree>
+    <p:extLst>
+      <p:ext uri="{BB962C8B-B14F-4D97-AF65-F5344CB8AC3E}">
+        <p14:creationId xmlns:p14="http://schemas.microsoft.com/office/powerpoint/2010/main" val="4045241910"/>
+      </p:ext>
+    </p:extLst>
   </p:cSld>
   <p:clrMapOvr>
     <a:masterClrMapping/>
@@ -9087,18 +14238,24 @@
 
 <file path=ppt/slides/slide8.xml><?xml version="1.0" encoding="utf-8"?>
 <p:sld xmlns:a="http://schemas.openxmlformats.org/drawingml/2006/main" xmlns:r="http://schemas.openxmlformats.org/officeDocument/2006/relationships" xmlns:p="http://schemas.openxmlformats.org/presentationml/2006/main">
-  <p:cSld name="Slide 15">
+  <p:cSld>
     <p:bg>
       <p:bgPr>
         <a:solidFill>
-          <a:srgbClr val="0E1410"/>
+          <a:srgbClr val="F4F1EB"/>
         </a:solidFill>
         <a:effectLst/>
       </p:bgPr>
     </p:bg>
     <p:spTree>
       <p:nvGrpSpPr>
-        <p:cNvPr id="1" name=""/>
+        <p:cNvPr id="1" name="">
+          <a:extLst>
+            <a:ext uri="{FF2B5EF4-FFF2-40B4-BE49-F238E27FC236}">
+              <a16:creationId xmlns:a16="http://schemas.microsoft.com/office/drawing/2014/main" id="{222AC132-FFCD-F600-7D1E-456ECEAD4D0D}"/>
+            </a:ext>
+          </a:extLst>
+        </p:cNvPr>
         <p:cNvGrpSpPr/>
         <p:nvPr/>
       </p:nvGrpSpPr>
@@ -9112,21 +14269,27 @@
       </p:grpSpPr>
       <p:sp>
         <p:nvSpPr>
-          <p:cNvPr id="2" name="Shape 0"/>
-          <p:cNvSpPr/>
-          <p:nvPr/>
-        </p:nvSpPr>
-        <p:spPr>
-          <a:xfrm>
-            <a:off x="838200" y="738188"/>
+          <p:cNvPr id="2" name="Shape 0">
+            <a:extLst>
+              <a:ext uri="{FF2B5EF4-FFF2-40B4-BE49-F238E27FC236}">
+                <a16:creationId xmlns:a16="http://schemas.microsoft.com/office/drawing/2014/main" id="{CB370787-89B3-EFE5-6975-1419FCE28D99}"/>
+              </a:ext>
+            </a:extLst>
+          </p:cNvPr>
+          <p:cNvSpPr/>
+          <p:nvPr/>
+        </p:nvSpPr>
+        <p:spPr>
+          <a:xfrm>
+            <a:off x="838200" y="928688"/>
             <a:ext cx="16611600" cy="9525"/>
           </a:xfrm>
           <a:prstGeom prst="rect">
             <a:avLst/>
           </a:prstGeom>
           <a:solidFill>
-            <a:srgbClr val="F4F1EA">
-              <a:alpha val="18000"/>
+            <a:srgbClr val="0E1410">
+              <a:alpha val="12000"/>
             </a:srgbClr>
           </a:solidFill>
           <a:ln/>
@@ -9141,13 +14304,19 @@
       </p:sp>
       <p:sp>
         <p:nvSpPr>
-          <p:cNvPr id="3" name="Text 1"/>
-          <p:cNvSpPr/>
-          <p:nvPr/>
-        </p:nvSpPr>
-        <p:spPr>
-          <a:xfrm>
-            <a:off x="838200" y="457200"/>
+          <p:cNvPr id="82" name="Text 80">
+            <a:extLst>
+              <a:ext uri="{FF2B5EF4-FFF2-40B4-BE49-F238E27FC236}">
+                <a16:creationId xmlns:a16="http://schemas.microsoft.com/office/drawing/2014/main" id="{9B61C771-9D60-0ADE-F9B9-398AC38A6DF8}"/>
+              </a:ext>
+            </a:extLst>
+          </p:cNvPr>
+          <p:cNvSpPr/>
+          <p:nvPr/>
+        </p:nvSpPr>
+        <p:spPr>
+          <a:xfrm>
+            <a:off x="16937682" y="9605963"/>
             <a:ext cx="588318" cy="185738"/>
           </a:xfrm>
           <a:prstGeom prst="rect">
@@ -9168,15 +14337,13 @@
             <a:r>
               <a:rPr lang="en-US" sz="900" kern="0" spc="36" dirty="0">
                 <a:solidFill>
-                  <a:srgbClr val="F4F1EA">
-                    <a:alpha val="45000"/>
-                  </a:srgbClr>
+                  <a:srgbClr val="6C726B"/>
                 </a:solidFill>
                 <a:latin typeface="JetBrains Mono" pitchFamily="34" charset="0"/>
                 <a:ea typeface="JetBrains Mono" pitchFamily="34" charset="-122"/>
                 <a:cs typeface="JetBrains Mono" pitchFamily="34" charset="-120"/>
               </a:rPr>
-              <a:t>15 / 15</a:t>
+              <a:t>08 / 15</a:t>
             </a:r>
             <a:endParaRPr lang="en-US" sz="900" dirty="0"/>
           </a:p>
@@ -9184,14 +14351,55 @@
       </p:sp>
       <p:sp>
         <p:nvSpPr>
-          <p:cNvPr id="4" name="Text 2"/>
-          <p:cNvSpPr/>
-          <p:nvPr/>
-        </p:nvSpPr>
-        <p:spPr>
-          <a:xfrm>
-            <a:off x="16937682" y="457200"/>
-            <a:ext cx="588318" cy="185738"/>
+          <p:cNvPr id="100" name="Shape 22">
+            <a:extLst>
+              <a:ext uri="{FF2B5EF4-FFF2-40B4-BE49-F238E27FC236}">
+                <a16:creationId xmlns:a16="http://schemas.microsoft.com/office/drawing/2014/main" id="{098FE347-F846-578A-54F5-4C012524EB55}"/>
+              </a:ext>
+            </a:extLst>
+          </p:cNvPr>
+          <p:cNvSpPr/>
+          <p:nvPr/>
+        </p:nvSpPr>
+        <p:spPr>
+          <a:xfrm>
+            <a:off x="838200" y="9424988"/>
+            <a:ext cx="16611600" cy="9525"/>
+          </a:xfrm>
+          <a:prstGeom prst="rect">
+            <a:avLst/>
+          </a:prstGeom>
+          <a:solidFill>
+            <a:srgbClr val="0E1410">
+              <a:alpha val="12000"/>
+            </a:srgbClr>
+          </a:solidFill>
+          <a:ln/>
+        </p:spPr>
+        <p:txBody>
+          <a:bodyPr/>
+          <a:lstStyle/>
+          <a:p>
+            <a:endParaRPr lang="pt-PT"/>
+          </a:p>
+        </p:txBody>
+      </p:sp>
+      <p:sp>
+        <p:nvSpPr>
+          <p:cNvPr id="103" name="Text 1">
+            <a:extLst>
+              <a:ext uri="{FF2B5EF4-FFF2-40B4-BE49-F238E27FC236}">
+                <a16:creationId xmlns:a16="http://schemas.microsoft.com/office/drawing/2014/main" id="{664111F8-6806-B657-CFFE-85DF5C3A3235}"/>
+              </a:ext>
+            </a:extLst>
+          </p:cNvPr>
+          <p:cNvSpPr/>
+          <p:nvPr/>
+        </p:nvSpPr>
+        <p:spPr>
+          <a:xfrm>
+            <a:off x="838200" y="609600"/>
+            <a:ext cx="2863129" cy="185738"/>
           </a:xfrm>
           <a:prstGeom prst="rect">
             <a:avLst/>
@@ -9205,77 +14413,84 @@
           </a:bodyPr>
           <a:lstStyle/>
           <a:p>
+            <a:r>
+              <a:rPr lang="en-US" sz="900" kern="0" spc="36" dirty="0">
+                <a:solidFill>
+                  <a:srgbClr val="6C726B"/>
+                </a:solidFill>
+                <a:latin typeface="JetBrains Mono" pitchFamily="34" charset="0"/>
+                <a:ea typeface="JetBrains Mono" pitchFamily="34" charset="-122"/>
+                <a:cs typeface="JetBrains Mono" pitchFamily="34" charset="-120"/>
+              </a:rPr>
+              <a:t>SECTION 02 – RETRIEVAL &amp; CONTEXT</a:t>
+            </a:r>
+            <a:endParaRPr lang="en-US" sz="900" dirty="0"/>
+          </a:p>
+        </p:txBody>
+      </p:sp>
+      <p:sp>
+        <p:nvSpPr>
+          <p:cNvPr id="7" name="Text 3">
+            <a:extLst>
+              <a:ext uri="{FF2B5EF4-FFF2-40B4-BE49-F238E27FC236}">
+                <a16:creationId xmlns:a16="http://schemas.microsoft.com/office/drawing/2014/main" id="{38498FC7-C9FE-0990-9241-E672D1872657}"/>
+              </a:ext>
+            </a:extLst>
+          </p:cNvPr>
+          <p:cNvSpPr/>
+          <p:nvPr/>
+        </p:nvSpPr>
+        <p:spPr>
+          <a:xfrm>
+            <a:off x="838200" y="1281113"/>
+            <a:ext cx="17109948" cy="214313"/>
+          </a:xfrm>
+          <a:prstGeom prst="rect">
+            <a:avLst/>
+          </a:prstGeom>
+          <a:noFill/>
+          <a:ln/>
+        </p:spPr>
+        <p:txBody>
+          <a:bodyPr wrap="square" lIns="25400" tIns="25400" rIns="25400" bIns="25400" rtlCol="0" anchor="t">
+            <a:normAutofit/>
+          </a:bodyPr>
+          <a:lstStyle/>
+          <a:p>
             <a:pPr marL="0" indent="0" algn="l">
               <a:buNone/>
             </a:pPr>
             <a:r>
-              <a:rPr lang="en-US" sz="900" kern="0" spc="36" dirty="0">
-                <a:solidFill>
-                  <a:srgbClr val="F4F1EA">
-                    <a:alpha val="45000"/>
-                  </a:srgbClr>
+              <a:rPr lang="en-US" sz="1050" kern="0" spc="168" dirty="0">
+                <a:solidFill>
+                  <a:srgbClr val="6C726B"/>
                 </a:solidFill>
                 <a:latin typeface="JetBrains Mono" pitchFamily="34" charset="0"/>
                 <a:ea typeface="JetBrains Mono" pitchFamily="34" charset="-122"/>
                 <a:cs typeface="JetBrains Mono" pitchFamily="34" charset="-120"/>
               </a:rPr>
-              <a:t>CLOSING</a:t>
-            </a:r>
-            <a:endParaRPr lang="en-US" sz="900" dirty="0"/>
-          </a:p>
-        </p:txBody>
-      </p:sp>
-      <p:sp>
-        <p:nvSpPr>
-          <p:cNvPr id="5" name="Text 3"/>
-          <p:cNvSpPr/>
-          <p:nvPr/>
-        </p:nvSpPr>
-        <p:spPr>
-          <a:xfrm>
-            <a:off x="838200" y="1596479"/>
-            <a:ext cx="14716125" cy="185738"/>
-          </a:xfrm>
-          <a:prstGeom prst="rect">
-            <a:avLst/>
-          </a:prstGeom>
-          <a:noFill/>
-          <a:ln/>
-        </p:spPr>
-        <p:txBody>
-          <a:bodyPr wrap="square" lIns="25400" tIns="25400" rIns="25400" bIns="25400" rtlCol="0" anchor="t">
-            <a:normAutofit lnSpcReduction="10000"/>
-          </a:bodyPr>
-          <a:lstStyle/>
-          <a:p>
-            <a:pPr marL="0" indent="0" algn="l">
-              <a:buNone/>
-            </a:pPr>
-            <a:r>
-              <a:rPr lang="en-US" sz="900" kern="0" spc="36" dirty="0">
-                <a:solidFill>
-                  <a:srgbClr val="6FD29A"/>
-                </a:solidFill>
-                <a:latin typeface="JetBrains Mono" pitchFamily="34" charset="0"/>
-                <a:ea typeface="JetBrains Mono" pitchFamily="34" charset="-122"/>
-                <a:cs typeface="JetBrains Mono" pitchFamily="34" charset="-120"/>
-              </a:rPr>
-              <a:t>SKILLCORNER MEASURES. TWELVE REASONS.</a:t>
-            </a:r>
-            <a:endParaRPr lang="en-US" sz="900" dirty="0"/>
-          </a:p>
-        </p:txBody>
-      </p:sp>
-      <p:sp>
-        <p:nvSpPr>
-          <p:cNvPr id="6" name="Text 4"/>
-          <p:cNvSpPr/>
-          <p:nvPr/>
-        </p:nvSpPr>
-        <p:spPr>
-          <a:xfrm>
-            <a:off x="838200" y="1915567"/>
-            <a:ext cx="14716125" cy="5646241"/>
+              <a:t>LLM Study Base</a:t>
+            </a:r>
+            <a:endParaRPr lang="en-US" sz="1050" dirty="0"/>
+          </a:p>
+        </p:txBody>
+      </p:sp>
+      <p:sp>
+        <p:nvSpPr>
+          <p:cNvPr id="8" name="Text 4">
+            <a:extLst>
+              <a:ext uri="{FF2B5EF4-FFF2-40B4-BE49-F238E27FC236}">
+                <a16:creationId xmlns:a16="http://schemas.microsoft.com/office/drawing/2014/main" id="{8F6E3899-F64A-AB14-3758-C69CDB6DBAB3}"/>
+              </a:ext>
+            </a:extLst>
+          </p:cNvPr>
+          <p:cNvSpPr/>
+          <p:nvPr/>
+        </p:nvSpPr>
+        <p:spPr>
+          <a:xfrm>
+            <a:off x="838200" y="1571624"/>
+            <a:ext cx="4936067" cy="4899421"/>
           </a:xfrm>
           <a:prstGeom prst="rect">
             <a:avLst/>
@@ -9291,138 +14506,58 @@
           <a:p>
             <a:pPr marL="0" indent="0" algn="l">
               <a:lnSpc>
-                <a:spcPct val="92000"/>
+                <a:spcPct val="96000"/>
               </a:lnSpc>
               <a:buNone/>
             </a:pPr>
             <a:r>
-              <a:rPr lang="en-US" sz="12000" b="1" kern="0" spc="-540" dirty="0">
-                <a:solidFill>
-                  <a:srgbClr val="F4F1EA"/>
+              <a:rPr lang="en-US" sz="23900" b="1" kern="0" spc="-241" dirty="0">
+                <a:solidFill>
+                  <a:srgbClr val="0E1410"/>
                 </a:solidFill>
                 <a:latin typeface="Space Grotesk" pitchFamily="34" charset="0"/>
                 <a:ea typeface="Space Grotesk" pitchFamily="34" charset="-122"/>
-                <a:cs typeface="Space Grotesk" pitchFamily="34" charset="-120"/>
-              </a:rPr>
-              <a:t>The model is the foundation. </a:t>
-            </a:r>
-            <a:r>
-              <a:rPr lang="en-US" sz="12000" b="1" kern="0" spc="-540" dirty="0">
-                <a:solidFill>
-                  <a:srgbClr val="6FD29A"/>
+              </a:rPr>
+              <a:t>54</a:t>
+            </a:r>
+          </a:p>
+          <a:p>
+            <a:pPr marL="0" indent="0" algn="l">
+              <a:lnSpc>
+                <a:spcPct val="96000"/>
+              </a:lnSpc>
+              <a:buNone/>
+            </a:pPr>
+            <a:r>
+              <a:rPr lang="en-US" sz="6900" b="1" kern="0" spc="-241" dirty="0">
+                <a:solidFill>
+                  <a:srgbClr val="0E1410"/>
                 </a:solidFill>
                 <a:latin typeface="Space Grotesk" pitchFamily="34" charset="0"/>
                 <a:ea typeface="Space Grotesk" pitchFamily="34" charset="-122"/>
-                <a:cs typeface="Space Grotesk" pitchFamily="34" charset="-120"/>
-              </a:rPr>
-              <a:t>Context </a:t>
-            </a:r>
-            <a:r>
-              <a:rPr lang="en-US" sz="12000" b="1" kern="0" spc="-540" dirty="0">
-                <a:solidFill>
-                  <a:srgbClr val="F4F1EA"/>
-                </a:solidFill>
-                <a:latin typeface="Space Grotesk" pitchFamily="34" charset="0"/>
-                <a:ea typeface="Space Grotesk" pitchFamily="34" charset="-122"/>
-                <a:cs typeface="Space Grotesk" pitchFamily="34" charset="-120"/>
-              </a:rPr>
-              <a:t>is the product</a:t>
-            </a:r>
-            <a:r>
-              <a:rPr lang="en-US" sz="12000" b="1" kern="0" spc="-540" dirty="0">
-                <a:solidFill>
-                  <a:srgbClr val="FF5A1F"/>
-                </a:solidFill>
-                <a:latin typeface="Space Grotesk" pitchFamily="34" charset="0"/>
-                <a:ea typeface="Space Grotesk" pitchFamily="34" charset="-122"/>
-                <a:cs typeface="Space Grotesk" pitchFamily="34" charset="-120"/>
-              </a:rPr>
-              <a:t>.</a:t>
-            </a:r>
-            <a:endParaRPr lang="en-US" sz="12000" dirty="0"/>
-          </a:p>
-        </p:txBody>
-      </p:sp>
-      <p:sp>
-        <p:nvSpPr>
-          <p:cNvPr id="7" name="Shape 5"/>
-          <p:cNvSpPr/>
-          <p:nvPr/>
-        </p:nvSpPr>
-        <p:spPr>
-          <a:xfrm>
-            <a:off x="838200" y="8258175"/>
-            <a:ext cx="16611600" cy="9525"/>
-          </a:xfrm>
-          <a:prstGeom prst="rect">
-            <a:avLst/>
-          </a:prstGeom>
-          <a:solidFill>
-            <a:srgbClr val="F4F1EA">
-              <a:alpha val="18000"/>
-            </a:srgbClr>
-          </a:solidFill>
-          <a:ln/>
-        </p:spPr>
-        <p:txBody>
-          <a:bodyPr/>
-          <a:lstStyle/>
-          <a:p>
-            <a:endParaRPr lang="pt-PT"/>
-          </a:p>
-        </p:txBody>
-      </p:sp>
-      <p:sp>
-        <p:nvSpPr>
-          <p:cNvPr id="8" name="Text 6"/>
-          <p:cNvSpPr/>
-          <p:nvPr/>
-        </p:nvSpPr>
-        <p:spPr>
-          <a:xfrm>
-            <a:off x="838200" y="8529638"/>
-            <a:ext cx="807765" cy="185738"/>
-          </a:xfrm>
-          <a:prstGeom prst="rect">
-            <a:avLst/>
-          </a:prstGeom>
-          <a:noFill/>
-          <a:ln/>
-        </p:spPr>
-        <p:txBody>
-          <a:bodyPr wrap="square" lIns="25400" tIns="25400" rIns="25400" bIns="25400" rtlCol="0" anchor="t">
-            <a:normAutofit lnSpcReduction="10000"/>
-          </a:bodyPr>
-          <a:lstStyle/>
-          <a:p>
-            <a:pPr marL="0" indent="0" algn="l">
-              <a:buNone/>
-            </a:pPr>
-            <a:r>
-              <a:rPr lang="en-US" sz="900" kern="0" spc="36" dirty="0">
-                <a:solidFill>
-                  <a:srgbClr val="6C726B"/>
-                </a:solidFill>
-                <a:latin typeface="JetBrains Mono" pitchFamily="34" charset="0"/>
-                <a:ea typeface="JetBrains Mono" pitchFamily="34" charset="-122"/>
-                <a:cs typeface="JetBrains Mono" pitchFamily="34" charset="-120"/>
-              </a:rPr>
-              <a:t>FOUNDATION</a:t>
-            </a:r>
-            <a:endParaRPr lang="en-US" sz="900" dirty="0"/>
-          </a:p>
-        </p:txBody>
-      </p:sp>
-      <p:sp>
-        <p:nvSpPr>
-          <p:cNvPr id="9" name="Text 7"/>
-          <p:cNvSpPr/>
-          <p:nvPr/>
-        </p:nvSpPr>
-        <p:spPr>
-          <a:xfrm>
-            <a:off x="838200" y="8763000"/>
-            <a:ext cx="5494020" cy="352425"/>
+              </a:rPr>
+              <a:t>Q&amp;A PAIRS</a:t>
+            </a:r>
+            <a:endParaRPr lang="en-US" sz="6900" dirty="0"/>
+          </a:p>
+        </p:txBody>
+      </p:sp>
+      <p:sp>
+        <p:nvSpPr>
+          <p:cNvPr id="10" name="Text 5">
+            <a:extLst>
+              <a:ext uri="{FF2B5EF4-FFF2-40B4-BE49-F238E27FC236}">
+                <a16:creationId xmlns:a16="http://schemas.microsoft.com/office/drawing/2014/main" id="{F5AB0494-5652-1067-C1B3-6479BCFA888B}"/>
+              </a:ext>
+            </a:extLst>
+          </p:cNvPr>
+          <p:cNvSpPr/>
+          <p:nvPr/>
+        </p:nvSpPr>
+        <p:spPr>
+          <a:xfrm>
+            <a:off x="838200" y="6505689"/>
+            <a:ext cx="5296593" cy="1431727"/>
           </a:xfrm>
           <a:prstGeom prst="rect">
             <a:avLst/>
@@ -9436,343 +14571,181 @@
           </a:bodyPr>
           <a:lstStyle/>
           <a:p>
-            <a:pPr marL="0" indent="0" algn="l">
-              <a:buNone/>
-            </a:pPr>
-            <a:r>
-              <a:rPr lang="en-US" sz="1950" b="1" kern="0" spc="-39" dirty="0">
-                <a:solidFill>
-                  <a:srgbClr val="F4F1EA"/>
-                </a:solidFill>
-                <a:latin typeface="Space Grotesk" pitchFamily="34" charset="0"/>
-                <a:ea typeface="Space Grotesk" pitchFamily="34" charset="-122"/>
-                <a:cs typeface="Space Grotesk" pitchFamily="34" charset="-120"/>
-              </a:rPr>
-              <a:t>SkillCorner</a:t>
-            </a:r>
-            <a:endParaRPr lang="en-US" sz="1950" dirty="0"/>
-          </a:p>
-        </p:txBody>
-      </p:sp>
-      <p:sp>
-        <p:nvSpPr>
-          <p:cNvPr id="10" name="Text 8"/>
-          <p:cNvSpPr/>
-          <p:nvPr/>
-        </p:nvSpPr>
-        <p:spPr>
-          <a:xfrm>
-            <a:off x="838200" y="9153525"/>
-            <a:ext cx="5494020" cy="252413"/>
-          </a:xfrm>
-          <a:prstGeom prst="rect">
-            <a:avLst/>
-          </a:prstGeom>
-          <a:noFill/>
-          <a:ln/>
-        </p:spPr>
-        <p:txBody>
-          <a:bodyPr wrap="square" lIns="25400" tIns="25400" rIns="25400" bIns="25400" rtlCol="0" anchor="t">
-            <a:normAutofit fontScale="92500" lnSpcReduction="10000"/>
-          </a:bodyPr>
-          <a:lstStyle/>
-          <a:p>
-            <a:pPr marL="0" indent="0" algn="l">
+            <a:pPr>
               <a:lnSpc>
                 <a:spcPct val="150000"/>
               </a:lnSpc>
-              <a:buNone/>
             </a:pPr>
             <a:r>
-              <a:rPr lang="en-US" sz="1125" dirty="0">
-                <a:solidFill>
-                  <a:srgbClr val="F4F1EA">
-                    <a:alpha val="65000"/>
-                  </a:srgbClr>
-                </a:solidFill>
-                <a:latin typeface="Space Grotesk" pitchFamily="34" charset="0"/>
-                <a:ea typeface="Space Grotesk" pitchFamily="34" charset="-122"/>
-                <a:cs typeface="Space Grotesk" pitchFamily="34" charset="-120"/>
-              </a:rPr>
-              <a:t>Tracking · physical metrics · per-match telemetry. The signals.</a:t>
-            </a:r>
-            <a:endParaRPr lang="en-US" sz="1125" dirty="0"/>
-          </a:p>
-        </p:txBody>
-      </p:sp>
-      <p:sp>
-        <p:nvSpPr>
-          <p:cNvPr id="11" name="Text 9"/>
-          <p:cNvSpPr/>
-          <p:nvPr/>
-        </p:nvSpPr>
-        <p:spPr>
-          <a:xfrm>
-            <a:off x="6477000" y="8529638"/>
-            <a:ext cx="442020" cy="185738"/>
-          </a:xfrm>
-          <a:prstGeom prst="rect">
-            <a:avLst/>
-          </a:prstGeom>
-          <a:noFill/>
-          <a:ln/>
-        </p:spPr>
-        <p:txBody>
-          <a:bodyPr wrap="square" lIns="25400" tIns="25400" rIns="25400" bIns="25400" rtlCol="0" anchor="t">
-            <a:normAutofit lnSpcReduction="10000"/>
-          </a:bodyPr>
-          <a:lstStyle/>
-          <a:p>
-            <a:pPr marL="0" indent="0" algn="l">
-              <a:buNone/>
-            </a:pPr>
-            <a:r>
-              <a:rPr lang="en-US" sz="900" kern="0" spc="36" dirty="0">
-                <a:solidFill>
-                  <a:srgbClr val="6C726B"/>
-                </a:solidFill>
-                <a:latin typeface="JetBrains Mono" pitchFamily="34" charset="0"/>
-                <a:ea typeface="JetBrains Mono" pitchFamily="34" charset="-122"/>
-                <a:cs typeface="JetBrains Mono" pitchFamily="34" charset="-120"/>
-              </a:rPr>
-              <a:t>LAYER</a:t>
-            </a:r>
-            <a:endParaRPr lang="en-US" sz="900" dirty="0"/>
-          </a:p>
-        </p:txBody>
-      </p:sp>
-      <p:sp>
-        <p:nvSpPr>
-          <p:cNvPr id="12" name="Text 10"/>
-          <p:cNvSpPr/>
-          <p:nvPr/>
-        </p:nvSpPr>
-        <p:spPr>
-          <a:xfrm>
-            <a:off x="6477000" y="8763000"/>
-            <a:ext cx="5494020" cy="352425"/>
-          </a:xfrm>
-          <a:prstGeom prst="rect">
-            <a:avLst/>
-          </a:prstGeom>
-          <a:noFill/>
-          <a:ln/>
-        </p:spPr>
-        <p:txBody>
-          <a:bodyPr wrap="square" lIns="25400" tIns="25400" rIns="25400" bIns="25400" rtlCol="0" anchor="t">
-            <a:normAutofit/>
-          </a:bodyPr>
-          <a:lstStyle/>
-          <a:p>
-            <a:pPr marL="0" indent="0" algn="l">
-              <a:buNone/>
-            </a:pPr>
-            <a:r>
-              <a:rPr lang="en-US" sz="1950" b="1" kern="0" spc="-39" dirty="0">
-                <a:solidFill>
-                  <a:srgbClr val="F4F1EA"/>
-                </a:solidFill>
-                <a:latin typeface="Space Grotesk" pitchFamily="34" charset="0"/>
-                <a:ea typeface="Space Grotesk" pitchFamily="34" charset="-122"/>
-                <a:cs typeface="Space Grotesk" pitchFamily="34" charset="-120"/>
-              </a:rPr>
-              <a:t>Twelve · Context Engineering</a:t>
-            </a:r>
-            <a:endParaRPr lang="en-US" sz="1950" dirty="0"/>
-          </a:p>
-        </p:txBody>
-      </p:sp>
-      <p:sp>
-        <p:nvSpPr>
-          <p:cNvPr id="13" name="Text 11"/>
-          <p:cNvSpPr/>
-          <p:nvPr/>
-        </p:nvSpPr>
-        <p:spPr>
-          <a:xfrm>
-            <a:off x="6477000" y="9153525"/>
-            <a:ext cx="5494020" cy="252413"/>
-          </a:xfrm>
-          <a:prstGeom prst="rect">
-            <a:avLst/>
-          </a:prstGeom>
-          <a:noFill/>
-          <a:ln/>
-        </p:spPr>
-        <p:txBody>
-          <a:bodyPr wrap="square" lIns="25400" tIns="25400" rIns="25400" bIns="25400" rtlCol="0" anchor="t">
-            <a:normAutofit fontScale="92500" lnSpcReduction="10000"/>
-          </a:bodyPr>
-          <a:lstStyle/>
-          <a:p>
-            <a:pPr marL="0" indent="0" algn="l">
+              <a:rPr lang="pt-PT" dirty="0" err="1"/>
+              <a:t>Before</a:t>
+            </a:r>
+            <a:r>
+              <a:rPr lang="pt-PT" dirty="0"/>
+              <a:t> </a:t>
+            </a:r>
+            <a:r>
+              <a:rPr lang="pt-PT" dirty="0" err="1"/>
+              <a:t>the</a:t>
+            </a:r>
+            <a:r>
+              <a:rPr lang="pt-PT" dirty="0"/>
+              <a:t> LLM </a:t>
+            </a:r>
+            <a:r>
+              <a:rPr lang="pt-PT" dirty="0" err="1"/>
+              <a:t>sees</a:t>
+            </a:r>
+            <a:r>
+              <a:rPr lang="pt-PT" dirty="0"/>
+              <a:t> </a:t>
+            </a:r>
+            <a:r>
+              <a:rPr lang="pt-PT" dirty="0" err="1"/>
+              <a:t>the</a:t>
+            </a:r>
+            <a:r>
+              <a:rPr lang="pt-PT" dirty="0"/>
+              <a:t> </a:t>
+            </a:r>
+            <a:r>
+              <a:rPr lang="pt-PT" dirty="0" err="1"/>
+              <a:t>player’s</a:t>
+            </a:r>
+            <a:r>
+              <a:rPr lang="pt-PT" dirty="0"/>
+              <a:t> data, </a:t>
+            </a:r>
+            <a:r>
+              <a:rPr lang="pt-PT" dirty="0" err="1"/>
+              <a:t>it</a:t>
+            </a:r>
+            <a:r>
+              <a:rPr lang="pt-PT" dirty="0"/>
+              <a:t> </a:t>
+            </a:r>
+            <a:r>
+              <a:rPr lang="pt-PT" dirty="0" err="1"/>
+              <a:t>reads</a:t>
+            </a:r>
+            <a:r>
+              <a:rPr lang="pt-PT" dirty="0"/>
+              <a:t> a </a:t>
+            </a:r>
+            <a:r>
+              <a:rPr lang="pt-PT" dirty="0" err="1"/>
+              <a:t>curated</a:t>
+            </a:r>
+            <a:r>
+              <a:rPr lang="pt-PT" dirty="0"/>
+              <a:t> </a:t>
+            </a:r>
+            <a:r>
+              <a:rPr lang="pt-PT" dirty="0" err="1"/>
+              <a:t>knowledge</a:t>
+            </a:r>
+            <a:r>
+              <a:rPr lang="pt-PT" dirty="0"/>
+              <a:t> base – a set </a:t>
+            </a:r>
+            <a:r>
+              <a:rPr lang="pt-PT" dirty="0" err="1"/>
+              <a:t>of</a:t>
+            </a:r>
+            <a:r>
+              <a:rPr lang="pt-PT" dirty="0"/>
+              <a:t> Q&amp;Q </a:t>
+            </a:r>
+            <a:r>
+              <a:rPr lang="pt-PT" dirty="0" err="1"/>
+              <a:t>pairs</a:t>
+            </a:r>
+            <a:r>
+              <a:rPr lang="pt-PT" dirty="0"/>
+              <a:t> </a:t>
+            </a:r>
+            <a:r>
+              <a:rPr lang="pt-PT" dirty="0" err="1"/>
+              <a:t>loaded</a:t>
+            </a:r>
+            <a:r>
+              <a:rPr lang="pt-PT" dirty="0"/>
+              <a:t> </a:t>
+            </a:r>
+            <a:r>
+              <a:rPr lang="pt-PT" dirty="0" err="1"/>
+              <a:t>directly</a:t>
+            </a:r>
+            <a:r>
+              <a:rPr lang="pt-PT" dirty="0"/>
+              <a:t> </a:t>
+            </a:r>
+            <a:r>
+              <a:rPr lang="pt-PT" dirty="0" err="1"/>
+              <a:t>into</a:t>
+            </a:r>
+            <a:r>
+              <a:rPr lang="pt-PT" dirty="0"/>
+              <a:t> </a:t>
+            </a:r>
+            <a:r>
+              <a:rPr lang="pt-PT" dirty="0" err="1"/>
+              <a:t>the</a:t>
+            </a:r>
+            <a:r>
+              <a:rPr lang="pt-PT" dirty="0"/>
+              <a:t> </a:t>
+            </a:r>
+            <a:r>
+              <a:rPr lang="pt-PT" dirty="0" err="1"/>
+              <a:t>conversation</a:t>
+            </a:r>
+            <a:r>
+              <a:rPr lang="pt-PT" dirty="0"/>
+              <a:t> </a:t>
+            </a:r>
+            <a:r>
+              <a:rPr lang="pt-PT" dirty="0" err="1"/>
+              <a:t>history</a:t>
+            </a:r>
+            <a:r>
+              <a:rPr lang="pt-PT" dirty="0"/>
+              <a:t>.</a:t>
+            </a:r>
+          </a:p>
+          <a:p>
+            <a:pPr>
               <a:lnSpc>
                 <a:spcPct val="150000"/>
               </a:lnSpc>
-              <a:buNone/>
             </a:pPr>
-            <a:r>
-              <a:rPr lang="en-US" sz="1125" dirty="0">
-                <a:solidFill>
-                  <a:srgbClr val="F4F1EA">
-                    <a:alpha val="65000"/>
-                  </a:srgbClr>
-                </a:solidFill>
-                <a:latin typeface="Space Grotesk" pitchFamily="34" charset="0"/>
-                <a:ea typeface="Space Grotesk" pitchFamily="34" charset="-122"/>
-                <a:cs typeface="Space Grotesk" pitchFamily="34" charset="-120"/>
-              </a:rPr>
-              <a:t>Pillars · retrieval · wordalisation · refusal. The product.</a:t>
-            </a:r>
-            <a:endParaRPr lang="en-US" sz="1125" dirty="0"/>
-          </a:p>
-        </p:txBody>
-      </p:sp>
-      <p:sp>
-        <p:nvSpPr>
-          <p:cNvPr id="14" name="Text 12"/>
-          <p:cNvSpPr/>
-          <p:nvPr/>
-        </p:nvSpPr>
-        <p:spPr>
-          <a:xfrm>
-            <a:off x="12115800" y="8529638"/>
-            <a:ext cx="368871" cy="185738"/>
-          </a:xfrm>
-          <a:prstGeom prst="rect">
-            <a:avLst/>
-          </a:prstGeom>
-          <a:noFill/>
-          <a:ln/>
-        </p:spPr>
-        <p:txBody>
-          <a:bodyPr wrap="square" lIns="25400" tIns="25400" rIns="25400" bIns="25400" rtlCol="0" anchor="t">
-            <a:normAutofit lnSpcReduction="10000"/>
-          </a:bodyPr>
-          <a:lstStyle/>
-          <a:p>
-            <a:pPr marL="0" indent="0" algn="l">
-              <a:buNone/>
-            </a:pPr>
-            <a:r>
-              <a:rPr lang="en-US" sz="900" kern="0" spc="36" dirty="0">
-                <a:solidFill>
-                  <a:srgbClr val="6C726B"/>
-                </a:solidFill>
-                <a:latin typeface="JetBrains Mono" pitchFamily="34" charset="0"/>
-                <a:ea typeface="JetBrains Mono" pitchFamily="34" charset="-122"/>
-                <a:cs typeface="JetBrains Mono" pitchFamily="34" charset="-120"/>
-              </a:rPr>
-              <a:t>NEXT</a:t>
-            </a:r>
-            <a:endParaRPr lang="en-US" sz="900" dirty="0"/>
-          </a:p>
-        </p:txBody>
-      </p:sp>
-      <p:sp>
-        <p:nvSpPr>
-          <p:cNvPr id="15" name="Text 13"/>
-          <p:cNvSpPr/>
-          <p:nvPr/>
-        </p:nvSpPr>
-        <p:spPr>
-          <a:xfrm>
-            <a:off x="12115800" y="8763000"/>
-            <a:ext cx="5494020" cy="352425"/>
-          </a:xfrm>
-          <a:prstGeom prst="rect">
-            <a:avLst/>
-          </a:prstGeom>
-          <a:noFill/>
-          <a:ln/>
-        </p:spPr>
-        <p:txBody>
-          <a:bodyPr wrap="square" lIns="25400" tIns="25400" rIns="25400" bIns="25400" rtlCol="0" anchor="t">
-            <a:normAutofit/>
-          </a:bodyPr>
-          <a:lstStyle/>
-          <a:p>
-            <a:pPr marL="0" indent="0" algn="l">
-              <a:buNone/>
-            </a:pPr>
-            <a:r>
-              <a:rPr lang="en-US" sz="1950" b="1" kern="0" spc="-39" dirty="0">
-                <a:solidFill>
-                  <a:srgbClr val="6FD29A"/>
-                </a:solidFill>
-                <a:latin typeface="Space Grotesk" pitchFamily="34" charset="0"/>
-                <a:ea typeface="Space Grotesk" pitchFamily="34" charset="-122"/>
-                <a:cs typeface="Space Grotesk" pitchFamily="34" charset="-120"/>
-              </a:rPr>
-              <a:t>Build the six functions.</a:t>
-            </a:r>
-            <a:endParaRPr lang="en-US" sz="1950" dirty="0"/>
-          </a:p>
-        </p:txBody>
-      </p:sp>
-      <p:sp>
-        <p:nvSpPr>
-          <p:cNvPr id="16" name="Text 14"/>
-          <p:cNvSpPr/>
-          <p:nvPr/>
-        </p:nvSpPr>
-        <p:spPr>
-          <a:xfrm>
-            <a:off x="12115800" y="9153525"/>
-            <a:ext cx="5494020" cy="252413"/>
-          </a:xfrm>
-          <a:prstGeom prst="rect">
-            <a:avLst/>
-          </a:prstGeom>
-          <a:noFill/>
-          <a:ln/>
-        </p:spPr>
-        <p:txBody>
-          <a:bodyPr wrap="square" lIns="25400" tIns="25400" rIns="25400" bIns="25400" rtlCol="0" anchor="t">
-            <a:normAutofit fontScale="92500" lnSpcReduction="10000"/>
-          </a:bodyPr>
-          <a:lstStyle/>
-          <a:p>
-            <a:pPr marL="0" indent="0" algn="l">
-              <a:lnSpc>
-                <a:spcPct val="150000"/>
-              </a:lnSpc>
-              <a:buNone/>
-            </a:pPr>
-            <a:r>
-              <a:rPr lang="en-US" sz="1125" dirty="0">
-                <a:solidFill>
-                  <a:srgbClr val="F4F1EA">
-                    <a:alpha val="65000"/>
-                  </a:srgbClr>
-                </a:solidFill>
-                <a:latin typeface="Space Grotesk" pitchFamily="34" charset="0"/>
-                <a:ea typeface="Space Grotesk" pitchFamily="34" charset="-122"/>
-                <a:cs typeface="Space Grotesk" pitchFamily="34" charset="-120"/>
-              </a:rPr>
-              <a:t>Three wordalisations, three ask-templates, one knowledge base.</a:t>
-            </a:r>
-            <a:endParaRPr lang="en-US" sz="1125" dirty="0"/>
-          </a:p>
-        </p:txBody>
-      </p:sp>
-      <p:sp>
-        <p:nvSpPr>
-          <p:cNvPr id="17" name="Shape 15"/>
-          <p:cNvSpPr/>
-          <p:nvPr/>
-        </p:nvSpPr>
-        <p:spPr>
-          <a:xfrm>
-            <a:off x="838200" y="9558338"/>
-            <a:ext cx="16611600" cy="9525"/>
+            <a:endParaRPr lang="en-US" sz="1650" dirty="0"/>
+          </a:p>
+        </p:txBody>
+      </p:sp>
+      <p:sp>
+        <p:nvSpPr>
+          <p:cNvPr id="11" name="Shape 0">
+            <a:extLst>
+              <a:ext uri="{FF2B5EF4-FFF2-40B4-BE49-F238E27FC236}">
+                <a16:creationId xmlns:a16="http://schemas.microsoft.com/office/drawing/2014/main" id="{27B50DB2-CA19-D0EC-681D-8AE2A0B299F0}"/>
+              </a:ext>
+            </a:extLst>
+          </p:cNvPr>
+          <p:cNvSpPr/>
+          <p:nvPr/>
+        </p:nvSpPr>
+        <p:spPr>
+          <a:xfrm>
+            <a:off x="838200" y="6321921"/>
+            <a:ext cx="1800000" cy="9525"/>
           </a:xfrm>
           <a:prstGeom prst="rect">
             <a:avLst/>
           </a:prstGeom>
           <a:solidFill>
-            <a:srgbClr val="F4F1EA">
-              <a:alpha val="18000"/>
+            <a:srgbClr val="0E1410">
+              <a:alpha val="12000"/>
             </a:srgbClr>
           </a:solidFill>
           <a:ln/>
@@ -9787,91 +14760,1390 @@
       </p:sp>
       <p:sp>
         <p:nvSpPr>
-          <p:cNvPr id="18" name="Text 16"/>
-          <p:cNvSpPr/>
-          <p:nvPr/>
-        </p:nvSpPr>
-        <p:spPr>
-          <a:xfrm>
-            <a:off x="838200" y="9720263"/>
-            <a:ext cx="2637099" cy="185738"/>
+          <p:cNvPr id="12" name="Shape 5">
+            <a:extLst>
+              <a:ext uri="{FF2B5EF4-FFF2-40B4-BE49-F238E27FC236}">
+                <a16:creationId xmlns:a16="http://schemas.microsoft.com/office/drawing/2014/main" id="{4EE2F9C3-B2C6-15A4-EB1E-92780FE894EF}"/>
+              </a:ext>
+            </a:extLst>
+          </p:cNvPr>
+          <p:cNvSpPr/>
+          <p:nvPr/>
+        </p:nvSpPr>
+        <p:spPr>
+          <a:xfrm>
+            <a:off x="8902523" y="1495426"/>
+            <a:ext cx="7604978" cy="1214591"/>
+          </a:xfrm>
+          <a:prstGeom prst="roundRect">
+            <a:avLst>
+              <a:gd name="adj" fmla="val 15353"/>
+            </a:avLst>
+          </a:prstGeom>
+          <a:solidFill>
+            <a:srgbClr val="FBF9F3"/>
+          </a:solidFill>
+          <a:ln w="9525">
+            <a:solidFill>
+              <a:srgbClr val="0E1410">
+                <a:alpha val="12000"/>
+              </a:srgbClr>
+            </a:solidFill>
+            <a:prstDash val="solid"/>
+          </a:ln>
+        </p:spPr>
+        <p:txBody>
+          <a:bodyPr/>
+          <a:lstStyle/>
+          <a:p>
+            <a:endParaRPr lang="pt-PT" dirty="0"/>
+          </a:p>
+        </p:txBody>
+      </p:sp>
+      <p:sp>
+        <p:nvSpPr>
+          <p:cNvPr id="13" name="CaixaDeTexto 12">
+            <a:extLst>
+              <a:ext uri="{FF2B5EF4-FFF2-40B4-BE49-F238E27FC236}">
+                <a16:creationId xmlns:a16="http://schemas.microsoft.com/office/drawing/2014/main" id="{EDDBF26A-DC45-8763-6BBC-5F13B5E9FD7E}"/>
+              </a:ext>
+            </a:extLst>
+          </p:cNvPr>
+          <p:cNvSpPr txBox="1"/>
+          <p:nvPr/>
+        </p:nvSpPr>
+        <p:spPr>
+          <a:xfrm>
+            <a:off x="10005271" y="1792821"/>
+            <a:ext cx="2766349" cy="646331"/>
           </a:xfrm>
           <a:prstGeom prst="rect">
             <a:avLst/>
           </a:prstGeom>
           <a:noFill/>
-          <a:ln/>
-        </p:spPr>
-        <p:txBody>
-          <a:bodyPr wrap="square" lIns="25400" tIns="25400" rIns="25400" bIns="25400" rtlCol="0" anchor="t">
-            <a:normAutofit lnSpcReduction="10000"/>
+        </p:spPr>
+        <p:txBody>
+          <a:bodyPr wrap="square" rtlCol="0">
+            <a:spAutoFit/>
           </a:bodyPr>
           <a:lstStyle/>
           <a:p>
-            <a:pPr marL="0" indent="0" algn="l">
-              <a:buNone/>
-            </a:pPr>
-            <a:r>
-              <a:rPr lang="en-US" sz="900" kern="0" spc="36" dirty="0">
-                <a:solidFill>
-                  <a:srgbClr val="F4F1EA">
-                    <a:alpha val="45000"/>
-                  </a:srgbClr>
-                </a:solidFill>
-                <a:latin typeface="JetBrains Mono" pitchFamily="34" charset="0"/>
-                <a:ea typeface="JetBrains Mono" pitchFamily="34" charset="-122"/>
-                <a:cs typeface="JetBrains Mono" pitchFamily="34" charset="-120"/>
-              </a:rPr>
-              <a:t>TWELVE · CONTEXT ENGINEERING · 2026</a:t>
-            </a:r>
-            <a:endParaRPr lang="en-US" sz="900" dirty="0"/>
-          </a:p>
-        </p:txBody>
-      </p:sp>
-      <p:sp>
-        <p:nvSpPr>
-          <p:cNvPr id="19" name="Text 17"/>
-          <p:cNvSpPr/>
-          <p:nvPr/>
-        </p:nvSpPr>
-        <p:spPr>
-          <a:xfrm>
-            <a:off x="16059894" y="9720263"/>
-            <a:ext cx="1466106" cy="185738"/>
+            <a:r>
+              <a:rPr lang="pt-PT" b="1" dirty="0">
+                <a:solidFill>
+                  <a:schemeClr val="bg2">
+                    <a:lumMod val="25000"/>
+                  </a:schemeClr>
+                </a:solidFill>
+              </a:rPr>
+              <a:t>METRICS </a:t>
+            </a:r>
+          </a:p>
+          <a:p>
+            <a:r>
+              <a:rPr lang="pt-PT" b="1" dirty="0">
+                <a:solidFill>
+                  <a:schemeClr val="bg2">
+                    <a:lumMod val="25000"/>
+                  </a:schemeClr>
+                </a:solidFill>
+              </a:rPr>
+              <a:t>DEFINITIONS</a:t>
+            </a:r>
+          </a:p>
+        </p:txBody>
+      </p:sp>
+      <p:sp>
+        <p:nvSpPr>
+          <p:cNvPr id="15" name="CaixaDeTexto 14">
+            <a:extLst>
+              <a:ext uri="{FF2B5EF4-FFF2-40B4-BE49-F238E27FC236}">
+                <a16:creationId xmlns:a16="http://schemas.microsoft.com/office/drawing/2014/main" id="{EA142B10-5244-2FF6-16E8-0C83CA26E4D4}"/>
+              </a:ext>
+            </a:extLst>
+          </p:cNvPr>
+          <p:cNvSpPr txBox="1"/>
+          <p:nvPr/>
+        </p:nvSpPr>
+        <p:spPr>
+          <a:xfrm>
+            <a:off x="12943493" y="1792821"/>
+            <a:ext cx="3424747" cy="646331"/>
           </a:xfrm>
           <a:prstGeom prst="rect">
             <a:avLst/>
           </a:prstGeom>
           <a:noFill/>
-          <a:ln/>
-        </p:spPr>
-        <p:txBody>
-          <a:bodyPr wrap="square" lIns="25400" tIns="25400" rIns="25400" bIns="25400" rtlCol="0" anchor="t">
-            <a:normAutofit lnSpcReduction="10000"/>
+        </p:spPr>
+        <p:txBody>
+          <a:bodyPr wrap="square" rtlCol="0">
+            <a:spAutoFit/>
           </a:bodyPr>
           <a:lstStyle/>
           <a:p>
-            <a:pPr marL="0" indent="0" algn="l">
-              <a:buNone/>
-            </a:pPr>
-            <a:r>
-              <a:rPr lang="en-US" sz="900" kern="0" spc="36" dirty="0">
-                <a:solidFill>
-                  <a:srgbClr val="F4F1EA">
-                    <a:alpha val="45000"/>
-                  </a:srgbClr>
-                </a:solidFill>
-                <a:latin typeface="JetBrains Mono" pitchFamily="34" charset="0"/>
-                <a:ea typeface="JetBrains Mono" pitchFamily="34" charset="-122"/>
-                <a:cs typeface="JetBrains Mono" pitchFamily="34" charset="-120"/>
-              </a:rPr>
-              <a:t>SESSION CTXENG / 11</a:t>
-            </a:r>
-            <a:endParaRPr lang="en-US" sz="900" dirty="0"/>
+            <a:r>
+              <a:rPr lang="pt-PT" i="1" dirty="0" err="1">
+                <a:solidFill>
+                  <a:schemeClr val="bg2">
+                    <a:lumMod val="25000"/>
+                  </a:schemeClr>
+                </a:solidFill>
+              </a:rPr>
+              <a:t>What</a:t>
+            </a:r>
+            <a:r>
+              <a:rPr lang="pt-PT" i="1" dirty="0">
+                <a:solidFill>
+                  <a:schemeClr val="bg2">
+                    <a:lumMod val="25000"/>
+                  </a:schemeClr>
+                </a:solidFill>
+              </a:rPr>
+              <a:t> do PSV-99, COD, HSR, Sprint, etc.. </a:t>
+            </a:r>
+            <a:r>
+              <a:rPr lang="pt-PT" i="1" dirty="0" err="1">
+                <a:solidFill>
+                  <a:schemeClr val="bg2">
+                    <a:lumMod val="25000"/>
+                  </a:schemeClr>
+                </a:solidFill>
+              </a:rPr>
+              <a:t>actually</a:t>
+            </a:r>
+            <a:r>
+              <a:rPr lang="pt-PT" i="1" dirty="0">
+                <a:solidFill>
+                  <a:schemeClr val="bg2">
+                    <a:lumMod val="25000"/>
+                  </a:schemeClr>
+                </a:solidFill>
+              </a:rPr>
+              <a:t> </a:t>
+            </a:r>
+            <a:r>
+              <a:rPr lang="pt-PT" i="1" dirty="0" err="1">
+                <a:solidFill>
+                  <a:schemeClr val="bg2">
+                    <a:lumMod val="25000"/>
+                  </a:schemeClr>
+                </a:solidFill>
+              </a:rPr>
+              <a:t>measure</a:t>
+            </a:r>
+            <a:r>
+              <a:rPr lang="pt-PT" i="1" dirty="0">
+                <a:solidFill>
+                  <a:schemeClr val="bg2">
+                    <a:lumMod val="25000"/>
+                  </a:schemeClr>
+                </a:solidFill>
+              </a:rPr>
+              <a:t>...</a:t>
+            </a:r>
+          </a:p>
+        </p:txBody>
+      </p:sp>
+      <p:sp>
+        <p:nvSpPr>
+          <p:cNvPr id="17" name="CaixaDeTexto 16">
+            <a:extLst>
+              <a:ext uri="{FF2B5EF4-FFF2-40B4-BE49-F238E27FC236}">
+                <a16:creationId xmlns:a16="http://schemas.microsoft.com/office/drawing/2014/main" id="{3273207E-E7AF-080D-21A3-5B36148915DD}"/>
+              </a:ext>
+            </a:extLst>
+          </p:cNvPr>
+          <p:cNvSpPr txBox="1"/>
+          <p:nvPr/>
+        </p:nvSpPr>
+        <p:spPr>
+          <a:xfrm>
+            <a:off x="9158820" y="1718000"/>
+            <a:ext cx="1125471" cy="769441"/>
+          </a:xfrm>
+          <a:prstGeom prst="rect">
+            <a:avLst/>
+          </a:prstGeom>
+          <a:noFill/>
+        </p:spPr>
+        <p:txBody>
+          <a:bodyPr wrap="square">
+            <a:spAutoFit/>
+          </a:bodyPr>
+          <a:lstStyle/>
+          <a:p>
+            <a:r>
+              <a:rPr lang="pt-PT" sz="4400" b="1" dirty="0">
+                <a:solidFill>
+                  <a:schemeClr val="bg2">
+                    <a:lumMod val="25000"/>
+                  </a:schemeClr>
+                </a:solidFill>
+              </a:rPr>
+              <a:t>16</a:t>
+            </a:r>
+            <a:endParaRPr lang="pt-PT" dirty="0"/>
+          </a:p>
+        </p:txBody>
+      </p:sp>
+      <p:sp>
+        <p:nvSpPr>
+          <p:cNvPr id="19" name="Shape 5">
+            <a:extLst>
+              <a:ext uri="{FF2B5EF4-FFF2-40B4-BE49-F238E27FC236}">
+                <a16:creationId xmlns:a16="http://schemas.microsoft.com/office/drawing/2014/main" id="{9581CE1A-637A-B30E-5943-2A10551649A4}"/>
+              </a:ext>
+            </a:extLst>
+          </p:cNvPr>
+          <p:cNvSpPr/>
+          <p:nvPr/>
+        </p:nvSpPr>
+        <p:spPr>
+          <a:xfrm>
+            <a:off x="8902523" y="3017855"/>
+            <a:ext cx="7604978" cy="1214591"/>
+          </a:xfrm>
+          <a:prstGeom prst="roundRect">
+            <a:avLst>
+              <a:gd name="adj" fmla="val 15353"/>
+            </a:avLst>
+          </a:prstGeom>
+          <a:solidFill>
+            <a:srgbClr val="FBF9F3"/>
+          </a:solidFill>
+          <a:ln w="9525">
+            <a:solidFill>
+              <a:srgbClr val="0E1410">
+                <a:alpha val="12000"/>
+              </a:srgbClr>
+            </a:solidFill>
+            <a:prstDash val="solid"/>
+          </a:ln>
+        </p:spPr>
+        <p:txBody>
+          <a:bodyPr/>
+          <a:lstStyle/>
+          <a:p>
+            <a:endParaRPr lang="pt-PT" dirty="0"/>
+          </a:p>
+        </p:txBody>
+      </p:sp>
+      <p:sp>
+        <p:nvSpPr>
+          <p:cNvPr id="20" name="CaixaDeTexto 19">
+            <a:extLst>
+              <a:ext uri="{FF2B5EF4-FFF2-40B4-BE49-F238E27FC236}">
+                <a16:creationId xmlns:a16="http://schemas.microsoft.com/office/drawing/2014/main" id="{24955F41-CDC6-9D5C-B114-0ECF99C302D3}"/>
+              </a:ext>
+            </a:extLst>
+          </p:cNvPr>
+          <p:cNvSpPr txBox="1"/>
+          <p:nvPr/>
+        </p:nvSpPr>
+        <p:spPr>
+          <a:xfrm>
+            <a:off x="10005271" y="3315250"/>
+            <a:ext cx="2766349" cy="646331"/>
+          </a:xfrm>
+          <a:prstGeom prst="rect">
+            <a:avLst/>
+          </a:prstGeom>
+          <a:noFill/>
+        </p:spPr>
+        <p:txBody>
+          <a:bodyPr wrap="square" rtlCol="0">
+            <a:spAutoFit/>
+          </a:bodyPr>
+          <a:lstStyle/>
+          <a:p>
+            <a:r>
+              <a:rPr lang="pt-PT" b="1" dirty="0">
+                <a:solidFill>
+                  <a:schemeClr val="bg2">
+                    <a:lumMod val="25000"/>
+                  </a:schemeClr>
+                </a:solidFill>
+              </a:rPr>
+              <a:t>ATTRIBUTE</a:t>
+            </a:r>
+          </a:p>
+          <a:p>
+            <a:r>
+              <a:rPr lang="pt-PT" b="1" dirty="0">
+                <a:solidFill>
+                  <a:schemeClr val="bg2">
+                    <a:lumMod val="25000"/>
+                  </a:schemeClr>
+                </a:solidFill>
+              </a:rPr>
+              <a:t>MEANING</a:t>
+            </a:r>
+          </a:p>
+        </p:txBody>
+      </p:sp>
+      <p:sp>
+        <p:nvSpPr>
+          <p:cNvPr id="21" name="CaixaDeTexto 20">
+            <a:extLst>
+              <a:ext uri="{FF2B5EF4-FFF2-40B4-BE49-F238E27FC236}">
+                <a16:creationId xmlns:a16="http://schemas.microsoft.com/office/drawing/2014/main" id="{0E9481A0-D0B9-1173-AA7E-5C4240056911}"/>
+              </a:ext>
+            </a:extLst>
+          </p:cNvPr>
+          <p:cNvSpPr txBox="1"/>
+          <p:nvPr/>
+        </p:nvSpPr>
+        <p:spPr>
+          <a:xfrm>
+            <a:off x="12943493" y="3315250"/>
+            <a:ext cx="3424747" cy="646331"/>
+          </a:xfrm>
+          <a:prstGeom prst="rect">
+            <a:avLst/>
+          </a:prstGeom>
+          <a:noFill/>
+        </p:spPr>
+        <p:txBody>
+          <a:bodyPr wrap="square" rtlCol="0">
+            <a:spAutoFit/>
+          </a:bodyPr>
+          <a:lstStyle/>
+          <a:p>
+            <a:r>
+              <a:rPr lang="pt-PT" i="1" dirty="0" err="1">
+                <a:solidFill>
+                  <a:schemeClr val="bg2">
+                    <a:lumMod val="25000"/>
+                  </a:schemeClr>
+                </a:solidFill>
+              </a:rPr>
+              <a:t>What</a:t>
+            </a:r>
+            <a:r>
+              <a:rPr lang="pt-PT" i="1" dirty="0">
+                <a:solidFill>
+                  <a:schemeClr val="bg2">
+                    <a:lumMod val="25000"/>
+                  </a:schemeClr>
+                </a:solidFill>
+              </a:rPr>
+              <a:t> Speed, </a:t>
+            </a:r>
+            <a:r>
+              <a:rPr lang="pt-PT" i="1" dirty="0" err="1">
+                <a:solidFill>
+                  <a:schemeClr val="bg2">
+                    <a:lumMod val="25000"/>
+                  </a:schemeClr>
+                </a:solidFill>
+              </a:rPr>
+              <a:t>Acceleration</a:t>
+            </a:r>
+            <a:r>
+              <a:rPr lang="pt-PT" i="1" dirty="0">
+                <a:solidFill>
+                  <a:schemeClr val="bg2">
+                    <a:lumMod val="25000"/>
+                  </a:schemeClr>
+                </a:solidFill>
+              </a:rPr>
+              <a:t>, </a:t>
+            </a:r>
+            <a:r>
+              <a:rPr lang="pt-PT" i="1" dirty="0" err="1">
+                <a:solidFill>
+                  <a:schemeClr val="bg2">
+                    <a:lumMod val="25000"/>
+                  </a:schemeClr>
+                </a:solidFill>
+              </a:rPr>
+              <a:t>Agility</a:t>
+            </a:r>
+            <a:r>
+              <a:rPr lang="pt-PT" i="1" dirty="0">
+                <a:solidFill>
+                  <a:schemeClr val="bg2">
+                    <a:lumMod val="25000"/>
+                  </a:schemeClr>
+                </a:solidFill>
+              </a:rPr>
+              <a:t>, etc... </a:t>
+            </a:r>
+            <a:r>
+              <a:rPr lang="pt-PT" i="1" dirty="0" err="1">
+                <a:solidFill>
+                  <a:schemeClr val="bg2">
+                    <a:lumMod val="25000"/>
+                  </a:schemeClr>
+                </a:solidFill>
+              </a:rPr>
+              <a:t>imply</a:t>
+            </a:r>
+            <a:r>
+              <a:rPr lang="pt-PT" i="1" dirty="0">
+                <a:solidFill>
+                  <a:schemeClr val="bg2">
+                    <a:lumMod val="25000"/>
+                  </a:schemeClr>
+                </a:solidFill>
+              </a:rPr>
+              <a:t>.</a:t>
+            </a:r>
+          </a:p>
+        </p:txBody>
+      </p:sp>
+      <p:sp>
+        <p:nvSpPr>
+          <p:cNvPr id="22" name="CaixaDeTexto 21">
+            <a:extLst>
+              <a:ext uri="{FF2B5EF4-FFF2-40B4-BE49-F238E27FC236}">
+                <a16:creationId xmlns:a16="http://schemas.microsoft.com/office/drawing/2014/main" id="{71D1029D-C35B-5947-4DA7-5831F4FC29B2}"/>
+              </a:ext>
+            </a:extLst>
+          </p:cNvPr>
+          <p:cNvSpPr txBox="1"/>
+          <p:nvPr/>
+        </p:nvSpPr>
+        <p:spPr>
+          <a:xfrm>
+            <a:off x="9158820" y="3240429"/>
+            <a:ext cx="1125471" cy="769441"/>
+          </a:xfrm>
+          <a:prstGeom prst="rect">
+            <a:avLst/>
+          </a:prstGeom>
+          <a:noFill/>
+        </p:spPr>
+        <p:txBody>
+          <a:bodyPr wrap="square">
+            <a:spAutoFit/>
+          </a:bodyPr>
+          <a:lstStyle/>
+          <a:p>
+            <a:r>
+              <a:rPr lang="pt-PT" sz="4400" b="1" dirty="0">
+                <a:solidFill>
+                  <a:schemeClr val="bg2">
+                    <a:lumMod val="25000"/>
+                  </a:schemeClr>
+                </a:solidFill>
+              </a:rPr>
+              <a:t>8</a:t>
+            </a:r>
+            <a:endParaRPr lang="pt-PT" dirty="0"/>
+          </a:p>
+        </p:txBody>
+      </p:sp>
+      <p:sp>
+        <p:nvSpPr>
+          <p:cNvPr id="23" name="Shape 5">
+            <a:extLst>
+              <a:ext uri="{FF2B5EF4-FFF2-40B4-BE49-F238E27FC236}">
+                <a16:creationId xmlns:a16="http://schemas.microsoft.com/office/drawing/2014/main" id="{AF67A995-AD91-4DF1-FA1B-1FDD88C8D2DB}"/>
+              </a:ext>
+            </a:extLst>
+          </p:cNvPr>
+          <p:cNvSpPr/>
+          <p:nvPr/>
+        </p:nvSpPr>
+        <p:spPr>
+          <a:xfrm>
+            <a:off x="8902523" y="4542771"/>
+            <a:ext cx="7604978" cy="1214591"/>
+          </a:xfrm>
+          <a:prstGeom prst="roundRect">
+            <a:avLst>
+              <a:gd name="adj" fmla="val 15353"/>
+            </a:avLst>
+          </a:prstGeom>
+          <a:solidFill>
+            <a:srgbClr val="FBF9F3"/>
+          </a:solidFill>
+          <a:ln w="9525">
+            <a:solidFill>
+              <a:srgbClr val="0E1410">
+                <a:alpha val="12000"/>
+              </a:srgbClr>
+            </a:solidFill>
+            <a:prstDash val="solid"/>
+          </a:ln>
+        </p:spPr>
+        <p:txBody>
+          <a:bodyPr/>
+          <a:lstStyle/>
+          <a:p>
+            <a:endParaRPr lang="pt-PT" dirty="0"/>
+          </a:p>
+        </p:txBody>
+      </p:sp>
+      <p:sp>
+        <p:nvSpPr>
+          <p:cNvPr id="24" name="CaixaDeTexto 23">
+            <a:extLst>
+              <a:ext uri="{FF2B5EF4-FFF2-40B4-BE49-F238E27FC236}">
+                <a16:creationId xmlns:a16="http://schemas.microsoft.com/office/drawing/2014/main" id="{5AA9A655-C47B-5DD3-E860-887E93B500CD}"/>
+              </a:ext>
+            </a:extLst>
+          </p:cNvPr>
+          <p:cNvSpPr txBox="1"/>
+          <p:nvPr/>
+        </p:nvSpPr>
+        <p:spPr>
+          <a:xfrm>
+            <a:off x="10005271" y="4840166"/>
+            <a:ext cx="2766349" cy="646331"/>
+          </a:xfrm>
+          <a:prstGeom prst="rect">
+            <a:avLst/>
+          </a:prstGeom>
+          <a:noFill/>
+        </p:spPr>
+        <p:txBody>
+          <a:bodyPr wrap="square" rtlCol="0">
+            <a:spAutoFit/>
+          </a:bodyPr>
+          <a:lstStyle/>
+          <a:p>
+            <a:r>
+              <a:rPr lang="pt-PT" b="1" dirty="0">
+                <a:solidFill>
+                  <a:schemeClr val="bg2">
+                    <a:lumMod val="25000"/>
+                  </a:schemeClr>
+                </a:solidFill>
+              </a:rPr>
+              <a:t>ATTRIBUTE</a:t>
+            </a:r>
+          </a:p>
+          <a:p>
+            <a:r>
+              <a:rPr lang="pt-PT" b="1" dirty="0">
+                <a:solidFill>
+                  <a:schemeClr val="bg2">
+                    <a:lumMod val="25000"/>
+                  </a:schemeClr>
+                </a:solidFill>
+              </a:rPr>
+              <a:t>COMBINATIONS</a:t>
+            </a:r>
+          </a:p>
+        </p:txBody>
+      </p:sp>
+      <p:sp>
+        <p:nvSpPr>
+          <p:cNvPr id="25" name="CaixaDeTexto 24">
+            <a:extLst>
+              <a:ext uri="{FF2B5EF4-FFF2-40B4-BE49-F238E27FC236}">
+                <a16:creationId xmlns:a16="http://schemas.microsoft.com/office/drawing/2014/main" id="{802EBAE6-80B1-A278-3607-72394F997E0E}"/>
+              </a:ext>
+            </a:extLst>
+          </p:cNvPr>
+          <p:cNvSpPr txBox="1"/>
+          <p:nvPr/>
+        </p:nvSpPr>
+        <p:spPr>
+          <a:xfrm>
+            <a:off x="12943493" y="4840166"/>
+            <a:ext cx="3424747" cy="646331"/>
+          </a:xfrm>
+          <a:prstGeom prst="rect">
+            <a:avLst/>
+          </a:prstGeom>
+          <a:noFill/>
+        </p:spPr>
+        <p:txBody>
+          <a:bodyPr wrap="square" rtlCol="0">
+            <a:spAutoFit/>
+          </a:bodyPr>
+          <a:lstStyle/>
+          <a:p>
+            <a:r>
+              <a:rPr lang="pt-PT" i="1" dirty="0" err="1">
+                <a:solidFill>
+                  <a:schemeClr val="bg2">
+                    <a:lumMod val="25000"/>
+                  </a:schemeClr>
+                </a:solidFill>
+              </a:rPr>
+              <a:t>How</a:t>
+            </a:r>
+            <a:r>
+              <a:rPr lang="pt-PT" i="1" dirty="0">
+                <a:solidFill>
+                  <a:schemeClr val="bg2">
+                    <a:lumMod val="25000"/>
+                  </a:schemeClr>
+                </a:solidFill>
+              </a:rPr>
+              <a:t> </a:t>
+            </a:r>
+            <a:r>
+              <a:rPr lang="pt-PT" i="1" dirty="0" err="1">
+                <a:solidFill>
+                  <a:schemeClr val="bg2">
+                    <a:lumMod val="25000"/>
+                  </a:schemeClr>
+                </a:solidFill>
+              </a:rPr>
+              <a:t>pairs</a:t>
+            </a:r>
+            <a:r>
+              <a:rPr lang="pt-PT" i="1" dirty="0">
+                <a:solidFill>
+                  <a:schemeClr val="bg2">
+                    <a:lumMod val="25000"/>
+                  </a:schemeClr>
+                </a:solidFill>
+              </a:rPr>
+              <a:t>  </a:t>
+            </a:r>
+            <a:r>
+              <a:rPr lang="pt-PT" i="1" dirty="0" err="1">
+                <a:solidFill>
+                  <a:schemeClr val="bg2">
+                    <a:lumMod val="25000"/>
+                  </a:schemeClr>
+                </a:solidFill>
+              </a:rPr>
+              <a:t>of</a:t>
+            </a:r>
+            <a:r>
+              <a:rPr lang="pt-PT" i="1" dirty="0">
+                <a:solidFill>
+                  <a:schemeClr val="bg2">
+                    <a:lumMod val="25000"/>
+                  </a:schemeClr>
+                </a:solidFill>
+              </a:rPr>
+              <a:t> </a:t>
+            </a:r>
+            <a:r>
+              <a:rPr lang="pt-PT" i="1" dirty="0" err="1">
+                <a:solidFill>
+                  <a:schemeClr val="bg2">
+                    <a:lumMod val="25000"/>
+                  </a:schemeClr>
+                </a:solidFill>
+              </a:rPr>
+              <a:t>attributes</a:t>
+            </a:r>
+            <a:r>
+              <a:rPr lang="pt-PT" i="1" dirty="0">
+                <a:solidFill>
+                  <a:schemeClr val="bg2">
+                    <a:lumMod val="25000"/>
+                  </a:schemeClr>
+                </a:solidFill>
+              </a:rPr>
+              <a:t> </a:t>
+            </a:r>
+            <a:r>
+              <a:rPr lang="pt-PT" i="1" dirty="0" err="1">
+                <a:solidFill>
+                  <a:schemeClr val="bg2">
+                    <a:lumMod val="25000"/>
+                  </a:schemeClr>
+                </a:solidFill>
+              </a:rPr>
+              <a:t>interact</a:t>
+            </a:r>
+            <a:r>
+              <a:rPr lang="pt-PT" i="1" dirty="0">
+                <a:solidFill>
+                  <a:schemeClr val="bg2">
+                    <a:lumMod val="25000"/>
+                  </a:schemeClr>
+                </a:solidFill>
+              </a:rPr>
+              <a:t> (e.g. fast </a:t>
+            </a:r>
+            <a:r>
+              <a:rPr lang="pt-PT" i="1" dirty="0" err="1">
+                <a:solidFill>
+                  <a:schemeClr val="bg2">
+                    <a:lumMod val="25000"/>
+                  </a:schemeClr>
+                </a:solidFill>
+              </a:rPr>
+              <a:t>but</a:t>
+            </a:r>
+            <a:r>
+              <a:rPr lang="pt-PT" i="1" dirty="0">
+                <a:solidFill>
+                  <a:schemeClr val="bg2">
+                    <a:lumMod val="25000"/>
+                  </a:schemeClr>
+                </a:solidFill>
+              </a:rPr>
+              <a:t> </a:t>
+            </a:r>
+            <a:r>
+              <a:rPr lang="pt-PT" i="1" dirty="0" err="1">
+                <a:solidFill>
+                  <a:schemeClr val="bg2">
+                    <a:lumMod val="25000"/>
+                  </a:schemeClr>
+                </a:solidFill>
+              </a:rPr>
+              <a:t>low</a:t>
+            </a:r>
+            <a:r>
+              <a:rPr lang="pt-PT" i="1" dirty="0">
+                <a:solidFill>
+                  <a:schemeClr val="bg2">
+                    <a:lumMod val="25000"/>
+                  </a:schemeClr>
+                </a:solidFill>
+              </a:rPr>
+              <a:t> endurance)</a:t>
+            </a:r>
+          </a:p>
+        </p:txBody>
+      </p:sp>
+      <p:sp>
+        <p:nvSpPr>
+          <p:cNvPr id="26" name="CaixaDeTexto 25">
+            <a:extLst>
+              <a:ext uri="{FF2B5EF4-FFF2-40B4-BE49-F238E27FC236}">
+                <a16:creationId xmlns:a16="http://schemas.microsoft.com/office/drawing/2014/main" id="{0F8A563A-8AC1-21DF-9189-0440CA15AAD2}"/>
+              </a:ext>
+            </a:extLst>
+          </p:cNvPr>
+          <p:cNvSpPr txBox="1"/>
+          <p:nvPr/>
+        </p:nvSpPr>
+        <p:spPr>
+          <a:xfrm>
+            <a:off x="9158820" y="4765345"/>
+            <a:ext cx="1125471" cy="769441"/>
+          </a:xfrm>
+          <a:prstGeom prst="rect">
+            <a:avLst/>
+          </a:prstGeom>
+          <a:noFill/>
+        </p:spPr>
+        <p:txBody>
+          <a:bodyPr wrap="square">
+            <a:spAutoFit/>
+          </a:bodyPr>
+          <a:lstStyle/>
+          <a:p>
+            <a:r>
+              <a:rPr lang="pt-PT" sz="4400" b="1" dirty="0">
+                <a:solidFill>
+                  <a:schemeClr val="bg2">
+                    <a:lumMod val="25000"/>
+                  </a:schemeClr>
+                </a:solidFill>
+              </a:rPr>
+              <a:t>8</a:t>
+            </a:r>
+            <a:endParaRPr lang="pt-PT" dirty="0"/>
+          </a:p>
+        </p:txBody>
+      </p:sp>
+      <p:sp>
+        <p:nvSpPr>
+          <p:cNvPr id="35" name="Shape 5">
+            <a:extLst>
+              <a:ext uri="{FF2B5EF4-FFF2-40B4-BE49-F238E27FC236}">
+                <a16:creationId xmlns:a16="http://schemas.microsoft.com/office/drawing/2014/main" id="{C01C7A8E-3BA3-7786-8A78-B07E1C857500}"/>
+              </a:ext>
+            </a:extLst>
+          </p:cNvPr>
+          <p:cNvSpPr/>
+          <p:nvPr/>
+        </p:nvSpPr>
+        <p:spPr>
+          <a:xfrm>
+            <a:off x="8902523" y="6053445"/>
+            <a:ext cx="7604978" cy="1214591"/>
+          </a:xfrm>
+          <a:prstGeom prst="roundRect">
+            <a:avLst>
+              <a:gd name="adj" fmla="val 15353"/>
+            </a:avLst>
+          </a:prstGeom>
+          <a:solidFill>
+            <a:srgbClr val="FBF9F3"/>
+          </a:solidFill>
+          <a:ln w="9525">
+            <a:solidFill>
+              <a:srgbClr val="0E1410">
+                <a:alpha val="12000"/>
+              </a:srgbClr>
+            </a:solidFill>
+            <a:prstDash val="solid"/>
+          </a:ln>
+        </p:spPr>
+        <p:txBody>
+          <a:bodyPr/>
+          <a:lstStyle/>
+          <a:p>
+            <a:endParaRPr lang="pt-PT" dirty="0"/>
+          </a:p>
+        </p:txBody>
+      </p:sp>
+      <p:sp>
+        <p:nvSpPr>
+          <p:cNvPr id="36" name="CaixaDeTexto 35">
+            <a:extLst>
+              <a:ext uri="{FF2B5EF4-FFF2-40B4-BE49-F238E27FC236}">
+                <a16:creationId xmlns:a16="http://schemas.microsoft.com/office/drawing/2014/main" id="{C295B174-E250-2B03-4690-84ACC4C6E030}"/>
+              </a:ext>
+            </a:extLst>
+          </p:cNvPr>
+          <p:cNvSpPr txBox="1"/>
+          <p:nvPr/>
+        </p:nvSpPr>
+        <p:spPr>
+          <a:xfrm>
+            <a:off x="10005271" y="6350840"/>
+            <a:ext cx="2766349" cy="646331"/>
+          </a:xfrm>
+          <a:prstGeom prst="rect">
+            <a:avLst/>
+          </a:prstGeom>
+          <a:noFill/>
+        </p:spPr>
+        <p:txBody>
+          <a:bodyPr wrap="square" rtlCol="0">
+            <a:spAutoFit/>
+          </a:bodyPr>
+          <a:lstStyle/>
+          <a:p>
+            <a:r>
+              <a:rPr lang="pt-PT" b="1" dirty="0">
+                <a:solidFill>
+                  <a:schemeClr val="bg2">
+                    <a:lumMod val="25000"/>
+                  </a:schemeClr>
+                </a:solidFill>
+              </a:rPr>
+              <a:t>POSITION</a:t>
+            </a:r>
+          </a:p>
+          <a:p>
+            <a:r>
+              <a:rPr lang="pt-PT" b="1" dirty="0">
+                <a:solidFill>
+                  <a:schemeClr val="bg2">
+                    <a:lumMod val="25000"/>
+                  </a:schemeClr>
+                </a:solidFill>
+              </a:rPr>
+              <a:t>CONTEXT</a:t>
+            </a:r>
+          </a:p>
+        </p:txBody>
+      </p:sp>
+      <p:sp>
+        <p:nvSpPr>
+          <p:cNvPr id="37" name="CaixaDeTexto 36">
+            <a:extLst>
+              <a:ext uri="{FF2B5EF4-FFF2-40B4-BE49-F238E27FC236}">
+                <a16:creationId xmlns:a16="http://schemas.microsoft.com/office/drawing/2014/main" id="{7CEEBCA9-02F1-3263-25CB-95B984EC30CC}"/>
+              </a:ext>
+            </a:extLst>
+          </p:cNvPr>
+          <p:cNvSpPr txBox="1"/>
+          <p:nvPr/>
+        </p:nvSpPr>
+        <p:spPr>
+          <a:xfrm>
+            <a:off x="12943493" y="6350840"/>
+            <a:ext cx="3424747" cy="646331"/>
+          </a:xfrm>
+          <a:prstGeom prst="rect">
+            <a:avLst/>
+          </a:prstGeom>
+          <a:noFill/>
+        </p:spPr>
+        <p:txBody>
+          <a:bodyPr wrap="square" rtlCol="0">
+            <a:spAutoFit/>
+          </a:bodyPr>
+          <a:lstStyle/>
+          <a:p>
+            <a:r>
+              <a:rPr lang="pt-PT" i="1" dirty="0" err="1">
+                <a:solidFill>
+                  <a:schemeClr val="bg2">
+                    <a:lumMod val="25000"/>
+                  </a:schemeClr>
+                </a:solidFill>
+              </a:rPr>
+              <a:t>What</a:t>
+            </a:r>
+            <a:r>
+              <a:rPr lang="pt-PT" i="1" dirty="0">
+                <a:solidFill>
+                  <a:schemeClr val="bg2">
+                    <a:lumMod val="25000"/>
+                  </a:schemeClr>
+                </a:solidFill>
+              </a:rPr>
+              <a:t> </a:t>
+            </a:r>
+            <a:r>
+              <a:rPr lang="pt-PT" i="1" dirty="0" err="1">
+                <a:solidFill>
+                  <a:schemeClr val="bg2">
+                    <a:lumMod val="25000"/>
+                  </a:schemeClr>
+                </a:solidFill>
+              </a:rPr>
+              <a:t>physical</a:t>
+            </a:r>
+            <a:r>
+              <a:rPr lang="pt-PT" i="1" dirty="0">
+                <a:solidFill>
+                  <a:schemeClr val="bg2">
+                    <a:lumMod val="25000"/>
+                  </a:schemeClr>
+                </a:solidFill>
+              </a:rPr>
+              <a:t> </a:t>
+            </a:r>
+            <a:r>
+              <a:rPr lang="pt-PT" i="1" dirty="0" err="1">
+                <a:solidFill>
+                  <a:schemeClr val="bg2">
+                    <a:lumMod val="25000"/>
+                  </a:schemeClr>
+                </a:solidFill>
+              </a:rPr>
+              <a:t>profile</a:t>
+            </a:r>
+            <a:r>
+              <a:rPr lang="pt-PT" i="1" dirty="0">
+                <a:solidFill>
+                  <a:schemeClr val="bg2">
+                    <a:lumMod val="25000"/>
+                  </a:schemeClr>
+                </a:solidFill>
+              </a:rPr>
+              <a:t> </a:t>
+            </a:r>
+            <a:r>
+              <a:rPr lang="pt-PT" i="1" dirty="0" err="1">
+                <a:solidFill>
+                  <a:schemeClr val="bg2">
+                    <a:lumMod val="25000"/>
+                  </a:schemeClr>
+                </a:solidFill>
+              </a:rPr>
+              <a:t>suits</a:t>
+            </a:r>
+            <a:r>
+              <a:rPr lang="pt-PT" i="1" dirty="0">
+                <a:solidFill>
+                  <a:schemeClr val="bg2">
+                    <a:lumMod val="25000"/>
+                  </a:schemeClr>
+                </a:solidFill>
+              </a:rPr>
+              <a:t> </a:t>
+            </a:r>
+            <a:r>
+              <a:rPr lang="pt-PT" i="1" dirty="0" err="1">
+                <a:solidFill>
+                  <a:schemeClr val="bg2">
+                    <a:lumMod val="25000"/>
+                  </a:schemeClr>
+                </a:solidFill>
+              </a:rPr>
+              <a:t>each</a:t>
+            </a:r>
+            <a:r>
+              <a:rPr lang="pt-PT" i="1" dirty="0">
+                <a:solidFill>
+                  <a:schemeClr val="bg2">
+                    <a:lumMod val="25000"/>
+                  </a:schemeClr>
+                </a:solidFill>
+              </a:rPr>
+              <a:t> </a:t>
+            </a:r>
+            <a:r>
+              <a:rPr lang="pt-PT" i="1" dirty="0" err="1">
+                <a:solidFill>
+                  <a:schemeClr val="bg2">
+                    <a:lumMod val="25000"/>
+                  </a:schemeClr>
+                </a:solidFill>
+              </a:rPr>
+              <a:t>position</a:t>
+            </a:r>
+            <a:r>
+              <a:rPr lang="pt-PT" i="1" dirty="0">
+                <a:solidFill>
+                  <a:schemeClr val="bg2">
+                    <a:lumMod val="25000"/>
+                  </a:schemeClr>
+                </a:solidFill>
+              </a:rPr>
+              <a:t> </a:t>
+            </a:r>
+            <a:r>
+              <a:rPr lang="pt-PT" i="1" dirty="0" err="1">
+                <a:solidFill>
+                  <a:schemeClr val="bg2">
+                    <a:lumMod val="25000"/>
+                  </a:schemeClr>
+                </a:solidFill>
+              </a:rPr>
+              <a:t>group</a:t>
+            </a:r>
+            <a:r>
+              <a:rPr lang="pt-PT" i="1" dirty="0">
+                <a:solidFill>
+                  <a:schemeClr val="bg2">
+                    <a:lumMod val="25000"/>
+                  </a:schemeClr>
+                </a:solidFill>
+              </a:rPr>
+              <a:t>.</a:t>
+            </a:r>
+          </a:p>
+        </p:txBody>
+      </p:sp>
+      <p:sp>
+        <p:nvSpPr>
+          <p:cNvPr id="38" name="CaixaDeTexto 37">
+            <a:extLst>
+              <a:ext uri="{FF2B5EF4-FFF2-40B4-BE49-F238E27FC236}">
+                <a16:creationId xmlns:a16="http://schemas.microsoft.com/office/drawing/2014/main" id="{34030A43-0D50-F999-44FF-683D9B84918A}"/>
+              </a:ext>
+            </a:extLst>
+          </p:cNvPr>
+          <p:cNvSpPr txBox="1"/>
+          <p:nvPr/>
+        </p:nvSpPr>
+        <p:spPr>
+          <a:xfrm>
+            <a:off x="9158820" y="6276019"/>
+            <a:ext cx="1125471" cy="769441"/>
+          </a:xfrm>
+          <a:prstGeom prst="rect">
+            <a:avLst/>
+          </a:prstGeom>
+          <a:noFill/>
+        </p:spPr>
+        <p:txBody>
+          <a:bodyPr wrap="square">
+            <a:spAutoFit/>
+          </a:bodyPr>
+          <a:lstStyle/>
+          <a:p>
+            <a:r>
+              <a:rPr lang="pt-PT" sz="4400" b="1" dirty="0">
+                <a:solidFill>
+                  <a:schemeClr val="bg2">
+                    <a:lumMod val="25000"/>
+                  </a:schemeClr>
+                </a:solidFill>
+              </a:rPr>
+              <a:t>9</a:t>
+            </a:r>
+            <a:endParaRPr lang="pt-PT" dirty="0"/>
+          </a:p>
+        </p:txBody>
+      </p:sp>
+      <p:sp>
+        <p:nvSpPr>
+          <p:cNvPr id="39" name="Shape 5">
+            <a:extLst>
+              <a:ext uri="{FF2B5EF4-FFF2-40B4-BE49-F238E27FC236}">
+                <a16:creationId xmlns:a16="http://schemas.microsoft.com/office/drawing/2014/main" id="{601F8BB8-A6F3-DADD-5C80-1574AC5FE139}"/>
+              </a:ext>
+            </a:extLst>
+          </p:cNvPr>
+          <p:cNvSpPr/>
+          <p:nvPr/>
+        </p:nvSpPr>
+        <p:spPr>
+          <a:xfrm>
+            <a:off x="8902523" y="7573849"/>
+            <a:ext cx="7604978" cy="1214591"/>
+          </a:xfrm>
+          <a:prstGeom prst="roundRect">
+            <a:avLst>
+              <a:gd name="adj" fmla="val 15353"/>
+            </a:avLst>
+          </a:prstGeom>
+          <a:solidFill>
+            <a:srgbClr val="FBF9F3"/>
+          </a:solidFill>
+          <a:ln w="9525">
+            <a:solidFill>
+              <a:srgbClr val="0E1410">
+                <a:alpha val="12000"/>
+              </a:srgbClr>
+            </a:solidFill>
+            <a:prstDash val="solid"/>
+          </a:ln>
+        </p:spPr>
+        <p:txBody>
+          <a:bodyPr/>
+          <a:lstStyle/>
+          <a:p>
+            <a:endParaRPr lang="pt-PT" dirty="0"/>
+          </a:p>
+        </p:txBody>
+      </p:sp>
+      <p:sp>
+        <p:nvSpPr>
+          <p:cNvPr id="40" name="CaixaDeTexto 39">
+            <a:extLst>
+              <a:ext uri="{FF2B5EF4-FFF2-40B4-BE49-F238E27FC236}">
+                <a16:creationId xmlns:a16="http://schemas.microsoft.com/office/drawing/2014/main" id="{9D69CC16-C16C-72A8-5EC5-3BE6D81CDA96}"/>
+              </a:ext>
+            </a:extLst>
+          </p:cNvPr>
+          <p:cNvSpPr txBox="1"/>
+          <p:nvPr/>
+        </p:nvSpPr>
+        <p:spPr>
+          <a:xfrm>
+            <a:off x="10005271" y="7871244"/>
+            <a:ext cx="2766349" cy="646331"/>
+          </a:xfrm>
+          <a:prstGeom prst="rect">
+            <a:avLst/>
+          </a:prstGeom>
+          <a:noFill/>
+        </p:spPr>
+        <p:txBody>
+          <a:bodyPr wrap="square" rtlCol="0">
+            <a:spAutoFit/>
+          </a:bodyPr>
+          <a:lstStyle/>
+          <a:p>
+            <a:r>
+              <a:rPr lang="pt-PT" b="1" dirty="0">
+                <a:solidFill>
+                  <a:schemeClr val="bg2">
+                    <a:lumMod val="25000"/>
+                  </a:schemeClr>
+                </a:solidFill>
+              </a:rPr>
+              <a:t>INTERPRETATION</a:t>
+            </a:r>
+          </a:p>
+          <a:p>
+            <a:r>
+              <a:rPr lang="pt-PT" b="1" dirty="0">
+                <a:solidFill>
+                  <a:schemeClr val="bg2">
+                    <a:lumMod val="25000"/>
+                  </a:schemeClr>
+                </a:solidFill>
+              </a:rPr>
+              <a:t>GUIDANCE</a:t>
+            </a:r>
+          </a:p>
+        </p:txBody>
+      </p:sp>
+      <p:sp>
+        <p:nvSpPr>
+          <p:cNvPr id="41" name="CaixaDeTexto 40">
+            <a:extLst>
+              <a:ext uri="{FF2B5EF4-FFF2-40B4-BE49-F238E27FC236}">
+                <a16:creationId xmlns:a16="http://schemas.microsoft.com/office/drawing/2014/main" id="{855F242D-40B3-D63B-9EB2-7C7714FE4720}"/>
+              </a:ext>
+            </a:extLst>
+          </p:cNvPr>
+          <p:cNvSpPr txBox="1"/>
+          <p:nvPr/>
+        </p:nvSpPr>
+        <p:spPr>
+          <a:xfrm>
+            <a:off x="12943493" y="7871244"/>
+            <a:ext cx="3424747" cy="646331"/>
+          </a:xfrm>
+          <a:prstGeom prst="rect">
+            <a:avLst/>
+          </a:prstGeom>
+          <a:noFill/>
+        </p:spPr>
+        <p:txBody>
+          <a:bodyPr wrap="square" rtlCol="0">
+            <a:spAutoFit/>
+          </a:bodyPr>
+          <a:lstStyle/>
+          <a:p>
+            <a:r>
+              <a:rPr lang="pt-PT" i="1" dirty="0" err="1">
+                <a:solidFill>
+                  <a:schemeClr val="bg2">
+                    <a:lumMod val="25000"/>
+                  </a:schemeClr>
+                </a:solidFill>
+              </a:rPr>
+              <a:t>How</a:t>
+            </a:r>
+            <a:r>
+              <a:rPr lang="pt-PT" i="1" dirty="0">
+                <a:solidFill>
+                  <a:schemeClr val="bg2">
+                    <a:lumMod val="25000"/>
+                  </a:schemeClr>
+                </a:solidFill>
+              </a:rPr>
+              <a:t> to </a:t>
+            </a:r>
+            <a:r>
+              <a:rPr lang="pt-PT" i="1" dirty="0" err="1">
+                <a:solidFill>
+                  <a:schemeClr val="bg2">
+                    <a:lumMod val="25000"/>
+                  </a:schemeClr>
+                </a:solidFill>
+              </a:rPr>
+              <a:t>read</a:t>
+            </a:r>
+            <a:r>
+              <a:rPr lang="pt-PT" i="1" dirty="0">
+                <a:solidFill>
+                  <a:schemeClr val="bg2">
+                    <a:lumMod val="25000"/>
+                  </a:schemeClr>
+                </a:solidFill>
+              </a:rPr>
+              <a:t> </a:t>
+            </a:r>
+            <a:r>
+              <a:rPr lang="pt-PT" i="1" dirty="0" err="1">
+                <a:solidFill>
+                  <a:schemeClr val="bg2">
+                    <a:lumMod val="25000"/>
+                  </a:schemeClr>
+                </a:solidFill>
+              </a:rPr>
+              <a:t>outiers</a:t>
+            </a:r>
+            <a:r>
+              <a:rPr lang="pt-PT" i="1" dirty="0">
+                <a:solidFill>
+                  <a:schemeClr val="bg2">
+                    <a:lumMod val="25000"/>
+                  </a:schemeClr>
+                </a:solidFill>
+              </a:rPr>
+              <a:t>, </a:t>
+            </a:r>
+            <a:r>
+              <a:rPr lang="pt-PT" i="1" dirty="0" err="1">
+                <a:solidFill>
+                  <a:schemeClr val="bg2">
+                    <a:lumMod val="25000"/>
+                  </a:schemeClr>
+                </a:solidFill>
+              </a:rPr>
+              <a:t>inverted</a:t>
+            </a:r>
+            <a:r>
+              <a:rPr lang="pt-PT" i="1" dirty="0">
+                <a:solidFill>
+                  <a:schemeClr val="bg2">
+                    <a:lumMod val="25000"/>
+                  </a:schemeClr>
+                </a:solidFill>
+              </a:rPr>
+              <a:t> </a:t>
+            </a:r>
+            <a:r>
+              <a:rPr lang="pt-PT" i="1" dirty="0" err="1">
+                <a:solidFill>
+                  <a:schemeClr val="bg2">
+                    <a:lumMod val="25000"/>
+                  </a:schemeClr>
+                </a:solidFill>
+              </a:rPr>
+              <a:t>metrics</a:t>
+            </a:r>
+            <a:r>
+              <a:rPr lang="pt-PT" i="1" dirty="0">
+                <a:solidFill>
+                  <a:schemeClr val="bg2">
+                    <a:lumMod val="25000"/>
+                  </a:schemeClr>
+                </a:solidFill>
+              </a:rPr>
+              <a:t>, </a:t>
+            </a:r>
+            <a:r>
+              <a:rPr lang="pt-PT" i="1" dirty="0" err="1">
+                <a:solidFill>
+                  <a:schemeClr val="bg2">
+                    <a:lumMod val="25000"/>
+                  </a:schemeClr>
+                </a:solidFill>
+              </a:rPr>
+              <a:t>thresholds</a:t>
+            </a:r>
+            <a:r>
+              <a:rPr lang="pt-PT" i="1" dirty="0">
+                <a:solidFill>
+                  <a:schemeClr val="bg2">
+                    <a:lumMod val="25000"/>
+                  </a:schemeClr>
+                </a:solidFill>
+              </a:rPr>
+              <a:t>, etc..</a:t>
+            </a:r>
+          </a:p>
+        </p:txBody>
+      </p:sp>
+      <p:sp>
+        <p:nvSpPr>
+          <p:cNvPr id="42" name="CaixaDeTexto 41">
+            <a:extLst>
+              <a:ext uri="{FF2B5EF4-FFF2-40B4-BE49-F238E27FC236}">
+                <a16:creationId xmlns:a16="http://schemas.microsoft.com/office/drawing/2014/main" id="{77323D39-EE1D-FA35-5339-5C7CB2B528F5}"/>
+              </a:ext>
+            </a:extLst>
+          </p:cNvPr>
+          <p:cNvSpPr txBox="1"/>
+          <p:nvPr/>
+        </p:nvSpPr>
+        <p:spPr>
+          <a:xfrm>
+            <a:off x="9158820" y="7796423"/>
+            <a:ext cx="1125471" cy="769441"/>
+          </a:xfrm>
+          <a:prstGeom prst="rect">
+            <a:avLst/>
+          </a:prstGeom>
+          <a:noFill/>
+        </p:spPr>
+        <p:txBody>
+          <a:bodyPr wrap="square">
+            <a:spAutoFit/>
+          </a:bodyPr>
+          <a:lstStyle/>
+          <a:p>
+            <a:r>
+              <a:rPr lang="pt-PT" sz="4400" b="1" dirty="0">
+                <a:solidFill>
+                  <a:schemeClr val="bg2">
+                    <a:lumMod val="25000"/>
+                  </a:schemeClr>
+                </a:solidFill>
+              </a:rPr>
+              <a:t>13</a:t>
+            </a:r>
+            <a:endParaRPr lang="pt-PT" dirty="0"/>
           </a:p>
         </p:txBody>
       </p:sp>
     </p:spTree>
+    <p:extLst>
+      <p:ext uri="{BB962C8B-B14F-4D97-AF65-F5344CB8AC3E}">
+        <p14:creationId xmlns:p14="http://schemas.microsoft.com/office/powerpoint/2010/main" val="478805368"/>
+      </p:ext>
+    </p:extLst>
   </p:cSld>
   <p:clrMapOvr>
     <a:masterClrMapping/>
@@ -9882,9 +16154,23 @@
 <file path=ppt/slides/slide9.xml><?xml version="1.0" encoding="utf-8"?>
 <p:sld xmlns:a="http://schemas.openxmlformats.org/drawingml/2006/main" xmlns:r="http://schemas.openxmlformats.org/officeDocument/2006/relationships" xmlns:p="http://schemas.openxmlformats.org/presentationml/2006/main">
   <p:cSld>
+    <p:bg>
+      <p:bgPr>
+        <a:solidFill>
+          <a:srgbClr val="F4F1EB"/>
+        </a:solidFill>
+        <a:effectLst/>
+      </p:bgPr>
+    </p:bg>
     <p:spTree>
       <p:nvGrpSpPr>
-        <p:cNvPr id="1" name=""/>
+        <p:cNvPr id="1" name="">
+          <a:extLst>
+            <a:ext uri="{FF2B5EF4-FFF2-40B4-BE49-F238E27FC236}">
+              <a16:creationId xmlns:a16="http://schemas.microsoft.com/office/drawing/2014/main" id="{66E9EC69-DFBC-6084-C58D-E0955089701C}"/>
+            </a:ext>
+          </a:extLst>
+        </p:cNvPr>
         <p:cNvGrpSpPr/>
         <p:nvPr/>
       </p:nvGrpSpPr>
@@ -9896,10 +16182,1326 @@
           <a:chExt cx="0" cy="0"/>
         </a:xfrm>
       </p:grpSpPr>
+      <p:sp>
+        <p:nvSpPr>
+          <p:cNvPr id="2" name="Shape 0">
+            <a:extLst>
+              <a:ext uri="{FF2B5EF4-FFF2-40B4-BE49-F238E27FC236}">
+                <a16:creationId xmlns:a16="http://schemas.microsoft.com/office/drawing/2014/main" id="{AABDB5C3-606E-6F9A-2098-EC7FCD0ACA97}"/>
+              </a:ext>
+            </a:extLst>
+          </p:cNvPr>
+          <p:cNvSpPr/>
+          <p:nvPr/>
+        </p:nvSpPr>
+        <p:spPr>
+          <a:xfrm>
+            <a:off x="838200" y="928688"/>
+            <a:ext cx="16611600" cy="9525"/>
+          </a:xfrm>
+          <a:prstGeom prst="rect">
+            <a:avLst/>
+          </a:prstGeom>
+          <a:solidFill>
+            <a:srgbClr val="0E1410">
+              <a:alpha val="12000"/>
+            </a:srgbClr>
+          </a:solidFill>
+          <a:ln/>
+        </p:spPr>
+        <p:txBody>
+          <a:bodyPr/>
+          <a:lstStyle/>
+          <a:p>
+            <a:endParaRPr lang="pt-PT"/>
+          </a:p>
+        </p:txBody>
+      </p:sp>
+      <p:sp>
+        <p:nvSpPr>
+          <p:cNvPr id="82" name="Text 80">
+            <a:extLst>
+              <a:ext uri="{FF2B5EF4-FFF2-40B4-BE49-F238E27FC236}">
+                <a16:creationId xmlns:a16="http://schemas.microsoft.com/office/drawing/2014/main" id="{AFAB5E49-0DA8-C4C2-473A-A9F487AF3006}"/>
+              </a:ext>
+            </a:extLst>
+          </p:cNvPr>
+          <p:cNvSpPr/>
+          <p:nvPr/>
+        </p:nvSpPr>
+        <p:spPr>
+          <a:xfrm>
+            <a:off x="16937682" y="9605963"/>
+            <a:ext cx="588318" cy="185738"/>
+          </a:xfrm>
+          <a:prstGeom prst="rect">
+            <a:avLst/>
+          </a:prstGeom>
+          <a:noFill/>
+          <a:ln/>
+        </p:spPr>
+        <p:txBody>
+          <a:bodyPr wrap="square" lIns="25400" tIns="25400" rIns="25400" bIns="25400" rtlCol="0" anchor="t">
+            <a:normAutofit lnSpcReduction="10000"/>
+          </a:bodyPr>
+          <a:lstStyle/>
+          <a:p>
+            <a:pPr marL="0" indent="0" algn="l">
+              <a:buNone/>
+            </a:pPr>
+            <a:r>
+              <a:rPr lang="en-US" sz="900" kern="0" spc="36" dirty="0">
+                <a:solidFill>
+                  <a:srgbClr val="6C726B"/>
+                </a:solidFill>
+                <a:latin typeface="JetBrains Mono" pitchFamily="34" charset="0"/>
+                <a:ea typeface="JetBrains Mono" pitchFamily="34" charset="-122"/>
+                <a:cs typeface="JetBrains Mono" pitchFamily="34" charset="-120"/>
+              </a:rPr>
+              <a:t>09 / 15</a:t>
+            </a:r>
+            <a:endParaRPr lang="en-US" sz="900" dirty="0"/>
+          </a:p>
+        </p:txBody>
+      </p:sp>
+      <p:sp>
+        <p:nvSpPr>
+          <p:cNvPr id="100" name="Shape 22">
+            <a:extLst>
+              <a:ext uri="{FF2B5EF4-FFF2-40B4-BE49-F238E27FC236}">
+                <a16:creationId xmlns:a16="http://schemas.microsoft.com/office/drawing/2014/main" id="{DB5DA187-6502-2268-01A4-44DDBA1C43A9}"/>
+              </a:ext>
+            </a:extLst>
+          </p:cNvPr>
+          <p:cNvSpPr/>
+          <p:nvPr/>
+        </p:nvSpPr>
+        <p:spPr>
+          <a:xfrm>
+            <a:off x="838200" y="9424988"/>
+            <a:ext cx="16611600" cy="9525"/>
+          </a:xfrm>
+          <a:prstGeom prst="rect">
+            <a:avLst/>
+          </a:prstGeom>
+          <a:solidFill>
+            <a:srgbClr val="0E1410">
+              <a:alpha val="12000"/>
+            </a:srgbClr>
+          </a:solidFill>
+          <a:ln/>
+        </p:spPr>
+        <p:txBody>
+          <a:bodyPr/>
+          <a:lstStyle/>
+          <a:p>
+            <a:endParaRPr lang="pt-PT"/>
+          </a:p>
+        </p:txBody>
+      </p:sp>
+      <p:sp>
+        <p:nvSpPr>
+          <p:cNvPr id="103" name="Text 1">
+            <a:extLst>
+              <a:ext uri="{FF2B5EF4-FFF2-40B4-BE49-F238E27FC236}">
+                <a16:creationId xmlns:a16="http://schemas.microsoft.com/office/drawing/2014/main" id="{88F1F54D-8444-FB65-EF9A-90FBB85544AB}"/>
+              </a:ext>
+            </a:extLst>
+          </p:cNvPr>
+          <p:cNvSpPr/>
+          <p:nvPr/>
+        </p:nvSpPr>
+        <p:spPr>
+          <a:xfrm>
+            <a:off x="838200" y="609600"/>
+            <a:ext cx="2863129" cy="185738"/>
+          </a:xfrm>
+          <a:prstGeom prst="rect">
+            <a:avLst/>
+          </a:prstGeom>
+          <a:noFill/>
+          <a:ln/>
+        </p:spPr>
+        <p:txBody>
+          <a:bodyPr wrap="square" lIns="25400" tIns="25400" rIns="25400" bIns="25400" rtlCol="0" anchor="t">
+            <a:normAutofit lnSpcReduction="10000"/>
+          </a:bodyPr>
+          <a:lstStyle/>
+          <a:p>
+            <a:r>
+              <a:rPr lang="en-US" sz="900" kern="0" spc="36" dirty="0">
+                <a:solidFill>
+                  <a:srgbClr val="6C726B"/>
+                </a:solidFill>
+                <a:latin typeface="JetBrains Mono" pitchFamily="34" charset="0"/>
+                <a:ea typeface="JetBrains Mono" pitchFamily="34" charset="-122"/>
+                <a:cs typeface="JetBrains Mono" pitchFamily="34" charset="-120"/>
+              </a:rPr>
+              <a:t>SECTION 02 – RETRIEVAL &amp; CONTEXT</a:t>
+            </a:r>
+            <a:endParaRPr lang="en-US" sz="900" dirty="0"/>
+          </a:p>
+        </p:txBody>
+      </p:sp>
+      <p:pic>
+        <p:nvPicPr>
+          <p:cNvPr id="45" name="Imagem 44">
+            <a:extLst>
+              <a:ext uri="{FF2B5EF4-FFF2-40B4-BE49-F238E27FC236}">
+                <a16:creationId xmlns:a16="http://schemas.microsoft.com/office/drawing/2014/main" id="{A03A031E-F276-AA2E-E07D-234A08C99EC2}"/>
+              </a:ext>
+            </a:extLst>
+          </p:cNvPr>
+          <p:cNvPicPr>
+            <a:picLocks noChangeAspect="1"/>
+          </p:cNvPicPr>
+          <p:nvPr/>
+        </p:nvPicPr>
+        <p:blipFill>
+          <a:blip r:embed="rId3"/>
+          <a:stretch>
+            <a:fillRect/>
+          </a:stretch>
+        </p:blipFill>
+        <p:spPr>
+          <a:xfrm>
+            <a:off x="5187906" y="1721136"/>
+            <a:ext cx="5808738" cy="7006111"/>
+          </a:xfrm>
+          <a:prstGeom prst="rect">
+            <a:avLst/>
+          </a:prstGeom>
+        </p:spPr>
+      </p:pic>
+      <p:pic>
+        <p:nvPicPr>
+          <p:cNvPr id="46" name="Imagem 45">
+            <a:extLst>
+              <a:ext uri="{FF2B5EF4-FFF2-40B4-BE49-F238E27FC236}">
+                <a16:creationId xmlns:a16="http://schemas.microsoft.com/office/drawing/2014/main" id="{87FA2823-E2AE-9925-FCA9-0828DFEF2C9B}"/>
+              </a:ext>
+            </a:extLst>
+          </p:cNvPr>
+          <p:cNvPicPr>
+            <a:picLocks noChangeAspect="1"/>
+          </p:cNvPicPr>
+          <p:nvPr/>
+        </p:nvPicPr>
+        <p:blipFill>
+          <a:blip r:embed="rId4"/>
+          <a:stretch>
+            <a:fillRect/>
+          </a:stretch>
+        </p:blipFill>
+        <p:spPr>
+          <a:xfrm>
+            <a:off x="11630590" y="2665682"/>
+            <a:ext cx="5888766" cy="1414112"/>
+          </a:xfrm>
+          <a:prstGeom prst="rect">
+            <a:avLst/>
+          </a:prstGeom>
+        </p:spPr>
+      </p:pic>
+      <p:pic>
+        <p:nvPicPr>
+          <p:cNvPr id="48" name="Imagem 47">
+            <a:extLst>
+              <a:ext uri="{FF2B5EF4-FFF2-40B4-BE49-F238E27FC236}">
+                <a16:creationId xmlns:a16="http://schemas.microsoft.com/office/drawing/2014/main" id="{C24156A6-78AB-77FB-8BA7-1A38C9C70CFB}"/>
+              </a:ext>
+            </a:extLst>
+          </p:cNvPr>
+          <p:cNvPicPr>
+            <a:picLocks noChangeAspect="1"/>
+          </p:cNvPicPr>
+          <p:nvPr/>
+        </p:nvPicPr>
+        <p:blipFill>
+          <a:blip r:embed="rId5"/>
+          <a:stretch>
+            <a:fillRect/>
+          </a:stretch>
+        </p:blipFill>
+        <p:spPr>
+          <a:xfrm>
+            <a:off x="11604243" y="5002772"/>
+            <a:ext cx="5906973" cy="2868817"/>
+          </a:xfrm>
+          <a:prstGeom prst="rect">
+            <a:avLst/>
+          </a:prstGeom>
+        </p:spPr>
+      </p:pic>
+      <p:sp>
+        <p:nvSpPr>
+          <p:cNvPr id="49" name="Text 3">
+            <a:extLst>
+              <a:ext uri="{FF2B5EF4-FFF2-40B4-BE49-F238E27FC236}">
+                <a16:creationId xmlns:a16="http://schemas.microsoft.com/office/drawing/2014/main" id="{A3C3C7CA-61BA-F214-0678-ABB7226F1E66}"/>
+              </a:ext>
+            </a:extLst>
+          </p:cNvPr>
+          <p:cNvSpPr/>
+          <p:nvPr/>
+        </p:nvSpPr>
+        <p:spPr>
+          <a:xfrm>
+            <a:off x="838200" y="1281113"/>
+            <a:ext cx="17109948" cy="214313"/>
+          </a:xfrm>
+          <a:prstGeom prst="rect">
+            <a:avLst/>
+          </a:prstGeom>
+          <a:noFill/>
+          <a:ln/>
+        </p:spPr>
+        <p:txBody>
+          <a:bodyPr wrap="square" lIns="25400" tIns="25400" rIns="25400" bIns="25400" rtlCol="0" anchor="t">
+            <a:normAutofit/>
+          </a:bodyPr>
+          <a:lstStyle/>
+          <a:p>
+            <a:pPr marL="0" indent="0" algn="l">
+              <a:buNone/>
+            </a:pPr>
+            <a:r>
+              <a:rPr lang="en-US" sz="1050" kern="0" spc="168" dirty="0">
+                <a:solidFill>
+                  <a:srgbClr val="6C726B"/>
+                </a:solidFill>
+                <a:latin typeface="JetBrains Mono" pitchFamily="34" charset="0"/>
+                <a:ea typeface="JetBrains Mono" pitchFamily="34" charset="-122"/>
+              </a:rPr>
+              <a:t>EXAMPLE 01</a:t>
+            </a:r>
+            <a:endParaRPr lang="en-US" sz="1050" dirty="0"/>
+          </a:p>
+        </p:txBody>
+      </p:sp>
+      <p:sp>
+        <p:nvSpPr>
+          <p:cNvPr id="51" name="Text 4">
+            <a:extLst>
+              <a:ext uri="{FF2B5EF4-FFF2-40B4-BE49-F238E27FC236}">
+                <a16:creationId xmlns:a16="http://schemas.microsoft.com/office/drawing/2014/main" id="{8B52C517-6FBE-4BC9-AA03-254C5EF5A8DE}"/>
+              </a:ext>
+            </a:extLst>
+          </p:cNvPr>
+          <p:cNvSpPr/>
+          <p:nvPr/>
+        </p:nvSpPr>
+        <p:spPr>
+          <a:xfrm>
+            <a:off x="838200" y="1571625"/>
+            <a:ext cx="3462867" cy="2389717"/>
+          </a:xfrm>
+          <a:prstGeom prst="rect">
+            <a:avLst/>
+          </a:prstGeom>
+          <a:noFill/>
+          <a:ln/>
+        </p:spPr>
+        <p:txBody>
+          <a:bodyPr wrap="square" lIns="25400" tIns="25400" rIns="25400" bIns="25400" rtlCol="0" anchor="t">
+            <a:normAutofit/>
+          </a:bodyPr>
+          <a:lstStyle/>
+          <a:p>
+            <a:pPr marL="0" indent="0" algn="l">
+              <a:lnSpc>
+                <a:spcPct val="96000"/>
+              </a:lnSpc>
+              <a:buNone/>
+            </a:pPr>
+            <a:r>
+              <a:rPr lang="en-US" sz="6900" b="1" kern="0" spc="-241" dirty="0">
+                <a:solidFill>
+                  <a:srgbClr val="0E1410"/>
+                </a:solidFill>
+                <a:latin typeface="Space Grotesk" pitchFamily="34" charset="0"/>
+                <a:ea typeface="Space Grotesk" pitchFamily="34" charset="-122"/>
+              </a:rPr>
+              <a:t>PLAYER</a:t>
+            </a:r>
+          </a:p>
+          <a:p>
+            <a:pPr marL="0" indent="0" algn="l">
+              <a:lnSpc>
+                <a:spcPct val="96000"/>
+              </a:lnSpc>
+              <a:buNone/>
+            </a:pPr>
+            <a:r>
+              <a:rPr lang="en-US" sz="6900" b="1" kern="0" spc="-241" dirty="0">
+                <a:solidFill>
+                  <a:srgbClr val="0E1410"/>
+                </a:solidFill>
+                <a:latin typeface="Space Grotesk" pitchFamily="34" charset="0"/>
+                <a:ea typeface="Space Grotesk" pitchFamily="34" charset="-122"/>
+              </a:rPr>
+              <a:t>PROFILE</a:t>
+            </a:r>
+            <a:endParaRPr lang="en-US" sz="6900" dirty="0"/>
+          </a:p>
+        </p:txBody>
+      </p:sp>
+      <p:sp>
+        <p:nvSpPr>
+          <p:cNvPr id="55" name="Text 5">
+            <a:extLst>
+              <a:ext uri="{FF2B5EF4-FFF2-40B4-BE49-F238E27FC236}">
+                <a16:creationId xmlns:a16="http://schemas.microsoft.com/office/drawing/2014/main" id="{147DCCFC-5305-03D7-5CA7-80C4C972B0C2}"/>
+              </a:ext>
+            </a:extLst>
+          </p:cNvPr>
+          <p:cNvSpPr/>
+          <p:nvPr/>
+        </p:nvSpPr>
+        <p:spPr>
+          <a:xfrm>
+            <a:off x="838201" y="3711772"/>
+            <a:ext cx="3276599" cy="2322841"/>
+          </a:xfrm>
+          <a:prstGeom prst="rect">
+            <a:avLst/>
+          </a:prstGeom>
+          <a:noFill/>
+          <a:ln/>
+        </p:spPr>
+        <p:txBody>
+          <a:bodyPr wrap="square" lIns="25400" tIns="25400" rIns="25400" bIns="25400" rtlCol="0" anchor="t">
+            <a:normAutofit fontScale="92500" lnSpcReduction="10000"/>
+          </a:bodyPr>
+          <a:lstStyle/>
+          <a:p>
+            <a:pPr algn="just">
+              <a:lnSpc>
+                <a:spcPct val="150000"/>
+              </a:lnSpc>
+            </a:pPr>
+            <a:r>
+              <a:rPr lang="pt-PT" dirty="0" err="1"/>
+              <a:t>The</a:t>
+            </a:r>
+            <a:r>
+              <a:rPr lang="pt-PT" dirty="0"/>
+              <a:t> </a:t>
+            </a:r>
+            <a:r>
+              <a:rPr lang="pt-PT" dirty="0" err="1"/>
+              <a:t>player</a:t>
+            </a:r>
+            <a:r>
+              <a:rPr lang="pt-PT" dirty="0"/>
+              <a:t> </a:t>
+            </a:r>
+            <a:r>
+              <a:rPr lang="pt-PT" dirty="0" err="1"/>
+              <a:t>profile</a:t>
+            </a:r>
+            <a:r>
+              <a:rPr lang="pt-PT" dirty="0"/>
+              <a:t> </a:t>
+            </a:r>
+            <a:r>
+              <a:rPr lang="pt-PT" dirty="0" err="1"/>
+              <a:t>page</a:t>
+            </a:r>
+            <a:r>
+              <a:rPr lang="pt-PT" dirty="0"/>
+              <a:t> displays </a:t>
+            </a:r>
+            <a:r>
+              <a:rPr lang="pt-PT" dirty="0" err="1"/>
+              <a:t>not</a:t>
+            </a:r>
+            <a:r>
+              <a:rPr lang="pt-PT" dirty="0"/>
+              <a:t> </a:t>
+            </a:r>
+            <a:r>
+              <a:rPr lang="pt-PT" dirty="0" err="1"/>
+              <a:t>only</a:t>
+            </a:r>
+            <a:r>
+              <a:rPr lang="pt-PT" dirty="0"/>
+              <a:t> </a:t>
+            </a:r>
+            <a:r>
+              <a:rPr lang="pt-PT" dirty="0" err="1"/>
+              <a:t>the</a:t>
+            </a:r>
+            <a:r>
+              <a:rPr lang="pt-PT" dirty="0"/>
+              <a:t> </a:t>
+            </a:r>
+            <a:r>
+              <a:rPr lang="pt-PT" dirty="0" err="1"/>
+              <a:t>underlying</a:t>
+            </a:r>
+            <a:r>
+              <a:rPr lang="pt-PT" dirty="0"/>
+              <a:t> data — </a:t>
+            </a:r>
+            <a:r>
+              <a:rPr lang="pt-PT" dirty="0" err="1"/>
+              <a:t>both</a:t>
+            </a:r>
+            <a:r>
+              <a:rPr lang="pt-PT" dirty="0"/>
+              <a:t> </a:t>
+            </a:r>
+            <a:r>
+              <a:rPr lang="pt-PT" dirty="0" err="1"/>
+              <a:t>raw</a:t>
+            </a:r>
+            <a:r>
+              <a:rPr lang="pt-PT" dirty="0"/>
+              <a:t> </a:t>
+            </a:r>
+            <a:r>
+              <a:rPr lang="pt-PT" dirty="0" err="1"/>
+              <a:t>values</a:t>
+            </a:r>
+            <a:r>
+              <a:rPr lang="pt-PT" dirty="0"/>
+              <a:t> </a:t>
+            </a:r>
+            <a:r>
+              <a:rPr lang="pt-PT" dirty="0" err="1"/>
+              <a:t>and</a:t>
+            </a:r>
+            <a:r>
+              <a:rPr lang="pt-PT" dirty="0"/>
+              <a:t> </a:t>
+            </a:r>
+            <a:r>
+              <a:rPr lang="pt-PT" dirty="0" err="1"/>
+              <a:t>percentile-based</a:t>
+            </a:r>
+            <a:r>
+              <a:rPr lang="pt-PT" dirty="0"/>
+              <a:t> </a:t>
+            </a:r>
+            <a:r>
+              <a:rPr lang="pt-PT" dirty="0" err="1"/>
+              <a:t>metrics</a:t>
+            </a:r>
+            <a:r>
+              <a:rPr lang="pt-PT" dirty="0"/>
+              <a:t> — </a:t>
+            </a:r>
+            <a:r>
+              <a:rPr lang="pt-PT" dirty="0" err="1"/>
+              <a:t>but</a:t>
+            </a:r>
+            <a:r>
+              <a:rPr lang="pt-PT" dirty="0"/>
+              <a:t> </a:t>
+            </a:r>
+            <a:r>
+              <a:rPr lang="pt-PT" dirty="0" err="1"/>
+              <a:t>also</a:t>
+            </a:r>
+            <a:r>
+              <a:rPr lang="pt-PT" dirty="0"/>
+              <a:t> </a:t>
+            </a:r>
+            <a:r>
+              <a:rPr lang="pt-PT" dirty="0" err="1"/>
+              <a:t>automatically</a:t>
+            </a:r>
+            <a:r>
+              <a:rPr lang="pt-PT" dirty="0"/>
+              <a:t> </a:t>
+            </a:r>
+            <a:r>
+              <a:rPr lang="pt-PT" dirty="0" err="1"/>
+              <a:t>generated</a:t>
+            </a:r>
+            <a:r>
+              <a:rPr lang="pt-PT" dirty="0"/>
+              <a:t> </a:t>
+            </a:r>
+            <a:r>
+              <a:rPr lang="pt-PT" dirty="0" err="1"/>
+              <a:t>summaries</a:t>
+            </a:r>
+            <a:r>
+              <a:rPr lang="pt-PT" dirty="0"/>
+              <a:t>, </a:t>
+            </a:r>
+            <a:r>
+              <a:rPr lang="pt-PT" dirty="0" err="1"/>
+              <a:t>available</a:t>
+            </a:r>
+            <a:r>
+              <a:rPr lang="pt-PT" dirty="0"/>
+              <a:t> in </a:t>
+            </a:r>
+            <a:r>
+              <a:rPr lang="pt-PT" dirty="0" err="1"/>
+              <a:t>either</a:t>
+            </a:r>
+            <a:r>
+              <a:rPr lang="pt-PT" dirty="0"/>
+              <a:t> short </a:t>
+            </a:r>
+            <a:r>
+              <a:rPr lang="pt-PT" dirty="0" err="1"/>
+              <a:t>or</a:t>
+            </a:r>
+            <a:r>
+              <a:rPr lang="pt-PT" dirty="0"/>
+              <a:t> </a:t>
+            </a:r>
+            <a:r>
+              <a:rPr lang="pt-PT" dirty="0" err="1"/>
+              <a:t>detailed</a:t>
+            </a:r>
+            <a:r>
+              <a:rPr lang="pt-PT" dirty="0"/>
+              <a:t> </a:t>
+            </a:r>
+            <a:r>
+              <a:rPr lang="pt-PT" dirty="0" err="1"/>
+              <a:t>formats</a:t>
+            </a:r>
+            <a:r>
+              <a:rPr lang="pt-PT" dirty="0"/>
+              <a:t>.</a:t>
+            </a:r>
+          </a:p>
+          <a:p>
+            <a:pPr algn="just">
+              <a:lnSpc>
+                <a:spcPct val="150000"/>
+              </a:lnSpc>
+            </a:pPr>
+            <a:endParaRPr lang="pt-PT" dirty="0"/>
+          </a:p>
+          <a:p>
+            <a:pPr>
+              <a:lnSpc>
+                <a:spcPct val="150000"/>
+              </a:lnSpc>
+            </a:pPr>
+            <a:endParaRPr lang="en-US" sz="1650" dirty="0"/>
+          </a:p>
+        </p:txBody>
+      </p:sp>
+      <p:sp>
+        <p:nvSpPr>
+          <p:cNvPr id="57" name="Shape 0">
+            <a:extLst>
+              <a:ext uri="{FF2B5EF4-FFF2-40B4-BE49-F238E27FC236}">
+                <a16:creationId xmlns:a16="http://schemas.microsoft.com/office/drawing/2014/main" id="{E4DCF69B-C2AB-F68C-307A-9F67F722FA22}"/>
+              </a:ext>
+            </a:extLst>
+          </p:cNvPr>
+          <p:cNvSpPr/>
+          <p:nvPr/>
+        </p:nvSpPr>
+        <p:spPr>
+          <a:xfrm>
+            <a:off x="838200" y="3563979"/>
+            <a:ext cx="1800000" cy="9525"/>
+          </a:xfrm>
+          <a:prstGeom prst="rect">
+            <a:avLst/>
+          </a:prstGeom>
+          <a:solidFill>
+            <a:srgbClr val="0E1410">
+              <a:alpha val="12000"/>
+            </a:srgbClr>
+          </a:solidFill>
+          <a:ln/>
+        </p:spPr>
+        <p:txBody>
+          <a:bodyPr/>
+          <a:lstStyle/>
+          <a:p>
+            <a:endParaRPr lang="pt-PT"/>
+          </a:p>
+        </p:txBody>
+      </p:sp>
+      <p:sp>
+        <p:nvSpPr>
+          <p:cNvPr id="58" name="Meia Moldura 57">
+            <a:extLst>
+              <a:ext uri="{FF2B5EF4-FFF2-40B4-BE49-F238E27FC236}">
+                <a16:creationId xmlns:a16="http://schemas.microsoft.com/office/drawing/2014/main" id="{AA0A23FB-3B29-68B3-EDC9-62656422546F}"/>
+              </a:ext>
+            </a:extLst>
+          </p:cNvPr>
+          <p:cNvSpPr/>
+          <p:nvPr/>
+        </p:nvSpPr>
+        <p:spPr>
+          <a:xfrm>
+            <a:off x="4983117" y="1535900"/>
+            <a:ext cx="108000" cy="108000"/>
+          </a:xfrm>
+          <a:prstGeom prst="halfFrame">
+            <a:avLst/>
+          </a:prstGeom>
+          <a:solidFill>
+            <a:srgbClr val="0D140F"/>
+          </a:solidFill>
+          <a:ln>
+            <a:noFill/>
+          </a:ln>
+        </p:spPr>
+        <p:style>
+          <a:lnRef idx="2">
+            <a:schemeClr val="accent1">
+              <a:shade val="15000"/>
+            </a:schemeClr>
+          </a:lnRef>
+          <a:fillRef idx="1">
+            <a:schemeClr val="accent1"/>
+          </a:fillRef>
+          <a:effectRef idx="0">
+            <a:schemeClr val="accent1"/>
+          </a:effectRef>
+          <a:fontRef idx="minor">
+            <a:schemeClr val="lt1"/>
+          </a:fontRef>
+        </p:style>
+        <p:txBody>
+          <a:bodyPr rtlCol="0" anchor="ctr"/>
+          <a:lstStyle/>
+          <a:p>
+            <a:pPr algn="ctr"/>
+            <a:endParaRPr lang="pt-PT">
+              <a:solidFill>
+                <a:schemeClr val="tx1"/>
+              </a:solidFill>
+            </a:endParaRPr>
+          </a:p>
+        </p:txBody>
+      </p:sp>
+      <p:sp>
+        <p:nvSpPr>
+          <p:cNvPr id="62" name="Meia Moldura 61">
+            <a:extLst>
+              <a:ext uri="{FF2B5EF4-FFF2-40B4-BE49-F238E27FC236}">
+                <a16:creationId xmlns:a16="http://schemas.microsoft.com/office/drawing/2014/main" id="{4E2D750F-6F9B-4BB4-E9F5-E3274318AD39}"/>
+              </a:ext>
+            </a:extLst>
+          </p:cNvPr>
+          <p:cNvSpPr/>
+          <p:nvPr/>
+        </p:nvSpPr>
+        <p:spPr>
+          <a:xfrm rot="5400000">
+            <a:off x="10998090" y="1533527"/>
+            <a:ext cx="108000" cy="108000"/>
+          </a:xfrm>
+          <a:prstGeom prst="halfFrame">
+            <a:avLst/>
+          </a:prstGeom>
+          <a:solidFill>
+            <a:srgbClr val="0D140F"/>
+          </a:solidFill>
+          <a:ln>
+            <a:noFill/>
+          </a:ln>
+        </p:spPr>
+        <p:style>
+          <a:lnRef idx="2">
+            <a:schemeClr val="accent1">
+              <a:shade val="15000"/>
+            </a:schemeClr>
+          </a:lnRef>
+          <a:fillRef idx="1">
+            <a:schemeClr val="accent1"/>
+          </a:fillRef>
+          <a:effectRef idx="0">
+            <a:schemeClr val="accent1"/>
+          </a:effectRef>
+          <a:fontRef idx="minor">
+            <a:schemeClr val="lt1"/>
+          </a:fontRef>
+        </p:style>
+        <p:txBody>
+          <a:bodyPr rtlCol="0" anchor="ctr"/>
+          <a:lstStyle/>
+          <a:p>
+            <a:pPr algn="ctr"/>
+            <a:endParaRPr lang="pt-PT">
+              <a:solidFill>
+                <a:schemeClr val="tx1"/>
+              </a:solidFill>
+            </a:endParaRPr>
+          </a:p>
+        </p:txBody>
+      </p:sp>
+      <p:sp>
+        <p:nvSpPr>
+          <p:cNvPr id="64" name="Meia Moldura 63">
+            <a:extLst>
+              <a:ext uri="{FF2B5EF4-FFF2-40B4-BE49-F238E27FC236}">
+                <a16:creationId xmlns:a16="http://schemas.microsoft.com/office/drawing/2014/main" id="{4652F727-518A-E155-583E-71C6D550A9BF}"/>
+              </a:ext>
+            </a:extLst>
+          </p:cNvPr>
+          <p:cNvSpPr/>
+          <p:nvPr/>
+        </p:nvSpPr>
+        <p:spPr>
+          <a:xfrm rot="16200000">
+            <a:off x="4983117" y="8770081"/>
+            <a:ext cx="108000" cy="108000"/>
+          </a:xfrm>
+          <a:prstGeom prst="halfFrame">
+            <a:avLst/>
+          </a:prstGeom>
+          <a:solidFill>
+            <a:srgbClr val="0D140F"/>
+          </a:solidFill>
+          <a:ln>
+            <a:noFill/>
+          </a:ln>
+        </p:spPr>
+        <p:style>
+          <a:lnRef idx="2">
+            <a:schemeClr val="accent1">
+              <a:shade val="15000"/>
+            </a:schemeClr>
+          </a:lnRef>
+          <a:fillRef idx="1">
+            <a:schemeClr val="accent1"/>
+          </a:fillRef>
+          <a:effectRef idx="0">
+            <a:schemeClr val="accent1"/>
+          </a:effectRef>
+          <a:fontRef idx="minor">
+            <a:schemeClr val="lt1"/>
+          </a:fontRef>
+        </p:style>
+        <p:txBody>
+          <a:bodyPr rtlCol="0" anchor="ctr"/>
+          <a:lstStyle/>
+          <a:p>
+            <a:pPr algn="ctr"/>
+            <a:endParaRPr lang="pt-PT">
+              <a:solidFill>
+                <a:schemeClr val="tx1"/>
+              </a:solidFill>
+            </a:endParaRPr>
+          </a:p>
+        </p:txBody>
+      </p:sp>
+      <p:sp>
+        <p:nvSpPr>
+          <p:cNvPr id="65" name="Meia Moldura 64">
+            <a:extLst>
+              <a:ext uri="{FF2B5EF4-FFF2-40B4-BE49-F238E27FC236}">
+                <a16:creationId xmlns:a16="http://schemas.microsoft.com/office/drawing/2014/main" id="{EB35429C-0DCD-A872-1C5A-D29510A4CB76}"/>
+              </a:ext>
+            </a:extLst>
+          </p:cNvPr>
+          <p:cNvSpPr/>
+          <p:nvPr/>
+        </p:nvSpPr>
+        <p:spPr>
+          <a:xfrm rot="10800000">
+            <a:off x="11001614" y="8773695"/>
+            <a:ext cx="108000" cy="108000"/>
+          </a:xfrm>
+          <a:prstGeom prst="halfFrame">
+            <a:avLst/>
+          </a:prstGeom>
+          <a:solidFill>
+            <a:srgbClr val="0D140F"/>
+          </a:solidFill>
+          <a:ln>
+            <a:noFill/>
+          </a:ln>
+        </p:spPr>
+        <p:style>
+          <a:lnRef idx="2">
+            <a:schemeClr val="accent1">
+              <a:shade val="15000"/>
+            </a:schemeClr>
+          </a:lnRef>
+          <a:fillRef idx="1">
+            <a:schemeClr val="accent1"/>
+          </a:fillRef>
+          <a:effectRef idx="0">
+            <a:schemeClr val="accent1"/>
+          </a:effectRef>
+          <a:fontRef idx="minor">
+            <a:schemeClr val="lt1"/>
+          </a:fontRef>
+        </p:style>
+        <p:txBody>
+          <a:bodyPr rtlCol="0" anchor="ctr"/>
+          <a:lstStyle/>
+          <a:p>
+            <a:pPr algn="ctr"/>
+            <a:endParaRPr lang="pt-PT">
+              <a:solidFill>
+                <a:schemeClr val="tx1"/>
+              </a:solidFill>
+            </a:endParaRPr>
+          </a:p>
+        </p:txBody>
+      </p:sp>
+      <p:sp>
+        <p:nvSpPr>
+          <p:cNvPr id="76" name="Meia Moldura 75">
+            <a:extLst>
+              <a:ext uri="{FF2B5EF4-FFF2-40B4-BE49-F238E27FC236}">
+                <a16:creationId xmlns:a16="http://schemas.microsoft.com/office/drawing/2014/main" id="{B0C6950C-006D-4825-932C-80215913743D}"/>
+              </a:ext>
+            </a:extLst>
+          </p:cNvPr>
+          <p:cNvSpPr/>
+          <p:nvPr/>
+        </p:nvSpPr>
+        <p:spPr>
+          <a:xfrm>
+            <a:off x="11496243" y="2534705"/>
+            <a:ext cx="108000" cy="108000"/>
+          </a:xfrm>
+          <a:prstGeom prst="halfFrame">
+            <a:avLst/>
+          </a:prstGeom>
+          <a:solidFill>
+            <a:srgbClr val="0D140F"/>
+          </a:solidFill>
+          <a:ln>
+            <a:noFill/>
+          </a:ln>
+        </p:spPr>
+        <p:style>
+          <a:lnRef idx="2">
+            <a:schemeClr val="accent1">
+              <a:shade val="15000"/>
+            </a:schemeClr>
+          </a:lnRef>
+          <a:fillRef idx="1">
+            <a:schemeClr val="accent1"/>
+          </a:fillRef>
+          <a:effectRef idx="0">
+            <a:schemeClr val="accent1"/>
+          </a:effectRef>
+          <a:fontRef idx="minor">
+            <a:schemeClr val="lt1"/>
+          </a:fontRef>
+        </p:style>
+        <p:txBody>
+          <a:bodyPr rtlCol="0" anchor="ctr"/>
+          <a:lstStyle/>
+          <a:p>
+            <a:pPr algn="ctr"/>
+            <a:endParaRPr lang="pt-PT">
+              <a:solidFill>
+                <a:schemeClr val="tx1"/>
+              </a:solidFill>
+            </a:endParaRPr>
+          </a:p>
+        </p:txBody>
+      </p:sp>
+      <p:sp>
+        <p:nvSpPr>
+          <p:cNvPr id="77" name="Meia Moldura 76">
+            <a:extLst>
+              <a:ext uri="{FF2B5EF4-FFF2-40B4-BE49-F238E27FC236}">
+                <a16:creationId xmlns:a16="http://schemas.microsoft.com/office/drawing/2014/main" id="{F7CA161A-58F3-5FF3-47B9-69AA01EFE19B}"/>
+              </a:ext>
+            </a:extLst>
+          </p:cNvPr>
+          <p:cNvSpPr/>
+          <p:nvPr/>
+        </p:nvSpPr>
+        <p:spPr>
+          <a:xfrm rot="5400000">
+            <a:off x="17511216" y="2532332"/>
+            <a:ext cx="108000" cy="108000"/>
+          </a:xfrm>
+          <a:prstGeom prst="halfFrame">
+            <a:avLst/>
+          </a:prstGeom>
+          <a:solidFill>
+            <a:srgbClr val="0D140F"/>
+          </a:solidFill>
+          <a:ln>
+            <a:noFill/>
+          </a:ln>
+        </p:spPr>
+        <p:style>
+          <a:lnRef idx="2">
+            <a:schemeClr val="accent1">
+              <a:shade val="15000"/>
+            </a:schemeClr>
+          </a:lnRef>
+          <a:fillRef idx="1">
+            <a:schemeClr val="accent1"/>
+          </a:fillRef>
+          <a:effectRef idx="0">
+            <a:schemeClr val="accent1"/>
+          </a:effectRef>
+          <a:fontRef idx="minor">
+            <a:schemeClr val="lt1"/>
+          </a:fontRef>
+        </p:style>
+        <p:txBody>
+          <a:bodyPr rtlCol="0" anchor="ctr"/>
+          <a:lstStyle/>
+          <a:p>
+            <a:pPr algn="ctr"/>
+            <a:endParaRPr lang="pt-PT">
+              <a:solidFill>
+                <a:schemeClr val="tx1"/>
+              </a:solidFill>
+            </a:endParaRPr>
+          </a:p>
+        </p:txBody>
+      </p:sp>
+      <p:sp>
+        <p:nvSpPr>
+          <p:cNvPr id="83" name="Meia Moldura 82">
+            <a:extLst>
+              <a:ext uri="{FF2B5EF4-FFF2-40B4-BE49-F238E27FC236}">
+                <a16:creationId xmlns:a16="http://schemas.microsoft.com/office/drawing/2014/main" id="{AEB84DCD-B5B4-8389-0D89-5D10F77A8822}"/>
+              </a:ext>
+            </a:extLst>
+          </p:cNvPr>
+          <p:cNvSpPr/>
+          <p:nvPr/>
+        </p:nvSpPr>
+        <p:spPr>
+          <a:xfrm rot="16200000">
+            <a:off x="11499768" y="4077712"/>
+            <a:ext cx="108000" cy="108000"/>
+          </a:xfrm>
+          <a:prstGeom prst="halfFrame">
+            <a:avLst/>
+          </a:prstGeom>
+          <a:solidFill>
+            <a:srgbClr val="0D140F"/>
+          </a:solidFill>
+          <a:ln>
+            <a:noFill/>
+          </a:ln>
+        </p:spPr>
+        <p:style>
+          <a:lnRef idx="2">
+            <a:schemeClr val="accent1">
+              <a:shade val="15000"/>
+            </a:schemeClr>
+          </a:lnRef>
+          <a:fillRef idx="1">
+            <a:schemeClr val="accent1"/>
+          </a:fillRef>
+          <a:effectRef idx="0">
+            <a:schemeClr val="accent1"/>
+          </a:effectRef>
+          <a:fontRef idx="minor">
+            <a:schemeClr val="lt1"/>
+          </a:fontRef>
+        </p:style>
+        <p:txBody>
+          <a:bodyPr rtlCol="0" anchor="ctr"/>
+          <a:lstStyle/>
+          <a:p>
+            <a:pPr algn="ctr"/>
+            <a:endParaRPr lang="pt-PT">
+              <a:solidFill>
+                <a:schemeClr val="tx1"/>
+              </a:solidFill>
+            </a:endParaRPr>
+          </a:p>
+        </p:txBody>
+      </p:sp>
+      <p:sp>
+        <p:nvSpPr>
+          <p:cNvPr id="86" name="Meia Moldura 85">
+            <a:extLst>
+              <a:ext uri="{FF2B5EF4-FFF2-40B4-BE49-F238E27FC236}">
+                <a16:creationId xmlns:a16="http://schemas.microsoft.com/office/drawing/2014/main" id="{3E66D742-0B90-2D42-63FB-2283400F4E38}"/>
+              </a:ext>
+            </a:extLst>
+          </p:cNvPr>
+          <p:cNvSpPr/>
+          <p:nvPr/>
+        </p:nvSpPr>
+        <p:spPr>
+          <a:xfrm rot="10800000">
+            <a:off x="17511216" y="4077713"/>
+            <a:ext cx="108000" cy="108000"/>
+          </a:xfrm>
+          <a:prstGeom prst="halfFrame">
+            <a:avLst/>
+          </a:prstGeom>
+          <a:solidFill>
+            <a:srgbClr val="0D140F"/>
+          </a:solidFill>
+          <a:ln>
+            <a:noFill/>
+          </a:ln>
+        </p:spPr>
+        <p:style>
+          <a:lnRef idx="2">
+            <a:schemeClr val="accent1">
+              <a:shade val="15000"/>
+            </a:schemeClr>
+          </a:lnRef>
+          <a:fillRef idx="1">
+            <a:schemeClr val="accent1"/>
+          </a:fillRef>
+          <a:effectRef idx="0">
+            <a:schemeClr val="accent1"/>
+          </a:effectRef>
+          <a:fontRef idx="minor">
+            <a:schemeClr val="lt1"/>
+          </a:fontRef>
+        </p:style>
+        <p:txBody>
+          <a:bodyPr rtlCol="0" anchor="ctr"/>
+          <a:lstStyle/>
+          <a:p>
+            <a:pPr algn="ctr"/>
+            <a:endParaRPr lang="pt-PT">
+              <a:solidFill>
+                <a:schemeClr val="tx1"/>
+              </a:solidFill>
+            </a:endParaRPr>
+          </a:p>
+        </p:txBody>
+      </p:sp>
+      <p:sp>
+        <p:nvSpPr>
+          <p:cNvPr id="88" name="Meia Moldura 87">
+            <a:extLst>
+              <a:ext uri="{FF2B5EF4-FFF2-40B4-BE49-F238E27FC236}">
+                <a16:creationId xmlns:a16="http://schemas.microsoft.com/office/drawing/2014/main" id="{1947E345-EDE2-ED00-D5EA-A13B515E8C3D}"/>
+              </a:ext>
+            </a:extLst>
+          </p:cNvPr>
+          <p:cNvSpPr/>
+          <p:nvPr/>
+        </p:nvSpPr>
+        <p:spPr>
+          <a:xfrm>
+            <a:off x="11496243" y="4812237"/>
+            <a:ext cx="108000" cy="108000"/>
+          </a:xfrm>
+          <a:prstGeom prst="halfFrame">
+            <a:avLst/>
+          </a:prstGeom>
+          <a:solidFill>
+            <a:srgbClr val="0D140F"/>
+          </a:solidFill>
+          <a:ln>
+            <a:noFill/>
+          </a:ln>
+        </p:spPr>
+        <p:style>
+          <a:lnRef idx="2">
+            <a:schemeClr val="accent1">
+              <a:shade val="15000"/>
+            </a:schemeClr>
+          </a:lnRef>
+          <a:fillRef idx="1">
+            <a:schemeClr val="accent1"/>
+          </a:fillRef>
+          <a:effectRef idx="0">
+            <a:schemeClr val="accent1"/>
+          </a:effectRef>
+          <a:fontRef idx="minor">
+            <a:schemeClr val="lt1"/>
+          </a:fontRef>
+        </p:style>
+        <p:txBody>
+          <a:bodyPr rtlCol="0" anchor="ctr"/>
+          <a:lstStyle/>
+          <a:p>
+            <a:pPr algn="ctr"/>
+            <a:endParaRPr lang="pt-PT">
+              <a:solidFill>
+                <a:schemeClr val="tx1"/>
+              </a:solidFill>
+            </a:endParaRPr>
+          </a:p>
+        </p:txBody>
+      </p:sp>
+      <p:sp>
+        <p:nvSpPr>
+          <p:cNvPr id="89" name="Meia Moldura 88">
+            <a:extLst>
+              <a:ext uri="{FF2B5EF4-FFF2-40B4-BE49-F238E27FC236}">
+                <a16:creationId xmlns:a16="http://schemas.microsoft.com/office/drawing/2014/main" id="{A80822E0-BE64-C7E5-6DD9-00869FF491EC}"/>
+              </a:ext>
+            </a:extLst>
+          </p:cNvPr>
+          <p:cNvSpPr/>
+          <p:nvPr/>
+        </p:nvSpPr>
+        <p:spPr>
+          <a:xfrm rot="5400000">
+            <a:off x="17511216" y="4809864"/>
+            <a:ext cx="108000" cy="108000"/>
+          </a:xfrm>
+          <a:prstGeom prst="halfFrame">
+            <a:avLst/>
+          </a:prstGeom>
+          <a:solidFill>
+            <a:srgbClr val="0D140F"/>
+          </a:solidFill>
+          <a:ln>
+            <a:noFill/>
+          </a:ln>
+        </p:spPr>
+        <p:style>
+          <a:lnRef idx="2">
+            <a:schemeClr val="accent1">
+              <a:shade val="15000"/>
+            </a:schemeClr>
+          </a:lnRef>
+          <a:fillRef idx="1">
+            <a:schemeClr val="accent1"/>
+          </a:fillRef>
+          <a:effectRef idx="0">
+            <a:schemeClr val="accent1"/>
+          </a:effectRef>
+          <a:fontRef idx="minor">
+            <a:schemeClr val="lt1"/>
+          </a:fontRef>
+        </p:style>
+        <p:txBody>
+          <a:bodyPr rtlCol="0" anchor="ctr"/>
+          <a:lstStyle/>
+          <a:p>
+            <a:pPr algn="ctr"/>
+            <a:endParaRPr lang="pt-PT">
+              <a:solidFill>
+                <a:schemeClr val="tx1"/>
+              </a:solidFill>
+            </a:endParaRPr>
+          </a:p>
+        </p:txBody>
+      </p:sp>
+      <p:sp>
+        <p:nvSpPr>
+          <p:cNvPr id="90" name="Meia Moldura 89">
+            <a:extLst>
+              <a:ext uri="{FF2B5EF4-FFF2-40B4-BE49-F238E27FC236}">
+                <a16:creationId xmlns:a16="http://schemas.microsoft.com/office/drawing/2014/main" id="{6C6F6601-AB4E-3D3F-AA80-71A18C1652B6}"/>
+              </a:ext>
+            </a:extLst>
+          </p:cNvPr>
+          <p:cNvSpPr/>
+          <p:nvPr/>
+        </p:nvSpPr>
+        <p:spPr>
+          <a:xfrm rot="16200000">
+            <a:off x="11499768" y="7860488"/>
+            <a:ext cx="108000" cy="108000"/>
+          </a:xfrm>
+          <a:prstGeom prst="halfFrame">
+            <a:avLst/>
+          </a:prstGeom>
+          <a:solidFill>
+            <a:srgbClr val="0D140F"/>
+          </a:solidFill>
+          <a:ln>
+            <a:noFill/>
+          </a:ln>
+        </p:spPr>
+        <p:style>
+          <a:lnRef idx="2">
+            <a:schemeClr val="accent1">
+              <a:shade val="15000"/>
+            </a:schemeClr>
+          </a:lnRef>
+          <a:fillRef idx="1">
+            <a:schemeClr val="accent1"/>
+          </a:fillRef>
+          <a:effectRef idx="0">
+            <a:schemeClr val="accent1"/>
+          </a:effectRef>
+          <a:fontRef idx="minor">
+            <a:schemeClr val="lt1"/>
+          </a:fontRef>
+        </p:style>
+        <p:txBody>
+          <a:bodyPr rtlCol="0" anchor="ctr"/>
+          <a:lstStyle/>
+          <a:p>
+            <a:pPr algn="ctr"/>
+            <a:endParaRPr lang="pt-PT">
+              <a:solidFill>
+                <a:schemeClr val="tx1"/>
+              </a:solidFill>
+            </a:endParaRPr>
+          </a:p>
+        </p:txBody>
+      </p:sp>
+      <p:sp>
+        <p:nvSpPr>
+          <p:cNvPr id="91" name="Meia Moldura 90">
+            <a:extLst>
+              <a:ext uri="{FF2B5EF4-FFF2-40B4-BE49-F238E27FC236}">
+                <a16:creationId xmlns:a16="http://schemas.microsoft.com/office/drawing/2014/main" id="{DF13AB79-2561-EE3C-AABE-7C068D3F98D5}"/>
+              </a:ext>
+            </a:extLst>
+          </p:cNvPr>
+          <p:cNvSpPr/>
+          <p:nvPr/>
+        </p:nvSpPr>
+        <p:spPr>
+          <a:xfrm rot="10800000">
+            <a:off x="17511216" y="7860489"/>
+            <a:ext cx="108000" cy="108000"/>
+          </a:xfrm>
+          <a:prstGeom prst="halfFrame">
+            <a:avLst/>
+          </a:prstGeom>
+          <a:solidFill>
+            <a:srgbClr val="0D140F"/>
+          </a:solidFill>
+          <a:ln>
+            <a:noFill/>
+          </a:ln>
+        </p:spPr>
+        <p:style>
+          <a:lnRef idx="2">
+            <a:schemeClr val="accent1">
+              <a:shade val="15000"/>
+            </a:schemeClr>
+          </a:lnRef>
+          <a:fillRef idx="1">
+            <a:schemeClr val="accent1"/>
+          </a:fillRef>
+          <a:effectRef idx="0">
+            <a:schemeClr val="accent1"/>
+          </a:effectRef>
+          <a:fontRef idx="minor">
+            <a:schemeClr val="lt1"/>
+          </a:fontRef>
+        </p:style>
+        <p:txBody>
+          <a:bodyPr rtlCol="0" anchor="ctr"/>
+          <a:lstStyle/>
+          <a:p>
+            <a:pPr algn="ctr"/>
+            <a:endParaRPr lang="pt-PT">
+              <a:solidFill>
+                <a:schemeClr val="tx1"/>
+              </a:solidFill>
+            </a:endParaRPr>
+          </a:p>
+        </p:txBody>
+      </p:sp>
     </p:spTree>
     <p:extLst>
       <p:ext uri="{BB962C8B-B14F-4D97-AF65-F5344CB8AC3E}">
-        <p14:creationId xmlns:p14="http://schemas.microsoft.com/office/powerpoint/2010/main" val="3572822146"/>
+        <p14:creationId xmlns:p14="http://schemas.microsoft.com/office/powerpoint/2010/main" val="3292084182"/>
       </p:ext>
     </p:extLst>
   </p:cSld>

--- a/Final_Physical_Analyst_Project.pptx
+++ b/Final_Physical_Analyst_Project.pptx
@@ -5,7 +5,7 @@
     <p:sldMasterId id="2147483648" r:id="rId1"/>
   </p:sldMasterIdLst>
   <p:notesMasterIdLst>
-    <p:notesMasterId r:id="rId14"/>
+    <p:notesMasterId r:id="rId16"/>
   </p:notesMasterIdLst>
   <p:sldIdLst>
     <p:sldId id="256" r:id="rId2"/>
@@ -19,7 +19,9 @@
     <p:sldId id="279" r:id="rId10"/>
     <p:sldId id="281" r:id="rId11"/>
     <p:sldId id="266" r:id="rId12"/>
-    <p:sldId id="270" r:id="rId13"/>
+    <p:sldId id="282" r:id="rId13"/>
+    <p:sldId id="283" r:id="rId14"/>
+    <p:sldId id="270" r:id="rId15"/>
   </p:sldIdLst>
   <p:sldSz cx="18288000" cy="10287000"/>
   <p:notesSz cx="10287000" cy="18288000"/>
@@ -529,6 +531,222 @@
   <p:cSld>
     <p:spTree>
       <p:nvGrpSpPr>
+        <p:cNvPr id="1" name="">
+          <a:extLst>
+            <a:ext uri="{FF2B5EF4-FFF2-40B4-BE49-F238E27FC236}">
+              <a16:creationId xmlns:a16="http://schemas.microsoft.com/office/drawing/2014/main" id="{8C8C2B95-1190-D484-6756-80D428CDC89D}"/>
+            </a:ext>
+          </a:extLst>
+        </p:cNvPr>
+        <p:cNvGrpSpPr/>
+        <p:nvPr/>
+      </p:nvGrpSpPr>
+      <p:grpSpPr>
+        <a:xfrm>
+          <a:off x="0" y="0"/>
+          <a:ext cx="0" cy="0"/>
+          <a:chOff x="0" y="0"/>
+          <a:chExt cx="0" cy="0"/>
+        </a:xfrm>
+      </p:grpSpPr>
+      <p:sp>
+        <p:nvSpPr>
+          <p:cNvPr id="2" name="Slide Image Placeholder 1">
+            <a:extLst>
+              <a:ext uri="{FF2B5EF4-FFF2-40B4-BE49-F238E27FC236}">
+                <a16:creationId xmlns:a16="http://schemas.microsoft.com/office/drawing/2014/main" id="{6113B78D-9388-99D9-129B-08A49CD0E89B}"/>
+              </a:ext>
+            </a:extLst>
+          </p:cNvPr>
+          <p:cNvSpPr>
+            <a:spLocks noGrp="1" noRot="1" noChangeAspect="1"/>
+          </p:cNvSpPr>
+          <p:nvPr>
+            <p:ph type="sldImg"/>
+          </p:nvPr>
+        </p:nvSpPr>
+        <p:spPr/>
+      </p:sp>
+      <p:sp>
+        <p:nvSpPr>
+          <p:cNvPr id="3" name="Notes Placeholder 2">
+            <a:extLst>
+              <a:ext uri="{FF2B5EF4-FFF2-40B4-BE49-F238E27FC236}">
+                <a16:creationId xmlns:a16="http://schemas.microsoft.com/office/drawing/2014/main" id="{13FC5465-3F4A-4511-E395-E898A0C6E3ED}"/>
+              </a:ext>
+            </a:extLst>
+          </p:cNvPr>
+          <p:cNvSpPr>
+            <a:spLocks noGrp="1"/>
+          </p:cNvSpPr>
+          <p:nvPr>
+            <p:ph type="body" idx="1"/>
+          </p:nvPr>
+        </p:nvSpPr>
+        <p:spPr/>
+        <p:txBody>
+          <a:bodyPr/>
+          <a:lstStyle/>
+          <a:p>
+            <a:endParaRPr lang="en-US" dirty="0"/>
+          </a:p>
+        </p:txBody>
+      </p:sp>
+      <p:sp>
+        <p:nvSpPr>
+          <p:cNvPr id="4" name="Slide Number Placeholder 3">
+            <a:extLst>
+              <a:ext uri="{FF2B5EF4-FFF2-40B4-BE49-F238E27FC236}">
+                <a16:creationId xmlns:a16="http://schemas.microsoft.com/office/drawing/2014/main" id="{79EFFCE4-5A1D-5D5E-B963-44A5E30EE763}"/>
+              </a:ext>
+            </a:extLst>
+          </p:cNvPr>
+          <p:cNvSpPr>
+            <a:spLocks noGrp="1"/>
+          </p:cNvSpPr>
+          <p:nvPr>
+            <p:ph type="sldNum" sz="quarter" idx="10"/>
+          </p:nvPr>
+        </p:nvSpPr>
+        <p:spPr/>
+        <p:txBody>
+          <a:bodyPr/>
+          <a:lstStyle/>
+          <a:p>
+            <a:fld id="{F7021451-1387-4CA6-816F-3879F97B5CBC}" type="slidenum">
+              <a:rPr lang="en-US"/>
+              <a:t>12</a:t>
+            </a:fld>
+            <a:endParaRPr lang="en-US"/>
+          </a:p>
+        </p:txBody>
+      </p:sp>
+    </p:spTree>
+    <p:extLst>
+      <p:ext uri="{BB962C8B-B14F-4D97-AF65-F5344CB8AC3E}">
+        <p14:creationId xmlns:p14="http://schemas.microsoft.com/office/powerpoint/2010/main" val="2989996390"/>
+      </p:ext>
+    </p:extLst>
+  </p:cSld>
+  <p:clrMapOvr>
+    <a:masterClrMapping/>
+  </p:clrMapOvr>
+</p:notes>
+</file>
+
+<file path=ppt/notesSlides/notesSlide13.xml><?xml version="1.0" encoding="utf-8"?>
+<p:notes xmlns:a="http://schemas.openxmlformats.org/drawingml/2006/main" xmlns:r="http://schemas.openxmlformats.org/officeDocument/2006/relationships" xmlns:p="http://schemas.openxmlformats.org/presentationml/2006/main">
+  <p:cSld>
+    <p:spTree>
+      <p:nvGrpSpPr>
+        <p:cNvPr id="1" name="">
+          <a:extLst>
+            <a:ext uri="{FF2B5EF4-FFF2-40B4-BE49-F238E27FC236}">
+              <a16:creationId xmlns:a16="http://schemas.microsoft.com/office/drawing/2014/main" id="{7078ABD8-D79F-57CE-107F-75724F431A2C}"/>
+            </a:ext>
+          </a:extLst>
+        </p:cNvPr>
+        <p:cNvGrpSpPr/>
+        <p:nvPr/>
+      </p:nvGrpSpPr>
+      <p:grpSpPr>
+        <a:xfrm>
+          <a:off x="0" y="0"/>
+          <a:ext cx="0" cy="0"/>
+          <a:chOff x="0" y="0"/>
+          <a:chExt cx="0" cy="0"/>
+        </a:xfrm>
+      </p:grpSpPr>
+      <p:sp>
+        <p:nvSpPr>
+          <p:cNvPr id="2" name="Slide Image Placeholder 1">
+            <a:extLst>
+              <a:ext uri="{FF2B5EF4-FFF2-40B4-BE49-F238E27FC236}">
+                <a16:creationId xmlns:a16="http://schemas.microsoft.com/office/drawing/2014/main" id="{61FD5D79-C388-E29E-59EC-7547D213DF28}"/>
+              </a:ext>
+            </a:extLst>
+          </p:cNvPr>
+          <p:cNvSpPr>
+            <a:spLocks noGrp="1" noRot="1" noChangeAspect="1"/>
+          </p:cNvSpPr>
+          <p:nvPr>
+            <p:ph type="sldImg"/>
+          </p:nvPr>
+        </p:nvSpPr>
+        <p:spPr/>
+      </p:sp>
+      <p:sp>
+        <p:nvSpPr>
+          <p:cNvPr id="3" name="Notes Placeholder 2">
+            <a:extLst>
+              <a:ext uri="{FF2B5EF4-FFF2-40B4-BE49-F238E27FC236}">
+                <a16:creationId xmlns:a16="http://schemas.microsoft.com/office/drawing/2014/main" id="{A70D0DFB-3C7A-2DC3-3DC9-818566991714}"/>
+              </a:ext>
+            </a:extLst>
+          </p:cNvPr>
+          <p:cNvSpPr>
+            <a:spLocks noGrp="1"/>
+          </p:cNvSpPr>
+          <p:nvPr>
+            <p:ph type="body" idx="1"/>
+          </p:nvPr>
+        </p:nvSpPr>
+        <p:spPr/>
+        <p:txBody>
+          <a:bodyPr/>
+          <a:lstStyle/>
+          <a:p>
+            <a:endParaRPr lang="en-US" dirty="0"/>
+          </a:p>
+        </p:txBody>
+      </p:sp>
+      <p:sp>
+        <p:nvSpPr>
+          <p:cNvPr id="4" name="Slide Number Placeholder 3">
+            <a:extLst>
+              <a:ext uri="{FF2B5EF4-FFF2-40B4-BE49-F238E27FC236}">
+                <a16:creationId xmlns:a16="http://schemas.microsoft.com/office/drawing/2014/main" id="{099D80DE-AA4E-E26B-D073-50BFFFE28D36}"/>
+              </a:ext>
+            </a:extLst>
+          </p:cNvPr>
+          <p:cNvSpPr>
+            <a:spLocks noGrp="1"/>
+          </p:cNvSpPr>
+          <p:nvPr>
+            <p:ph type="sldNum" sz="quarter" idx="10"/>
+          </p:nvPr>
+        </p:nvSpPr>
+        <p:spPr/>
+        <p:txBody>
+          <a:bodyPr/>
+          <a:lstStyle/>
+          <a:p>
+            <a:fld id="{F7021451-1387-4CA6-816F-3879F97B5CBC}" type="slidenum">
+              <a:rPr lang="en-US"/>
+              <a:t>13</a:t>
+            </a:fld>
+            <a:endParaRPr lang="en-US"/>
+          </a:p>
+        </p:txBody>
+      </p:sp>
+    </p:spTree>
+    <p:extLst>
+      <p:ext uri="{BB962C8B-B14F-4D97-AF65-F5344CB8AC3E}">
+        <p14:creationId xmlns:p14="http://schemas.microsoft.com/office/powerpoint/2010/main" val="149138275"/>
+      </p:ext>
+    </p:extLst>
+  </p:cSld>
+  <p:clrMapOvr>
+    <a:masterClrMapping/>
+  </p:clrMapOvr>
+</p:notes>
+</file>
+
+<file path=ppt/notesSlides/notesSlide14.xml><?xml version="1.0" encoding="utf-8"?>
+<p:notes xmlns:a="http://schemas.openxmlformats.org/drawingml/2006/main" xmlns:r="http://schemas.openxmlformats.org/officeDocument/2006/relationships" xmlns:p="http://schemas.openxmlformats.org/presentationml/2006/main">
+  <p:cSld>
+    <p:spTree>
+      <p:nvGrpSpPr>
         <p:cNvPr id="1" name=""/>
         <p:cNvGrpSpPr/>
         <p:nvPr/>
@@ -589,7 +807,7 @@
           <a:p>
             <a:fld id="{F7021451-1387-4CA6-816F-3879F97B5CBC}" type="slidenum">
               <a:rPr lang="en-US"/>
-              <a:t>12</a:t>
+              <a:t>14</a:t>
             </a:fld>
             <a:endParaRPr lang="en-US"/>
           </a:p>
@@ -1715,35 +1933,36 @@
           <a:chExt cx="0" cy="0"/>
         </a:xfrm>
       </p:grpSpPr>
-      <p:sp>
-        <p:nvSpPr>
-          <p:cNvPr id="2" name="Shape 0"/>
-          <p:cNvSpPr/>
-          <p:nvPr/>
-        </p:nvSpPr>
-        <p:spPr>
-          <a:xfrm>
-            <a:off x="0" y="700088"/>
-            <a:ext cx="18288000" cy="9525"/>
-          </a:xfrm>
-          <a:prstGeom prst="rect">
-            <a:avLst/>
-          </a:prstGeom>
-          <a:solidFill>
-            <a:srgbClr val="0E1410">
-              <a:alpha val="12000"/>
-            </a:srgbClr>
-          </a:solidFill>
-          <a:ln/>
-        </p:spPr>
-        <p:txBody>
-          <a:bodyPr/>
-          <a:lstStyle/>
-          <a:p>
-            <a:endParaRPr lang="pt-PT"/>
-          </a:p>
-        </p:txBody>
-      </p:sp>
+      <p:pic>
+        <p:nvPicPr>
+          <p:cNvPr id="8" name="Imagem 7">
+            <a:extLst>
+              <a:ext uri="{FF2B5EF4-FFF2-40B4-BE49-F238E27FC236}">
+                <a16:creationId xmlns:a16="http://schemas.microsoft.com/office/drawing/2014/main" id="{9F420C9B-8046-2930-25BA-65F9652D035C}"/>
+              </a:ext>
+            </a:extLst>
+          </p:cNvPr>
+          <p:cNvPicPr>
+            <a:picLocks noChangeAspect="1"/>
+          </p:cNvPicPr>
+          <p:nvPr/>
+        </p:nvPicPr>
+        <p:blipFill>
+          <a:blip r:embed="rId3"/>
+          <a:stretch>
+            <a:fillRect/>
+          </a:stretch>
+        </p:blipFill>
+        <p:spPr>
+          <a:xfrm>
+            <a:off x="0" y="0"/>
+            <a:ext cx="18288000" cy="12192000"/>
+          </a:xfrm>
+          <a:prstGeom prst="rect">
+            <a:avLst/>
+          </a:prstGeom>
+        </p:spPr>
+      </p:pic>
       <p:sp>
         <p:nvSpPr>
           <p:cNvPr id="3" name="Text 1"/>
@@ -1773,7 +1992,7 @@
             <a:r>
               <a:rPr lang="en-US" sz="1200" kern="0" spc="48" dirty="0">
                 <a:solidFill>
-                  <a:srgbClr val="6C726B"/>
+                  <a:srgbClr val="DCDAD5"/>
                 </a:solidFill>
                 <a:latin typeface="JetBrains Mono" pitchFamily="34" charset="0"/>
                 <a:ea typeface="JetBrains Mono" pitchFamily="34" charset="-122"/>
@@ -1781,20 +2000,24 @@
               </a:rPr>
               <a:t>CONTEXT ENGINGEERING · 2026</a:t>
             </a:r>
-            <a:endParaRPr lang="en-US" sz="1200" dirty="0"/>
-          </a:p>
-        </p:txBody>
-      </p:sp>
-      <p:sp>
-        <p:nvSpPr>
-          <p:cNvPr id="4" name="Text 2"/>
-          <p:cNvSpPr/>
-          <p:nvPr/>
-        </p:nvSpPr>
-        <p:spPr>
-          <a:xfrm>
-            <a:off x="8705106" y="266700"/>
-            <a:ext cx="1246659" cy="242888"/>
+            <a:endParaRPr lang="en-US" sz="1200" dirty="0">
+              <a:solidFill>
+                <a:srgbClr val="DCDAD5"/>
+              </a:solidFill>
+            </a:endParaRPr>
+          </a:p>
+        </p:txBody>
+      </p:sp>
+      <p:sp>
+        <p:nvSpPr>
+          <p:cNvPr id="5" name="Text 3"/>
+          <p:cNvSpPr/>
+          <p:nvPr/>
+        </p:nvSpPr>
+        <p:spPr>
+          <a:xfrm>
+            <a:off x="16605498" y="266700"/>
+            <a:ext cx="1149102" cy="242888"/>
           </a:xfrm>
           <a:prstGeom prst="rect">
             <a:avLst/>
@@ -1814,28 +2037,32 @@
             <a:r>
               <a:rPr lang="en-US" sz="1200" kern="0" spc="48" dirty="0">
                 <a:solidFill>
-                  <a:srgbClr val="6C726B"/>
+                  <a:srgbClr val="DCDAD5"/>
                 </a:solidFill>
                 <a:latin typeface="JetBrains Mono" pitchFamily="34" charset="0"/>
                 <a:ea typeface="JetBrains Mono" pitchFamily="34" charset="-122"/>
                 <a:cs typeface="JetBrains Mono" pitchFamily="34" charset="-120"/>
               </a:rPr>
-              <a:t>SESSION / 11</a:t>
-            </a:r>
-            <a:endParaRPr lang="en-US" sz="1200" dirty="0"/>
-          </a:p>
-        </p:txBody>
-      </p:sp>
-      <p:sp>
-        <p:nvSpPr>
-          <p:cNvPr id="5" name="Text 3"/>
-          <p:cNvSpPr/>
-          <p:nvPr/>
-        </p:nvSpPr>
-        <p:spPr>
-          <a:xfrm>
-            <a:off x="16605498" y="266700"/>
-            <a:ext cx="1149102" cy="242888"/>
+              <a:t>MAY 2026</a:t>
+            </a:r>
+            <a:endParaRPr lang="en-US" sz="1200" dirty="0">
+              <a:solidFill>
+                <a:srgbClr val="DCDAD5"/>
+              </a:solidFill>
+            </a:endParaRPr>
+          </a:p>
+        </p:txBody>
+      </p:sp>
+      <p:sp>
+        <p:nvSpPr>
+          <p:cNvPr id="15" name="Text 13"/>
+          <p:cNvSpPr/>
+          <p:nvPr/>
+        </p:nvSpPr>
+        <p:spPr>
+          <a:xfrm>
+            <a:off x="609600" y="1996741"/>
+            <a:ext cx="17068800" cy="8348896"/>
           </a:xfrm>
           <a:prstGeom prst="rect">
             <a:avLst/>
@@ -1846,211 +2073,6 @@
         <p:txBody>
           <a:bodyPr wrap="square" lIns="25400" tIns="25400" rIns="25400" bIns="25400" rtlCol="0" anchor="t">
             <a:normAutofit/>
-          </a:bodyPr>
-          <a:lstStyle/>
-          <a:p>
-            <a:pPr marL="0" indent="0" algn="l">
-              <a:buNone/>
-            </a:pPr>
-            <a:r>
-              <a:rPr lang="en-US" sz="1200" kern="0" spc="48" dirty="0">
-                <a:solidFill>
-                  <a:srgbClr val="6C726B"/>
-                </a:solidFill>
-                <a:latin typeface="JetBrains Mono" pitchFamily="34" charset="0"/>
-                <a:ea typeface="JetBrains Mono" pitchFamily="34" charset="-122"/>
-                <a:cs typeface="JetBrains Mono" pitchFamily="34" charset="-120"/>
-              </a:rPr>
-              <a:t>23 APR 2026</a:t>
-            </a:r>
-            <a:endParaRPr lang="en-US" sz="1200" dirty="0"/>
-          </a:p>
-        </p:txBody>
-      </p:sp>
-      <p:sp>
-        <p:nvSpPr>
-          <p:cNvPr id="6" name="Text 4"/>
-          <p:cNvSpPr/>
-          <p:nvPr/>
-        </p:nvSpPr>
-        <p:spPr>
-          <a:xfrm>
-            <a:off x="609600" y="1104900"/>
-            <a:ext cx="8162544" cy="314325"/>
-          </a:xfrm>
-          <a:prstGeom prst="rect">
-            <a:avLst/>
-          </a:prstGeom>
-          <a:noFill/>
-          <a:ln/>
-        </p:spPr>
-        <p:txBody>
-          <a:bodyPr wrap="square" lIns="25400" tIns="25400" rIns="25400" bIns="25400" rtlCol="0" anchor="t">
-            <a:normAutofit/>
-          </a:bodyPr>
-          <a:lstStyle/>
-          <a:p>
-            <a:pPr marL="0" indent="0" algn="l">
-              <a:buNone/>
-            </a:pPr>
-            <a:r>
-              <a:rPr lang="en-US" sz="1650" b="1" kern="0" spc="198" dirty="0">
-                <a:solidFill>
-                  <a:srgbClr val="0E1410"/>
-                </a:solidFill>
-                <a:latin typeface="JetBrains Mono" pitchFamily="34" charset="0"/>
-                <a:ea typeface="JetBrains Mono" pitchFamily="34" charset="-122"/>
-                <a:cs typeface="JetBrains Mono" pitchFamily="34" charset="-120"/>
-              </a:rPr>
-              <a:t>SKILLCORNER</a:t>
-            </a:r>
-            <a:endParaRPr lang="en-US" sz="1650" dirty="0"/>
-          </a:p>
-        </p:txBody>
-      </p:sp>
-      <p:sp>
-        <p:nvSpPr>
-          <p:cNvPr id="7" name="Text 5"/>
-          <p:cNvSpPr/>
-          <p:nvPr/>
-        </p:nvSpPr>
-        <p:spPr>
-          <a:xfrm>
-            <a:off x="609600" y="1381125"/>
-            <a:ext cx="8162544" cy="185738"/>
-          </a:xfrm>
-          <a:prstGeom prst="rect">
-            <a:avLst/>
-          </a:prstGeom>
-          <a:noFill/>
-          <a:ln/>
-        </p:spPr>
-        <p:txBody>
-          <a:bodyPr wrap="square" lIns="25400" tIns="25400" rIns="25400" bIns="25400" rtlCol="0" anchor="t">
-            <a:normAutofit lnSpcReduction="10000"/>
-          </a:bodyPr>
-          <a:lstStyle/>
-          <a:p>
-            <a:pPr marL="0" indent="0" algn="l">
-              <a:buNone/>
-            </a:pPr>
-            <a:r>
-              <a:rPr lang="en-US" sz="900" kern="0" spc="36" dirty="0">
-                <a:solidFill>
-                  <a:srgbClr val="6C726B"/>
-                </a:solidFill>
-                <a:latin typeface="JetBrains Mono" pitchFamily="34" charset="0"/>
-                <a:ea typeface="JetBrains Mono" pitchFamily="34" charset="-122"/>
-                <a:cs typeface="JetBrains Mono" pitchFamily="34" charset="-120"/>
-              </a:rPr>
-              <a:t>TRACKING · TELEMETRY · METRICS</a:t>
-            </a:r>
-            <a:endParaRPr lang="en-US" sz="900" dirty="0"/>
-          </a:p>
-        </p:txBody>
-      </p:sp>
-      <p:sp>
-        <p:nvSpPr>
-          <p:cNvPr id="11" name="Text 9"/>
-          <p:cNvSpPr/>
-          <p:nvPr/>
-        </p:nvSpPr>
-        <p:spPr>
-          <a:xfrm>
-            <a:off x="9763125" y="1104900"/>
-            <a:ext cx="8152733" cy="314325"/>
-          </a:xfrm>
-          <a:prstGeom prst="rect">
-            <a:avLst/>
-          </a:prstGeom>
-          <a:noFill/>
-          <a:ln/>
-        </p:spPr>
-        <p:txBody>
-          <a:bodyPr wrap="square" lIns="25400" tIns="25400" rIns="25400" bIns="25400" rtlCol="0" anchor="t">
-            <a:normAutofit/>
-          </a:bodyPr>
-          <a:lstStyle/>
-          <a:p>
-            <a:pPr marL="0" indent="0" algn="l">
-              <a:buNone/>
-            </a:pPr>
-            <a:r>
-              <a:rPr lang="en-US" sz="1650" b="1" kern="0" spc="198" dirty="0">
-                <a:solidFill>
-                  <a:srgbClr val="006B2E"/>
-                </a:solidFill>
-                <a:latin typeface="JetBrains Mono" pitchFamily="34" charset="0"/>
-                <a:ea typeface="JetBrains Mono" pitchFamily="34" charset="-122"/>
-                <a:cs typeface="JetBrains Mono" pitchFamily="34" charset="-120"/>
-              </a:rPr>
-              <a:t>TWELVE</a:t>
-            </a:r>
-            <a:endParaRPr lang="en-US" sz="1650" dirty="0"/>
-          </a:p>
-        </p:txBody>
-      </p:sp>
-      <p:sp>
-        <p:nvSpPr>
-          <p:cNvPr id="12" name="Text 10"/>
-          <p:cNvSpPr/>
-          <p:nvPr/>
-        </p:nvSpPr>
-        <p:spPr>
-          <a:xfrm>
-            <a:off x="9763125" y="1381125"/>
-            <a:ext cx="8152733" cy="185738"/>
-          </a:xfrm>
-          <a:prstGeom prst="rect">
-            <a:avLst/>
-          </a:prstGeom>
-          <a:noFill/>
-          <a:ln/>
-        </p:spPr>
-        <p:txBody>
-          <a:bodyPr wrap="square" lIns="25400" tIns="25400" rIns="25400" bIns="25400" rtlCol="0" anchor="t">
-            <a:normAutofit lnSpcReduction="10000"/>
-          </a:bodyPr>
-          <a:lstStyle/>
-          <a:p>
-            <a:pPr marL="0" indent="0" algn="l">
-              <a:buNone/>
-            </a:pPr>
-            <a:r>
-              <a:rPr lang="en-US" sz="900" kern="0" spc="36" dirty="0">
-                <a:solidFill>
-                  <a:srgbClr val="6C726B"/>
-                </a:solidFill>
-                <a:latin typeface="JetBrains Mono" pitchFamily="34" charset="0"/>
-                <a:ea typeface="JetBrains Mono" pitchFamily="34" charset="-122"/>
-                <a:cs typeface="JetBrains Mono" pitchFamily="34" charset="-120"/>
-              </a:rPr>
-              <a:t>CONTEXT · RETRIEVAL · NARRATIVE</a:t>
-            </a:r>
-            <a:endParaRPr lang="en-US" sz="900" dirty="0"/>
-          </a:p>
-        </p:txBody>
-      </p:sp>
-      <p:sp>
-        <p:nvSpPr>
-          <p:cNvPr id="15" name="Text 13"/>
-          <p:cNvSpPr/>
-          <p:nvPr/>
-        </p:nvSpPr>
-        <p:spPr>
-          <a:xfrm>
-            <a:off x="609600" y="2311083"/>
-            <a:ext cx="12231859" cy="3552825"/>
-          </a:xfrm>
-          <a:prstGeom prst="rect">
-            <a:avLst/>
-          </a:prstGeom>
-          <a:noFill/>
-          <a:ln/>
-        </p:spPr>
-        <p:txBody>
-          <a:bodyPr wrap="square" lIns="25400" tIns="25400" rIns="25400" bIns="25400" rtlCol="0" anchor="t">
-            <a:normAutofit fontScale="92500" lnSpcReduction="20000"/>
           </a:bodyPr>
           <a:lstStyle/>
           <a:p>
@@ -2061,18 +2083,72 @@
               <a:buNone/>
             </a:pPr>
             <a:r>
-              <a:rPr lang="en-US" sz="15000" b="1" kern="0" spc="-675" dirty="0">
-                <a:solidFill>
-                  <a:srgbClr val="0E1410"/>
+              <a:rPr lang="en-US" sz="8800" b="1" kern="0" spc="-675" dirty="0">
+                <a:solidFill>
+                  <a:srgbClr val="EA5A1F"/>
                 </a:solidFill>
                 <a:latin typeface="Space Grotesk" pitchFamily="34" charset="0"/>
                 <a:ea typeface="Space Grotesk" pitchFamily="34" charset="-122"/>
                 <a:cs typeface="Space Grotesk" pitchFamily="34" charset="-120"/>
               </a:rPr>
+              <a:t>TWELVE</a:t>
+            </a:r>
+            <a:endParaRPr lang="en-US" sz="15000" b="1" kern="0" spc="-675" dirty="0">
+              <a:solidFill>
+                <a:srgbClr val="EA5A1F"/>
+              </a:solidFill>
+              <a:latin typeface="Space Grotesk" pitchFamily="34" charset="0"/>
+              <a:ea typeface="Space Grotesk" pitchFamily="34" charset="-122"/>
+              <a:cs typeface="Space Grotesk" pitchFamily="34" charset="-120"/>
+            </a:endParaRPr>
+          </a:p>
+          <a:p>
+            <a:pPr marL="0" indent="0">
+              <a:lnSpc>
+                <a:spcPct val="92000"/>
+              </a:lnSpc>
+              <a:buNone/>
+            </a:pPr>
+            <a:r>
+              <a:rPr lang="en-US" sz="12500" b="1" kern="0" spc="-675" dirty="0">
+                <a:solidFill>
+                  <a:srgbClr val="DCDAD5"/>
+                </a:solidFill>
+                <a:latin typeface="Space Grotesk" pitchFamily="34" charset="0"/>
+                <a:ea typeface="Space Grotesk" pitchFamily="34" charset="-122"/>
+                <a:cs typeface="Space Grotesk" pitchFamily="34" charset="-120"/>
+              </a:rPr>
+              <a:t>CONTEXT ENGINEERNG</a:t>
+            </a:r>
+            <a:endParaRPr lang="en-US" sz="15000" b="1" kern="0" spc="-675" dirty="0">
+              <a:solidFill>
+                <a:srgbClr val="0E1410"/>
+              </a:solidFill>
+              <a:latin typeface="Space Grotesk" pitchFamily="34" charset="0"/>
+              <a:ea typeface="Space Grotesk" pitchFamily="34" charset="-122"/>
+              <a:cs typeface="Space Grotesk" pitchFamily="34" charset="-120"/>
+            </a:endParaRPr>
+          </a:p>
+          <a:p>
+            <a:pPr marL="0" indent="0">
+              <a:lnSpc>
+                <a:spcPct val="92000"/>
+              </a:lnSpc>
+              <a:buNone/>
+            </a:pPr>
+            <a:r>
+              <a:rPr lang="en-US" sz="7200" b="1" kern="0" spc="-675" dirty="0">
+                <a:solidFill>
+                  <a:srgbClr val="DCDAD5"/>
+                </a:solidFill>
+                <a:latin typeface="Space Grotesk" pitchFamily="34" charset="0"/>
+                <a:ea typeface="Space Grotesk" pitchFamily="34" charset="-122"/>
+                <a:cs typeface="Space Grotesk" pitchFamily="34" charset="-120"/>
+              </a:rPr>
               <a:t>From metrics </a:t>
             </a:r>
             <a:r>
-              <a:rPr lang="en-US" sz="15000" i="1" kern="0" spc="-675" dirty="0">
+              <a:rPr lang="en-US" sz="7200" i="1" kern="0" spc="-675" dirty="0">
                 <a:solidFill>
                   <a:srgbClr val="6C726B"/>
                 </a:solidFill>
@@ -2083,9 +2159,9 @@
               <a:t>to </a:t>
             </a:r>
             <a:r>
-              <a:rPr lang="en-US" sz="15000" b="1" kern="0" spc="-675" dirty="0">
-                <a:solidFill>
-                  <a:srgbClr val="0E1410"/>
+              <a:rPr lang="en-US" sz="7200" b="1" kern="0" spc="-675" dirty="0">
+                <a:solidFill>
+                  <a:srgbClr val="DCDAD5"/>
                 </a:solidFill>
                 <a:latin typeface="Space Grotesk" pitchFamily="34" charset="0"/>
                 <a:ea typeface="Space Grotesk" pitchFamily="34" charset="-122"/>
@@ -2094,7 +2170,7 @@
               <a:t>intelligence</a:t>
             </a:r>
             <a:r>
-              <a:rPr lang="en-US" sz="15000" b="1" kern="0" spc="-675" dirty="0">
+              <a:rPr lang="en-US" sz="7200" b="1" kern="0" spc="-675" dirty="0">
                 <a:solidFill>
                   <a:srgbClr val="FF5A1F"/>
                 </a:solidFill>
@@ -2104,20 +2180,26 @@
               </a:rPr>
               <a:t>.</a:t>
             </a:r>
-            <a:endParaRPr lang="en-US" sz="15000" dirty="0"/>
-          </a:p>
-        </p:txBody>
-      </p:sp>
-      <p:sp>
-        <p:nvSpPr>
-          <p:cNvPr id="16" name="Text 14"/>
-          <p:cNvSpPr/>
-          <p:nvPr/>
-        </p:nvSpPr>
-        <p:spPr>
-          <a:xfrm>
-            <a:off x="609600" y="5218143"/>
-            <a:ext cx="8633460" cy="645765"/>
+            <a:endParaRPr lang="en-US" sz="7200" dirty="0"/>
+          </a:p>
+        </p:txBody>
+      </p:sp>
+      <p:sp>
+        <p:nvSpPr>
+          <p:cNvPr id="10" name="Text 4">
+            <a:extLst>
+              <a:ext uri="{FF2B5EF4-FFF2-40B4-BE49-F238E27FC236}">
+                <a16:creationId xmlns:a16="http://schemas.microsoft.com/office/drawing/2014/main" id="{F2F4DEE4-7520-2B1F-442B-D51CD68394C7}"/>
+              </a:ext>
+            </a:extLst>
+          </p:cNvPr>
+          <p:cNvSpPr/>
+          <p:nvPr/>
+        </p:nvSpPr>
+        <p:spPr>
+          <a:xfrm>
+            <a:off x="13656013" y="10834419"/>
+            <a:ext cx="4098587" cy="1996741"/>
           </a:xfrm>
           <a:prstGeom prst="rect">
             <a:avLst/>
@@ -2127,139 +2209,44 @@
         </p:spPr>
         <p:txBody>
           <a:bodyPr wrap="square" lIns="25400" tIns="25400" rIns="25400" bIns="25400" rtlCol="0" anchor="t">
-            <a:normAutofit fontScale="92500" lnSpcReduction="10000"/>
+            <a:normAutofit/>
           </a:bodyPr>
           <a:lstStyle/>
           <a:p>
-            <a:pPr marL="0" indent="0">
+            <a:pPr marL="0" indent="0" algn="r">
               <a:lnSpc>
-                <a:spcPct val="145000"/>
+                <a:spcPct val="96000"/>
               </a:lnSpc>
               <a:buNone/>
             </a:pPr>
             <a:r>
-              <a:rPr lang="en-US" sz="1650" dirty="0">
-                <a:solidFill>
-                  <a:srgbClr val="1D2520"/>
+              <a:rPr lang="en-US" sz="2800" b="1" kern="0" spc="-241" dirty="0">
+                <a:solidFill>
+                  <a:srgbClr val="E8F4E1"/>
                 </a:solidFill>
                 <a:latin typeface="Space Grotesk" pitchFamily="34" charset="0"/>
                 <a:ea typeface="Space Grotesk" pitchFamily="34" charset="-122"/>
-                <a:cs typeface="Space Grotesk" pitchFamily="34" charset="-120"/>
-              </a:rPr>
-              <a:t>Why context turns physical signals into football product value — a Twelve × SkillCorner storyboard for the Physical Analyst.</a:t>
-            </a:r>
-            <a:endParaRPr lang="en-US" sz="1650" dirty="0"/>
-          </a:p>
-        </p:txBody>
-      </p:sp>
-      <p:sp>
-        <p:nvSpPr>
-          <p:cNvPr id="17" name="Shape 15"/>
-          <p:cNvSpPr/>
-          <p:nvPr/>
-        </p:nvSpPr>
-        <p:spPr>
-          <a:xfrm>
-            <a:off x="0" y="709613"/>
-            <a:ext cx="18288000" cy="9525"/>
-          </a:xfrm>
-          <a:prstGeom prst="rect">
-            <a:avLst/>
-          </a:prstGeom>
-          <a:solidFill>
-            <a:srgbClr val="0E1410">
-              <a:alpha val="12000"/>
-            </a:srgbClr>
-          </a:solidFill>
-          <a:ln/>
-        </p:spPr>
-        <p:txBody>
-          <a:bodyPr/>
-          <a:lstStyle/>
-          <a:p>
-            <a:endParaRPr lang="pt-PT"/>
-          </a:p>
-        </p:txBody>
-      </p:sp>
-      <p:sp>
-        <p:nvSpPr>
-          <p:cNvPr id="18" name="Text 16"/>
-          <p:cNvSpPr/>
-          <p:nvPr/>
-        </p:nvSpPr>
-        <p:spPr>
-          <a:xfrm>
-            <a:off x="609600" y="947737"/>
-            <a:ext cx="2124447" cy="9110663"/>
-          </a:xfrm>
-          <a:prstGeom prst="rect">
-            <a:avLst/>
-          </a:prstGeom>
-          <a:noFill/>
-          <a:ln/>
-        </p:spPr>
-        <p:txBody>
-          <a:bodyPr wrap="square" lIns="25400" tIns="25400" rIns="25400" bIns="25400" rtlCol="0" anchor="t">
-            <a:normAutofit/>
-          </a:bodyPr>
-          <a:lstStyle/>
-          <a:p>
-            <a:pPr marL="0" indent="0" algn="l">
+              </a:rPr>
+              <a:t>PEDRO CARVALHO</a:t>
+            </a:r>
+          </a:p>
+          <a:p>
+            <a:pPr marL="0" indent="0" algn="r">
+              <a:lnSpc>
+                <a:spcPct val="96000"/>
+              </a:lnSpc>
               <a:buNone/>
             </a:pPr>
             <a:r>
-              <a:rPr lang="en-US" sz="900" kern="0" spc="36" dirty="0">
-                <a:solidFill>
-                  <a:srgbClr val="6C726B"/>
-                </a:solidFill>
-                <a:latin typeface="JetBrains Mono" pitchFamily="34" charset="0"/>
-                <a:ea typeface="JetBrains Mono" pitchFamily="34" charset="-122"/>
-                <a:cs typeface="JetBrains Mono" pitchFamily="34" charset="-120"/>
-              </a:rPr>
-              <a:t>TWELVE · CONTEXT ENGINEERING</a:t>
-            </a:r>
-            <a:endParaRPr lang="en-US" sz="900" dirty="0"/>
-          </a:p>
-        </p:txBody>
-      </p:sp>
-      <p:sp>
-        <p:nvSpPr>
-          <p:cNvPr id="19" name="Text 17"/>
-          <p:cNvSpPr/>
-          <p:nvPr/>
-        </p:nvSpPr>
-        <p:spPr>
-          <a:xfrm>
-            <a:off x="9763124" y="909639"/>
-            <a:ext cx="3707131" cy="323848"/>
-          </a:xfrm>
-          <a:prstGeom prst="rect">
-            <a:avLst/>
-          </a:prstGeom>
-          <a:noFill/>
-          <a:ln/>
-        </p:spPr>
-        <p:txBody>
-          <a:bodyPr wrap="square" lIns="25400" tIns="25400" rIns="25400" bIns="25400" rtlCol="0" anchor="t">
-            <a:normAutofit/>
-          </a:bodyPr>
-          <a:lstStyle/>
-          <a:p>
-            <a:pPr marL="0" indent="0" algn="l">
-              <a:buNone/>
-            </a:pPr>
-            <a:r>
-              <a:rPr lang="en-US" sz="900" kern="0" spc="36" dirty="0">
-                <a:solidFill>
-                  <a:srgbClr val="6C726B"/>
-                </a:solidFill>
-                <a:latin typeface="JetBrains Mono" pitchFamily="34" charset="0"/>
-                <a:ea typeface="JetBrains Mono" pitchFamily="34" charset="-122"/>
-                <a:cs typeface="JetBrains Mono" pitchFamily="34" charset="-120"/>
-              </a:rPr>
-              <a:t>PHYSICAL ANALYST · STORYBOARD</a:t>
-            </a:r>
-            <a:endParaRPr lang="en-US" sz="900" dirty="0"/>
+              <a:rPr lang="en-US" sz="2800" b="1" kern="0" spc="-241" dirty="0">
+                <a:solidFill>
+                  <a:srgbClr val="E8F4E1"/>
+                </a:solidFill>
+                <a:latin typeface="Space Grotesk" pitchFamily="34" charset="0"/>
+                <a:ea typeface="Space Grotesk" pitchFamily="34" charset="-122"/>
+              </a:rPr>
+              <a:t>LIAM HENSHAW</a:t>
+            </a:r>
           </a:p>
         </p:txBody>
       </p:sp>
@@ -2378,7 +2365,7 @@
                 <a:ea typeface="JetBrains Mono" pitchFamily="34" charset="-122"/>
                 <a:cs typeface="JetBrains Mono" pitchFamily="34" charset="-120"/>
               </a:rPr>
-              <a:t>10 / 15</a:t>
+              <a:t>10 / 14</a:t>
             </a:r>
             <a:endParaRPr lang="en-US" sz="900" dirty="0"/>
           </a:p>
@@ -2503,7 +2490,7 @@
                 <a:latin typeface="JetBrains Mono" pitchFamily="34" charset="0"/>
                 <a:ea typeface="JetBrains Mono" pitchFamily="34" charset="-122"/>
               </a:rPr>
-              <a:t>EXAMPLE 01</a:t>
+              <a:t>EXAMPLE 02</a:t>
             </a:r>
             <a:endParaRPr lang="en-US" sz="1050" dirty="0"/>
           </a:p>
@@ -3579,7 +3566,7 @@
                 <a:ea typeface="JetBrains Mono" pitchFamily="34" charset="-122"/>
                 <a:cs typeface="JetBrains Mono" pitchFamily="34" charset="-120"/>
               </a:rPr>
-              <a:t>11 / 15</a:t>
+              <a:t>11 / 14</a:t>
             </a:r>
             <a:endParaRPr lang="en-US" sz="900" dirty="0"/>
           </a:p>
@@ -3830,6 +3817,2909 @@
 </file>
 
 <file path=ppt/slides/slide12.xml><?xml version="1.0" encoding="utf-8"?>
+<p:sld xmlns:a="http://schemas.openxmlformats.org/drawingml/2006/main" xmlns:r="http://schemas.openxmlformats.org/officeDocument/2006/relationships" xmlns:p="http://schemas.openxmlformats.org/presentationml/2006/main">
+  <p:cSld>
+    <p:bg>
+      <p:bgPr>
+        <a:solidFill>
+          <a:srgbClr val="F4F1EB"/>
+        </a:solidFill>
+        <a:effectLst/>
+      </p:bgPr>
+    </p:bg>
+    <p:spTree>
+      <p:nvGrpSpPr>
+        <p:cNvPr id="1" name="">
+          <a:extLst>
+            <a:ext uri="{FF2B5EF4-FFF2-40B4-BE49-F238E27FC236}">
+              <a16:creationId xmlns:a16="http://schemas.microsoft.com/office/drawing/2014/main" id="{F1ABF44D-743C-57BF-9515-B147CBFC501F}"/>
+            </a:ext>
+          </a:extLst>
+        </p:cNvPr>
+        <p:cNvGrpSpPr/>
+        <p:nvPr/>
+      </p:nvGrpSpPr>
+      <p:grpSpPr>
+        <a:xfrm>
+          <a:off x="0" y="0"/>
+          <a:ext cx="0" cy="0"/>
+          <a:chOff x="0" y="0"/>
+          <a:chExt cx="0" cy="0"/>
+        </a:xfrm>
+      </p:grpSpPr>
+      <p:sp>
+        <p:nvSpPr>
+          <p:cNvPr id="2" name="Shape 0">
+            <a:extLst>
+              <a:ext uri="{FF2B5EF4-FFF2-40B4-BE49-F238E27FC236}">
+                <a16:creationId xmlns:a16="http://schemas.microsoft.com/office/drawing/2014/main" id="{278F8327-BA00-5AC3-A047-40CFBF568EF5}"/>
+              </a:ext>
+            </a:extLst>
+          </p:cNvPr>
+          <p:cNvSpPr/>
+          <p:nvPr/>
+        </p:nvSpPr>
+        <p:spPr>
+          <a:xfrm>
+            <a:off x="838200" y="928688"/>
+            <a:ext cx="16611600" cy="9525"/>
+          </a:xfrm>
+          <a:prstGeom prst="rect">
+            <a:avLst/>
+          </a:prstGeom>
+          <a:solidFill>
+            <a:srgbClr val="0E1410">
+              <a:alpha val="12000"/>
+            </a:srgbClr>
+          </a:solidFill>
+          <a:ln/>
+        </p:spPr>
+        <p:txBody>
+          <a:bodyPr/>
+          <a:lstStyle/>
+          <a:p>
+            <a:endParaRPr lang="pt-PT"/>
+          </a:p>
+        </p:txBody>
+      </p:sp>
+      <p:sp>
+        <p:nvSpPr>
+          <p:cNvPr id="82" name="Text 80">
+            <a:extLst>
+              <a:ext uri="{FF2B5EF4-FFF2-40B4-BE49-F238E27FC236}">
+                <a16:creationId xmlns:a16="http://schemas.microsoft.com/office/drawing/2014/main" id="{47AA3BA6-C291-290D-FB64-8504ECD56896}"/>
+              </a:ext>
+            </a:extLst>
+          </p:cNvPr>
+          <p:cNvSpPr/>
+          <p:nvPr/>
+        </p:nvSpPr>
+        <p:spPr>
+          <a:xfrm>
+            <a:off x="16937682" y="9605963"/>
+            <a:ext cx="588318" cy="185738"/>
+          </a:xfrm>
+          <a:prstGeom prst="rect">
+            <a:avLst/>
+          </a:prstGeom>
+          <a:noFill/>
+          <a:ln/>
+        </p:spPr>
+        <p:txBody>
+          <a:bodyPr wrap="square" lIns="25400" tIns="25400" rIns="25400" bIns="25400" rtlCol="0" anchor="t">
+            <a:normAutofit lnSpcReduction="10000"/>
+          </a:bodyPr>
+          <a:lstStyle/>
+          <a:p>
+            <a:pPr marL="0" indent="0" algn="l">
+              <a:buNone/>
+            </a:pPr>
+            <a:r>
+              <a:rPr lang="en-US" sz="900" kern="0" spc="36" dirty="0">
+                <a:solidFill>
+                  <a:srgbClr val="6C726B"/>
+                </a:solidFill>
+                <a:latin typeface="JetBrains Mono" pitchFamily="34" charset="0"/>
+                <a:ea typeface="JetBrains Mono" pitchFamily="34" charset="-122"/>
+                <a:cs typeface="JetBrains Mono" pitchFamily="34" charset="-120"/>
+              </a:rPr>
+              <a:t>12 / 14</a:t>
+            </a:r>
+            <a:endParaRPr lang="en-US" sz="900" dirty="0"/>
+          </a:p>
+        </p:txBody>
+      </p:sp>
+      <p:sp>
+        <p:nvSpPr>
+          <p:cNvPr id="100" name="Shape 22">
+            <a:extLst>
+              <a:ext uri="{FF2B5EF4-FFF2-40B4-BE49-F238E27FC236}">
+                <a16:creationId xmlns:a16="http://schemas.microsoft.com/office/drawing/2014/main" id="{F7B6C0FE-D210-6B58-CA95-512492E7631C}"/>
+              </a:ext>
+            </a:extLst>
+          </p:cNvPr>
+          <p:cNvSpPr/>
+          <p:nvPr/>
+        </p:nvSpPr>
+        <p:spPr>
+          <a:xfrm>
+            <a:off x="838200" y="9424988"/>
+            <a:ext cx="16611600" cy="9525"/>
+          </a:xfrm>
+          <a:prstGeom prst="rect">
+            <a:avLst/>
+          </a:prstGeom>
+          <a:solidFill>
+            <a:srgbClr val="0E1410">
+              <a:alpha val="12000"/>
+            </a:srgbClr>
+          </a:solidFill>
+          <a:ln/>
+        </p:spPr>
+        <p:txBody>
+          <a:bodyPr/>
+          <a:lstStyle/>
+          <a:p>
+            <a:endParaRPr lang="pt-PT"/>
+          </a:p>
+        </p:txBody>
+      </p:sp>
+      <p:sp>
+        <p:nvSpPr>
+          <p:cNvPr id="103" name="Text 1">
+            <a:extLst>
+              <a:ext uri="{FF2B5EF4-FFF2-40B4-BE49-F238E27FC236}">
+                <a16:creationId xmlns:a16="http://schemas.microsoft.com/office/drawing/2014/main" id="{2CF06CE6-AF5A-09AC-5E33-3473A9570E70}"/>
+              </a:ext>
+            </a:extLst>
+          </p:cNvPr>
+          <p:cNvSpPr/>
+          <p:nvPr/>
+        </p:nvSpPr>
+        <p:spPr>
+          <a:xfrm>
+            <a:off x="838200" y="609600"/>
+            <a:ext cx="2863129" cy="185738"/>
+          </a:xfrm>
+          <a:prstGeom prst="rect">
+            <a:avLst/>
+          </a:prstGeom>
+          <a:noFill/>
+          <a:ln/>
+        </p:spPr>
+        <p:txBody>
+          <a:bodyPr wrap="square" lIns="25400" tIns="25400" rIns="25400" bIns="25400" rtlCol="0" anchor="t">
+            <a:normAutofit lnSpcReduction="10000"/>
+          </a:bodyPr>
+          <a:lstStyle/>
+          <a:p>
+            <a:r>
+              <a:rPr lang="en-US" sz="900" kern="0" spc="36" dirty="0">
+                <a:solidFill>
+                  <a:srgbClr val="6C726B"/>
+                </a:solidFill>
+                <a:latin typeface="JetBrains Mono" pitchFamily="34" charset="0"/>
+                <a:ea typeface="JetBrains Mono" pitchFamily="34" charset="-122"/>
+                <a:cs typeface="JetBrains Mono" pitchFamily="34" charset="-120"/>
+              </a:rPr>
+              <a:t>SECTION 03 – FUTURE VISION STORYBOARD</a:t>
+            </a:r>
+            <a:endParaRPr lang="en-US" sz="900" dirty="0"/>
+          </a:p>
+        </p:txBody>
+      </p:sp>
+      <p:sp>
+        <p:nvSpPr>
+          <p:cNvPr id="3" name="Text 4">
+            <a:extLst>
+              <a:ext uri="{FF2B5EF4-FFF2-40B4-BE49-F238E27FC236}">
+                <a16:creationId xmlns:a16="http://schemas.microsoft.com/office/drawing/2014/main" id="{1CA13A76-5E60-75F8-33FE-45AF75A67521}"/>
+              </a:ext>
+            </a:extLst>
+          </p:cNvPr>
+          <p:cNvSpPr/>
+          <p:nvPr/>
+        </p:nvSpPr>
+        <p:spPr>
+          <a:xfrm>
+            <a:off x="838200" y="1571625"/>
+            <a:ext cx="15853475" cy="2389717"/>
+          </a:xfrm>
+          <a:prstGeom prst="rect">
+            <a:avLst/>
+          </a:prstGeom>
+          <a:noFill/>
+          <a:ln/>
+        </p:spPr>
+        <p:txBody>
+          <a:bodyPr wrap="square" lIns="25400" tIns="25400" rIns="25400" bIns="25400" rtlCol="0" anchor="t">
+            <a:normAutofit/>
+          </a:bodyPr>
+          <a:lstStyle/>
+          <a:p>
+            <a:pPr marL="0" indent="0" algn="l">
+              <a:lnSpc>
+                <a:spcPct val="96000"/>
+              </a:lnSpc>
+              <a:buNone/>
+            </a:pPr>
+            <a:r>
+              <a:rPr lang="en-US" sz="6900" b="1" kern="0" spc="-241" dirty="0">
+                <a:solidFill>
+                  <a:srgbClr val="0E1410"/>
+                </a:solidFill>
+                <a:latin typeface="Space Grotesk" pitchFamily="34" charset="0"/>
+                <a:ea typeface="Space Grotesk" pitchFamily="34" charset="-122"/>
+              </a:rPr>
+              <a:t>The receptionist routes to six functions</a:t>
+            </a:r>
+          </a:p>
+        </p:txBody>
+      </p:sp>
+      <p:sp>
+        <p:nvSpPr>
+          <p:cNvPr id="50" name="TextBox 6">
+            <a:extLst>
+              <a:ext uri="{FF2B5EF4-FFF2-40B4-BE49-F238E27FC236}">
+                <a16:creationId xmlns:a16="http://schemas.microsoft.com/office/drawing/2014/main" id="{62330F19-9795-1D15-A320-22B298E398F6}"/>
+              </a:ext>
+            </a:extLst>
+          </p:cNvPr>
+          <p:cNvSpPr txBox="1"/>
+          <p:nvPr/>
+        </p:nvSpPr>
+        <p:spPr>
+          <a:xfrm>
+            <a:off x="2413449" y="3494568"/>
+            <a:ext cx="4455523" cy="153888"/>
+          </a:xfrm>
+          <a:prstGeom prst="rect">
+            <a:avLst/>
+          </a:prstGeom>
+          <a:noFill/>
+        </p:spPr>
+        <p:txBody>
+          <a:bodyPr wrap="square" lIns="0" tIns="0" rIns="0" bIns="0" anchor="t">
+            <a:spAutoFit/>
+          </a:bodyPr>
+          <a:lstStyle/>
+          <a:p>
+            <a:pPr algn="l"/>
+            <a:r>
+              <a:rPr sz="1000" b="1" i="0" dirty="0">
+                <a:solidFill>
+                  <a:srgbClr val="EA5A1F"/>
+                </a:solidFill>
+                <a:latin typeface="Helvetica Neue"/>
+              </a:rPr>
+              <a:t>DOMAIN 1 · PROFILE</a:t>
+            </a:r>
+            <a:endParaRPr lang="pt-PT" sz="1000" b="1" i="0" dirty="0">
+              <a:solidFill>
+                <a:srgbClr val="EA5A1F"/>
+              </a:solidFill>
+              <a:latin typeface="Helvetica Neue"/>
+            </a:endParaRPr>
+          </a:p>
+        </p:txBody>
+      </p:sp>
+      <p:sp>
+        <p:nvSpPr>
+          <p:cNvPr id="52" name="TextBox 7">
+            <a:extLst>
+              <a:ext uri="{FF2B5EF4-FFF2-40B4-BE49-F238E27FC236}">
+                <a16:creationId xmlns:a16="http://schemas.microsoft.com/office/drawing/2014/main" id="{06E3FD00-2787-E64B-8189-DB6F6C307630}"/>
+              </a:ext>
+            </a:extLst>
+          </p:cNvPr>
+          <p:cNvSpPr txBox="1"/>
+          <p:nvPr/>
+        </p:nvSpPr>
+        <p:spPr>
+          <a:xfrm>
+            <a:off x="2413449" y="3768888"/>
+            <a:ext cx="4455523" cy="153888"/>
+          </a:xfrm>
+          <a:prstGeom prst="rect">
+            <a:avLst/>
+          </a:prstGeom>
+          <a:noFill/>
+        </p:spPr>
+        <p:txBody>
+          <a:bodyPr wrap="square" lIns="0" tIns="0" rIns="0" bIns="0" anchor="t">
+            <a:spAutoFit/>
+          </a:bodyPr>
+          <a:lstStyle/>
+          <a:p>
+            <a:pPr algn="l"/>
+            <a:r>
+              <a:rPr sz="1000" b="0" i="1">
+                <a:solidFill>
+                  <a:srgbClr val="8BA39A"/>
+                </a:solidFill>
+                <a:latin typeface="Helvetica Neue"/>
+              </a:rPr>
+              <a:t>Who is this player physically</a:t>
+            </a:r>
+          </a:p>
+        </p:txBody>
+      </p:sp>
+      <p:sp>
+        <p:nvSpPr>
+          <p:cNvPr id="53" name="TextBox 8">
+            <a:extLst>
+              <a:ext uri="{FF2B5EF4-FFF2-40B4-BE49-F238E27FC236}">
+                <a16:creationId xmlns:a16="http://schemas.microsoft.com/office/drawing/2014/main" id="{B1CA1223-2273-7401-ACDA-C9074AB77878}"/>
+              </a:ext>
+            </a:extLst>
+          </p:cNvPr>
+          <p:cNvSpPr txBox="1"/>
+          <p:nvPr/>
+        </p:nvSpPr>
+        <p:spPr>
+          <a:xfrm>
+            <a:off x="7131644" y="3494568"/>
+            <a:ext cx="4004854" cy="153888"/>
+          </a:xfrm>
+          <a:prstGeom prst="rect">
+            <a:avLst/>
+          </a:prstGeom>
+          <a:noFill/>
+        </p:spPr>
+        <p:txBody>
+          <a:bodyPr wrap="square" lIns="0" tIns="0" rIns="0" bIns="0" anchor="t">
+            <a:spAutoFit/>
+          </a:bodyPr>
+          <a:lstStyle/>
+          <a:p>
+            <a:pPr algn="l"/>
+            <a:r>
+              <a:rPr sz="1000" b="1" i="0">
+                <a:solidFill>
+                  <a:srgbClr val="EA5A1F"/>
+                </a:solidFill>
+                <a:latin typeface="Helvetica Neue"/>
+              </a:rPr>
+              <a:t>DOMAIN 2 · SIMILARITY / COMPARE</a:t>
+            </a:r>
+          </a:p>
+        </p:txBody>
+      </p:sp>
+      <p:sp>
+        <p:nvSpPr>
+          <p:cNvPr id="54" name="TextBox 9">
+            <a:extLst>
+              <a:ext uri="{FF2B5EF4-FFF2-40B4-BE49-F238E27FC236}">
+                <a16:creationId xmlns:a16="http://schemas.microsoft.com/office/drawing/2014/main" id="{F2158DC2-0F03-6C32-23E8-22A47455744A}"/>
+              </a:ext>
+            </a:extLst>
+          </p:cNvPr>
+          <p:cNvSpPr txBox="1"/>
+          <p:nvPr/>
+        </p:nvSpPr>
+        <p:spPr>
+          <a:xfrm>
+            <a:off x="7131644" y="3768888"/>
+            <a:ext cx="4004854" cy="153888"/>
+          </a:xfrm>
+          <a:prstGeom prst="rect">
+            <a:avLst/>
+          </a:prstGeom>
+          <a:noFill/>
+        </p:spPr>
+        <p:txBody>
+          <a:bodyPr wrap="square" lIns="0" tIns="0" rIns="0" bIns="0" anchor="t">
+            <a:spAutoFit/>
+          </a:bodyPr>
+          <a:lstStyle/>
+          <a:p>
+            <a:pPr algn="l"/>
+            <a:r>
+              <a:rPr sz="1000" b="0" i="1">
+                <a:solidFill>
+                  <a:srgbClr val="8BA39A"/>
+                </a:solidFill>
+                <a:latin typeface="Helvetica Neue"/>
+              </a:rPr>
+              <a:t>Player ↔ others</a:t>
+            </a:r>
+          </a:p>
+        </p:txBody>
+      </p:sp>
+      <p:sp>
+        <p:nvSpPr>
+          <p:cNvPr id="56" name="TextBox 10">
+            <a:extLst>
+              <a:ext uri="{FF2B5EF4-FFF2-40B4-BE49-F238E27FC236}">
+                <a16:creationId xmlns:a16="http://schemas.microsoft.com/office/drawing/2014/main" id="{9309D847-F26C-AF22-3EC6-E3FECD57F989}"/>
+              </a:ext>
+            </a:extLst>
+          </p:cNvPr>
+          <p:cNvSpPr txBox="1"/>
+          <p:nvPr/>
+        </p:nvSpPr>
+        <p:spPr>
+          <a:xfrm>
+            <a:off x="11399170" y="3494568"/>
+            <a:ext cx="4004854" cy="153888"/>
+          </a:xfrm>
+          <a:prstGeom prst="rect">
+            <a:avLst/>
+          </a:prstGeom>
+          <a:noFill/>
+        </p:spPr>
+        <p:txBody>
+          <a:bodyPr wrap="square" lIns="0" tIns="0" rIns="0" bIns="0" anchor="t">
+            <a:spAutoFit/>
+          </a:bodyPr>
+          <a:lstStyle/>
+          <a:p>
+            <a:pPr algn="l"/>
+            <a:r>
+              <a:rPr sz="1000" b="1" i="0">
+                <a:solidFill>
+                  <a:srgbClr val="EA5A1F"/>
+                </a:solidFill>
+                <a:latin typeface="Helvetica Neue"/>
+              </a:rPr>
+              <a:t>DOMAIN 3 · SHORTLIST</a:t>
+            </a:r>
+          </a:p>
+        </p:txBody>
+      </p:sp>
+      <p:sp>
+        <p:nvSpPr>
+          <p:cNvPr id="58" name="TextBox 11">
+            <a:extLst>
+              <a:ext uri="{FF2B5EF4-FFF2-40B4-BE49-F238E27FC236}">
+                <a16:creationId xmlns:a16="http://schemas.microsoft.com/office/drawing/2014/main" id="{7EED8B64-7687-A2B6-60EF-3CE94CC72574}"/>
+              </a:ext>
+            </a:extLst>
+          </p:cNvPr>
+          <p:cNvSpPr txBox="1"/>
+          <p:nvPr/>
+        </p:nvSpPr>
+        <p:spPr>
+          <a:xfrm>
+            <a:off x="11399170" y="3768888"/>
+            <a:ext cx="4004854" cy="153888"/>
+          </a:xfrm>
+          <a:prstGeom prst="rect">
+            <a:avLst/>
+          </a:prstGeom>
+          <a:noFill/>
+        </p:spPr>
+        <p:txBody>
+          <a:bodyPr wrap="square" lIns="0" tIns="0" rIns="0" bIns="0" anchor="t">
+            <a:spAutoFit/>
+          </a:bodyPr>
+          <a:lstStyle/>
+          <a:p>
+            <a:pPr algn="l"/>
+            <a:r>
+              <a:rPr sz="1000" b="0" i="1">
+                <a:solidFill>
+                  <a:srgbClr val="8BA39A"/>
+                </a:solidFill>
+                <a:latin typeface="Helvetica Neue"/>
+              </a:rPr>
+              <a:t>Brief → candidates</a:t>
+            </a:r>
+          </a:p>
+        </p:txBody>
+      </p:sp>
+      <p:sp>
+        <p:nvSpPr>
+          <p:cNvPr id="59" name="Rounded Rectangle 12">
+            <a:extLst>
+              <a:ext uri="{FF2B5EF4-FFF2-40B4-BE49-F238E27FC236}">
+                <a16:creationId xmlns:a16="http://schemas.microsoft.com/office/drawing/2014/main" id="{6D15D231-8452-1C64-862F-E70F47B13A40}"/>
+              </a:ext>
+            </a:extLst>
+          </p:cNvPr>
+          <p:cNvSpPr/>
+          <p:nvPr/>
+        </p:nvSpPr>
+        <p:spPr>
+          <a:xfrm>
+            <a:off x="2413449" y="4134648"/>
+            <a:ext cx="4455523" cy="2017703"/>
+          </a:xfrm>
+          <a:prstGeom prst="roundRect">
+            <a:avLst>
+              <a:gd name="adj" fmla="val 5000"/>
+            </a:avLst>
+          </a:prstGeom>
+          <a:solidFill>
+            <a:srgbClr val="FCF9F4"/>
+          </a:solidFill>
+          <a:ln>
+            <a:solidFill>
+              <a:srgbClr val="DBDAD4"/>
+            </a:solidFill>
+          </a:ln>
+          <a:effectLst/>
+        </p:spPr>
+        <p:style>
+          <a:lnRef idx="1">
+            <a:schemeClr val="accent1"/>
+          </a:lnRef>
+          <a:fillRef idx="3">
+            <a:schemeClr val="accent1"/>
+          </a:fillRef>
+          <a:effectRef idx="2">
+            <a:schemeClr val="accent1"/>
+          </a:effectRef>
+          <a:fontRef idx="minor">
+            <a:schemeClr val="lt1"/>
+          </a:fontRef>
+        </p:style>
+        <p:txBody>
+          <a:bodyPr rtlCol="0" anchor="ctr"/>
+          <a:lstStyle/>
+          <a:p>
+            <a:pPr algn="ctr"/>
+            <a:endParaRPr/>
+          </a:p>
+        </p:txBody>
+      </p:sp>
+      <p:sp>
+        <p:nvSpPr>
+          <p:cNvPr id="60" name="TextBox 13">
+            <a:extLst>
+              <a:ext uri="{FF2B5EF4-FFF2-40B4-BE49-F238E27FC236}">
+                <a16:creationId xmlns:a16="http://schemas.microsoft.com/office/drawing/2014/main" id="{6FE83820-7FDC-8B26-9CEB-A420168CDF72}"/>
+              </a:ext>
+            </a:extLst>
+          </p:cNvPr>
+          <p:cNvSpPr txBox="1"/>
+          <p:nvPr/>
+        </p:nvSpPr>
+        <p:spPr>
+          <a:xfrm>
+            <a:off x="2676121" y="4271808"/>
+            <a:ext cx="4009971" cy="153888"/>
+          </a:xfrm>
+          <a:prstGeom prst="rect">
+            <a:avLst/>
+          </a:prstGeom>
+          <a:noFill/>
+        </p:spPr>
+        <p:txBody>
+          <a:bodyPr wrap="square" lIns="0" tIns="0" rIns="0" bIns="0" anchor="t">
+            <a:spAutoFit/>
+          </a:bodyPr>
+          <a:lstStyle/>
+          <a:p>
+            <a:pPr algn="l"/>
+            <a:r>
+              <a:rPr sz="1000" b="1" i="0">
+                <a:solidFill>
+                  <a:srgbClr val="EA5A1F"/>
+                </a:solidFill>
+                <a:latin typeface="Helvetica Neue"/>
+              </a:rPr>
+              <a:t>SUMMARY</a:t>
+            </a:r>
+          </a:p>
+        </p:txBody>
+      </p:sp>
+      <p:sp>
+        <p:nvSpPr>
+          <p:cNvPr id="61" name="TextBox 14">
+            <a:extLst>
+              <a:ext uri="{FF2B5EF4-FFF2-40B4-BE49-F238E27FC236}">
+                <a16:creationId xmlns:a16="http://schemas.microsoft.com/office/drawing/2014/main" id="{203616AB-36AB-88ED-8216-FDCDB6A88094}"/>
+              </a:ext>
+            </a:extLst>
+          </p:cNvPr>
+          <p:cNvSpPr txBox="1"/>
+          <p:nvPr/>
+        </p:nvSpPr>
+        <p:spPr>
+          <a:xfrm>
+            <a:off x="2676121" y="4591848"/>
+            <a:ext cx="4009971" cy="184666"/>
+          </a:xfrm>
+          <a:prstGeom prst="rect">
+            <a:avLst/>
+          </a:prstGeom>
+          <a:noFill/>
+        </p:spPr>
+        <p:txBody>
+          <a:bodyPr wrap="square" lIns="0" tIns="0" rIns="0" bIns="0" anchor="t">
+            <a:spAutoFit/>
+          </a:bodyPr>
+          <a:lstStyle/>
+          <a:p>
+            <a:pPr algn="l"/>
+            <a:r>
+              <a:rPr sz="1200" b="1" i="0" dirty="0" err="1">
+                <a:latin typeface="Helvetica Neue"/>
+              </a:rPr>
+              <a:t>getPhysicalProfile</a:t>
+            </a:r>
+            <a:r>
+              <a:rPr sz="1200" b="1" i="0" dirty="0">
+                <a:latin typeface="Helvetica Neue"/>
+              </a:rPr>
+              <a:t>(player)</a:t>
+            </a:r>
+          </a:p>
+        </p:txBody>
+      </p:sp>
+      <p:sp>
+        <p:nvSpPr>
+          <p:cNvPr id="62" name="TextBox 15">
+            <a:extLst>
+              <a:ext uri="{FF2B5EF4-FFF2-40B4-BE49-F238E27FC236}">
+                <a16:creationId xmlns:a16="http://schemas.microsoft.com/office/drawing/2014/main" id="{46F819E8-4032-39E4-B7A6-6777A4923549}"/>
+              </a:ext>
+            </a:extLst>
+          </p:cNvPr>
+          <p:cNvSpPr txBox="1"/>
+          <p:nvPr/>
+        </p:nvSpPr>
+        <p:spPr>
+          <a:xfrm>
+            <a:off x="2676121" y="5094768"/>
+            <a:ext cx="4009971" cy="153888"/>
+          </a:xfrm>
+          <a:prstGeom prst="rect">
+            <a:avLst/>
+          </a:prstGeom>
+          <a:noFill/>
+        </p:spPr>
+        <p:txBody>
+          <a:bodyPr wrap="square" lIns="0" tIns="0" rIns="0" bIns="0" anchor="t">
+            <a:spAutoFit/>
+          </a:bodyPr>
+          <a:lstStyle/>
+          <a:p>
+            <a:pPr algn="l"/>
+            <a:r>
+              <a:rPr sz="1000" b="0" i="0">
+                <a:solidFill>
+                  <a:srgbClr val="8BA39A"/>
+                </a:solidFill>
+                <a:latin typeface="Helvetica Neue"/>
+              </a:rPr>
+              <a:t>Deterministic. Fixed shape.</a:t>
+            </a:r>
+          </a:p>
+        </p:txBody>
+      </p:sp>
+      <p:sp>
+        <p:nvSpPr>
+          <p:cNvPr id="63" name="Rounded Rectangle 16">
+            <a:extLst>
+              <a:ext uri="{FF2B5EF4-FFF2-40B4-BE49-F238E27FC236}">
+                <a16:creationId xmlns:a16="http://schemas.microsoft.com/office/drawing/2014/main" id="{75604F94-9E24-254F-49FB-9C018E6E9CA7}"/>
+              </a:ext>
+            </a:extLst>
+          </p:cNvPr>
+          <p:cNvSpPr/>
+          <p:nvPr/>
+        </p:nvSpPr>
+        <p:spPr>
+          <a:xfrm>
+            <a:off x="7131644" y="4134648"/>
+            <a:ext cx="4004854" cy="2017703"/>
+          </a:xfrm>
+          <a:prstGeom prst="roundRect">
+            <a:avLst>
+              <a:gd name="adj" fmla="val 5000"/>
+            </a:avLst>
+          </a:prstGeom>
+          <a:solidFill>
+            <a:srgbClr val="FCF9F4"/>
+          </a:solidFill>
+          <a:ln>
+            <a:solidFill>
+              <a:srgbClr val="DBDAD4"/>
+            </a:solidFill>
+          </a:ln>
+          <a:effectLst/>
+        </p:spPr>
+        <p:style>
+          <a:lnRef idx="1">
+            <a:schemeClr val="accent1"/>
+          </a:lnRef>
+          <a:fillRef idx="3">
+            <a:schemeClr val="accent1"/>
+          </a:fillRef>
+          <a:effectRef idx="2">
+            <a:schemeClr val="accent1"/>
+          </a:effectRef>
+          <a:fontRef idx="minor">
+            <a:schemeClr val="lt1"/>
+          </a:fontRef>
+        </p:style>
+        <p:txBody>
+          <a:bodyPr rtlCol="0" anchor="ctr"/>
+          <a:lstStyle/>
+          <a:p>
+            <a:pPr algn="ctr"/>
+            <a:endParaRPr/>
+          </a:p>
+        </p:txBody>
+      </p:sp>
+      <p:sp>
+        <p:nvSpPr>
+          <p:cNvPr id="64" name="TextBox 17">
+            <a:extLst>
+              <a:ext uri="{FF2B5EF4-FFF2-40B4-BE49-F238E27FC236}">
+                <a16:creationId xmlns:a16="http://schemas.microsoft.com/office/drawing/2014/main" id="{962F5F87-208A-69A2-5E8F-D22637982E4A}"/>
+              </a:ext>
+            </a:extLst>
+          </p:cNvPr>
+          <p:cNvSpPr txBox="1"/>
+          <p:nvPr/>
+        </p:nvSpPr>
+        <p:spPr>
+          <a:xfrm>
+            <a:off x="7349249" y="4271808"/>
+            <a:ext cx="3604369" cy="153888"/>
+          </a:xfrm>
+          <a:prstGeom prst="rect">
+            <a:avLst/>
+          </a:prstGeom>
+          <a:noFill/>
+        </p:spPr>
+        <p:txBody>
+          <a:bodyPr wrap="square" lIns="0" tIns="0" rIns="0" bIns="0" anchor="t">
+            <a:spAutoFit/>
+          </a:bodyPr>
+          <a:lstStyle/>
+          <a:p>
+            <a:pPr algn="l"/>
+            <a:r>
+              <a:rPr sz="1000" b="1" i="0">
+                <a:solidFill>
+                  <a:srgbClr val="EA5A1F"/>
+                </a:solidFill>
+                <a:latin typeface="Helvetica Neue"/>
+              </a:rPr>
+              <a:t>SUMMARY</a:t>
+            </a:r>
+          </a:p>
+        </p:txBody>
+      </p:sp>
+      <p:sp>
+        <p:nvSpPr>
+          <p:cNvPr id="65" name="TextBox 18">
+            <a:extLst>
+              <a:ext uri="{FF2B5EF4-FFF2-40B4-BE49-F238E27FC236}">
+                <a16:creationId xmlns:a16="http://schemas.microsoft.com/office/drawing/2014/main" id="{997F9311-DF0F-285D-F533-F2881ED3E818}"/>
+              </a:ext>
+            </a:extLst>
+          </p:cNvPr>
+          <p:cNvSpPr txBox="1"/>
+          <p:nvPr/>
+        </p:nvSpPr>
+        <p:spPr>
+          <a:xfrm>
+            <a:off x="7349249" y="4591848"/>
+            <a:ext cx="3604369" cy="184666"/>
+          </a:xfrm>
+          <a:prstGeom prst="rect">
+            <a:avLst/>
+          </a:prstGeom>
+          <a:noFill/>
+        </p:spPr>
+        <p:txBody>
+          <a:bodyPr wrap="square" lIns="0" tIns="0" rIns="0" bIns="0" anchor="t">
+            <a:spAutoFit/>
+          </a:bodyPr>
+          <a:lstStyle/>
+          <a:p>
+            <a:pPr algn="l"/>
+            <a:r>
+              <a:rPr sz="1200" b="1" i="0" dirty="0" err="1">
+                <a:latin typeface="Helvetica Neue"/>
+              </a:rPr>
+              <a:t>findSimilarOrCompare</a:t>
+            </a:r>
+            <a:r>
+              <a:rPr sz="1200" b="1" i="0" dirty="0">
+                <a:latin typeface="Helvetica Neue"/>
+              </a:rPr>
+              <a:t>(mode, A, B?)</a:t>
+            </a:r>
+          </a:p>
+        </p:txBody>
+      </p:sp>
+      <p:sp>
+        <p:nvSpPr>
+          <p:cNvPr id="66" name="TextBox 19">
+            <a:extLst>
+              <a:ext uri="{FF2B5EF4-FFF2-40B4-BE49-F238E27FC236}">
+                <a16:creationId xmlns:a16="http://schemas.microsoft.com/office/drawing/2014/main" id="{F985B175-83FE-A219-233D-57A7BE2A1167}"/>
+              </a:ext>
+            </a:extLst>
+          </p:cNvPr>
+          <p:cNvSpPr txBox="1"/>
+          <p:nvPr/>
+        </p:nvSpPr>
+        <p:spPr>
+          <a:xfrm>
+            <a:off x="7349249" y="5094768"/>
+            <a:ext cx="3604369" cy="153888"/>
+          </a:xfrm>
+          <a:prstGeom prst="rect">
+            <a:avLst/>
+          </a:prstGeom>
+          <a:noFill/>
+        </p:spPr>
+        <p:txBody>
+          <a:bodyPr wrap="square" lIns="0" tIns="0" rIns="0" bIns="0" anchor="t">
+            <a:spAutoFit/>
+          </a:bodyPr>
+          <a:lstStyle/>
+          <a:p>
+            <a:pPr algn="l"/>
+            <a:r>
+              <a:rPr sz="1000" b="0" i="0">
+                <a:solidFill>
+                  <a:srgbClr val="8BA39A"/>
+                </a:solidFill>
+                <a:latin typeface="Helvetica Neue"/>
+              </a:rPr>
+              <a:t>Deterministic. Fixed shape.</a:t>
+            </a:r>
+          </a:p>
+        </p:txBody>
+      </p:sp>
+      <p:sp>
+        <p:nvSpPr>
+          <p:cNvPr id="67" name="Rounded Rectangle 20">
+            <a:extLst>
+              <a:ext uri="{FF2B5EF4-FFF2-40B4-BE49-F238E27FC236}">
+                <a16:creationId xmlns:a16="http://schemas.microsoft.com/office/drawing/2014/main" id="{0869A129-193D-5A0B-0E41-0B2F78B0BEB4}"/>
+              </a:ext>
+            </a:extLst>
+          </p:cNvPr>
+          <p:cNvSpPr/>
+          <p:nvPr/>
+        </p:nvSpPr>
+        <p:spPr>
+          <a:xfrm>
+            <a:off x="11399170" y="4134649"/>
+            <a:ext cx="4004854" cy="2017702"/>
+          </a:xfrm>
+          <a:prstGeom prst="roundRect">
+            <a:avLst>
+              <a:gd name="adj" fmla="val 5000"/>
+            </a:avLst>
+          </a:prstGeom>
+          <a:solidFill>
+            <a:srgbClr val="FCF9F4"/>
+          </a:solidFill>
+          <a:ln>
+            <a:solidFill>
+              <a:srgbClr val="DBDAD4"/>
+            </a:solidFill>
+          </a:ln>
+          <a:effectLst/>
+        </p:spPr>
+        <p:style>
+          <a:lnRef idx="1">
+            <a:schemeClr val="accent1"/>
+          </a:lnRef>
+          <a:fillRef idx="3">
+            <a:schemeClr val="accent1"/>
+          </a:fillRef>
+          <a:effectRef idx="2">
+            <a:schemeClr val="accent1"/>
+          </a:effectRef>
+          <a:fontRef idx="minor">
+            <a:schemeClr val="lt1"/>
+          </a:fontRef>
+        </p:style>
+        <p:txBody>
+          <a:bodyPr rtlCol="0" anchor="ctr"/>
+          <a:lstStyle/>
+          <a:p>
+            <a:pPr algn="ctr"/>
+            <a:endParaRPr/>
+          </a:p>
+        </p:txBody>
+      </p:sp>
+      <p:sp>
+        <p:nvSpPr>
+          <p:cNvPr id="68" name="TextBox 21">
+            <a:extLst>
+              <a:ext uri="{FF2B5EF4-FFF2-40B4-BE49-F238E27FC236}">
+                <a16:creationId xmlns:a16="http://schemas.microsoft.com/office/drawing/2014/main" id="{45891C2D-4ABA-22A1-E143-60E8D876ABE2}"/>
+              </a:ext>
+            </a:extLst>
+          </p:cNvPr>
+          <p:cNvSpPr txBox="1"/>
+          <p:nvPr/>
+        </p:nvSpPr>
+        <p:spPr>
+          <a:xfrm>
+            <a:off x="11616775" y="4271808"/>
+            <a:ext cx="3604369" cy="153888"/>
+          </a:xfrm>
+          <a:prstGeom prst="rect">
+            <a:avLst/>
+          </a:prstGeom>
+          <a:noFill/>
+        </p:spPr>
+        <p:txBody>
+          <a:bodyPr wrap="square" lIns="0" tIns="0" rIns="0" bIns="0" anchor="t">
+            <a:spAutoFit/>
+          </a:bodyPr>
+          <a:lstStyle/>
+          <a:p>
+            <a:pPr algn="l"/>
+            <a:r>
+              <a:rPr sz="1000" b="1" i="0">
+                <a:solidFill>
+                  <a:srgbClr val="EA5A1F"/>
+                </a:solidFill>
+                <a:latin typeface="Helvetica Neue"/>
+              </a:rPr>
+              <a:t>SUMMARY</a:t>
+            </a:r>
+          </a:p>
+        </p:txBody>
+      </p:sp>
+      <p:sp>
+        <p:nvSpPr>
+          <p:cNvPr id="69" name="TextBox 22">
+            <a:extLst>
+              <a:ext uri="{FF2B5EF4-FFF2-40B4-BE49-F238E27FC236}">
+                <a16:creationId xmlns:a16="http://schemas.microsoft.com/office/drawing/2014/main" id="{81B6705C-55D4-874B-73B1-9B8DE83D7953}"/>
+              </a:ext>
+            </a:extLst>
+          </p:cNvPr>
+          <p:cNvSpPr txBox="1"/>
+          <p:nvPr/>
+        </p:nvSpPr>
+        <p:spPr>
+          <a:xfrm>
+            <a:off x="11616775" y="4591848"/>
+            <a:ext cx="3604369" cy="184666"/>
+          </a:xfrm>
+          <a:prstGeom prst="rect">
+            <a:avLst/>
+          </a:prstGeom>
+          <a:noFill/>
+        </p:spPr>
+        <p:txBody>
+          <a:bodyPr wrap="square" lIns="0" tIns="0" rIns="0" bIns="0" anchor="t">
+            <a:spAutoFit/>
+          </a:bodyPr>
+          <a:lstStyle/>
+          <a:p>
+            <a:pPr algn="l"/>
+            <a:r>
+              <a:rPr sz="1200" b="1" i="0" dirty="0" err="1">
+                <a:latin typeface="Helvetica Neue"/>
+              </a:rPr>
+              <a:t>shortlistByAttribute</a:t>
+            </a:r>
+            <a:r>
+              <a:rPr sz="1200" b="1" i="0" dirty="0">
+                <a:latin typeface="Helvetica Neue"/>
+              </a:rPr>
+              <a:t>(metric, pos, league, n)</a:t>
+            </a:r>
+          </a:p>
+        </p:txBody>
+      </p:sp>
+      <p:sp>
+        <p:nvSpPr>
+          <p:cNvPr id="70" name="TextBox 23">
+            <a:extLst>
+              <a:ext uri="{FF2B5EF4-FFF2-40B4-BE49-F238E27FC236}">
+                <a16:creationId xmlns:a16="http://schemas.microsoft.com/office/drawing/2014/main" id="{09D579C1-AF59-1213-15BF-71941903447B}"/>
+              </a:ext>
+            </a:extLst>
+          </p:cNvPr>
+          <p:cNvSpPr txBox="1"/>
+          <p:nvPr/>
+        </p:nvSpPr>
+        <p:spPr>
+          <a:xfrm>
+            <a:off x="11616775" y="5094768"/>
+            <a:ext cx="3604369" cy="153888"/>
+          </a:xfrm>
+          <a:prstGeom prst="rect">
+            <a:avLst/>
+          </a:prstGeom>
+          <a:noFill/>
+        </p:spPr>
+        <p:txBody>
+          <a:bodyPr wrap="square" lIns="0" tIns="0" rIns="0" bIns="0" anchor="t">
+            <a:spAutoFit/>
+          </a:bodyPr>
+          <a:lstStyle/>
+          <a:p>
+            <a:pPr algn="l"/>
+            <a:r>
+              <a:rPr sz="1000" b="0" i="0">
+                <a:solidFill>
+                  <a:srgbClr val="8BA39A"/>
+                </a:solidFill>
+                <a:latin typeface="Helvetica Neue"/>
+              </a:rPr>
+              <a:t>Deterministic. Fixed shape.</a:t>
+            </a:r>
+          </a:p>
+        </p:txBody>
+      </p:sp>
+      <p:sp>
+        <p:nvSpPr>
+          <p:cNvPr id="71" name="Rounded Rectangle 24">
+            <a:extLst>
+              <a:ext uri="{FF2B5EF4-FFF2-40B4-BE49-F238E27FC236}">
+                <a16:creationId xmlns:a16="http://schemas.microsoft.com/office/drawing/2014/main" id="{EB5F7D3B-DDE7-BFAF-A871-BF5C0D430306}"/>
+              </a:ext>
+            </a:extLst>
+          </p:cNvPr>
+          <p:cNvSpPr/>
+          <p:nvPr/>
+        </p:nvSpPr>
+        <p:spPr>
+          <a:xfrm>
+            <a:off x="2413449" y="6342126"/>
+            <a:ext cx="4455523" cy="2017703"/>
+          </a:xfrm>
+          <a:prstGeom prst="roundRect">
+            <a:avLst>
+              <a:gd name="adj" fmla="val 5000"/>
+            </a:avLst>
+          </a:prstGeom>
+          <a:solidFill>
+            <a:srgbClr val="FCF9F4"/>
+          </a:solidFill>
+          <a:ln>
+            <a:solidFill>
+              <a:srgbClr val="DBDAD4"/>
+            </a:solidFill>
+          </a:ln>
+          <a:effectLst/>
+        </p:spPr>
+        <p:style>
+          <a:lnRef idx="1">
+            <a:schemeClr val="accent1"/>
+          </a:lnRef>
+          <a:fillRef idx="3">
+            <a:schemeClr val="accent1"/>
+          </a:fillRef>
+          <a:effectRef idx="2">
+            <a:schemeClr val="accent1"/>
+          </a:effectRef>
+          <a:fontRef idx="minor">
+            <a:schemeClr val="lt1"/>
+          </a:fontRef>
+        </p:style>
+        <p:txBody>
+          <a:bodyPr rtlCol="0" anchor="ctr"/>
+          <a:lstStyle/>
+          <a:p>
+            <a:pPr algn="ctr"/>
+            <a:endParaRPr/>
+          </a:p>
+        </p:txBody>
+      </p:sp>
+      <p:sp>
+        <p:nvSpPr>
+          <p:cNvPr id="72" name="TextBox 25">
+            <a:extLst>
+              <a:ext uri="{FF2B5EF4-FFF2-40B4-BE49-F238E27FC236}">
+                <a16:creationId xmlns:a16="http://schemas.microsoft.com/office/drawing/2014/main" id="{673325CC-24E0-CB53-367A-4DD26429E442}"/>
+              </a:ext>
+            </a:extLst>
+          </p:cNvPr>
+          <p:cNvSpPr txBox="1"/>
+          <p:nvPr/>
+        </p:nvSpPr>
+        <p:spPr>
+          <a:xfrm>
+            <a:off x="2676121" y="6479286"/>
+            <a:ext cx="4009971" cy="153888"/>
+          </a:xfrm>
+          <a:prstGeom prst="rect">
+            <a:avLst/>
+          </a:prstGeom>
+          <a:noFill/>
+        </p:spPr>
+        <p:txBody>
+          <a:bodyPr wrap="square" lIns="0" tIns="0" rIns="0" bIns="0" anchor="t">
+            <a:spAutoFit/>
+          </a:bodyPr>
+          <a:lstStyle/>
+          <a:p>
+            <a:pPr algn="l"/>
+            <a:r>
+              <a:rPr sz="1000" b="1" i="0">
+                <a:solidFill>
+                  <a:srgbClr val="EA5A1F"/>
+                </a:solidFill>
+                <a:latin typeface="Helvetica Neue"/>
+              </a:rPr>
+              <a:t>ASK</a:t>
+            </a:r>
+          </a:p>
+        </p:txBody>
+      </p:sp>
+      <p:sp>
+        <p:nvSpPr>
+          <p:cNvPr id="73" name="TextBox 26">
+            <a:extLst>
+              <a:ext uri="{FF2B5EF4-FFF2-40B4-BE49-F238E27FC236}">
+                <a16:creationId xmlns:a16="http://schemas.microsoft.com/office/drawing/2014/main" id="{050BCE11-0621-6330-9A34-63DB07B75B42}"/>
+              </a:ext>
+            </a:extLst>
+          </p:cNvPr>
+          <p:cNvSpPr txBox="1"/>
+          <p:nvPr/>
+        </p:nvSpPr>
+        <p:spPr>
+          <a:xfrm>
+            <a:off x="2676121" y="6799326"/>
+            <a:ext cx="4009971" cy="184666"/>
+          </a:xfrm>
+          <a:prstGeom prst="rect">
+            <a:avLst/>
+          </a:prstGeom>
+          <a:noFill/>
+        </p:spPr>
+        <p:txBody>
+          <a:bodyPr wrap="square" lIns="0" tIns="0" rIns="0" bIns="0" anchor="t">
+            <a:spAutoFit/>
+          </a:bodyPr>
+          <a:lstStyle/>
+          <a:p>
+            <a:pPr algn="l"/>
+            <a:r>
+              <a:rPr sz="1200" b="1" i="0">
+                <a:latin typeface="Helvetica Neue"/>
+              </a:rPr>
+              <a:t>askAboutProfile(player, q)</a:t>
+            </a:r>
+          </a:p>
+        </p:txBody>
+      </p:sp>
+      <p:sp>
+        <p:nvSpPr>
+          <p:cNvPr id="74" name="TextBox 27">
+            <a:extLst>
+              <a:ext uri="{FF2B5EF4-FFF2-40B4-BE49-F238E27FC236}">
+                <a16:creationId xmlns:a16="http://schemas.microsoft.com/office/drawing/2014/main" id="{524FB460-C75F-0214-0D08-1F100FE13A63}"/>
+              </a:ext>
+            </a:extLst>
+          </p:cNvPr>
+          <p:cNvSpPr txBox="1"/>
+          <p:nvPr/>
+        </p:nvSpPr>
+        <p:spPr>
+          <a:xfrm>
+            <a:off x="2676121" y="7302246"/>
+            <a:ext cx="4009971" cy="153888"/>
+          </a:xfrm>
+          <a:prstGeom prst="rect">
+            <a:avLst/>
+          </a:prstGeom>
+          <a:noFill/>
+        </p:spPr>
+        <p:txBody>
+          <a:bodyPr wrap="square" lIns="0" tIns="0" rIns="0" bIns="0" anchor="t">
+            <a:spAutoFit/>
+          </a:bodyPr>
+          <a:lstStyle/>
+          <a:p>
+            <a:pPr algn="l"/>
+            <a:r>
+              <a:rPr sz="1000" b="0" i="0">
+                <a:solidFill>
+                  <a:srgbClr val="8BA39A"/>
+                </a:solidFill>
+                <a:latin typeface="Helvetica Neue"/>
+              </a:rPr>
+              <a:t>Intent-driven. Receptionist filters off-scope upstream.</a:t>
+            </a:r>
+          </a:p>
+        </p:txBody>
+      </p:sp>
+      <p:sp>
+        <p:nvSpPr>
+          <p:cNvPr id="75" name="Rounded Rectangle 28">
+            <a:extLst>
+              <a:ext uri="{FF2B5EF4-FFF2-40B4-BE49-F238E27FC236}">
+                <a16:creationId xmlns:a16="http://schemas.microsoft.com/office/drawing/2014/main" id="{DF8C4090-A3B6-8833-51F8-B6CDE99F2A96}"/>
+              </a:ext>
+            </a:extLst>
+          </p:cNvPr>
+          <p:cNvSpPr/>
+          <p:nvPr/>
+        </p:nvSpPr>
+        <p:spPr>
+          <a:xfrm>
+            <a:off x="7131644" y="6343170"/>
+            <a:ext cx="4004854" cy="2017703"/>
+          </a:xfrm>
+          <a:prstGeom prst="roundRect">
+            <a:avLst>
+              <a:gd name="adj" fmla="val 5000"/>
+            </a:avLst>
+          </a:prstGeom>
+          <a:solidFill>
+            <a:srgbClr val="FCF9F4"/>
+          </a:solidFill>
+          <a:ln>
+            <a:solidFill>
+              <a:srgbClr val="DBDAD4"/>
+            </a:solidFill>
+          </a:ln>
+          <a:effectLst/>
+        </p:spPr>
+        <p:style>
+          <a:lnRef idx="1">
+            <a:schemeClr val="accent1"/>
+          </a:lnRef>
+          <a:fillRef idx="3">
+            <a:schemeClr val="accent1"/>
+          </a:fillRef>
+          <a:effectRef idx="2">
+            <a:schemeClr val="accent1"/>
+          </a:effectRef>
+          <a:fontRef idx="minor">
+            <a:schemeClr val="lt1"/>
+          </a:fontRef>
+        </p:style>
+        <p:txBody>
+          <a:bodyPr rtlCol="0" anchor="ctr"/>
+          <a:lstStyle/>
+          <a:p>
+            <a:pPr algn="ctr"/>
+            <a:endParaRPr/>
+          </a:p>
+        </p:txBody>
+      </p:sp>
+      <p:sp>
+        <p:nvSpPr>
+          <p:cNvPr id="76" name="TextBox 29">
+            <a:extLst>
+              <a:ext uri="{FF2B5EF4-FFF2-40B4-BE49-F238E27FC236}">
+                <a16:creationId xmlns:a16="http://schemas.microsoft.com/office/drawing/2014/main" id="{E1AD71E7-A8B6-D67D-F931-35CB4A16E340}"/>
+              </a:ext>
+            </a:extLst>
+          </p:cNvPr>
+          <p:cNvSpPr txBox="1"/>
+          <p:nvPr/>
+        </p:nvSpPr>
+        <p:spPr>
+          <a:xfrm>
+            <a:off x="7349249" y="6480330"/>
+            <a:ext cx="3604369" cy="153888"/>
+          </a:xfrm>
+          <a:prstGeom prst="rect">
+            <a:avLst/>
+          </a:prstGeom>
+          <a:noFill/>
+        </p:spPr>
+        <p:txBody>
+          <a:bodyPr wrap="square" lIns="0" tIns="0" rIns="0" bIns="0" anchor="t">
+            <a:spAutoFit/>
+          </a:bodyPr>
+          <a:lstStyle/>
+          <a:p>
+            <a:pPr algn="l"/>
+            <a:r>
+              <a:rPr sz="1000" b="1" i="0">
+                <a:solidFill>
+                  <a:srgbClr val="EA5A1F"/>
+                </a:solidFill>
+                <a:latin typeface="Helvetica Neue"/>
+              </a:rPr>
+              <a:t>ASK</a:t>
+            </a:r>
+          </a:p>
+        </p:txBody>
+      </p:sp>
+      <p:sp>
+        <p:nvSpPr>
+          <p:cNvPr id="77" name="TextBox 30">
+            <a:extLst>
+              <a:ext uri="{FF2B5EF4-FFF2-40B4-BE49-F238E27FC236}">
+                <a16:creationId xmlns:a16="http://schemas.microsoft.com/office/drawing/2014/main" id="{FE24A59D-8251-3ED0-1828-88C092B9B072}"/>
+              </a:ext>
+            </a:extLst>
+          </p:cNvPr>
+          <p:cNvSpPr txBox="1"/>
+          <p:nvPr/>
+        </p:nvSpPr>
+        <p:spPr>
+          <a:xfrm>
+            <a:off x="7349249" y="6800370"/>
+            <a:ext cx="3604369" cy="184666"/>
+          </a:xfrm>
+          <a:prstGeom prst="rect">
+            <a:avLst/>
+          </a:prstGeom>
+          <a:noFill/>
+        </p:spPr>
+        <p:txBody>
+          <a:bodyPr wrap="square" lIns="0" tIns="0" rIns="0" bIns="0" anchor="t">
+            <a:spAutoFit/>
+          </a:bodyPr>
+          <a:lstStyle/>
+          <a:p>
+            <a:pPr algn="l"/>
+            <a:r>
+              <a:rPr sz="1200" b="1" i="0">
+                <a:latin typeface="Helvetica Neue"/>
+              </a:rPr>
+              <a:t>askAboutSimilarity(q)</a:t>
+            </a:r>
+          </a:p>
+        </p:txBody>
+      </p:sp>
+      <p:sp>
+        <p:nvSpPr>
+          <p:cNvPr id="78" name="TextBox 31">
+            <a:extLst>
+              <a:ext uri="{FF2B5EF4-FFF2-40B4-BE49-F238E27FC236}">
+                <a16:creationId xmlns:a16="http://schemas.microsoft.com/office/drawing/2014/main" id="{853E25D6-CCEC-818D-633C-CF417C0545E6}"/>
+              </a:ext>
+            </a:extLst>
+          </p:cNvPr>
+          <p:cNvSpPr txBox="1"/>
+          <p:nvPr/>
+        </p:nvSpPr>
+        <p:spPr>
+          <a:xfrm>
+            <a:off x="7349249" y="7303290"/>
+            <a:ext cx="3604369" cy="153888"/>
+          </a:xfrm>
+          <a:prstGeom prst="rect">
+            <a:avLst/>
+          </a:prstGeom>
+          <a:noFill/>
+        </p:spPr>
+        <p:txBody>
+          <a:bodyPr wrap="square" lIns="0" tIns="0" rIns="0" bIns="0" anchor="t">
+            <a:spAutoFit/>
+          </a:bodyPr>
+          <a:lstStyle/>
+          <a:p>
+            <a:pPr algn="l"/>
+            <a:r>
+              <a:rPr sz="1000" b="0" i="0">
+                <a:solidFill>
+                  <a:srgbClr val="8BA39A"/>
+                </a:solidFill>
+                <a:latin typeface="Helvetica Neue"/>
+              </a:rPr>
+              <a:t>Intent-driven. Receptionist filters off-scope upstream.</a:t>
+            </a:r>
+          </a:p>
+        </p:txBody>
+      </p:sp>
+      <p:sp>
+        <p:nvSpPr>
+          <p:cNvPr id="79" name="Rounded Rectangle 32">
+            <a:extLst>
+              <a:ext uri="{FF2B5EF4-FFF2-40B4-BE49-F238E27FC236}">
+                <a16:creationId xmlns:a16="http://schemas.microsoft.com/office/drawing/2014/main" id="{7B7D7E53-77A1-EC05-B68C-CD10545BFA79}"/>
+              </a:ext>
+            </a:extLst>
+          </p:cNvPr>
+          <p:cNvSpPr/>
+          <p:nvPr/>
+        </p:nvSpPr>
+        <p:spPr>
+          <a:xfrm>
+            <a:off x="11399170" y="6342127"/>
+            <a:ext cx="4004854" cy="2017702"/>
+          </a:xfrm>
+          <a:prstGeom prst="roundRect">
+            <a:avLst>
+              <a:gd name="adj" fmla="val 5000"/>
+            </a:avLst>
+          </a:prstGeom>
+          <a:solidFill>
+            <a:srgbClr val="FCF9F4"/>
+          </a:solidFill>
+          <a:ln>
+            <a:solidFill>
+              <a:srgbClr val="DBDAD4"/>
+            </a:solidFill>
+          </a:ln>
+          <a:effectLst/>
+        </p:spPr>
+        <p:style>
+          <a:lnRef idx="1">
+            <a:schemeClr val="accent1"/>
+          </a:lnRef>
+          <a:fillRef idx="3">
+            <a:schemeClr val="accent1"/>
+          </a:fillRef>
+          <a:effectRef idx="2">
+            <a:schemeClr val="accent1"/>
+          </a:effectRef>
+          <a:fontRef idx="minor">
+            <a:schemeClr val="lt1"/>
+          </a:fontRef>
+        </p:style>
+        <p:txBody>
+          <a:bodyPr rtlCol="0" anchor="ctr"/>
+          <a:lstStyle/>
+          <a:p>
+            <a:pPr algn="ctr"/>
+            <a:endParaRPr/>
+          </a:p>
+        </p:txBody>
+      </p:sp>
+      <p:sp>
+        <p:nvSpPr>
+          <p:cNvPr id="80" name="TextBox 33">
+            <a:extLst>
+              <a:ext uri="{FF2B5EF4-FFF2-40B4-BE49-F238E27FC236}">
+                <a16:creationId xmlns:a16="http://schemas.microsoft.com/office/drawing/2014/main" id="{4D344BEF-753B-9AD7-04F6-2597127966DB}"/>
+              </a:ext>
+            </a:extLst>
+          </p:cNvPr>
+          <p:cNvSpPr txBox="1"/>
+          <p:nvPr/>
+        </p:nvSpPr>
+        <p:spPr>
+          <a:xfrm>
+            <a:off x="11616775" y="6479286"/>
+            <a:ext cx="3604369" cy="153888"/>
+          </a:xfrm>
+          <a:prstGeom prst="rect">
+            <a:avLst/>
+          </a:prstGeom>
+          <a:noFill/>
+        </p:spPr>
+        <p:txBody>
+          <a:bodyPr wrap="square" lIns="0" tIns="0" rIns="0" bIns="0" anchor="t">
+            <a:spAutoFit/>
+          </a:bodyPr>
+          <a:lstStyle/>
+          <a:p>
+            <a:pPr algn="l"/>
+            <a:r>
+              <a:rPr sz="1000" b="1" i="0">
+                <a:solidFill>
+                  <a:srgbClr val="EA5A1F"/>
+                </a:solidFill>
+                <a:latin typeface="Helvetica Neue"/>
+              </a:rPr>
+              <a:t>ASK</a:t>
+            </a:r>
+          </a:p>
+        </p:txBody>
+      </p:sp>
+      <p:sp>
+        <p:nvSpPr>
+          <p:cNvPr id="81" name="TextBox 34">
+            <a:extLst>
+              <a:ext uri="{FF2B5EF4-FFF2-40B4-BE49-F238E27FC236}">
+                <a16:creationId xmlns:a16="http://schemas.microsoft.com/office/drawing/2014/main" id="{49BAD244-A970-19C0-B1AF-464A078BADFE}"/>
+              </a:ext>
+            </a:extLst>
+          </p:cNvPr>
+          <p:cNvSpPr txBox="1"/>
+          <p:nvPr/>
+        </p:nvSpPr>
+        <p:spPr>
+          <a:xfrm>
+            <a:off x="11616775" y="6799326"/>
+            <a:ext cx="3604369" cy="184666"/>
+          </a:xfrm>
+          <a:prstGeom prst="rect">
+            <a:avLst/>
+          </a:prstGeom>
+          <a:noFill/>
+        </p:spPr>
+        <p:txBody>
+          <a:bodyPr wrap="square" lIns="0" tIns="0" rIns="0" bIns="0" anchor="t">
+            <a:spAutoFit/>
+          </a:bodyPr>
+          <a:lstStyle/>
+          <a:p>
+            <a:pPr algn="l"/>
+            <a:r>
+              <a:rPr sz="1200" b="1" i="0">
+                <a:latin typeface="Helvetica Neue"/>
+              </a:rPr>
+              <a:t>askShortlistQuestion(brief)</a:t>
+            </a:r>
+          </a:p>
+        </p:txBody>
+      </p:sp>
+      <p:sp>
+        <p:nvSpPr>
+          <p:cNvPr id="83" name="TextBox 35">
+            <a:extLst>
+              <a:ext uri="{FF2B5EF4-FFF2-40B4-BE49-F238E27FC236}">
+                <a16:creationId xmlns:a16="http://schemas.microsoft.com/office/drawing/2014/main" id="{493FAE1F-5FBE-B8AE-43C6-6D2B4CF89A47}"/>
+              </a:ext>
+            </a:extLst>
+          </p:cNvPr>
+          <p:cNvSpPr txBox="1"/>
+          <p:nvPr/>
+        </p:nvSpPr>
+        <p:spPr>
+          <a:xfrm>
+            <a:off x="11616775" y="7302246"/>
+            <a:ext cx="3604369" cy="153888"/>
+          </a:xfrm>
+          <a:prstGeom prst="rect">
+            <a:avLst/>
+          </a:prstGeom>
+          <a:noFill/>
+        </p:spPr>
+        <p:txBody>
+          <a:bodyPr wrap="square" lIns="0" tIns="0" rIns="0" bIns="0" anchor="t">
+            <a:spAutoFit/>
+          </a:bodyPr>
+          <a:lstStyle/>
+          <a:p>
+            <a:pPr algn="l"/>
+            <a:r>
+              <a:rPr sz="1000" b="0" i="0">
+                <a:solidFill>
+                  <a:srgbClr val="8BA39A"/>
+                </a:solidFill>
+                <a:latin typeface="Helvetica Neue"/>
+              </a:rPr>
+              <a:t>Intent-driven. Receptionist filters off-scope upstream.</a:t>
+            </a:r>
+          </a:p>
+        </p:txBody>
+      </p:sp>
+    </p:spTree>
+    <p:extLst>
+      <p:ext uri="{BB962C8B-B14F-4D97-AF65-F5344CB8AC3E}">
+        <p14:creationId xmlns:p14="http://schemas.microsoft.com/office/powerpoint/2010/main" val="366404326"/>
+      </p:ext>
+    </p:extLst>
+  </p:cSld>
+  <p:clrMapOvr>
+    <a:masterClrMapping/>
+  </p:clrMapOvr>
+</p:sld>
+</file>
+
+<file path=ppt/slides/slide13.xml><?xml version="1.0" encoding="utf-8"?>
+<p:sld xmlns:a="http://schemas.openxmlformats.org/drawingml/2006/main" xmlns:r="http://schemas.openxmlformats.org/officeDocument/2006/relationships" xmlns:p="http://schemas.openxmlformats.org/presentationml/2006/main">
+  <p:cSld>
+    <p:bg>
+      <p:bgPr>
+        <a:solidFill>
+          <a:srgbClr val="F4F1EB"/>
+        </a:solidFill>
+        <a:effectLst/>
+      </p:bgPr>
+    </p:bg>
+    <p:spTree>
+      <p:nvGrpSpPr>
+        <p:cNvPr id="1" name="">
+          <a:extLst>
+            <a:ext uri="{FF2B5EF4-FFF2-40B4-BE49-F238E27FC236}">
+              <a16:creationId xmlns:a16="http://schemas.microsoft.com/office/drawing/2014/main" id="{5F160F1C-8890-CF53-B67C-8E3EB2127471}"/>
+            </a:ext>
+          </a:extLst>
+        </p:cNvPr>
+        <p:cNvGrpSpPr/>
+        <p:nvPr/>
+      </p:nvGrpSpPr>
+      <p:grpSpPr>
+        <a:xfrm>
+          <a:off x="0" y="0"/>
+          <a:ext cx="0" cy="0"/>
+          <a:chOff x="0" y="0"/>
+          <a:chExt cx="0" cy="0"/>
+        </a:xfrm>
+      </p:grpSpPr>
+      <p:sp>
+        <p:nvSpPr>
+          <p:cNvPr id="2" name="Shape 0">
+            <a:extLst>
+              <a:ext uri="{FF2B5EF4-FFF2-40B4-BE49-F238E27FC236}">
+                <a16:creationId xmlns:a16="http://schemas.microsoft.com/office/drawing/2014/main" id="{110C1487-EA9E-6925-C695-93865A3C6A5F}"/>
+              </a:ext>
+            </a:extLst>
+          </p:cNvPr>
+          <p:cNvSpPr/>
+          <p:nvPr/>
+        </p:nvSpPr>
+        <p:spPr>
+          <a:xfrm>
+            <a:off x="838200" y="928688"/>
+            <a:ext cx="16611600" cy="9525"/>
+          </a:xfrm>
+          <a:prstGeom prst="rect">
+            <a:avLst/>
+          </a:prstGeom>
+          <a:solidFill>
+            <a:srgbClr val="0E1410">
+              <a:alpha val="12000"/>
+            </a:srgbClr>
+          </a:solidFill>
+          <a:ln/>
+        </p:spPr>
+        <p:txBody>
+          <a:bodyPr/>
+          <a:lstStyle/>
+          <a:p>
+            <a:endParaRPr lang="pt-PT"/>
+          </a:p>
+        </p:txBody>
+      </p:sp>
+      <p:sp>
+        <p:nvSpPr>
+          <p:cNvPr id="82" name="Text 80">
+            <a:extLst>
+              <a:ext uri="{FF2B5EF4-FFF2-40B4-BE49-F238E27FC236}">
+                <a16:creationId xmlns:a16="http://schemas.microsoft.com/office/drawing/2014/main" id="{3DC16482-4593-919D-0D1F-B7BA2C8DDC7A}"/>
+              </a:ext>
+            </a:extLst>
+          </p:cNvPr>
+          <p:cNvSpPr/>
+          <p:nvPr/>
+        </p:nvSpPr>
+        <p:spPr>
+          <a:xfrm>
+            <a:off x="16937682" y="9605963"/>
+            <a:ext cx="588318" cy="185738"/>
+          </a:xfrm>
+          <a:prstGeom prst="rect">
+            <a:avLst/>
+          </a:prstGeom>
+          <a:noFill/>
+          <a:ln/>
+        </p:spPr>
+        <p:txBody>
+          <a:bodyPr wrap="square" lIns="25400" tIns="25400" rIns="25400" bIns="25400" rtlCol="0" anchor="t">
+            <a:normAutofit lnSpcReduction="10000"/>
+          </a:bodyPr>
+          <a:lstStyle/>
+          <a:p>
+            <a:pPr marL="0" indent="0" algn="l">
+              <a:buNone/>
+            </a:pPr>
+            <a:r>
+              <a:rPr lang="en-US" sz="900" kern="0" spc="36" dirty="0">
+                <a:solidFill>
+                  <a:srgbClr val="6C726B"/>
+                </a:solidFill>
+                <a:latin typeface="JetBrains Mono" pitchFamily="34" charset="0"/>
+                <a:ea typeface="JetBrains Mono" pitchFamily="34" charset="-122"/>
+                <a:cs typeface="JetBrains Mono" pitchFamily="34" charset="-120"/>
+              </a:rPr>
+              <a:t>13 / 14</a:t>
+            </a:r>
+            <a:endParaRPr lang="en-US" sz="900" dirty="0"/>
+          </a:p>
+        </p:txBody>
+      </p:sp>
+      <p:sp>
+        <p:nvSpPr>
+          <p:cNvPr id="100" name="Shape 22">
+            <a:extLst>
+              <a:ext uri="{FF2B5EF4-FFF2-40B4-BE49-F238E27FC236}">
+                <a16:creationId xmlns:a16="http://schemas.microsoft.com/office/drawing/2014/main" id="{6697B9B4-58D0-D78D-91EE-D9D0D1617023}"/>
+              </a:ext>
+            </a:extLst>
+          </p:cNvPr>
+          <p:cNvSpPr/>
+          <p:nvPr/>
+        </p:nvSpPr>
+        <p:spPr>
+          <a:xfrm>
+            <a:off x="838200" y="9424988"/>
+            <a:ext cx="16611600" cy="9525"/>
+          </a:xfrm>
+          <a:prstGeom prst="rect">
+            <a:avLst/>
+          </a:prstGeom>
+          <a:solidFill>
+            <a:srgbClr val="0E1410">
+              <a:alpha val="12000"/>
+            </a:srgbClr>
+          </a:solidFill>
+          <a:ln/>
+        </p:spPr>
+        <p:txBody>
+          <a:bodyPr/>
+          <a:lstStyle/>
+          <a:p>
+            <a:endParaRPr lang="pt-PT"/>
+          </a:p>
+        </p:txBody>
+      </p:sp>
+      <p:sp>
+        <p:nvSpPr>
+          <p:cNvPr id="4" name="Text 1">
+            <a:extLst>
+              <a:ext uri="{FF2B5EF4-FFF2-40B4-BE49-F238E27FC236}">
+                <a16:creationId xmlns:a16="http://schemas.microsoft.com/office/drawing/2014/main" id="{3F322F0C-93E7-A99B-998A-AF4816AB543B}"/>
+              </a:ext>
+            </a:extLst>
+          </p:cNvPr>
+          <p:cNvSpPr/>
+          <p:nvPr/>
+        </p:nvSpPr>
+        <p:spPr>
+          <a:xfrm>
+            <a:off x="838200" y="609600"/>
+            <a:ext cx="2863129" cy="185738"/>
+          </a:xfrm>
+          <a:prstGeom prst="rect">
+            <a:avLst/>
+          </a:prstGeom>
+          <a:noFill/>
+          <a:ln/>
+        </p:spPr>
+        <p:txBody>
+          <a:bodyPr wrap="square" lIns="25400" tIns="25400" rIns="25400" bIns="25400" rtlCol="0" anchor="t">
+            <a:normAutofit lnSpcReduction="10000"/>
+          </a:bodyPr>
+          <a:lstStyle/>
+          <a:p>
+            <a:r>
+              <a:rPr lang="en-US" sz="900" kern="0" spc="36" dirty="0">
+                <a:solidFill>
+                  <a:srgbClr val="6C726B"/>
+                </a:solidFill>
+                <a:latin typeface="JetBrains Mono" pitchFamily="34" charset="0"/>
+                <a:ea typeface="JetBrains Mono" pitchFamily="34" charset="-122"/>
+                <a:cs typeface="JetBrains Mono" pitchFamily="34" charset="-120"/>
+              </a:rPr>
+              <a:t>SECTION 03 – FUTURE VISION STORYBOARD</a:t>
+            </a:r>
+            <a:endParaRPr lang="en-US" sz="900" dirty="0"/>
+          </a:p>
+        </p:txBody>
+      </p:sp>
+      <p:sp>
+        <p:nvSpPr>
+          <p:cNvPr id="5" name="Rounded Rectangle 6">
+            <a:extLst>
+              <a:ext uri="{FF2B5EF4-FFF2-40B4-BE49-F238E27FC236}">
+                <a16:creationId xmlns:a16="http://schemas.microsoft.com/office/drawing/2014/main" id="{B67077D4-9EDF-A712-F5F0-9CB50DF5F69E}"/>
+              </a:ext>
+            </a:extLst>
+          </p:cNvPr>
+          <p:cNvSpPr/>
+          <p:nvPr/>
+        </p:nvSpPr>
+        <p:spPr>
+          <a:xfrm>
+            <a:off x="1053728" y="3555380"/>
+            <a:ext cx="5072932" cy="2380192"/>
+          </a:xfrm>
+          <a:prstGeom prst="roundRect">
+            <a:avLst>
+              <a:gd name="adj" fmla="val 5000"/>
+            </a:avLst>
+          </a:prstGeom>
+          <a:solidFill>
+            <a:srgbClr val="FCF9F4"/>
+          </a:solidFill>
+          <a:ln>
+            <a:solidFill>
+              <a:srgbClr val="DCDAD5"/>
+            </a:solidFill>
+          </a:ln>
+          <a:effectLst/>
+        </p:spPr>
+        <p:style>
+          <a:lnRef idx="1">
+            <a:schemeClr val="accent1"/>
+          </a:lnRef>
+          <a:fillRef idx="3">
+            <a:schemeClr val="accent1"/>
+          </a:fillRef>
+          <a:effectRef idx="2">
+            <a:schemeClr val="accent1"/>
+          </a:effectRef>
+          <a:fontRef idx="minor">
+            <a:schemeClr val="lt1"/>
+          </a:fontRef>
+        </p:style>
+        <p:txBody>
+          <a:bodyPr rtlCol="0" anchor="ctr"/>
+          <a:lstStyle/>
+          <a:p>
+            <a:pPr algn="ctr"/>
+            <a:endParaRPr/>
+          </a:p>
+        </p:txBody>
+      </p:sp>
+      <p:sp>
+        <p:nvSpPr>
+          <p:cNvPr id="6" name="TextBox 7">
+            <a:extLst>
+              <a:ext uri="{FF2B5EF4-FFF2-40B4-BE49-F238E27FC236}">
+                <a16:creationId xmlns:a16="http://schemas.microsoft.com/office/drawing/2014/main" id="{A12F79D8-899B-DB5A-C14C-ED1BE7BD34F3}"/>
+              </a:ext>
+            </a:extLst>
+          </p:cNvPr>
+          <p:cNvSpPr txBox="1"/>
+          <p:nvPr/>
+        </p:nvSpPr>
+        <p:spPr>
+          <a:xfrm>
+            <a:off x="1417369" y="3765733"/>
+            <a:ext cx="4422556" cy="184666"/>
+          </a:xfrm>
+          <a:prstGeom prst="rect">
+            <a:avLst/>
+          </a:prstGeom>
+          <a:noFill/>
+        </p:spPr>
+        <p:txBody>
+          <a:bodyPr wrap="square" lIns="0" tIns="0" rIns="0" bIns="0" anchor="t">
+            <a:spAutoFit/>
+          </a:bodyPr>
+          <a:lstStyle/>
+          <a:p>
+            <a:pPr algn="l"/>
+            <a:r>
+              <a:rPr sz="1200" b="1" i="0" dirty="0">
+                <a:solidFill>
+                  <a:srgbClr val="EA5A1F"/>
+                </a:solidFill>
+                <a:latin typeface="Helvetica Neue"/>
+              </a:rPr>
+              <a:t>STEP 1</a:t>
+            </a:r>
+          </a:p>
+        </p:txBody>
+      </p:sp>
+      <p:sp>
+        <p:nvSpPr>
+          <p:cNvPr id="7" name="TextBox 8">
+            <a:extLst>
+              <a:ext uri="{FF2B5EF4-FFF2-40B4-BE49-F238E27FC236}">
+                <a16:creationId xmlns:a16="http://schemas.microsoft.com/office/drawing/2014/main" id="{0F354E1E-255C-BEBE-2B5C-F4F6CCE1F395}"/>
+              </a:ext>
+            </a:extLst>
+          </p:cNvPr>
+          <p:cNvSpPr txBox="1"/>
+          <p:nvPr/>
+        </p:nvSpPr>
+        <p:spPr>
+          <a:xfrm>
+            <a:off x="1378916" y="4050026"/>
+            <a:ext cx="4422556" cy="430887"/>
+          </a:xfrm>
+          <a:prstGeom prst="rect">
+            <a:avLst/>
+          </a:prstGeom>
+          <a:noFill/>
+        </p:spPr>
+        <p:txBody>
+          <a:bodyPr wrap="square" lIns="0" tIns="0" rIns="0" bIns="0" anchor="t">
+            <a:spAutoFit/>
+          </a:bodyPr>
+          <a:lstStyle/>
+          <a:p>
+            <a:pPr algn="l"/>
+            <a:r>
+              <a:rPr sz="2800" b="1" i="0" dirty="0">
+                <a:latin typeface="Helvetica Neue"/>
+              </a:rPr>
+              <a:t>SHORTLIST</a:t>
+            </a:r>
+          </a:p>
+        </p:txBody>
+      </p:sp>
+      <p:sp>
+        <p:nvSpPr>
+          <p:cNvPr id="8" name="TextBox 9">
+            <a:extLst>
+              <a:ext uri="{FF2B5EF4-FFF2-40B4-BE49-F238E27FC236}">
+                <a16:creationId xmlns:a16="http://schemas.microsoft.com/office/drawing/2014/main" id="{E7EF3948-98B3-8F28-57FC-D71924B19BEC}"/>
+              </a:ext>
+            </a:extLst>
+          </p:cNvPr>
+          <p:cNvSpPr txBox="1"/>
+          <p:nvPr/>
+        </p:nvSpPr>
+        <p:spPr>
+          <a:xfrm>
+            <a:off x="1378916" y="4554111"/>
+            <a:ext cx="4422556" cy="276999"/>
+          </a:xfrm>
+          <a:prstGeom prst="rect">
+            <a:avLst/>
+          </a:prstGeom>
+          <a:noFill/>
+        </p:spPr>
+        <p:txBody>
+          <a:bodyPr wrap="square" lIns="0" tIns="0" rIns="0" bIns="0" anchor="t">
+            <a:spAutoFit/>
+          </a:bodyPr>
+          <a:lstStyle/>
+          <a:p>
+            <a:pPr algn="l"/>
+            <a:r>
+              <a:rPr b="0" i="0" dirty="0">
+                <a:solidFill>
+                  <a:srgbClr val="8BA39A"/>
+                </a:solidFill>
+                <a:latin typeface="Helvetica Neue"/>
+              </a:rPr>
+              <a:t>Start from a brief</a:t>
+            </a:r>
+          </a:p>
+        </p:txBody>
+      </p:sp>
+      <p:sp>
+        <p:nvSpPr>
+          <p:cNvPr id="9" name="TextBox 10">
+            <a:extLst>
+              <a:ext uri="{FF2B5EF4-FFF2-40B4-BE49-F238E27FC236}">
+                <a16:creationId xmlns:a16="http://schemas.microsoft.com/office/drawing/2014/main" id="{3C650DA5-0228-1592-2AAF-338E35AAD356}"/>
+              </a:ext>
+            </a:extLst>
+          </p:cNvPr>
+          <p:cNvSpPr txBox="1"/>
+          <p:nvPr/>
+        </p:nvSpPr>
+        <p:spPr>
+          <a:xfrm>
+            <a:off x="1378916" y="5333160"/>
+            <a:ext cx="4422556" cy="369332"/>
+          </a:xfrm>
+          <a:prstGeom prst="rect">
+            <a:avLst/>
+          </a:prstGeom>
+          <a:noFill/>
+        </p:spPr>
+        <p:txBody>
+          <a:bodyPr wrap="square" lIns="0" tIns="0" rIns="0" bIns="0" anchor="t">
+            <a:spAutoFit/>
+          </a:bodyPr>
+          <a:lstStyle/>
+          <a:p>
+            <a:pPr algn="l"/>
+            <a:r>
+              <a:rPr sz="1200" b="0" i="1" dirty="0">
+                <a:latin typeface="Helvetica Neue"/>
+              </a:rPr>
+              <a:t>"Top 5 quickest CBs in the PL"</a:t>
+            </a:r>
+          </a:p>
+          <a:p>
+            <a:pPr algn="l"/>
+            <a:r>
+              <a:rPr sz="1200" b="0" i="1" dirty="0">
+                <a:latin typeface="Helvetica Neue"/>
+              </a:rPr>
+              <a:t>"Quick LB under 24 with endurance"</a:t>
+            </a:r>
+          </a:p>
+        </p:txBody>
+      </p:sp>
+      <p:sp>
+        <p:nvSpPr>
+          <p:cNvPr id="10" name="Right Arrow 11">
+            <a:extLst>
+              <a:ext uri="{FF2B5EF4-FFF2-40B4-BE49-F238E27FC236}">
+                <a16:creationId xmlns:a16="http://schemas.microsoft.com/office/drawing/2014/main" id="{BA90B738-A2D0-59B6-65F7-BD7778B9F604}"/>
+              </a:ext>
+            </a:extLst>
+          </p:cNvPr>
+          <p:cNvSpPr/>
+          <p:nvPr/>
+        </p:nvSpPr>
+        <p:spPr>
+          <a:xfrm>
+            <a:off x="6303346" y="4572647"/>
+            <a:ext cx="390226" cy="357029"/>
+          </a:xfrm>
+          <a:prstGeom prst="rightArrow">
+            <a:avLst/>
+          </a:prstGeom>
+          <a:solidFill>
+            <a:srgbClr val="EA5A1F"/>
+          </a:solidFill>
+          <a:ln>
+            <a:noFill/>
+          </a:ln>
+          <a:effectLst/>
+        </p:spPr>
+        <p:style>
+          <a:lnRef idx="1">
+            <a:schemeClr val="accent1"/>
+          </a:lnRef>
+          <a:fillRef idx="3">
+            <a:schemeClr val="accent1"/>
+          </a:fillRef>
+          <a:effectRef idx="2">
+            <a:schemeClr val="accent1"/>
+          </a:effectRef>
+          <a:fontRef idx="minor">
+            <a:schemeClr val="lt1"/>
+          </a:fontRef>
+        </p:style>
+        <p:txBody>
+          <a:bodyPr rtlCol="0" anchor="ctr"/>
+          <a:lstStyle/>
+          <a:p>
+            <a:pPr algn="ctr"/>
+            <a:endParaRPr/>
+          </a:p>
+        </p:txBody>
+      </p:sp>
+      <p:sp>
+        <p:nvSpPr>
+          <p:cNvPr id="11" name="Rounded Rectangle 12">
+            <a:extLst>
+              <a:ext uri="{FF2B5EF4-FFF2-40B4-BE49-F238E27FC236}">
+                <a16:creationId xmlns:a16="http://schemas.microsoft.com/office/drawing/2014/main" id="{26BD40E8-AD81-16C0-493D-A296375589D9}"/>
+              </a:ext>
+            </a:extLst>
+          </p:cNvPr>
+          <p:cNvSpPr/>
+          <p:nvPr/>
+        </p:nvSpPr>
+        <p:spPr>
+          <a:xfrm>
+            <a:off x="6870259" y="3555380"/>
+            <a:ext cx="5072932" cy="2380192"/>
+          </a:xfrm>
+          <a:prstGeom prst="roundRect">
+            <a:avLst>
+              <a:gd name="adj" fmla="val 5000"/>
+            </a:avLst>
+          </a:prstGeom>
+          <a:solidFill>
+            <a:srgbClr val="FCF9F4"/>
+          </a:solidFill>
+          <a:ln>
+            <a:solidFill>
+              <a:srgbClr val="DCDAD5"/>
+            </a:solidFill>
+          </a:ln>
+          <a:effectLst/>
+        </p:spPr>
+        <p:style>
+          <a:lnRef idx="1">
+            <a:schemeClr val="accent1"/>
+          </a:lnRef>
+          <a:fillRef idx="3">
+            <a:schemeClr val="accent1"/>
+          </a:fillRef>
+          <a:effectRef idx="2">
+            <a:schemeClr val="accent1"/>
+          </a:effectRef>
+          <a:fontRef idx="minor">
+            <a:schemeClr val="lt1"/>
+          </a:fontRef>
+        </p:style>
+        <p:txBody>
+          <a:bodyPr rtlCol="0" anchor="ctr"/>
+          <a:lstStyle/>
+          <a:p>
+            <a:pPr algn="ctr"/>
+            <a:endParaRPr/>
+          </a:p>
+        </p:txBody>
+      </p:sp>
+      <p:sp>
+        <p:nvSpPr>
+          <p:cNvPr id="12" name="TextBox 13">
+            <a:extLst>
+              <a:ext uri="{FF2B5EF4-FFF2-40B4-BE49-F238E27FC236}">
+                <a16:creationId xmlns:a16="http://schemas.microsoft.com/office/drawing/2014/main" id="{B3309CAF-128D-23F5-3A7C-6A5B3D0DED24}"/>
+              </a:ext>
+            </a:extLst>
+          </p:cNvPr>
+          <p:cNvSpPr txBox="1"/>
+          <p:nvPr/>
+        </p:nvSpPr>
+        <p:spPr>
+          <a:xfrm>
+            <a:off x="7210713" y="3792154"/>
+            <a:ext cx="4422556" cy="153888"/>
+          </a:xfrm>
+          <a:prstGeom prst="rect">
+            <a:avLst/>
+          </a:prstGeom>
+          <a:noFill/>
+        </p:spPr>
+        <p:txBody>
+          <a:bodyPr wrap="square" lIns="0" tIns="0" rIns="0" bIns="0" anchor="t">
+            <a:spAutoFit/>
+          </a:bodyPr>
+          <a:lstStyle/>
+          <a:p>
+            <a:pPr algn="l"/>
+            <a:r>
+              <a:rPr sz="1000" b="1" i="0" dirty="0">
+                <a:solidFill>
+                  <a:srgbClr val="EA5A1F"/>
+                </a:solidFill>
+                <a:latin typeface="Helvetica Neue"/>
+              </a:rPr>
+              <a:t>STEP 2</a:t>
+            </a:r>
+          </a:p>
+        </p:txBody>
+      </p:sp>
+      <p:sp>
+        <p:nvSpPr>
+          <p:cNvPr id="13" name="TextBox 14">
+            <a:extLst>
+              <a:ext uri="{FF2B5EF4-FFF2-40B4-BE49-F238E27FC236}">
+                <a16:creationId xmlns:a16="http://schemas.microsoft.com/office/drawing/2014/main" id="{BC32ECF2-D036-6CDA-4195-334BC497FF61}"/>
+              </a:ext>
+            </a:extLst>
+          </p:cNvPr>
+          <p:cNvSpPr txBox="1"/>
+          <p:nvPr/>
+        </p:nvSpPr>
+        <p:spPr>
+          <a:xfrm>
+            <a:off x="7210713" y="4054000"/>
+            <a:ext cx="4422556" cy="430887"/>
+          </a:xfrm>
+          <a:prstGeom prst="rect">
+            <a:avLst/>
+          </a:prstGeom>
+          <a:noFill/>
+        </p:spPr>
+        <p:txBody>
+          <a:bodyPr wrap="square" lIns="0" tIns="0" rIns="0" bIns="0" anchor="t">
+            <a:spAutoFit/>
+          </a:bodyPr>
+          <a:lstStyle/>
+          <a:p>
+            <a:pPr algn="l"/>
+            <a:r>
+              <a:rPr sz="2800" b="1" i="0" dirty="0">
+                <a:latin typeface="Helvetica Neue"/>
+              </a:rPr>
+              <a:t>PROFILE</a:t>
+            </a:r>
+            <a:endParaRPr sz="1800" b="1" i="0" dirty="0">
+              <a:latin typeface="Helvetica Neue"/>
+            </a:endParaRPr>
+          </a:p>
+        </p:txBody>
+      </p:sp>
+      <p:sp>
+        <p:nvSpPr>
+          <p:cNvPr id="14" name="TextBox 15">
+            <a:extLst>
+              <a:ext uri="{FF2B5EF4-FFF2-40B4-BE49-F238E27FC236}">
+                <a16:creationId xmlns:a16="http://schemas.microsoft.com/office/drawing/2014/main" id="{963475B4-20C9-7B4A-C8A2-B216C6CBB1EF}"/>
+              </a:ext>
+            </a:extLst>
+          </p:cNvPr>
+          <p:cNvSpPr txBox="1"/>
+          <p:nvPr/>
+        </p:nvSpPr>
+        <p:spPr>
+          <a:xfrm>
+            <a:off x="7210713" y="4572438"/>
+            <a:ext cx="4422556" cy="184666"/>
+          </a:xfrm>
+          <a:prstGeom prst="rect">
+            <a:avLst/>
+          </a:prstGeom>
+          <a:noFill/>
+        </p:spPr>
+        <p:txBody>
+          <a:bodyPr wrap="square" lIns="0" tIns="0" rIns="0" bIns="0" anchor="t">
+            <a:spAutoFit/>
+          </a:bodyPr>
+          <a:lstStyle/>
+          <a:p>
+            <a:pPr algn="l"/>
+            <a:r>
+              <a:rPr sz="1200" b="0" i="0" dirty="0">
+                <a:solidFill>
+                  <a:srgbClr val="8BA39A"/>
+                </a:solidFill>
+                <a:latin typeface="Helvetica Neue"/>
+              </a:rPr>
+              <a:t>Describe a known player</a:t>
+            </a:r>
+          </a:p>
+        </p:txBody>
+      </p:sp>
+      <p:sp>
+        <p:nvSpPr>
+          <p:cNvPr id="15" name="TextBox 16">
+            <a:extLst>
+              <a:ext uri="{FF2B5EF4-FFF2-40B4-BE49-F238E27FC236}">
+                <a16:creationId xmlns:a16="http://schemas.microsoft.com/office/drawing/2014/main" id="{A083661C-ABBC-AF88-71A8-B5B16D852213}"/>
+              </a:ext>
+            </a:extLst>
+          </p:cNvPr>
+          <p:cNvSpPr txBox="1"/>
+          <p:nvPr/>
+        </p:nvSpPr>
+        <p:spPr>
+          <a:xfrm>
+            <a:off x="7210713" y="5390567"/>
+            <a:ext cx="4422556" cy="307777"/>
+          </a:xfrm>
+          <a:prstGeom prst="rect">
+            <a:avLst/>
+          </a:prstGeom>
+          <a:noFill/>
+        </p:spPr>
+        <p:txBody>
+          <a:bodyPr wrap="square" lIns="0" tIns="0" rIns="0" bIns="0" anchor="t">
+            <a:spAutoFit/>
+          </a:bodyPr>
+          <a:lstStyle/>
+          <a:p>
+            <a:pPr algn="l"/>
+            <a:r>
+              <a:rPr sz="1000" b="0" i="1" dirty="0">
+                <a:latin typeface="Helvetica Neue"/>
+              </a:rPr>
+              <a:t>"What's </a:t>
+            </a:r>
+            <a:r>
+              <a:rPr sz="1000" b="0" i="1" dirty="0" err="1">
+                <a:latin typeface="Helvetica Neue"/>
+              </a:rPr>
+              <a:t>Gvardiol's</a:t>
+            </a:r>
+            <a:r>
+              <a:rPr sz="1000" b="0" i="1" dirty="0">
+                <a:latin typeface="Helvetica Neue"/>
+              </a:rPr>
+              <a:t> profile?"</a:t>
+            </a:r>
+          </a:p>
+          <a:p>
+            <a:pPr algn="l"/>
+            <a:r>
+              <a:rPr sz="1000" b="0" i="1" dirty="0">
+                <a:latin typeface="Helvetica Neue"/>
+              </a:rPr>
+              <a:t>"Is Kane still fit enough?"</a:t>
+            </a:r>
+          </a:p>
+        </p:txBody>
+      </p:sp>
+      <p:sp>
+        <p:nvSpPr>
+          <p:cNvPr id="16" name="Right Arrow 17">
+            <a:extLst>
+              <a:ext uri="{FF2B5EF4-FFF2-40B4-BE49-F238E27FC236}">
+                <a16:creationId xmlns:a16="http://schemas.microsoft.com/office/drawing/2014/main" id="{3251308A-BA63-73BB-6C2B-6C69063F3B84}"/>
+              </a:ext>
+            </a:extLst>
+          </p:cNvPr>
+          <p:cNvSpPr/>
+          <p:nvPr/>
+        </p:nvSpPr>
+        <p:spPr>
+          <a:xfrm>
+            <a:off x="12119878" y="4572438"/>
+            <a:ext cx="390226" cy="357029"/>
+          </a:xfrm>
+          <a:prstGeom prst="rightArrow">
+            <a:avLst/>
+          </a:prstGeom>
+          <a:solidFill>
+            <a:srgbClr val="EA5A1F"/>
+          </a:solidFill>
+          <a:ln>
+            <a:noFill/>
+          </a:ln>
+          <a:effectLst/>
+        </p:spPr>
+        <p:style>
+          <a:lnRef idx="1">
+            <a:schemeClr val="accent1"/>
+          </a:lnRef>
+          <a:fillRef idx="3">
+            <a:schemeClr val="accent1"/>
+          </a:fillRef>
+          <a:effectRef idx="2">
+            <a:schemeClr val="accent1"/>
+          </a:effectRef>
+          <a:fontRef idx="minor">
+            <a:schemeClr val="lt1"/>
+          </a:fontRef>
+        </p:style>
+        <p:txBody>
+          <a:bodyPr rtlCol="0" anchor="ctr"/>
+          <a:lstStyle/>
+          <a:p>
+            <a:pPr algn="ctr"/>
+            <a:endParaRPr/>
+          </a:p>
+        </p:txBody>
+      </p:sp>
+      <p:sp>
+        <p:nvSpPr>
+          <p:cNvPr id="22" name="Rounded Rectangle 23">
+            <a:extLst>
+              <a:ext uri="{FF2B5EF4-FFF2-40B4-BE49-F238E27FC236}">
+                <a16:creationId xmlns:a16="http://schemas.microsoft.com/office/drawing/2014/main" id="{F628FE60-9C6F-04FB-D3CD-9EF4E988CC9B}"/>
+              </a:ext>
+            </a:extLst>
+          </p:cNvPr>
+          <p:cNvSpPr/>
+          <p:nvPr/>
+        </p:nvSpPr>
+        <p:spPr>
+          <a:xfrm>
+            <a:off x="1053728" y="6522239"/>
+            <a:ext cx="15999247" cy="2261182"/>
+          </a:xfrm>
+          <a:prstGeom prst="roundRect">
+            <a:avLst>
+              <a:gd name="adj" fmla="val 5000"/>
+            </a:avLst>
+          </a:prstGeom>
+          <a:solidFill>
+            <a:srgbClr val="FCF9F4"/>
+          </a:solidFill>
+          <a:ln>
+            <a:solidFill>
+              <a:srgbClr val="E8F4E1"/>
+            </a:solidFill>
+          </a:ln>
+          <a:effectLst/>
+        </p:spPr>
+        <p:style>
+          <a:lnRef idx="1">
+            <a:schemeClr val="accent1"/>
+          </a:lnRef>
+          <a:fillRef idx="3">
+            <a:schemeClr val="accent1"/>
+          </a:fillRef>
+          <a:effectRef idx="2">
+            <a:schemeClr val="accent1"/>
+          </a:effectRef>
+          <a:fontRef idx="minor">
+            <a:schemeClr val="lt1"/>
+          </a:fontRef>
+        </p:style>
+        <p:txBody>
+          <a:bodyPr rtlCol="0" anchor="ctr"/>
+          <a:lstStyle/>
+          <a:p>
+            <a:pPr algn="ctr"/>
+            <a:endParaRPr/>
+          </a:p>
+        </p:txBody>
+      </p:sp>
+      <p:sp>
+        <p:nvSpPr>
+          <p:cNvPr id="23" name="TextBox 24">
+            <a:extLst>
+              <a:ext uri="{FF2B5EF4-FFF2-40B4-BE49-F238E27FC236}">
+                <a16:creationId xmlns:a16="http://schemas.microsoft.com/office/drawing/2014/main" id="{56258D28-A4FC-033E-FE18-93274D5A2B75}"/>
+              </a:ext>
+            </a:extLst>
+          </p:cNvPr>
+          <p:cNvSpPr txBox="1"/>
+          <p:nvPr/>
+        </p:nvSpPr>
+        <p:spPr>
+          <a:xfrm>
+            <a:off x="1378916" y="6753120"/>
+            <a:ext cx="15218796" cy="215444"/>
+          </a:xfrm>
+          <a:prstGeom prst="rect">
+            <a:avLst/>
+          </a:prstGeom>
+          <a:noFill/>
+        </p:spPr>
+        <p:txBody>
+          <a:bodyPr wrap="square" lIns="0" tIns="0" rIns="0" bIns="0" anchor="t">
+            <a:spAutoFit/>
+          </a:bodyPr>
+          <a:lstStyle/>
+          <a:p>
+            <a:pPr algn="l"/>
+            <a:r>
+              <a:rPr sz="1400" b="1" i="0" dirty="0">
+                <a:solidFill>
+                  <a:srgbClr val="EA5A1F"/>
+                </a:solidFill>
+                <a:latin typeface="Helvetica Neue"/>
+              </a:rPr>
+              <a:t>WHY THIS SHAPE</a:t>
+            </a:r>
+          </a:p>
+        </p:txBody>
+      </p:sp>
+      <p:sp>
+        <p:nvSpPr>
+          <p:cNvPr id="24" name="TextBox 25">
+            <a:extLst>
+              <a:ext uri="{FF2B5EF4-FFF2-40B4-BE49-F238E27FC236}">
+                <a16:creationId xmlns:a16="http://schemas.microsoft.com/office/drawing/2014/main" id="{8C811C50-368C-FCE9-461B-4FC2052D9740}"/>
+              </a:ext>
+            </a:extLst>
+          </p:cNvPr>
+          <p:cNvSpPr txBox="1"/>
+          <p:nvPr/>
+        </p:nvSpPr>
+        <p:spPr>
+          <a:xfrm>
+            <a:off x="1393668" y="7111474"/>
+            <a:ext cx="15218796" cy="1384995"/>
+          </a:xfrm>
+          <a:prstGeom prst="rect">
+            <a:avLst/>
+          </a:prstGeom>
+          <a:noFill/>
+        </p:spPr>
+        <p:txBody>
+          <a:bodyPr wrap="square" lIns="0" tIns="0" rIns="0" bIns="0" anchor="t">
+            <a:spAutoFit/>
+          </a:bodyPr>
+          <a:lstStyle/>
+          <a:p>
+            <a:pPr algn="l"/>
+            <a:r>
+              <a:rPr b="0" i="0" dirty="0">
+                <a:latin typeface="Helvetica Neue"/>
+              </a:rPr>
+              <a:t>Three domains cover a sporting director's real-world loop: brief → target → alternatives.</a:t>
+            </a:r>
+          </a:p>
+          <a:p>
+            <a:pPr algn="l"/>
+            <a:r>
+              <a:rPr b="0" i="0" dirty="0">
+                <a:latin typeface="Helvetica Neue"/>
+              </a:rPr>
+              <a:t>Each domain answers at two depths — a fixed summary for the obvious question, an ask-question</a:t>
+            </a:r>
+          </a:p>
+          <a:p>
+            <a:pPr algn="l"/>
+            <a:r>
+              <a:rPr b="0" i="0" dirty="0">
+                <a:latin typeface="Helvetica Neue"/>
+              </a:rPr>
+              <a:t>function for the nuanced one. Same knowledge base underneath, different prompt on top.</a:t>
+            </a:r>
+          </a:p>
+          <a:p>
+            <a:pPr algn="l"/>
+            <a:endParaRPr b="0" i="0" dirty="0">
+              <a:latin typeface="Helvetica Neue"/>
+            </a:endParaRPr>
+          </a:p>
+          <a:p>
+            <a:pPr algn="l"/>
+            <a:r>
+              <a:rPr b="0" i="0" dirty="0">
+                <a:latin typeface="Helvetica Neue"/>
+              </a:rPr>
+              <a:t>Entry is pure chat — player, league, position extracted from natural language, no UI dropdowns.</a:t>
+            </a:r>
+          </a:p>
+        </p:txBody>
+      </p:sp>
+      <p:sp>
+        <p:nvSpPr>
+          <p:cNvPr id="25" name="Text 4">
+            <a:extLst>
+              <a:ext uri="{FF2B5EF4-FFF2-40B4-BE49-F238E27FC236}">
+                <a16:creationId xmlns:a16="http://schemas.microsoft.com/office/drawing/2014/main" id="{99968BBC-B1E8-B459-7213-4F08D662F565}"/>
+              </a:ext>
+            </a:extLst>
+          </p:cNvPr>
+          <p:cNvSpPr/>
+          <p:nvPr/>
+        </p:nvSpPr>
+        <p:spPr>
+          <a:xfrm>
+            <a:off x="838200" y="1571625"/>
+            <a:ext cx="15853475" cy="2389717"/>
+          </a:xfrm>
+          <a:prstGeom prst="rect">
+            <a:avLst/>
+          </a:prstGeom>
+          <a:noFill/>
+          <a:ln/>
+        </p:spPr>
+        <p:txBody>
+          <a:bodyPr wrap="square" lIns="25400" tIns="25400" rIns="25400" bIns="25400" rtlCol="0" anchor="t">
+            <a:normAutofit/>
+          </a:bodyPr>
+          <a:lstStyle/>
+          <a:p>
+            <a:pPr marL="0" indent="0" algn="l">
+              <a:lnSpc>
+                <a:spcPct val="96000"/>
+              </a:lnSpc>
+              <a:buNone/>
+            </a:pPr>
+            <a:r>
+              <a:rPr lang="en-US" sz="6900" b="1" kern="0" spc="-241" dirty="0">
+                <a:solidFill>
+                  <a:srgbClr val="0E1410"/>
+                </a:solidFill>
+                <a:latin typeface="Space Grotesk" pitchFamily="34" charset="0"/>
+                <a:ea typeface="Space Grotesk" pitchFamily="34" charset="-122"/>
+              </a:rPr>
+              <a:t>One loop, three entry points</a:t>
+            </a:r>
+          </a:p>
+        </p:txBody>
+      </p:sp>
+      <p:sp>
+        <p:nvSpPr>
+          <p:cNvPr id="32" name="Rounded Rectangle 12">
+            <a:extLst>
+              <a:ext uri="{FF2B5EF4-FFF2-40B4-BE49-F238E27FC236}">
+                <a16:creationId xmlns:a16="http://schemas.microsoft.com/office/drawing/2014/main" id="{E45778CD-28A5-4DF4-A16B-5401ED25B8BC}"/>
+              </a:ext>
+            </a:extLst>
+          </p:cNvPr>
+          <p:cNvSpPr/>
+          <p:nvPr/>
+        </p:nvSpPr>
+        <p:spPr>
+          <a:xfrm>
+            <a:off x="12686790" y="3559531"/>
+            <a:ext cx="4366185" cy="2380192"/>
+          </a:xfrm>
+          <a:prstGeom prst="roundRect">
+            <a:avLst>
+              <a:gd name="adj" fmla="val 5000"/>
+            </a:avLst>
+          </a:prstGeom>
+          <a:solidFill>
+            <a:srgbClr val="FCF9F4"/>
+          </a:solidFill>
+          <a:ln>
+            <a:solidFill>
+              <a:srgbClr val="DCDAD5"/>
+            </a:solidFill>
+          </a:ln>
+          <a:effectLst/>
+        </p:spPr>
+        <p:style>
+          <a:lnRef idx="1">
+            <a:schemeClr val="accent1"/>
+          </a:lnRef>
+          <a:fillRef idx="3">
+            <a:schemeClr val="accent1"/>
+          </a:fillRef>
+          <a:effectRef idx="2">
+            <a:schemeClr val="accent1"/>
+          </a:effectRef>
+          <a:fontRef idx="minor">
+            <a:schemeClr val="lt1"/>
+          </a:fontRef>
+        </p:style>
+        <p:txBody>
+          <a:bodyPr rtlCol="0" anchor="ctr"/>
+          <a:lstStyle/>
+          <a:p>
+            <a:pPr algn="ctr"/>
+            <a:endParaRPr/>
+          </a:p>
+        </p:txBody>
+      </p:sp>
+      <p:sp>
+        <p:nvSpPr>
+          <p:cNvPr id="33" name="TextBox 13">
+            <a:extLst>
+              <a:ext uri="{FF2B5EF4-FFF2-40B4-BE49-F238E27FC236}">
+                <a16:creationId xmlns:a16="http://schemas.microsoft.com/office/drawing/2014/main" id="{3A4A2B3B-D70E-0645-F24F-C921CBAE7D80}"/>
+              </a:ext>
+            </a:extLst>
+          </p:cNvPr>
+          <p:cNvSpPr txBox="1"/>
+          <p:nvPr/>
+        </p:nvSpPr>
+        <p:spPr>
+          <a:xfrm>
+            <a:off x="13027244" y="3796305"/>
+            <a:ext cx="4422556" cy="153888"/>
+          </a:xfrm>
+          <a:prstGeom prst="rect">
+            <a:avLst/>
+          </a:prstGeom>
+          <a:noFill/>
+        </p:spPr>
+        <p:txBody>
+          <a:bodyPr wrap="square" lIns="0" tIns="0" rIns="0" bIns="0" anchor="t">
+            <a:spAutoFit/>
+          </a:bodyPr>
+          <a:lstStyle/>
+          <a:p>
+            <a:pPr algn="l"/>
+            <a:r>
+              <a:rPr sz="1000" b="1" i="0" dirty="0">
+                <a:solidFill>
+                  <a:srgbClr val="EA5A1F"/>
+                </a:solidFill>
+                <a:latin typeface="Helvetica Neue"/>
+              </a:rPr>
+              <a:t>STEP </a:t>
+            </a:r>
+            <a:r>
+              <a:rPr lang="pt-PT" sz="1000" b="1" i="0" dirty="0">
+                <a:solidFill>
+                  <a:srgbClr val="EA5A1F"/>
+                </a:solidFill>
+                <a:latin typeface="Helvetica Neue"/>
+              </a:rPr>
+              <a:t>3</a:t>
+            </a:r>
+            <a:endParaRPr sz="1000" b="1" i="0" dirty="0">
+              <a:solidFill>
+                <a:srgbClr val="EA5A1F"/>
+              </a:solidFill>
+              <a:latin typeface="Helvetica Neue"/>
+            </a:endParaRPr>
+          </a:p>
+        </p:txBody>
+      </p:sp>
+      <p:sp>
+        <p:nvSpPr>
+          <p:cNvPr id="34" name="TextBox 14">
+            <a:extLst>
+              <a:ext uri="{FF2B5EF4-FFF2-40B4-BE49-F238E27FC236}">
+                <a16:creationId xmlns:a16="http://schemas.microsoft.com/office/drawing/2014/main" id="{23F8C14C-D232-F135-30BF-0E8B6B38C5F6}"/>
+              </a:ext>
+            </a:extLst>
+          </p:cNvPr>
+          <p:cNvSpPr txBox="1"/>
+          <p:nvPr/>
+        </p:nvSpPr>
+        <p:spPr>
+          <a:xfrm>
+            <a:off x="13027244" y="4058151"/>
+            <a:ext cx="4422556" cy="430887"/>
+          </a:xfrm>
+          <a:prstGeom prst="rect">
+            <a:avLst/>
+          </a:prstGeom>
+          <a:noFill/>
+        </p:spPr>
+        <p:txBody>
+          <a:bodyPr wrap="square" lIns="0" tIns="0" rIns="0" bIns="0" anchor="t">
+            <a:spAutoFit/>
+          </a:bodyPr>
+          <a:lstStyle/>
+          <a:p>
+            <a:pPr algn="l"/>
+            <a:r>
+              <a:rPr lang="pt-PT" sz="2800" b="1" dirty="0">
+                <a:latin typeface="Helvetica Neue"/>
+              </a:rPr>
+              <a:t>SIMILAR / COMPARE</a:t>
+            </a:r>
+            <a:endParaRPr sz="1800" b="1" i="0" dirty="0">
+              <a:latin typeface="Helvetica Neue"/>
+            </a:endParaRPr>
+          </a:p>
+        </p:txBody>
+      </p:sp>
+      <p:sp>
+        <p:nvSpPr>
+          <p:cNvPr id="35" name="TextBox 15">
+            <a:extLst>
+              <a:ext uri="{FF2B5EF4-FFF2-40B4-BE49-F238E27FC236}">
+                <a16:creationId xmlns:a16="http://schemas.microsoft.com/office/drawing/2014/main" id="{5C05A97B-904B-A900-05BB-F2E0525C0CE6}"/>
+              </a:ext>
+            </a:extLst>
+          </p:cNvPr>
+          <p:cNvSpPr txBox="1"/>
+          <p:nvPr/>
+        </p:nvSpPr>
+        <p:spPr>
+          <a:xfrm>
+            <a:off x="13027244" y="4576589"/>
+            <a:ext cx="4422556" cy="184666"/>
+          </a:xfrm>
+          <a:prstGeom prst="rect">
+            <a:avLst/>
+          </a:prstGeom>
+          <a:noFill/>
+        </p:spPr>
+        <p:txBody>
+          <a:bodyPr wrap="square" lIns="0" tIns="0" rIns="0" bIns="0" anchor="t">
+            <a:spAutoFit/>
+          </a:bodyPr>
+          <a:lstStyle/>
+          <a:p>
+            <a:pPr algn="l"/>
+            <a:r>
+              <a:rPr lang="pt-PT" sz="1200" b="0" i="0" dirty="0">
+                <a:solidFill>
+                  <a:srgbClr val="8BA39A"/>
+                </a:solidFill>
+                <a:latin typeface="Helvetica Neue"/>
+              </a:rPr>
+              <a:t>Pivot to </a:t>
+            </a:r>
+            <a:r>
+              <a:rPr lang="pt-PT" sz="1200" b="0" i="0" dirty="0" err="1">
+                <a:solidFill>
+                  <a:srgbClr val="8BA39A"/>
+                </a:solidFill>
+                <a:latin typeface="Helvetica Neue"/>
+              </a:rPr>
+              <a:t>alternatives</a:t>
+            </a:r>
+            <a:endParaRPr sz="1200" b="0" i="0" dirty="0">
+              <a:solidFill>
+                <a:srgbClr val="8BA39A"/>
+              </a:solidFill>
+              <a:latin typeface="Helvetica Neue"/>
+            </a:endParaRPr>
+          </a:p>
+        </p:txBody>
+      </p:sp>
+      <p:sp>
+        <p:nvSpPr>
+          <p:cNvPr id="36" name="TextBox 16">
+            <a:extLst>
+              <a:ext uri="{FF2B5EF4-FFF2-40B4-BE49-F238E27FC236}">
+                <a16:creationId xmlns:a16="http://schemas.microsoft.com/office/drawing/2014/main" id="{4A1F0461-BE58-7C14-BE97-239CE6AFD229}"/>
+              </a:ext>
+            </a:extLst>
+          </p:cNvPr>
+          <p:cNvSpPr txBox="1"/>
+          <p:nvPr/>
+        </p:nvSpPr>
+        <p:spPr>
+          <a:xfrm>
+            <a:off x="13027244" y="5394718"/>
+            <a:ext cx="4422556" cy="307777"/>
+          </a:xfrm>
+          <a:prstGeom prst="rect">
+            <a:avLst/>
+          </a:prstGeom>
+          <a:noFill/>
+        </p:spPr>
+        <p:txBody>
+          <a:bodyPr wrap="square" lIns="0" tIns="0" rIns="0" bIns="0" anchor="t">
+            <a:spAutoFit/>
+          </a:bodyPr>
+          <a:lstStyle/>
+          <a:p>
+            <a:r>
+              <a:rPr lang="pt-PT" sz="1000" i="1" dirty="0">
+                <a:latin typeface="Helvetica Neue"/>
+              </a:rPr>
+              <a:t>"</a:t>
+            </a:r>
+            <a:r>
+              <a:rPr lang="pt-PT" sz="1000" i="1" dirty="0" err="1">
+                <a:latin typeface="Helvetica Neue"/>
+              </a:rPr>
+              <a:t>Who</a:t>
+            </a:r>
+            <a:r>
+              <a:rPr lang="pt-PT" sz="1000" i="1" dirty="0">
+                <a:latin typeface="Helvetica Neue"/>
+              </a:rPr>
+              <a:t> </a:t>
+            </a:r>
+            <a:r>
+              <a:rPr lang="pt-PT" sz="1000" i="1" dirty="0" err="1">
+                <a:latin typeface="Helvetica Neue"/>
+              </a:rPr>
+              <a:t>could</a:t>
+            </a:r>
+            <a:r>
+              <a:rPr lang="pt-PT" sz="1000" i="1" dirty="0">
+                <a:latin typeface="Helvetica Neue"/>
+              </a:rPr>
+              <a:t> </a:t>
+            </a:r>
+            <a:r>
+              <a:rPr lang="pt-PT" sz="1000" i="1" dirty="0" err="1">
+                <a:latin typeface="Helvetica Neue"/>
+              </a:rPr>
+              <a:t>replace</a:t>
+            </a:r>
+            <a:r>
+              <a:rPr lang="pt-PT" sz="1000" i="1" dirty="0">
+                <a:latin typeface="Helvetica Neue"/>
+              </a:rPr>
+              <a:t> </a:t>
+            </a:r>
+            <a:r>
+              <a:rPr lang="pt-PT" sz="1000" i="1" dirty="0" err="1">
+                <a:latin typeface="Helvetica Neue"/>
+              </a:rPr>
+              <a:t>him</a:t>
+            </a:r>
+            <a:r>
+              <a:rPr lang="pt-PT" sz="1000" i="1" dirty="0">
+                <a:latin typeface="Helvetica Neue"/>
+              </a:rPr>
+              <a:t> in </a:t>
+            </a:r>
+            <a:r>
+              <a:rPr lang="pt-PT" sz="1000" i="1" dirty="0" err="1">
+                <a:latin typeface="Helvetica Neue"/>
+              </a:rPr>
+              <a:t>the</a:t>
+            </a:r>
+            <a:r>
+              <a:rPr lang="pt-PT" sz="1000" i="1" dirty="0">
+                <a:latin typeface="Helvetica Neue"/>
+              </a:rPr>
+              <a:t> Bundesliga?"</a:t>
+            </a:r>
+          </a:p>
+          <a:p>
+            <a:r>
+              <a:rPr lang="pt-PT" sz="1000" i="1" dirty="0">
+                <a:latin typeface="Helvetica Neue"/>
+              </a:rPr>
+              <a:t>"Compare </a:t>
+            </a:r>
+            <a:r>
+              <a:rPr lang="pt-PT" sz="1000" i="1" dirty="0" err="1">
+                <a:latin typeface="Helvetica Neue"/>
+              </a:rPr>
+              <a:t>Saliba</a:t>
+            </a:r>
+            <a:r>
+              <a:rPr lang="pt-PT" sz="1000" i="1" dirty="0">
+                <a:latin typeface="Helvetica Neue"/>
+              </a:rPr>
+              <a:t> </a:t>
+            </a:r>
+            <a:r>
+              <a:rPr lang="pt-PT" sz="1000" i="1" dirty="0" err="1">
+                <a:latin typeface="Helvetica Neue"/>
+              </a:rPr>
+              <a:t>vs</a:t>
+            </a:r>
+            <a:r>
+              <a:rPr lang="pt-PT" sz="1000" i="1" dirty="0">
+                <a:latin typeface="Helvetica Neue"/>
+              </a:rPr>
+              <a:t> </a:t>
+            </a:r>
+            <a:r>
+              <a:rPr lang="pt-PT" sz="1000" i="1" dirty="0" err="1">
+                <a:latin typeface="Helvetica Neue"/>
+              </a:rPr>
+              <a:t>Konaté</a:t>
+            </a:r>
+            <a:r>
+              <a:rPr lang="pt-PT" sz="1000" i="1" dirty="0">
+                <a:latin typeface="Helvetica Neue"/>
+              </a:rPr>
+              <a:t>"</a:t>
+            </a:r>
+          </a:p>
+        </p:txBody>
+      </p:sp>
+    </p:spTree>
+    <p:extLst>
+      <p:ext uri="{BB962C8B-B14F-4D97-AF65-F5344CB8AC3E}">
+        <p14:creationId xmlns:p14="http://schemas.microsoft.com/office/powerpoint/2010/main" val="977799149"/>
+      </p:ext>
+    </p:extLst>
+  </p:cSld>
+  <p:clrMapOvr>
+    <a:masterClrMapping/>
+  </p:clrMapOvr>
+</p:sld>
+</file>
+
+<file path=ppt/slides/slide14.xml><?xml version="1.0" encoding="utf-8"?>
 <p:sld xmlns:a="http://schemas.openxmlformats.org/drawingml/2006/main" xmlns:r="http://schemas.openxmlformats.org/officeDocument/2006/relationships" xmlns:p="http://schemas.openxmlformats.org/presentationml/2006/main">
   <p:cSld name="Slide 15">
     <p:bg>
@@ -3854,6 +6744,36 @@
           <a:chExt cx="0" cy="0"/>
         </a:xfrm>
       </p:grpSpPr>
+      <p:pic>
+        <p:nvPicPr>
+          <p:cNvPr id="25" name="Imagem 24">
+            <a:extLst>
+              <a:ext uri="{FF2B5EF4-FFF2-40B4-BE49-F238E27FC236}">
+                <a16:creationId xmlns:a16="http://schemas.microsoft.com/office/drawing/2014/main" id="{F7E75FBF-EA01-1FDC-CB69-0B9FA83E9EA6}"/>
+              </a:ext>
+            </a:extLst>
+          </p:cNvPr>
+          <p:cNvPicPr>
+            <a:picLocks noChangeAspect="1"/>
+          </p:cNvPicPr>
+          <p:nvPr/>
+        </p:nvPicPr>
+        <p:blipFill>
+          <a:blip r:embed="rId3"/>
+          <a:stretch>
+            <a:fillRect/>
+          </a:stretch>
+        </p:blipFill>
+        <p:spPr>
+          <a:xfrm>
+            <a:off x="0" y="-339833"/>
+            <a:ext cx="18288000" cy="12192000"/>
+          </a:xfrm>
+          <a:prstGeom prst="rect">
+            <a:avLst/>
+          </a:prstGeom>
+        </p:spPr>
+      </p:pic>
       <p:sp>
         <p:nvSpPr>
           <p:cNvPr id="2" name="Shape 0"/>
@@ -3920,7 +6840,7 @@
                 <a:ea typeface="JetBrains Mono" pitchFamily="34" charset="-122"/>
                 <a:cs typeface="JetBrains Mono" pitchFamily="34" charset="-120"/>
               </a:rPr>
-              <a:t>15 / 15</a:t>
+              <a:t>14 / 14</a:t>
             </a:r>
             <a:endParaRPr lang="en-US" sz="900" dirty="0"/>
           </a:p>
@@ -3964,47 +6884,6 @@
                 <a:cs typeface="JetBrains Mono" pitchFamily="34" charset="-120"/>
               </a:rPr>
               <a:t>CLOSING</a:t>
-            </a:r>
-            <a:endParaRPr lang="en-US" sz="900" dirty="0"/>
-          </a:p>
-        </p:txBody>
-      </p:sp>
-      <p:sp>
-        <p:nvSpPr>
-          <p:cNvPr id="5" name="Text 3"/>
-          <p:cNvSpPr/>
-          <p:nvPr/>
-        </p:nvSpPr>
-        <p:spPr>
-          <a:xfrm>
-            <a:off x="838200" y="1596479"/>
-            <a:ext cx="14716125" cy="185738"/>
-          </a:xfrm>
-          <a:prstGeom prst="rect">
-            <a:avLst/>
-          </a:prstGeom>
-          <a:noFill/>
-          <a:ln/>
-        </p:spPr>
-        <p:txBody>
-          <a:bodyPr wrap="square" lIns="25400" tIns="25400" rIns="25400" bIns="25400" rtlCol="0" anchor="t">
-            <a:normAutofit lnSpcReduction="10000"/>
-          </a:bodyPr>
-          <a:lstStyle/>
-          <a:p>
-            <a:pPr marL="0" indent="0" algn="l">
-              <a:buNone/>
-            </a:pPr>
-            <a:r>
-              <a:rPr lang="en-US" sz="900" kern="0" spc="36" dirty="0">
-                <a:solidFill>
-                  <a:srgbClr val="6FD29A"/>
-                </a:solidFill>
-                <a:latin typeface="JetBrains Mono" pitchFamily="34" charset="0"/>
-                <a:ea typeface="JetBrains Mono" pitchFamily="34" charset="-122"/>
-                <a:cs typeface="JetBrains Mono" pitchFamily="34" charset="-120"/>
-              </a:rPr>
-              <a:t>SKILLCORNER MEASURES. TWELVE REASONS.</a:t>
             </a:r>
             <a:endParaRPr lang="en-US" sz="900" dirty="0"/>
           </a:p>
@@ -4040,27 +6919,35 @@
               <a:buNone/>
             </a:pPr>
             <a:r>
-              <a:rPr lang="en-US" sz="12000" b="1" kern="0" spc="-540" dirty="0">
-                <a:solidFill>
-                  <a:srgbClr val="F4F1EA"/>
+              <a:rPr lang="en-US" sz="7200" b="1" kern="0" spc="-540" dirty="0">
+                <a:solidFill>
+                  <a:srgbClr val="EA5A1F"/>
                 </a:solidFill>
                 <a:latin typeface="Space Grotesk" pitchFamily="34" charset="0"/>
                 <a:ea typeface="Space Grotesk" pitchFamily="34" charset="-122"/>
                 <a:cs typeface="Space Grotesk" pitchFamily="34" charset="-120"/>
               </a:rPr>
-              <a:t>The model is the foundation. </a:t>
-            </a:r>
-            <a:r>
-              <a:rPr lang="en-US" sz="12000" b="1" kern="0" spc="-540" dirty="0">
-                <a:solidFill>
-                  <a:srgbClr val="6FD29A"/>
+              <a:t>TWELVE</a:t>
+            </a:r>
+            <a:r>
+              <a:rPr lang="en-US" sz="7200" b="1" kern="0" spc="-540" dirty="0">
+                <a:solidFill>
+                  <a:srgbClr val="F4F1EA"/>
                 </a:solidFill>
                 <a:latin typeface="Space Grotesk" pitchFamily="34" charset="0"/>
                 <a:ea typeface="Space Grotesk" pitchFamily="34" charset="-122"/>
                 <a:cs typeface="Space Grotesk" pitchFamily="34" charset="-120"/>
               </a:rPr>
-              <a:t>Context </a:t>
-            </a:r>
+              <a:t> </a:t>
+            </a:r>
+          </a:p>
+          <a:p>
+            <a:pPr marL="0" indent="0" algn="l">
+              <a:lnSpc>
+                <a:spcPct val="92000"/>
+              </a:lnSpc>
+              <a:buNone/>
+            </a:pPr>
             <a:r>
               <a:rPr lang="en-US" sz="12000" b="1" kern="0" spc="-540" dirty="0">
                 <a:solidFill>
@@ -4070,32 +6957,100 @@
                 <a:ea typeface="Space Grotesk" pitchFamily="34" charset="-122"/>
                 <a:cs typeface="Space Grotesk" pitchFamily="34" charset="-120"/>
               </a:rPr>
-              <a:t>is the product</a:t>
-            </a:r>
-            <a:r>
-              <a:rPr lang="en-US" sz="12000" b="1" kern="0" spc="-540" dirty="0">
-                <a:solidFill>
-                  <a:srgbClr val="FF5A1F"/>
-                </a:solidFill>
-                <a:latin typeface="Space Grotesk" pitchFamily="34" charset="0"/>
-                <a:ea typeface="Space Grotesk" pitchFamily="34" charset="-122"/>
-                <a:cs typeface="Space Grotesk" pitchFamily="34" charset="-120"/>
-              </a:rPr>
-              <a:t>.</a:t>
-            </a:r>
-            <a:endParaRPr lang="en-US" sz="12000" dirty="0"/>
-          </a:p>
-        </p:txBody>
-      </p:sp>
-      <p:sp>
-        <p:nvSpPr>
-          <p:cNvPr id="7" name="Shape 5"/>
-          <p:cNvSpPr/>
-          <p:nvPr/>
-        </p:nvSpPr>
-        <p:spPr>
-          <a:xfrm>
-            <a:off x="838200" y="8258175"/>
+              <a:t>CONTEXT ENGINEERING</a:t>
+            </a:r>
+          </a:p>
+          <a:p>
+            <a:pPr marL="0" indent="0" algn="l">
+              <a:lnSpc>
+                <a:spcPct val="92000"/>
+              </a:lnSpc>
+              <a:buNone/>
+            </a:pPr>
+            <a:endParaRPr lang="en-US" sz="3200" kern="0" spc="-540" dirty="0">
+              <a:solidFill>
+                <a:srgbClr val="F4F1EA"/>
+              </a:solidFill>
+              <a:latin typeface="Franklin Gothic Medium" panose="020B0603020102020204" pitchFamily="34" charset="0"/>
+              <a:ea typeface="Space Grotesk" pitchFamily="34" charset="-122"/>
+              <a:cs typeface="Space Grotesk" pitchFamily="34" charset="-120"/>
+            </a:endParaRPr>
+          </a:p>
+          <a:p>
+            <a:pPr marL="0" indent="0" algn="l">
+              <a:lnSpc>
+                <a:spcPct val="92000"/>
+              </a:lnSpc>
+              <a:buNone/>
+            </a:pPr>
+            <a:endParaRPr lang="en-US" sz="3200" kern="0" spc="-540" dirty="0">
+              <a:solidFill>
+                <a:srgbClr val="F4F1EA"/>
+              </a:solidFill>
+              <a:latin typeface="Franklin Gothic Medium" panose="020B0603020102020204" pitchFamily="34" charset="0"/>
+              <a:ea typeface="Space Grotesk" pitchFamily="34" charset="-122"/>
+              <a:cs typeface="Space Grotesk" pitchFamily="34" charset="-120"/>
+            </a:endParaRPr>
+          </a:p>
+          <a:p>
+            <a:pPr marL="0" indent="0" algn="l">
+              <a:lnSpc>
+                <a:spcPct val="92000"/>
+              </a:lnSpc>
+              <a:buNone/>
+            </a:pPr>
+            <a:endParaRPr lang="en-US" sz="3200" kern="0" spc="-540" dirty="0">
+              <a:solidFill>
+                <a:srgbClr val="F4F1EA"/>
+              </a:solidFill>
+              <a:latin typeface="Franklin Gothic Medium" panose="020B0603020102020204" pitchFamily="34" charset="0"/>
+              <a:ea typeface="Space Grotesk" pitchFamily="34" charset="-122"/>
+              <a:cs typeface="Space Grotesk" pitchFamily="34" charset="-120"/>
+            </a:endParaRPr>
+          </a:p>
+          <a:p>
+            <a:pPr marL="0" indent="0" algn="l">
+              <a:lnSpc>
+                <a:spcPct val="92000"/>
+              </a:lnSpc>
+              <a:buNone/>
+            </a:pPr>
+            <a:endParaRPr lang="en-US" sz="3200" kern="0" spc="-540" dirty="0">
+              <a:solidFill>
+                <a:srgbClr val="F4F1EA"/>
+              </a:solidFill>
+              <a:latin typeface="Franklin Gothic Medium" panose="020B0603020102020204" pitchFamily="34" charset="0"/>
+              <a:ea typeface="Space Grotesk" pitchFamily="34" charset="-122"/>
+              <a:cs typeface="Space Grotesk" pitchFamily="34" charset="-120"/>
+            </a:endParaRPr>
+          </a:p>
+          <a:p>
+            <a:pPr marL="0" indent="0" algn="l">
+              <a:lnSpc>
+                <a:spcPct val="92000"/>
+              </a:lnSpc>
+              <a:buNone/>
+            </a:pPr>
+            <a:endParaRPr lang="en-US" sz="12000" kern="0" spc="-540" dirty="0">
+              <a:solidFill>
+                <a:srgbClr val="F4F1EA"/>
+              </a:solidFill>
+              <a:latin typeface="Franklin Gothic Medium" panose="020B0603020102020204" pitchFamily="34" charset="0"/>
+              <a:ea typeface="Space Grotesk" pitchFamily="34" charset="-122"/>
+              <a:cs typeface="Space Grotesk" pitchFamily="34" charset="-120"/>
+            </a:endParaRPr>
+          </a:p>
+        </p:txBody>
+      </p:sp>
+      <p:sp>
+        <p:nvSpPr>
+          <p:cNvPr id="17" name="Shape 15"/>
+          <p:cNvSpPr/>
+          <p:nvPr/>
+        </p:nvSpPr>
+        <p:spPr>
+          <a:xfrm>
+            <a:off x="838200" y="9558338"/>
             <a:ext cx="16611600" cy="9525"/>
           </a:xfrm>
           <a:prstGeom prst="rect">
@@ -4118,14 +7073,14 @@
       </p:sp>
       <p:sp>
         <p:nvSpPr>
-          <p:cNvPr id="8" name="Text 6"/>
-          <p:cNvSpPr/>
-          <p:nvPr/>
-        </p:nvSpPr>
-        <p:spPr>
-          <a:xfrm>
-            <a:off x="838200" y="8529638"/>
-            <a:ext cx="807765" cy="185738"/>
+          <p:cNvPr id="18" name="Text 16"/>
+          <p:cNvSpPr/>
+          <p:nvPr/>
+        </p:nvSpPr>
+        <p:spPr>
+          <a:xfrm>
+            <a:off x="838200" y="9720263"/>
+            <a:ext cx="2637099" cy="185738"/>
           </a:xfrm>
           <a:prstGeom prst="rect">
             <a:avLst/>
@@ -4145,13 +7100,15 @@
             <a:r>
               <a:rPr lang="en-US" sz="900" kern="0" spc="36" dirty="0">
                 <a:solidFill>
-                  <a:srgbClr val="6C726B"/>
+                  <a:srgbClr val="F4F1EA">
+                    <a:alpha val="45000"/>
+                  </a:srgbClr>
                 </a:solidFill>
                 <a:latin typeface="JetBrains Mono" pitchFamily="34" charset="0"/>
                 <a:ea typeface="JetBrains Mono" pitchFamily="34" charset="-122"/>
                 <a:cs typeface="JetBrains Mono" pitchFamily="34" charset="-120"/>
               </a:rPr>
-              <a:t>FOUNDATION</a:t>
+              <a:t>TWELVE · CONTEXT ENGINEERING · 2026</a:t>
             </a:r>
             <a:endParaRPr lang="en-US" sz="900" dirty="0"/>
           </a:p>
@@ -4159,14 +7116,20 @@
       </p:sp>
       <p:sp>
         <p:nvSpPr>
-          <p:cNvPr id="9" name="Text 7"/>
-          <p:cNvSpPr/>
-          <p:nvPr/>
-        </p:nvSpPr>
-        <p:spPr>
-          <a:xfrm>
-            <a:off x="838200" y="8763000"/>
-            <a:ext cx="5494020" cy="352425"/>
+          <p:cNvPr id="20" name="Text 4">
+            <a:extLst>
+              <a:ext uri="{FF2B5EF4-FFF2-40B4-BE49-F238E27FC236}">
+                <a16:creationId xmlns:a16="http://schemas.microsoft.com/office/drawing/2014/main" id="{FA4BDC1E-2CBD-42CA-F4E3-8A5674EE0B61}"/>
+              </a:ext>
+            </a:extLst>
+          </p:cNvPr>
+          <p:cNvSpPr/>
+          <p:nvPr/>
+        </p:nvSpPr>
+        <p:spPr>
+          <a:xfrm>
+            <a:off x="838200" y="5756167"/>
+            <a:ext cx="15853475" cy="2389717"/>
           </a:xfrm>
           <a:prstGeom prst="rect">
             <a:avLst/>
@@ -4181,437 +7144,39 @@
           <a:lstStyle/>
           <a:p>
             <a:pPr marL="0" indent="0" algn="l">
-              <a:buNone/>
-            </a:pPr>
-            <a:r>
-              <a:rPr lang="en-US" sz="1950" b="1" kern="0" spc="-39" dirty="0">
-                <a:solidFill>
-                  <a:srgbClr val="F4F1EA"/>
-                </a:solidFill>
-                <a:latin typeface="Space Grotesk" pitchFamily="34" charset="0"/>
-                <a:ea typeface="Space Grotesk" pitchFamily="34" charset="-122"/>
-                <a:cs typeface="Space Grotesk" pitchFamily="34" charset="-120"/>
-              </a:rPr>
-              <a:t>SkillCorner</a:t>
-            </a:r>
-            <a:endParaRPr lang="en-US" sz="1950" dirty="0"/>
-          </a:p>
-        </p:txBody>
-      </p:sp>
-      <p:sp>
-        <p:nvSpPr>
-          <p:cNvPr id="10" name="Text 8"/>
-          <p:cNvSpPr/>
-          <p:nvPr/>
-        </p:nvSpPr>
-        <p:spPr>
-          <a:xfrm>
-            <a:off x="838200" y="9153525"/>
-            <a:ext cx="5494020" cy="252413"/>
-          </a:xfrm>
-          <a:prstGeom prst="rect">
-            <a:avLst/>
-          </a:prstGeom>
-          <a:noFill/>
-          <a:ln/>
-        </p:spPr>
-        <p:txBody>
-          <a:bodyPr wrap="square" lIns="25400" tIns="25400" rIns="25400" bIns="25400" rtlCol="0" anchor="t">
-            <a:normAutofit fontScale="92500" lnSpcReduction="10000"/>
-          </a:bodyPr>
-          <a:lstStyle/>
-          <a:p>
-            <a:pPr marL="0" indent="0" algn="l">
               <a:lnSpc>
-                <a:spcPct val="150000"/>
+                <a:spcPct val="96000"/>
               </a:lnSpc>
               <a:buNone/>
             </a:pPr>
             <a:r>
-              <a:rPr lang="en-US" sz="1125" dirty="0">
-                <a:solidFill>
-                  <a:srgbClr val="F4F1EA">
-                    <a:alpha val="65000"/>
-                  </a:srgbClr>
+              <a:rPr lang="en-US" sz="4000" b="1" kern="0" spc="-241" dirty="0">
+                <a:solidFill>
+                  <a:srgbClr val="E8F4E1"/>
                 </a:solidFill>
                 <a:latin typeface="Space Grotesk" pitchFamily="34" charset="0"/>
                 <a:ea typeface="Space Grotesk" pitchFamily="34" charset="-122"/>
-                <a:cs typeface="Space Grotesk" pitchFamily="34" charset="-120"/>
-              </a:rPr>
-              <a:t>Tracking · physical metrics · per-match telemetry. The signals.</a:t>
-            </a:r>
-            <a:endParaRPr lang="en-US" sz="1125" dirty="0"/>
-          </a:p>
-        </p:txBody>
-      </p:sp>
-      <p:sp>
-        <p:nvSpPr>
-          <p:cNvPr id="11" name="Text 9"/>
-          <p:cNvSpPr/>
-          <p:nvPr/>
-        </p:nvSpPr>
-        <p:spPr>
-          <a:xfrm>
-            <a:off x="6477000" y="8529638"/>
-            <a:ext cx="442020" cy="185738"/>
-          </a:xfrm>
-          <a:prstGeom prst="rect">
-            <a:avLst/>
-          </a:prstGeom>
-          <a:noFill/>
-          <a:ln/>
-        </p:spPr>
-        <p:txBody>
-          <a:bodyPr wrap="square" lIns="25400" tIns="25400" rIns="25400" bIns="25400" rtlCol="0" anchor="t">
-            <a:normAutofit lnSpcReduction="10000"/>
-          </a:bodyPr>
-          <a:lstStyle/>
-          <a:p>
-            <a:pPr marL="0" indent="0" algn="l">
-              <a:buNone/>
-            </a:pPr>
-            <a:r>
-              <a:rPr lang="en-US" sz="900" kern="0" spc="36" dirty="0">
-                <a:solidFill>
-                  <a:srgbClr val="6C726B"/>
-                </a:solidFill>
-                <a:latin typeface="JetBrains Mono" pitchFamily="34" charset="0"/>
-                <a:ea typeface="JetBrains Mono" pitchFamily="34" charset="-122"/>
-                <a:cs typeface="JetBrains Mono" pitchFamily="34" charset="-120"/>
-              </a:rPr>
-              <a:t>LAYER</a:t>
-            </a:r>
-            <a:endParaRPr lang="en-US" sz="900" dirty="0"/>
-          </a:p>
-        </p:txBody>
-      </p:sp>
-      <p:sp>
-        <p:nvSpPr>
-          <p:cNvPr id="12" name="Text 10"/>
-          <p:cNvSpPr/>
-          <p:nvPr/>
-        </p:nvSpPr>
-        <p:spPr>
-          <a:xfrm>
-            <a:off x="6477000" y="8763000"/>
-            <a:ext cx="5494020" cy="352425"/>
-          </a:xfrm>
-          <a:prstGeom prst="rect">
-            <a:avLst/>
-          </a:prstGeom>
-          <a:noFill/>
-          <a:ln/>
-        </p:spPr>
-        <p:txBody>
-          <a:bodyPr wrap="square" lIns="25400" tIns="25400" rIns="25400" bIns="25400" rtlCol="0" anchor="t">
-            <a:normAutofit/>
-          </a:bodyPr>
-          <a:lstStyle/>
-          <a:p>
-            <a:pPr marL="0" indent="0" algn="l">
-              <a:buNone/>
-            </a:pPr>
-            <a:r>
-              <a:rPr lang="en-US" sz="1950" b="1" kern="0" spc="-39" dirty="0">
-                <a:solidFill>
-                  <a:srgbClr val="F4F1EA"/>
-                </a:solidFill>
-                <a:latin typeface="Space Grotesk" pitchFamily="34" charset="0"/>
-                <a:ea typeface="Space Grotesk" pitchFamily="34" charset="-122"/>
-                <a:cs typeface="Space Grotesk" pitchFamily="34" charset="-120"/>
-              </a:rPr>
-              <a:t>Twelve · Context Engineering</a:t>
-            </a:r>
-            <a:endParaRPr lang="en-US" sz="1950" dirty="0"/>
-          </a:p>
-        </p:txBody>
-      </p:sp>
-      <p:sp>
-        <p:nvSpPr>
-          <p:cNvPr id="13" name="Text 11"/>
-          <p:cNvSpPr/>
-          <p:nvPr/>
-        </p:nvSpPr>
-        <p:spPr>
-          <a:xfrm>
-            <a:off x="6477000" y="9153525"/>
-            <a:ext cx="5494020" cy="252413"/>
-          </a:xfrm>
-          <a:prstGeom prst="rect">
-            <a:avLst/>
-          </a:prstGeom>
-          <a:noFill/>
-          <a:ln/>
-        </p:spPr>
-        <p:txBody>
-          <a:bodyPr wrap="square" lIns="25400" tIns="25400" rIns="25400" bIns="25400" rtlCol="0" anchor="t">
-            <a:normAutofit fontScale="92500" lnSpcReduction="10000"/>
-          </a:bodyPr>
-          <a:lstStyle/>
+              </a:rPr>
+              <a:t>PEDRO CARVALHO</a:t>
+            </a:r>
+          </a:p>
           <a:p>
             <a:pPr marL="0" indent="0" algn="l">
               <a:lnSpc>
-                <a:spcPct val="150000"/>
+                <a:spcPct val="96000"/>
               </a:lnSpc>
               <a:buNone/>
             </a:pPr>
             <a:r>
-              <a:rPr lang="en-US" sz="1125" dirty="0">
-                <a:solidFill>
-                  <a:srgbClr val="F4F1EA">
-                    <a:alpha val="65000"/>
-                  </a:srgbClr>
+              <a:rPr lang="en-US" sz="4000" b="1" kern="0" spc="-241" dirty="0">
+                <a:solidFill>
+                  <a:srgbClr val="E8F4E1"/>
                 </a:solidFill>
                 <a:latin typeface="Space Grotesk" pitchFamily="34" charset="0"/>
                 <a:ea typeface="Space Grotesk" pitchFamily="34" charset="-122"/>
-                <a:cs typeface="Space Grotesk" pitchFamily="34" charset="-120"/>
-              </a:rPr>
-              <a:t>Pillars · retrieval · wordalisation · refusal. The product.</a:t>
-            </a:r>
-            <a:endParaRPr lang="en-US" sz="1125" dirty="0"/>
-          </a:p>
-        </p:txBody>
-      </p:sp>
-      <p:sp>
-        <p:nvSpPr>
-          <p:cNvPr id="14" name="Text 12"/>
-          <p:cNvSpPr/>
-          <p:nvPr/>
-        </p:nvSpPr>
-        <p:spPr>
-          <a:xfrm>
-            <a:off x="12115800" y="8529638"/>
-            <a:ext cx="368871" cy="185738"/>
-          </a:xfrm>
-          <a:prstGeom prst="rect">
-            <a:avLst/>
-          </a:prstGeom>
-          <a:noFill/>
-          <a:ln/>
-        </p:spPr>
-        <p:txBody>
-          <a:bodyPr wrap="square" lIns="25400" tIns="25400" rIns="25400" bIns="25400" rtlCol="0" anchor="t">
-            <a:normAutofit lnSpcReduction="10000"/>
-          </a:bodyPr>
-          <a:lstStyle/>
-          <a:p>
-            <a:pPr marL="0" indent="0" algn="l">
-              <a:buNone/>
-            </a:pPr>
-            <a:r>
-              <a:rPr lang="en-US" sz="900" kern="0" spc="36" dirty="0">
-                <a:solidFill>
-                  <a:srgbClr val="6C726B"/>
-                </a:solidFill>
-                <a:latin typeface="JetBrains Mono" pitchFamily="34" charset="0"/>
-                <a:ea typeface="JetBrains Mono" pitchFamily="34" charset="-122"/>
-                <a:cs typeface="JetBrains Mono" pitchFamily="34" charset="-120"/>
-              </a:rPr>
-              <a:t>NEXT</a:t>
-            </a:r>
-            <a:endParaRPr lang="en-US" sz="900" dirty="0"/>
-          </a:p>
-        </p:txBody>
-      </p:sp>
-      <p:sp>
-        <p:nvSpPr>
-          <p:cNvPr id="15" name="Text 13"/>
-          <p:cNvSpPr/>
-          <p:nvPr/>
-        </p:nvSpPr>
-        <p:spPr>
-          <a:xfrm>
-            <a:off x="12115800" y="8763000"/>
-            <a:ext cx="5494020" cy="352425"/>
-          </a:xfrm>
-          <a:prstGeom prst="rect">
-            <a:avLst/>
-          </a:prstGeom>
-          <a:noFill/>
-          <a:ln/>
-        </p:spPr>
-        <p:txBody>
-          <a:bodyPr wrap="square" lIns="25400" tIns="25400" rIns="25400" bIns="25400" rtlCol="0" anchor="t">
-            <a:normAutofit/>
-          </a:bodyPr>
-          <a:lstStyle/>
-          <a:p>
-            <a:pPr marL="0" indent="0" algn="l">
-              <a:buNone/>
-            </a:pPr>
-            <a:r>
-              <a:rPr lang="en-US" sz="1950" b="1" kern="0" spc="-39" dirty="0">
-                <a:solidFill>
-                  <a:srgbClr val="6FD29A"/>
-                </a:solidFill>
-                <a:latin typeface="Space Grotesk" pitchFamily="34" charset="0"/>
-                <a:ea typeface="Space Grotesk" pitchFamily="34" charset="-122"/>
-                <a:cs typeface="Space Grotesk" pitchFamily="34" charset="-120"/>
-              </a:rPr>
-              <a:t>Build the six functions.</a:t>
-            </a:r>
-            <a:endParaRPr lang="en-US" sz="1950" dirty="0"/>
-          </a:p>
-        </p:txBody>
-      </p:sp>
-      <p:sp>
-        <p:nvSpPr>
-          <p:cNvPr id="16" name="Text 14"/>
-          <p:cNvSpPr/>
-          <p:nvPr/>
-        </p:nvSpPr>
-        <p:spPr>
-          <a:xfrm>
-            <a:off x="12115800" y="9153525"/>
-            <a:ext cx="5494020" cy="252413"/>
-          </a:xfrm>
-          <a:prstGeom prst="rect">
-            <a:avLst/>
-          </a:prstGeom>
-          <a:noFill/>
-          <a:ln/>
-        </p:spPr>
-        <p:txBody>
-          <a:bodyPr wrap="square" lIns="25400" tIns="25400" rIns="25400" bIns="25400" rtlCol="0" anchor="t">
-            <a:normAutofit fontScale="92500" lnSpcReduction="10000"/>
-          </a:bodyPr>
-          <a:lstStyle/>
-          <a:p>
-            <a:pPr marL="0" indent="0" algn="l">
-              <a:lnSpc>
-                <a:spcPct val="150000"/>
-              </a:lnSpc>
-              <a:buNone/>
-            </a:pPr>
-            <a:r>
-              <a:rPr lang="en-US" sz="1125" dirty="0">
-                <a:solidFill>
-                  <a:srgbClr val="F4F1EA">
-                    <a:alpha val="65000"/>
-                  </a:srgbClr>
-                </a:solidFill>
-                <a:latin typeface="Space Grotesk" pitchFamily="34" charset="0"/>
-                <a:ea typeface="Space Grotesk" pitchFamily="34" charset="-122"/>
-                <a:cs typeface="Space Grotesk" pitchFamily="34" charset="-120"/>
-              </a:rPr>
-              <a:t>Three wordalisations, three ask-templates, one knowledge base.</a:t>
-            </a:r>
-            <a:endParaRPr lang="en-US" sz="1125" dirty="0"/>
-          </a:p>
-        </p:txBody>
-      </p:sp>
-      <p:sp>
-        <p:nvSpPr>
-          <p:cNvPr id="17" name="Shape 15"/>
-          <p:cNvSpPr/>
-          <p:nvPr/>
-        </p:nvSpPr>
-        <p:spPr>
-          <a:xfrm>
-            <a:off x="838200" y="9558338"/>
-            <a:ext cx="16611600" cy="9525"/>
-          </a:xfrm>
-          <a:prstGeom prst="rect">
-            <a:avLst/>
-          </a:prstGeom>
-          <a:solidFill>
-            <a:srgbClr val="F4F1EA">
-              <a:alpha val="18000"/>
-            </a:srgbClr>
-          </a:solidFill>
-          <a:ln/>
-        </p:spPr>
-        <p:txBody>
-          <a:bodyPr/>
-          <a:lstStyle/>
-          <a:p>
-            <a:endParaRPr lang="pt-PT"/>
-          </a:p>
-        </p:txBody>
-      </p:sp>
-      <p:sp>
-        <p:nvSpPr>
-          <p:cNvPr id="18" name="Text 16"/>
-          <p:cNvSpPr/>
-          <p:nvPr/>
-        </p:nvSpPr>
-        <p:spPr>
-          <a:xfrm>
-            <a:off x="838200" y="9720263"/>
-            <a:ext cx="2637099" cy="185738"/>
-          </a:xfrm>
-          <a:prstGeom prst="rect">
-            <a:avLst/>
-          </a:prstGeom>
-          <a:noFill/>
-          <a:ln/>
-        </p:spPr>
-        <p:txBody>
-          <a:bodyPr wrap="square" lIns="25400" tIns="25400" rIns="25400" bIns="25400" rtlCol="0" anchor="t">
-            <a:normAutofit lnSpcReduction="10000"/>
-          </a:bodyPr>
-          <a:lstStyle/>
-          <a:p>
-            <a:pPr marL="0" indent="0" algn="l">
-              <a:buNone/>
-            </a:pPr>
-            <a:r>
-              <a:rPr lang="en-US" sz="900" kern="0" spc="36" dirty="0">
-                <a:solidFill>
-                  <a:srgbClr val="F4F1EA">
-                    <a:alpha val="45000"/>
-                  </a:srgbClr>
-                </a:solidFill>
-                <a:latin typeface="JetBrains Mono" pitchFamily="34" charset="0"/>
-                <a:ea typeface="JetBrains Mono" pitchFamily="34" charset="-122"/>
-                <a:cs typeface="JetBrains Mono" pitchFamily="34" charset="-120"/>
-              </a:rPr>
-              <a:t>TWELVE · CONTEXT ENGINEERING · 2026</a:t>
-            </a:r>
-            <a:endParaRPr lang="en-US" sz="900" dirty="0"/>
-          </a:p>
-        </p:txBody>
-      </p:sp>
-      <p:sp>
-        <p:nvSpPr>
-          <p:cNvPr id="19" name="Text 17"/>
-          <p:cNvSpPr/>
-          <p:nvPr/>
-        </p:nvSpPr>
-        <p:spPr>
-          <a:xfrm>
-            <a:off x="16059894" y="9720263"/>
-            <a:ext cx="1466106" cy="185738"/>
-          </a:xfrm>
-          <a:prstGeom prst="rect">
-            <a:avLst/>
-          </a:prstGeom>
-          <a:noFill/>
-          <a:ln/>
-        </p:spPr>
-        <p:txBody>
-          <a:bodyPr wrap="square" lIns="25400" tIns="25400" rIns="25400" bIns="25400" rtlCol="0" anchor="t">
-            <a:normAutofit lnSpcReduction="10000"/>
-          </a:bodyPr>
-          <a:lstStyle/>
-          <a:p>
-            <a:pPr marL="0" indent="0" algn="l">
-              <a:buNone/>
-            </a:pPr>
-            <a:r>
-              <a:rPr lang="en-US" sz="900" kern="0" spc="36" dirty="0">
-                <a:solidFill>
-                  <a:srgbClr val="F4F1EA">
-                    <a:alpha val="45000"/>
-                  </a:srgbClr>
-                </a:solidFill>
-                <a:latin typeface="JetBrains Mono" pitchFamily="34" charset="0"/>
-                <a:ea typeface="JetBrains Mono" pitchFamily="34" charset="-122"/>
-                <a:cs typeface="JetBrains Mono" pitchFamily="34" charset="-120"/>
-              </a:rPr>
-              <a:t>SESSION CTXENG / 11</a:t>
-            </a:r>
-            <a:endParaRPr lang="en-US" sz="900" dirty="0"/>
+              </a:rPr>
+              <a:t>LIAM HENSHAW</a:t>
+            </a:r>
           </a:p>
         </p:txBody>
       </p:sp>
@@ -4712,7 +7277,7 @@
                 <a:ea typeface="JetBrains Mono" pitchFamily="34" charset="-122"/>
                 <a:cs typeface="JetBrains Mono" pitchFamily="34" charset="-120"/>
               </a:rPr>
-              <a:t>02 / 15</a:t>
+              <a:t>02 / 14</a:t>
             </a:r>
             <a:endParaRPr lang="en-US" sz="900" dirty="0"/>
           </a:p>
@@ -6149,7 +8714,7 @@
                 <a:ea typeface="JetBrains Mono" pitchFamily="34" charset="-122"/>
                 <a:cs typeface="JetBrains Mono" pitchFamily="34" charset="-120"/>
               </a:rPr>
-              <a:t>03 / 15</a:t>
+              <a:t>03 / 14</a:t>
             </a:r>
             <a:endParaRPr lang="en-US" sz="900" dirty="0"/>
           </a:p>
@@ -8641,7 +11206,7 @@
                 <a:ea typeface="JetBrains Mono" pitchFamily="34" charset="-122"/>
                 <a:cs typeface="JetBrains Mono" pitchFamily="34" charset="-120"/>
               </a:rPr>
-              <a:t>04 / 15</a:t>
+              <a:t>04 / 14</a:t>
             </a:r>
             <a:endParaRPr lang="en-US" sz="900" dirty="0"/>
           </a:p>
@@ -9625,7 +12190,7 @@
                 <a:ea typeface="JetBrains Mono" pitchFamily="34" charset="-122"/>
                 <a:cs typeface="JetBrains Mono" pitchFamily="34" charset="-120"/>
               </a:rPr>
-              <a:t>05 / 15</a:t>
+              <a:t>05 / 14</a:t>
             </a:r>
             <a:endParaRPr lang="en-US" sz="900" dirty="0"/>
           </a:p>
@@ -11234,7 +13799,7 @@
                 <a:ea typeface="JetBrains Mono" pitchFamily="34" charset="-122"/>
                 <a:cs typeface="JetBrains Mono" pitchFamily="34" charset="-120"/>
               </a:rPr>
-              <a:t>06 / 15</a:t>
+              <a:t>06 / 14</a:t>
             </a:r>
             <a:endParaRPr lang="en-US" sz="900" dirty="0"/>
           </a:p>
@@ -11594,7 +14159,7 @@
                 <a:ea typeface="JetBrains Mono" pitchFamily="34" charset="-122"/>
                 <a:cs typeface="JetBrains Mono" pitchFamily="34" charset="-120"/>
               </a:rPr>
-              <a:t>07/ 15</a:t>
+              <a:t>07/ 14</a:t>
             </a:r>
             <a:endParaRPr lang="en-US" sz="900" dirty="0"/>
           </a:p>
@@ -14343,7 +16908,7 @@
                 <a:ea typeface="JetBrains Mono" pitchFamily="34" charset="-122"/>
                 <a:cs typeface="JetBrains Mono" pitchFamily="34" charset="-120"/>
               </a:rPr>
-              <a:t>08 / 15</a:t>
+              <a:t>08 / 14</a:t>
             </a:r>
             <a:endParaRPr lang="en-US" sz="900" dirty="0"/>
           </a:p>
@@ -14469,7 +17034,7 @@
                 <a:ea typeface="JetBrains Mono" pitchFamily="34" charset="-122"/>
                 <a:cs typeface="JetBrains Mono" pitchFamily="34" charset="-120"/>
               </a:rPr>
-              <a:t>LLM Study Base</a:t>
+              <a:t>LLM STUDY BASE</a:t>
             </a:r>
             <a:endParaRPr lang="en-US" sz="1050" dirty="0"/>
           </a:p>
@@ -15024,7 +17589,10 @@
           <a:bodyPr/>
           <a:lstStyle/>
           <a:p>
-            <a:endParaRPr lang="pt-PT" dirty="0"/>
+            <a:r>
+              <a:rPr lang="pt-PT" dirty="0"/>
+              <a:t>X</a:t>
+            </a:r>
           </a:p>
         </p:txBody>
       </p:sp>
@@ -16258,7 +18826,7 @@
                 <a:ea typeface="JetBrains Mono" pitchFamily="34" charset="-122"/>
                 <a:cs typeface="JetBrains Mono" pitchFamily="34" charset="-120"/>
               </a:rPr>
-              <a:t>09 / 15</a:t>
+              <a:t>09 / 14</a:t>
             </a:r>
             <a:endParaRPr lang="en-US" sz="900" dirty="0"/>
           </a:p>
